--- a/マラソン大会に向けて_講義スライド.pptx
+++ b/マラソン大会に向けて_講義スライド.pptx
@@ -138,14 +138,14 @@
   <p:extLst>
     <p:ext uri="{521415D9-36F7-43E2-AB2F-B90AF26B5E84}">
       <p14:sectionLst xmlns:p14="http://schemas.microsoft.com/office/powerpoint/2010/main">
-        <p14:section name="導入" id="{88e9641e-61c3-11f3-8146-9deff44fb667}">
+        <p14:section name="導入" id="{f8816d52-8e5f-88d1-a33e-85547b6d92d2}">
           <p14:sldIdLst>
             <p14:sldId id="256"/>
             <p14:sldId id="257"/>
             <p14:sldId id="258"/>
           </p14:sldIdLst>
         </p14:section>
-        <p14:section name="1. 位置づけ" id="{e8099d36-6b1a-cdf3-bfe9-f32a5b3a13c1}">
+        <p14:section name="1. 位置づけ" id="{ff3bbdc0-83ad-222d-1094-f6b0024fce32}">
           <p14:sldIdLst>
             <p14:sldId id="259"/>
             <p14:sldId id="260"/>
@@ -154,20 +154,20 @@
             <p14:sldId id="263"/>
           </p14:sldIdLst>
         </p14:section>
-        <p14:section name="2. 目指す姿" id="{36c27b22-3b54-80d2-4113-764da02b1a0d}">
+        <p14:section name="2. 目指す姿" id="{17f24596-7e29-0fa8-7577-8c9d0de1fa04}">
           <p14:sldIdLst>
             <p14:sldId id="264"/>
             <p14:sldId id="265"/>
             <p14:sldId id="266"/>
           </p14:sldIdLst>
         </p14:section>
-        <p14:section name="3. 社会の中の走ること" id="{908d88b0-01b5-20fb-970d-69ede159090a}">
+        <p14:section name="3. 社会の中の走ること" id="{84ad1041-81f3-2ccc-4a2c-6599466d98b5}">
           <p14:sldIdLst>
             <p14:sldId id="267"/>
             <p14:sldId id="268"/>
           </p14:sldIdLst>
         </p14:section>
-        <p14:section name="4. 苦しいの正体" id="{2622e325-13ba-a2a4-17dc-39d347d61159}">
+        <p14:section name="4. 苦しいの正体" id="{4a9fe206-cbd7-2fec-e8dd-c84807d1236e}">
           <p14:sldIdLst>
             <p14:sldId id="269"/>
             <p14:sldId id="270"/>
@@ -176,19 +176,19 @@
             <p14:sldId id="273"/>
           </p14:sldIdLst>
         </p14:section>
-        <p14:section name="5. 3つの方法" id="{89c36e32-7024-73be-4711-da55f03803d1}">
+        <p14:section name="5. 3つの方法" id="{64eff787-9e08-d6ee-e2ff-813f969fa2df}">
           <p14:sldIdLst>
             <p14:sldId id="274"/>
             <p14:sldId id="275"/>
             <p14:sldId id="276"/>
           </p14:sldIdLst>
         </p14:section>
-        <p14:section name="6. 嫌いになる理由" id="{38787444-0c03-8d39-eae3-144e53dcd94c}">
+        <p14:section name="6. 嫌いになる理由" id="{3daf02a4-88fe-aa77-241f-a4997c80f19a}">
           <p14:sldIdLst>
             <p14:sldId id="277"/>
           </p14:sldIdLst>
         </p14:section>
-        <p14:section name="7. 大会までに何をするか" id="{e210873a-d297-a743-fa9d-1c380363cec8}">
+        <p14:section name="7. 大会までに何をするか" id="{f34f593e-752e-80d8-e3ff-c7bd29c6d2d9}">
           <p14:sldIdLst>
             <p14:sldId id="278"/>
             <p14:sldId id="279"/>
@@ -198,13 +198,13 @@
             <p14:sldId id="283"/>
           </p14:sldIdLst>
         </p14:section>
-        <p14:section name="8. 安全管理" id="{a1687ef3-6c7f-3ede-71d5-958a29ac459b}">
+        <p14:section name="8. 安全管理" id="{042aab8c-de19-ffbc-d01b-28979f8bf66f}">
           <p14:sldIdLst>
             <p14:sldId id="284"/>
             <p14:sldId id="285"/>
           </p14:sldIdLst>
         </p14:section>
-        <p14:section name="まとめ" id="{675da171-cc8e-4850-7eeb-784290f701d5}">
+        <p14:section name="まとめ" id="{32747da0-fb71-da21-144e-4d6deb3151d3}">
           <p14:sldIdLst>
             <p14:sldId id="286"/>
             <p14:sldId id="287"/>
@@ -3573,8 +3573,8 @@
         </p:nvSpPr>
         <p:spPr>
           <a:xfrm>
-            <a:off x="731520" y="1828800"/>
-            <a:ext cx="10698480" cy="1828800"/>
+            <a:off x="731520" y="1463040"/>
+            <a:ext cx="10698480" cy="2194560"/>
           </a:xfrm>
           <a:prstGeom prst="rect">
             <a:avLst/>
@@ -3586,19 +3586,28 @@
           <a:bodyPr wrap="square" rtlCol="0"/>
           <a:lstStyle>
             <a:lvl1pPr algn="l" indent="0" marL="0">
-              <a:buNone/>
-              <a:defRPr lang="en-US" sz="4400" b="1" dirty="0">
+              <a:lnSpc>
+                <a:spcPct val="110000"/>
+              </a:lnSpc>
+              <a:buNone/>
+              <a:defRPr lang="en-US" sz="4800" dirty="0">
                 <a:solidFill>
                   <a:schemeClr val="bg1"/>
                 </a:solidFill>
+                <a:latin typeface="Noto Sans JP Print Black" pitchFamily="34" charset="0"/>
+                <a:ea typeface="Noto Sans JP Print Black" pitchFamily="34" charset="-122"/>
+                <a:cs typeface="Noto Sans JP Print Black" pitchFamily="34" charset="-120"/>
               </a:defRPr>
             </a:lvl1pPr>
           </a:lstStyle>
           <a:p>
             <a:pPr algn="l" indent="0" marL="0">
-              <a:buNone/>
-            </a:pPr>
-            <a:endParaRPr lang="en-US" sz="4400" dirty="0"/>
+              <a:lnSpc>
+                <a:spcPct val="110000"/>
+              </a:lnSpc>
+              <a:buNone/>
+            </a:pPr>
+            <a:endParaRPr lang="en-US" sz="4800" dirty="0"/>
           </a:p>
         </p:txBody>
       </p:sp>
@@ -3683,7 +3692,7 @@
         </p:nvSpPr>
         <p:spPr>
           <a:xfrm>
-            <a:off x="548640" y="320040"/>
+            <a:off x="548640" y="274320"/>
             <a:ext cx="7315200" cy="320040"/>
           </a:xfrm>
           <a:prstGeom prst="rect">
@@ -3722,8 +3731,8 @@
         </p:nvSpPr>
         <p:spPr>
           <a:xfrm>
-            <a:off x="548640" y="685800"/>
-            <a:ext cx="11064240" cy="1143000"/>
+            <a:off x="548640" y="594360"/>
+            <a:ext cx="11064240" cy="1325880"/>
           </a:xfrm>
           <a:prstGeom prst="rect">
             <a:avLst/>
@@ -3735,19 +3744,28 @@
           <a:bodyPr wrap="square" rtlCol="0"/>
           <a:lstStyle>
             <a:lvl1pPr algn="l" indent="0" marL="0">
-              <a:buNone/>
-              <a:defRPr lang="en-US" sz="3000" b="1" dirty="0">
+              <a:lnSpc>
+                <a:spcPct val="90000"/>
+              </a:lnSpc>
+              <a:buNone/>
+              <a:defRPr lang="en-US" sz="3600" dirty="0">
                 <a:solidFill>
                   <a:schemeClr val="tx2"/>
                 </a:solidFill>
+                <a:latin typeface="Noto Sans JP Print Black" pitchFamily="34" charset="0"/>
+                <a:ea typeface="Noto Sans JP Print Black" pitchFamily="34" charset="-122"/>
+                <a:cs typeface="Noto Sans JP Print Black" pitchFamily="34" charset="-120"/>
               </a:defRPr>
             </a:lvl1pPr>
           </a:lstStyle>
           <a:p>
             <a:pPr algn="l" indent="0" marL="0">
-              <a:buNone/>
-            </a:pPr>
-            <a:endParaRPr lang="en-US" sz="3000" dirty="0"/>
+              <a:lnSpc>
+                <a:spcPct val="90000"/>
+              </a:lnSpc>
+              <a:buNone/>
+            </a:pPr>
+            <a:endParaRPr lang="en-US" sz="3600" dirty="0"/>
           </a:p>
         </p:txBody>
       </p:sp>
@@ -3781,8 +3799,11 @@
             <a:lvl1pPr>
               <a:defRPr sz="1100">
                 <a:solidFill>
-                  <a:srgbClr val="6B7A90"/>
-                </a:solidFill>
+                  <a:srgbClr val="7C828D"/>
+                </a:solidFill>
+                <a:latin typeface="Noto Sans JP Print Black"/>
+                <a:ea typeface="Noto Sans JP Print Black"/>
+                <a:cs typeface="Noto Sans JP Print Black"/>
               </a:defRPr>
             </a:lvl1pPr>
           </a:lstStyle>
@@ -3838,7 +3859,7 @@
         </p:nvSpPr>
         <p:spPr>
           <a:xfrm>
-            <a:off x="548640" y="320040"/>
+            <a:off x="548640" y="274320"/>
             <a:ext cx="7315200" cy="320040"/>
           </a:xfrm>
           <a:prstGeom prst="rect">
@@ -3877,8 +3898,8 @@
         </p:nvSpPr>
         <p:spPr>
           <a:xfrm>
-            <a:off x="548640" y="685800"/>
-            <a:ext cx="11064240" cy="1143000"/>
+            <a:off x="548640" y="594360"/>
+            <a:ext cx="11064240" cy="1325880"/>
           </a:xfrm>
           <a:prstGeom prst="rect">
             <a:avLst/>
@@ -3890,19 +3911,28 @@
           <a:bodyPr wrap="square" rtlCol="0"/>
           <a:lstStyle>
             <a:lvl1pPr algn="l" indent="0" marL="0">
-              <a:buNone/>
-              <a:defRPr lang="en-US" sz="3000" b="1" dirty="0">
+              <a:lnSpc>
+                <a:spcPct val="90000"/>
+              </a:lnSpc>
+              <a:buNone/>
+              <a:defRPr lang="en-US" sz="3600" dirty="0">
                 <a:solidFill>
                   <a:schemeClr val="tx2"/>
                 </a:solidFill>
+                <a:latin typeface="Noto Sans JP Print Black" pitchFamily="34" charset="0"/>
+                <a:ea typeface="Noto Sans JP Print Black" pitchFamily="34" charset="-122"/>
+                <a:cs typeface="Noto Sans JP Print Black" pitchFamily="34" charset="-120"/>
               </a:defRPr>
             </a:lvl1pPr>
           </a:lstStyle>
           <a:p>
             <a:pPr algn="l" indent="0" marL="0">
-              <a:buNone/>
-            </a:pPr>
-            <a:endParaRPr lang="en-US" sz="3000" dirty="0"/>
+              <a:lnSpc>
+                <a:spcPct val="90000"/>
+              </a:lnSpc>
+              <a:buNone/>
+            </a:pPr>
+            <a:endParaRPr lang="en-US" sz="3600" dirty="0"/>
           </a:p>
         </p:txBody>
       </p:sp>
@@ -3936,8 +3966,11 @@
             <a:lvl1pPr>
               <a:defRPr sz="1100">
                 <a:solidFill>
-                  <a:srgbClr val="6B7A90"/>
-                </a:solidFill>
+                  <a:srgbClr val="7C828D"/>
+                </a:solidFill>
+                <a:latin typeface="Noto Sans JP Print Black"/>
+                <a:ea typeface="Noto Sans JP Print Black"/>
+                <a:cs typeface="Noto Sans JP Print Black"/>
               </a:defRPr>
             </a:lvl1pPr>
           </a:lstStyle>
@@ -4006,8 +4039,11 @@
             <a:lvl1pPr>
               <a:defRPr sz="1100">
                 <a:solidFill>
-                  <a:srgbClr val="6B7A90"/>
-                </a:solidFill>
+                  <a:srgbClr val="7C828D"/>
+                </a:solidFill>
+                <a:latin typeface="Noto Sans JP Print Black"/>
+                <a:ea typeface="Noto Sans JP Print Black"/>
+                <a:cs typeface="Noto Sans JP Print Black"/>
               </a:defRPr>
             </a:lvl1pPr>
           </a:lstStyle>
@@ -4311,8 +4347,8 @@
         </p:nvSpPr>
         <p:spPr>
           <a:xfrm>
-            <a:off x="731520" y="1828800"/>
-            <a:ext cx="10698480" cy="1828800"/>
+            <a:off x="731520" y="1463040"/>
+            <a:ext cx="10698480" cy="2194560"/>
           </a:xfrm>
           <a:prstGeom prst="rect">
             <a:avLst/>
@@ -4325,31 +4361,43 @@
           <a:lstStyle/>
           <a:p>
             <a:pPr algn="l" indent="0" marL="0">
-              <a:buNone/>
-            </a:pPr>
-            <a:r>
-              <a:rPr lang="en-US" sz="4400" b="1" dirty="0">
+              <a:lnSpc>
+                <a:spcPct val="110000"/>
+              </a:lnSpc>
+              <a:buNone/>
+            </a:pPr>
+            <a:r>
+              <a:rPr lang="en-US" sz="4800" dirty="0">
                 <a:solidFill>
                   <a:schemeClr val="bg1"/>
                 </a:solidFill>
+                <a:latin typeface="Noto Sans JP Print Black" pitchFamily="34" charset="0"/>
+                <a:ea typeface="Noto Sans JP Print Black" pitchFamily="34" charset="-122"/>
+                <a:cs typeface="Noto Sans JP Print Black" pitchFamily="34" charset="-120"/>
               </a:rPr>
               <a:t>「走るのが好き」が、</a:t>
             </a:r>
-            <a:endParaRPr lang="en-US" sz="4400" dirty="0"/>
+            <a:endParaRPr lang="en-US" sz="4800" dirty="0"/>
           </a:p>
           <a:p>
             <a:pPr algn="l" indent="0" marL="0">
-              <a:buNone/>
-            </a:pPr>
-            <a:r>
-              <a:rPr lang="en-US" sz="4400" b="1" dirty="0">
+              <a:lnSpc>
+                <a:spcPct val="110000"/>
+              </a:lnSpc>
+              <a:buNone/>
+            </a:pPr>
+            <a:r>
+              <a:rPr lang="en-US" sz="4800" dirty="0">
                 <a:solidFill>
                   <a:schemeClr val="bg1"/>
                 </a:solidFill>
+                <a:latin typeface="Noto Sans JP Print Black" pitchFamily="34" charset="0"/>
+                <a:ea typeface="Noto Sans JP Print Black" pitchFamily="34" charset="-122"/>
+                <a:cs typeface="Noto Sans JP Print Black" pitchFamily="34" charset="-120"/>
               </a:rPr>
               <a:t>いちばんの体力づくり</a:t>
             </a:r>
-            <a:endParaRPr lang="en-US" sz="4400" dirty="0"/>
+            <a:endParaRPr lang="en-US" sz="4800" dirty="0"/>
           </a:p>
         </p:txBody>
       </p:sp>
@@ -4407,65 +4455,40 @@
       </p:sp>
       <p:sp>
         <p:nvSpPr>
-          <p:cNvPr id="4" name="Shape 2"/>
-          <p:cNvSpPr/>
-          <p:nvPr/>
-        </p:nvSpPr>
-        <p:spPr>
-          <a:xfrm>
-            <a:off x="10241280" y="640080"/>
-            <a:ext cx="1188720" cy="1188720"/>
-          </a:xfrm>
-          <a:prstGeom prst="ellipse">
-            <a:avLst/>
-          </a:prstGeom>
-          <a:solidFill>
-            <a:schemeClr val="accent1"/>
-          </a:solidFill>
-          <a:ln w="6350">
-            <a:solidFill>
-              <a:schemeClr val="accent1"/>
-            </a:solidFill>
-            <a:prstDash val="solid"/>
-          </a:ln>
-        </p:spPr>
-      </p:sp>
-      <p:sp>
-        <p:nvSpPr>
-          <p:cNvPr id="5" name="Text 3"/>
+          <p:cNvPr id="4" name="Text 2"/>
           <p:cNvSpPr txBox="1"/>
           <p:nvPr/>
         </p:nvSpPr>
         <p:spPr>
           <a:xfrm>
-            <a:off x="10241280" y="640080"/>
-            <a:ext cx="1188720" cy="1188720"/>
-          </a:xfrm>
-          <a:prstGeom prst="rect">
-            <a:avLst/>
-          </a:prstGeom>
-          <a:noFill/>
-          <a:ln/>
-        </p:spPr>
-        <p:txBody>
-          <a:bodyPr wrap="square" lIns="0" tIns="0" rIns="0" bIns="0" rtlCol="0" anchor="ctr"/>
-          <a:lstStyle/>
-          <a:p>
-            <a:pPr algn="ctr" indent="0" marL="0">
-              <a:buNone/>
-            </a:pPr>
-            <a:r>
-              <a:rPr lang="en-US" sz="2000" b="1" dirty="0">
-                <a:solidFill>
-                  <a:schemeClr val="bg1"/>
-                </a:solidFill>
-                <a:latin typeface="BIZ UDPゴシック" pitchFamily="34" charset="0"/>
-                <a:ea typeface="BIZ UDPゴシック" pitchFamily="34" charset="-122"/>
-                <a:cs typeface="BIZ UDPゴシック" pitchFamily="34" charset="-120"/>
+            <a:off x="731520" y="640080"/>
+            <a:ext cx="3657600" cy="457200"/>
+          </a:xfrm>
+          <a:prstGeom prst="rect">
+            <a:avLst/>
+          </a:prstGeom>
+          <a:noFill/>
+          <a:ln/>
+        </p:spPr>
+        <p:txBody>
+          <a:bodyPr wrap="square" lIns="0" tIns="0" rIns="0" bIns="0" rtlCol="0" anchor="t"/>
+          <a:lstStyle/>
+          <a:p>
+            <a:pPr indent="0" marL="0">
+              <a:buNone/>
+            </a:pPr>
+            <a:r>
+              <a:rPr lang="en-US" sz="1600" b="1" spc="600" kern="0" dirty="0">
+                <a:solidFill>
+                  <a:schemeClr val="accent1"/>
+                </a:solidFill>
+                <a:latin typeface="Noto Sans JP Print Black" pitchFamily="34" charset="0"/>
+                <a:ea typeface="Noto Sans JP Print Black" pitchFamily="34" charset="-122"/>
+                <a:cs typeface="Noto Sans JP Print Black" pitchFamily="34" charset="-120"/>
               </a:rPr>
               <a:t>RUN</a:t>
             </a:r>
-            <a:endParaRPr lang="en-US" sz="2000" dirty="0"/>
+            <a:endParaRPr lang="en-US" sz="1600" dirty="0"/>
           </a:p>
         </p:txBody>
       </p:sp>
@@ -4504,7 +4527,7 @@
         </p:nvSpPr>
         <p:spPr>
           <a:xfrm>
-            <a:off x="548640" y="320040"/>
+            <a:off x="548640" y="274320"/>
             <a:ext cx="7315200" cy="320040"/>
           </a:xfrm>
           <a:prstGeom prst="rect">
@@ -4542,8 +4565,8 @@
         </p:nvSpPr>
         <p:spPr>
           <a:xfrm>
-            <a:off x="548640" y="685800"/>
-            <a:ext cx="11064240" cy="1143000"/>
+            <a:off x="548640" y="594360"/>
+            <a:ext cx="11064240" cy="1325880"/>
           </a:xfrm>
           <a:prstGeom prst="rect">
             <a:avLst/>
@@ -4556,31 +4579,43 @@
           <a:lstStyle/>
           <a:p>
             <a:pPr algn="l" indent="0" marL="0">
-              <a:buNone/>
-            </a:pPr>
-            <a:r>
-              <a:rPr lang="en-US" sz="3000" b="1" dirty="0">
+              <a:lnSpc>
+                <a:spcPct val="90000"/>
+              </a:lnSpc>
+              <a:buNone/>
+            </a:pPr>
+            <a:r>
+              <a:rPr lang="en-US" sz="3600" dirty="0">
                 <a:solidFill>
                   <a:schemeClr val="tx2"/>
                 </a:solidFill>
+                <a:latin typeface="Noto Sans JP Print Black" pitchFamily="34" charset="0"/>
+                <a:ea typeface="Noto Sans JP Print Black" pitchFamily="34" charset="-122"/>
+                <a:cs typeface="Noto Sans JP Print Black" pitchFamily="34" charset="-120"/>
               </a:rPr>
               <a:t>目指すのは、苦しさをコントロールし、</a:t>
             </a:r>
-            <a:endParaRPr lang="en-US" sz="3000" dirty="0"/>
+            <a:endParaRPr lang="en-US" sz="3600" dirty="0"/>
           </a:p>
           <a:p>
             <a:pPr algn="l" indent="0" marL="0">
-              <a:buNone/>
-            </a:pPr>
-            <a:r>
-              <a:rPr lang="en-US" sz="3000" b="1" dirty="0">
+              <a:lnSpc>
+                <a:spcPct val="90000"/>
+              </a:lnSpc>
+              <a:buNone/>
+            </a:pPr>
+            <a:r>
+              <a:rPr lang="en-US" sz="3600" dirty="0">
                 <a:solidFill>
                   <a:schemeClr val="tx2"/>
                 </a:solidFill>
+                <a:latin typeface="Noto Sans JP Print Black" pitchFamily="34" charset="0"/>
+                <a:ea typeface="Noto Sans JP Print Black" pitchFamily="34" charset="-122"/>
+                <a:cs typeface="Noto Sans JP Print Black" pitchFamily="34" charset="-120"/>
               </a:rPr>
               <a:t>伸びを実感して、もっと走りたくなる子</a:t>
             </a:r>
-            <a:endParaRPr lang="en-US" sz="3000" dirty="0"/>
+            <a:endParaRPr lang="en-US" sz="3600" dirty="0"/>
           </a:p>
         </p:txBody>
       </p:sp>
@@ -4597,7 +4632,7 @@
           </a:xfrm>
           <a:prstGeom prst="roundRect">
             <a:avLst>
-              <a:gd name="adj" fmla="val 3333"/>
+              <a:gd name="adj" fmla="val 1389"/>
             </a:avLst>
           </a:prstGeom>
           <a:solidFill>
@@ -4665,9 +4700,9 @@
                 <a:solidFill>
                   <a:schemeClr val="bg1"/>
                 </a:solidFill>
-                <a:latin typeface="BIZ UDPゴシック" pitchFamily="34" charset="0"/>
-                <a:ea typeface="BIZ UDPゴシック" pitchFamily="34" charset="-122"/>
-                <a:cs typeface="BIZ UDPゴシック" pitchFamily="34" charset="-120"/>
+                <a:latin typeface="Noto Sans JP Print Black" pitchFamily="34" charset="0"/>
+                <a:ea typeface="Noto Sans JP Print Black" pitchFamily="34" charset="-122"/>
+                <a:cs typeface="Noto Sans JP Print Black" pitchFamily="34" charset="-120"/>
               </a:rPr>
               <a:t>1</a:t>
             </a:r>
@@ -4704,9 +4739,9 @@
                 <a:solidFill>
                   <a:schemeClr val="tx2"/>
                 </a:solidFill>
-                <a:latin typeface="BIZ UDPゴシック" pitchFamily="34" charset="0"/>
-                <a:ea typeface="BIZ UDPゴシック" pitchFamily="34" charset="-122"/>
-                <a:cs typeface="BIZ UDPゴシック" pitchFamily="34" charset="-120"/>
+                <a:latin typeface="Noto Sans JP Print" pitchFamily="34" charset="0"/>
+                <a:ea typeface="Noto Sans JP Print" pitchFamily="34" charset="-122"/>
+                <a:cs typeface="Noto Sans JP Print" pitchFamily="34" charset="-120"/>
               </a:rPr>
               <a:t>苦しさを</a:t>
             </a:r>
@@ -4721,9 +4756,9 @@
                 <a:solidFill>
                   <a:schemeClr val="tx2"/>
                 </a:solidFill>
-                <a:latin typeface="BIZ UDPゴシック" pitchFamily="34" charset="0"/>
-                <a:ea typeface="BIZ UDPゴシック" pitchFamily="34" charset="-122"/>
-                <a:cs typeface="BIZ UDPゴシック" pitchFamily="34" charset="-120"/>
+                <a:latin typeface="Noto Sans JP Print" pitchFamily="34" charset="0"/>
+                <a:ea typeface="Noto Sans JP Print" pitchFamily="34" charset="-122"/>
+                <a:cs typeface="Noto Sans JP Print" pitchFamily="34" charset="-120"/>
               </a:rPr>
               <a:t>コントロールする</a:t>
             </a:r>
@@ -4760,9 +4795,9 @@
                 <a:solidFill>
                   <a:schemeClr val="tx1"/>
                 </a:solidFill>
-                <a:latin typeface="BIZ UDPゴシック" pitchFamily="34" charset="0"/>
-                <a:ea typeface="BIZ UDPゴシック" pitchFamily="34" charset="-122"/>
-                <a:cs typeface="BIZ UDPゴシック" pitchFamily="34" charset="-120"/>
+                <a:latin typeface="Noto Sans JP Print" pitchFamily="34" charset="0"/>
+                <a:ea typeface="Noto Sans JP Print" pitchFamily="34" charset="-122"/>
+                <a:cs typeface="Noto Sans JP Print" pitchFamily="34" charset="-120"/>
               </a:rPr>
               <a:t>自分でペースを調整できる</a:t>
             </a:r>
@@ -4808,7 +4843,7 @@
           </a:xfrm>
           <a:prstGeom prst="roundRect">
             <a:avLst>
-              <a:gd name="adj" fmla="val 3333"/>
+              <a:gd name="adj" fmla="val 1389"/>
             </a:avLst>
           </a:prstGeom>
           <a:solidFill>
@@ -4876,9 +4911,9 @@
                 <a:solidFill>
                   <a:schemeClr val="bg1"/>
                 </a:solidFill>
-                <a:latin typeface="BIZ UDPゴシック" pitchFamily="34" charset="0"/>
-                <a:ea typeface="BIZ UDPゴシック" pitchFamily="34" charset="-122"/>
-                <a:cs typeface="BIZ UDPゴシック" pitchFamily="34" charset="-120"/>
+                <a:latin typeface="Noto Sans JP Print Black" pitchFamily="34" charset="0"/>
+                <a:ea typeface="Noto Sans JP Print Black" pitchFamily="34" charset="-122"/>
+                <a:cs typeface="Noto Sans JP Print Black" pitchFamily="34" charset="-120"/>
               </a:rPr>
               <a:t>2</a:t>
             </a:r>
@@ -4915,9 +4950,9 @@
                 <a:solidFill>
                   <a:schemeClr val="tx2"/>
                 </a:solidFill>
-                <a:latin typeface="BIZ UDPゴシック" pitchFamily="34" charset="0"/>
-                <a:ea typeface="BIZ UDPゴシック" pitchFamily="34" charset="-122"/>
-                <a:cs typeface="BIZ UDPゴシック" pitchFamily="34" charset="-120"/>
+                <a:latin typeface="Noto Sans JP Print" pitchFamily="34" charset="0"/>
+                <a:ea typeface="Noto Sans JP Print" pitchFamily="34" charset="-122"/>
+                <a:cs typeface="Noto Sans JP Print" pitchFamily="34" charset="-120"/>
               </a:rPr>
               <a:t>伸びを</a:t>
             </a:r>
@@ -4932,9 +4967,9 @@
                 <a:solidFill>
                   <a:schemeClr val="tx2"/>
                 </a:solidFill>
-                <a:latin typeface="BIZ UDPゴシック" pitchFamily="34" charset="0"/>
-                <a:ea typeface="BIZ UDPゴシック" pitchFamily="34" charset="-122"/>
-                <a:cs typeface="BIZ UDPゴシック" pitchFamily="34" charset="-120"/>
+                <a:latin typeface="Noto Sans JP Print" pitchFamily="34" charset="0"/>
+                <a:ea typeface="Noto Sans JP Print" pitchFamily="34" charset="-122"/>
+                <a:cs typeface="Noto Sans JP Print" pitchFamily="34" charset="-120"/>
               </a:rPr>
               <a:t>実感する</a:t>
             </a:r>
@@ -4971,9 +5006,9 @@
                 <a:solidFill>
                   <a:schemeClr val="tx1"/>
                 </a:solidFill>
-                <a:latin typeface="BIZ UDPゴシック" pitchFamily="34" charset="0"/>
-                <a:ea typeface="BIZ UDPゴシック" pitchFamily="34" charset="-122"/>
-                <a:cs typeface="BIZ UDPゴシック" pitchFamily="34" charset="-120"/>
+                <a:latin typeface="Noto Sans JP Print" pitchFamily="34" charset="0"/>
+                <a:ea typeface="Noto Sans JP Print" pitchFamily="34" charset="-122"/>
+                <a:cs typeface="Noto Sans JP Print" pitchFamily="34" charset="-120"/>
               </a:rPr>
               <a:t>「前より楽」「前より長く」</a:t>
             </a:r>
@@ -4988,9 +5023,9 @@
                 <a:solidFill>
                   <a:schemeClr val="tx1"/>
                 </a:solidFill>
-                <a:latin typeface="BIZ UDPゴシック" pitchFamily="34" charset="0"/>
-                <a:ea typeface="BIZ UDPゴシック" pitchFamily="34" charset="-122"/>
-                <a:cs typeface="BIZ UDPゴシック" pitchFamily="34" charset="-120"/>
+                <a:latin typeface="Noto Sans JP Print" pitchFamily="34" charset="0"/>
+                <a:ea typeface="Noto Sans JP Print" pitchFamily="34" charset="-122"/>
+                <a:cs typeface="Noto Sans JP Print" pitchFamily="34" charset="-120"/>
               </a:rPr>
               <a:t>がわかる</a:t>
             </a:r>
@@ -5036,7 +5071,7 @@
           </a:xfrm>
           <a:prstGeom prst="roundRect">
             <a:avLst>
-              <a:gd name="adj" fmla="val 3333"/>
+              <a:gd name="adj" fmla="val 1389"/>
             </a:avLst>
           </a:prstGeom>
           <a:solidFill>
@@ -5104,9 +5139,9 @@
                 <a:solidFill>
                   <a:schemeClr val="bg1"/>
                 </a:solidFill>
-                <a:latin typeface="BIZ UDPゴシック" pitchFamily="34" charset="0"/>
-                <a:ea typeface="BIZ UDPゴシック" pitchFamily="34" charset="-122"/>
-                <a:cs typeface="BIZ UDPゴシック" pitchFamily="34" charset="-120"/>
+                <a:latin typeface="Noto Sans JP Print Black" pitchFamily="34" charset="0"/>
+                <a:ea typeface="Noto Sans JP Print Black" pitchFamily="34" charset="-122"/>
+                <a:cs typeface="Noto Sans JP Print Black" pitchFamily="34" charset="-120"/>
               </a:rPr>
               <a:t>3</a:t>
             </a:r>
@@ -5143,9 +5178,9 @@
                 <a:solidFill>
                   <a:schemeClr val="tx2"/>
                 </a:solidFill>
-                <a:latin typeface="BIZ UDPゴシック" pitchFamily="34" charset="0"/>
-                <a:ea typeface="BIZ UDPゴシック" pitchFamily="34" charset="-122"/>
-                <a:cs typeface="BIZ UDPゴシック" pitchFamily="34" charset="-120"/>
+                <a:latin typeface="Noto Sans JP Print" pitchFamily="34" charset="0"/>
+                <a:ea typeface="Noto Sans JP Print" pitchFamily="34" charset="-122"/>
+                <a:cs typeface="Noto Sans JP Print" pitchFamily="34" charset="-120"/>
               </a:rPr>
               <a:t>もっと</a:t>
             </a:r>
@@ -5160,9 +5195,9 @@
                 <a:solidFill>
                   <a:schemeClr val="tx2"/>
                 </a:solidFill>
-                <a:latin typeface="BIZ UDPゴシック" pitchFamily="34" charset="0"/>
-                <a:ea typeface="BIZ UDPゴシック" pitchFamily="34" charset="-122"/>
-                <a:cs typeface="BIZ UDPゴシック" pitchFamily="34" charset="-120"/>
+                <a:latin typeface="Noto Sans JP Print" pitchFamily="34" charset="0"/>
+                <a:ea typeface="Noto Sans JP Print" pitchFamily="34" charset="-122"/>
+                <a:cs typeface="Noto Sans JP Print" pitchFamily="34" charset="-120"/>
               </a:rPr>
               <a:t>走りたくなる</a:t>
             </a:r>
@@ -5199,9 +5234,9 @@
                 <a:solidFill>
                   <a:schemeClr val="tx1"/>
                 </a:solidFill>
-                <a:latin typeface="BIZ UDPゴシック" pitchFamily="34" charset="0"/>
-                <a:ea typeface="BIZ UDPゴシック" pitchFamily="34" charset="-122"/>
-                <a:cs typeface="BIZ UDPゴシック" pitchFamily="34" charset="-120"/>
+                <a:latin typeface="Noto Sans JP Print" pitchFamily="34" charset="0"/>
+                <a:ea typeface="Noto Sans JP Print" pitchFamily="34" charset="-122"/>
+                <a:cs typeface="Noto Sans JP Print" pitchFamily="34" charset="-120"/>
               </a:rPr>
               <a:t>次への意欲が生まれる</a:t>
             </a:r>
@@ -5239,8 +5274,11 @@
             <a:lvl1pPr>
               <a:defRPr sz="1100">
                 <a:solidFill>
-                  <a:srgbClr val="6B7A90"/>
-                </a:solidFill>
+                  <a:srgbClr val="7C828D"/>
+                </a:solidFill>
+                <a:latin typeface="Noto Sans JP Print Black"/>
+                <a:ea typeface="Noto Sans JP Print Black"/>
+                <a:cs typeface="Noto Sans JP Print Black"/>
               </a:defRPr>
             </a:lvl1pPr>
           </a:lstStyle>
@@ -5289,7 +5327,7 @@
         </p:nvSpPr>
         <p:spPr>
           <a:xfrm>
-            <a:off x="548640" y="320040"/>
+            <a:off x="548640" y="274320"/>
             <a:ext cx="7315200" cy="320040"/>
           </a:xfrm>
           <a:prstGeom prst="rect">
@@ -5327,8 +5365,8 @@
         </p:nvSpPr>
         <p:spPr>
           <a:xfrm>
-            <a:off x="548640" y="685800"/>
-            <a:ext cx="11064240" cy="1143000"/>
+            <a:off x="548640" y="594360"/>
+            <a:ext cx="11064240" cy="1325880"/>
           </a:xfrm>
           <a:prstGeom prst="rect">
             <a:avLst/>
@@ -5341,17 +5379,43 @@
           <a:lstStyle/>
           <a:p>
             <a:pPr algn="l" indent="0" marL="0">
-              <a:buNone/>
-            </a:pPr>
-            <a:r>
-              <a:rPr lang="en-US" sz="3000" b="1" dirty="0">
+              <a:lnSpc>
+                <a:spcPct val="90000"/>
+              </a:lnSpc>
+              <a:buNone/>
+            </a:pPr>
+            <a:r>
+              <a:rPr lang="en-US" sz="3600" dirty="0">
                 <a:solidFill>
                   <a:schemeClr val="tx2"/>
                 </a:solidFill>
-              </a:rPr>
-              <a:t>マラソン大会で、子どものどんな姿が見たいですか？</a:t>
-            </a:r>
-            <a:endParaRPr lang="en-US" sz="3000" dirty="0"/>
+                <a:latin typeface="Noto Sans JP Print Black" pitchFamily="34" charset="0"/>
+                <a:ea typeface="Noto Sans JP Print Black" pitchFamily="34" charset="-122"/>
+                <a:cs typeface="Noto Sans JP Print Black" pitchFamily="34" charset="-120"/>
+              </a:rPr>
+              <a:t>マラソン大会で、</a:t>
+            </a:r>
+            <a:endParaRPr lang="en-US" sz="3600" dirty="0"/>
+          </a:p>
+          <a:p>
+            <a:pPr algn="l" indent="0" marL="0">
+              <a:lnSpc>
+                <a:spcPct val="90000"/>
+              </a:lnSpc>
+              <a:buNone/>
+            </a:pPr>
+            <a:r>
+              <a:rPr lang="en-US" sz="3600" dirty="0">
+                <a:solidFill>
+                  <a:schemeClr val="tx2"/>
+                </a:solidFill>
+                <a:latin typeface="Noto Sans JP Print Black" pitchFamily="34" charset="0"/>
+                <a:ea typeface="Noto Sans JP Print Black" pitchFamily="34" charset="-122"/>
+                <a:cs typeface="Noto Sans JP Print Black" pitchFamily="34" charset="-120"/>
+              </a:rPr>
+              <a:t>子どものどんな姿が見たいですか？</a:t>
+            </a:r>
+            <a:endParaRPr lang="en-US" sz="3600" dirty="0"/>
           </a:p>
         </p:txBody>
       </p:sp>
@@ -5368,7 +5432,7 @@
           </a:xfrm>
           <a:prstGeom prst="roundRect">
             <a:avLst>
-              <a:gd name="adj" fmla="val 4615"/>
+              <a:gd name="adj" fmla="val 1923"/>
             </a:avLst>
           </a:prstGeom>
           <a:solidFill>
@@ -5411,9 +5475,9 @@
                 <a:solidFill>
                   <a:schemeClr val="accent1"/>
                 </a:solidFill>
-                <a:latin typeface="BIZ UDPゴシック" pitchFamily="34" charset="0"/>
-                <a:ea typeface="BIZ UDPゴシック" pitchFamily="34" charset="-122"/>
-                <a:cs typeface="BIZ UDPゴシック" pitchFamily="34" charset="-120"/>
+                <a:latin typeface="Noto Sans JP Print" pitchFamily="34" charset="0"/>
+                <a:ea typeface="Noto Sans JP Print" pitchFamily="34" charset="-122"/>
+                <a:cs typeface="Noto Sans JP Print" pitchFamily="34" charset="-120"/>
               </a:rPr>
               <a:t>練習中</a:t>
             </a:r>
@@ -5450,9 +5514,9 @@
                 <a:solidFill>
                   <a:schemeClr val="tx2"/>
                 </a:solidFill>
-                <a:latin typeface="BIZ UDPゴシック" pitchFamily="34" charset="0"/>
-                <a:ea typeface="BIZ UDPゴシック" pitchFamily="34" charset="-122"/>
-                <a:cs typeface="BIZ UDPゴシック" pitchFamily="34" charset="-120"/>
+                <a:latin typeface="Noto Sans JP Print" pitchFamily="34" charset="0"/>
+                <a:ea typeface="Noto Sans JP Print" pitchFamily="34" charset="-122"/>
+                <a:cs typeface="Noto Sans JP Print" pitchFamily="34" charset="-120"/>
               </a:rPr>
               <a:t>どんな顔で走っている？</a:t>
             </a:r>
@@ -5473,7 +5537,7 @@
           </a:xfrm>
           <a:prstGeom prst="roundRect">
             <a:avLst>
-              <a:gd name="adj" fmla="val 4615"/>
+              <a:gd name="adj" fmla="val 1923"/>
             </a:avLst>
           </a:prstGeom>
           <a:solidFill>
@@ -5516,9 +5580,9 @@
                 <a:solidFill>
                   <a:schemeClr val="accent1"/>
                 </a:solidFill>
-                <a:latin typeface="BIZ UDPゴシック" pitchFamily="34" charset="0"/>
-                <a:ea typeface="BIZ UDPゴシック" pitchFamily="34" charset="-122"/>
-                <a:cs typeface="BIZ UDPゴシック" pitchFamily="34" charset="-120"/>
+                <a:latin typeface="Noto Sans JP Print" pitchFamily="34" charset="0"/>
+                <a:ea typeface="Noto Sans JP Print" pitchFamily="34" charset="-122"/>
+                <a:cs typeface="Noto Sans JP Print" pitchFamily="34" charset="-120"/>
               </a:rPr>
               <a:t>大会当日</a:t>
             </a:r>
@@ -5555,11 +5619,28 @@
                 <a:solidFill>
                   <a:schemeClr val="tx2"/>
                 </a:solidFill>
-                <a:latin typeface="BIZ UDPゴシック" pitchFamily="34" charset="0"/>
-                <a:ea typeface="BIZ UDPゴシック" pitchFamily="34" charset="-122"/>
-                <a:cs typeface="BIZ UDPゴシック" pitchFamily="34" charset="-120"/>
-              </a:rPr>
-              <a:t>スタート前・ゴールの瞬間は？</a:t>
+                <a:latin typeface="Noto Sans JP Print" pitchFamily="34" charset="0"/>
+                <a:ea typeface="Noto Sans JP Print" pitchFamily="34" charset="-122"/>
+                <a:cs typeface="Noto Sans JP Print" pitchFamily="34" charset="-120"/>
+              </a:rPr>
+              <a:t>スタート前・</a:t>
+            </a:r>
+            <a:endParaRPr lang="en-US" sz="1800" dirty="0"/>
+          </a:p>
+          <a:p>
+            <a:pPr indent="0" marL="0">
+              <a:buNone/>
+            </a:pPr>
+            <a:r>
+              <a:rPr lang="en-US" sz="1800" dirty="0">
+                <a:solidFill>
+                  <a:schemeClr val="tx2"/>
+                </a:solidFill>
+                <a:latin typeface="Noto Sans JP Print" pitchFamily="34" charset="0"/>
+                <a:ea typeface="Noto Sans JP Print" pitchFamily="34" charset="-122"/>
+                <a:cs typeface="Noto Sans JP Print" pitchFamily="34" charset="-120"/>
+              </a:rPr>
+              <a:t>ゴールの瞬間は？</a:t>
             </a:r>
             <a:endParaRPr lang="en-US" sz="1800" dirty="0"/>
           </a:p>
@@ -5578,7 +5659,7 @@
           </a:xfrm>
           <a:prstGeom prst="roundRect">
             <a:avLst>
-              <a:gd name="adj" fmla="val 4615"/>
+              <a:gd name="adj" fmla="val 1923"/>
             </a:avLst>
           </a:prstGeom>
           <a:solidFill>
@@ -5621,9 +5702,9 @@
                 <a:solidFill>
                   <a:schemeClr val="accent1"/>
                 </a:solidFill>
-                <a:latin typeface="BIZ UDPゴシック" pitchFamily="34" charset="0"/>
-                <a:ea typeface="BIZ UDPゴシック" pitchFamily="34" charset="-122"/>
-                <a:cs typeface="BIZ UDPゴシック" pitchFamily="34" charset="-120"/>
+                <a:latin typeface="Noto Sans JP Print" pitchFamily="34" charset="0"/>
+                <a:ea typeface="Noto Sans JP Print" pitchFamily="34" charset="-122"/>
+                <a:cs typeface="Noto Sans JP Print" pitchFamily="34" charset="-120"/>
               </a:rPr>
               <a:t>大会後</a:t>
             </a:r>
@@ -5660,9 +5741,9 @@
                 <a:solidFill>
                   <a:schemeClr val="tx2"/>
                 </a:solidFill>
-                <a:latin typeface="BIZ UDPゴシック" pitchFamily="34" charset="0"/>
-                <a:ea typeface="BIZ UDPゴシック" pitchFamily="34" charset="-122"/>
-                <a:cs typeface="BIZ UDPゴシック" pitchFamily="34" charset="-120"/>
+                <a:latin typeface="Noto Sans JP Print" pitchFamily="34" charset="0"/>
+                <a:ea typeface="Noto Sans JP Print" pitchFamily="34" charset="-122"/>
+                <a:cs typeface="Noto Sans JP Print" pitchFamily="34" charset="-120"/>
               </a:rPr>
               <a:t>どんな言葉を口にしている？</a:t>
             </a:r>
@@ -5724,9 +5805,9 @@
                 <a:solidFill>
                   <a:schemeClr val="bg1"/>
                 </a:solidFill>
-                <a:latin typeface="BIZ UDPゴシック" pitchFamily="34" charset="0"/>
-                <a:ea typeface="BIZ UDPゴシック" pitchFamily="34" charset="-122"/>
-                <a:cs typeface="BIZ UDPゴシック" pitchFamily="34" charset="-120"/>
+                <a:latin typeface="Noto Sans JP Print" pitchFamily="34" charset="0"/>
+                <a:ea typeface="Noto Sans JP Print" pitchFamily="34" charset="-122"/>
+                <a:cs typeface="Noto Sans JP Print" pitchFamily="34" charset="-120"/>
               </a:rPr>
               <a:t>3分</a:t>
             </a:r>
@@ -5763,9 +5844,9 @@
                 <a:solidFill>
                   <a:schemeClr val="tx2"/>
                 </a:solidFill>
-                <a:latin typeface="BIZ UDPゴシック" pitchFamily="34" charset="0"/>
-                <a:ea typeface="BIZ UDPゴシック" pitchFamily="34" charset="-122"/>
-                <a:cs typeface="BIZ UDPゴシック" pitchFamily="34" charset="-120"/>
+                <a:latin typeface="Noto Sans JP Print" pitchFamily="34" charset="0"/>
+                <a:ea typeface="Noto Sans JP Print" pitchFamily="34" charset="-122"/>
+                <a:cs typeface="Noto Sans JP Print" pitchFamily="34" charset="-120"/>
               </a:rPr>
               <a:t>隣の方とペアで話し合い、あとで2〜3組に紹介していただきます</a:t>
             </a:r>
@@ -5803,8 +5884,11 @@
             <a:lvl1pPr>
               <a:defRPr sz="1100">
                 <a:solidFill>
-                  <a:srgbClr val="6B7A90"/>
-                </a:solidFill>
+                  <a:srgbClr val="7C828D"/>
+                </a:solidFill>
+                <a:latin typeface="Noto Sans JP Print Black"/>
+                <a:ea typeface="Noto Sans JP Print Black"/>
+                <a:cs typeface="Noto Sans JP Print Black"/>
               </a:defRPr>
             </a:lvl1pPr>
           </a:lstStyle>
@@ -5853,7 +5937,7 @@
         </p:nvSpPr>
         <p:spPr>
           <a:xfrm>
-            <a:off x="548640" y="320040"/>
+            <a:off x="548640" y="274320"/>
             <a:ext cx="7315200" cy="320040"/>
           </a:xfrm>
           <a:prstGeom prst="rect">
@@ -5891,8 +5975,8 @@
         </p:nvSpPr>
         <p:spPr>
           <a:xfrm>
-            <a:off x="548640" y="685800"/>
-            <a:ext cx="11064240" cy="1143000"/>
+            <a:off x="548640" y="594360"/>
+            <a:ext cx="11064240" cy="1325880"/>
           </a:xfrm>
           <a:prstGeom prst="rect">
             <a:avLst/>
@@ -5905,17 +5989,43 @@
           <a:lstStyle/>
           <a:p>
             <a:pPr algn="l" indent="0" marL="0">
-              <a:buNone/>
-            </a:pPr>
-            <a:r>
-              <a:rPr lang="en-US" sz="3000" b="1" dirty="0">
+              <a:lnSpc>
+                <a:spcPct val="90000"/>
+              </a:lnSpc>
+              <a:buNone/>
+            </a:pPr>
+            <a:r>
+              <a:rPr lang="en-US" sz="3600" dirty="0">
                 <a:solidFill>
                   <a:schemeClr val="tx2"/>
                 </a:solidFill>
-              </a:rPr>
-              <a:t>大人にとって、走ることは「きつい運動」ではなく「気軽な運動」</a:t>
-            </a:r>
-            <a:endParaRPr lang="en-US" sz="3000" dirty="0"/>
+                <a:latin typeface="Noto Sans JP Print Black" pitchFamily="34" charset="0"/>
+                <a:ea typeface="Noto Sans JP Print Black" pitchFamily="34" charset="-122"/>
+                <a:cs typeface="Noto Sans JP Print Black" pitchFamily="34" charset="-120"/>
+              </a:rPr>
+              <a:t>大人にとって、走ることは</a:t>
+            </a:r>
+            <a:endParaRPr lang="en-US" sz="3600" dirty="0"/>
+          </a:p>
+          <a:p>
+            <a:pPr algn="l" indent="0" marL="0">
+              <a:lnSpc>
+                <a:spcPct val="90000"/>
+              </a:lnSpc>
+              <a:buNone/>
+            </a:pPr>
+            <a:r>
+              <a:rPr lang="en-US" sz="3600" dirty="0">
+                <a:solidFill>
+                  <a:schemeClr val="tx2"/>
+                </a:solidFill>
+                <a:latin typeface="Noto Sans JP Print Black" pitchFamily="34" charset="0"/>
+                <a:ea typeface="Noto Sans JP Print Black" pitchFamily="34" charset="-122"/>
+                <a:cs typeface="Noto Sans JP Print Black" pitchFamily="34" charset="-120"/>
+              </a:rPr>
+              <a:t>「きつい運動」ではなく「気軽な運動」</a:t>
+            </a:r>
+            <a:endParaRPr lang="en-US" sz="3600" dirty="0"/>
           </a:p>
         </p:txBody>
       </p:sp>
@@ -5932,7 +6042,7 @@
           </a:xfrm>
           <a:prstGeom prst="roundRect">
             <a:avLst>
-              <a:gd name="adj" fmla="val 3077"/>
+              <a:gd name="adj" fmla="val 1282"/>
             </a:avLst>
           </a:prstGeom>
           <a:solidFill>
@@ -5975,9 +6085,9 @@
                 <a:solidFill>
                   <a:schemeClr val="accent2"/>
                 </a:solidFill>
-                <a:latin typeface="BIZ UDPゴシック" pitchFamily="34" charset="0"/>
-                <a:ea typeface="BIZ UDPゴシック" pitchFamily="34" charset="-122"/>
-                <a:cs typeface="BIZ UDPゴシック" pitchFamily="34" charset="-120"/>
+                <a:latin typeface="Noto Sans JP Print" pitchFamily="34" charset="0"/>
+                <a:ea typeface="Noto Sans JP Print" pitchFamily="34" charset="-122"/>
+                <a:cs typeface="Noto Sans JP Print" pitchFamily="34" charset="-120"/>
               </a:rPr>
               <a:t>大人が走る理由</a:t>
             </a:r>
@@ -6018,9 +6128,9 @@
                 <a:solidFill>
                   <a:schemeClr val="tx2"/>
                 </a:solidFill>
-                <a:latin typeface="BIZ UDPゴシック" pitchFamily="34" charset="0"/>
-                <a:ea typeface="BIZ UDPゴシック" pitchFamily="34" charset="-122"/>
-                <a:cs typeface="BIZ UDPゴシック" pitchFamily="34" charset="-120"/>
+                <a:latin typeface="Noto Sans JP Print" pitchFamily="34" charset="0"/>
+                <a:ea typeface="Noto Sans JP Print" pitchFamily="34" charset="-122"/>
+                <a:cs typeface="Noto Sans JP Print" pitchFamily="34" charset="-120"/>
               </a:rPr>
               <a:t>健康のため</a:t>
             </a:r>
@@ -6039,9 +6149,9 @@
                 <a:solidFill>
                   <a:schemeClr val="tx2"/>
                 </a:solidFill>
-                <a:latin typeface="BIZ UDPゴシック" pitchFamily="34" charset="0"/>
-                <a:ea typeface="BIZ UDPゴシック" pitchFamily="34" charset="-122"/>
-                <a:cs typeface="BIZ UDPゴシック" pitchFamily="34" charset="-120"/>
+                <a:latin typeface="Noto Sans JP Print" pitchFamily="34" charset="0"/>
+                <a:ea typeface="Noto Sans JP Print" pitchFamily="34" charset="-122"/>
+                <a:cs typeface="Noto Sans JP Print" pitchFamily="34" charset="-120"/>
               </a:rPr>
               <a:t>気分転換・ストレス解消</a:t>
             </a:r>
@@ -6060,9 +6170,9 @@
                 <a:solidFill>
                   <a:schemeClr val="tx2"/>
                 </a:solidFill>
-                <a:latin typeface="BIZ UDPゴシック" pitchFamily="34" charset="0"/>
-                <a:ea typeface="BIZ UDPゴシック" pitchFamily="34" charset="-122"/>
-                <a:cs typeface="BIZ UDPゴシック" pitchFamily="34" charset="-120"/>
+                <a:latin typeface="Noto Sans JP Print" pitchFamily="34" charset="0"/>
+                <a:ea typeface="Noto Sans JP Print" pitchFamily="34" charset="-122"/>
+                <a:cs typeface="Noto Sans JP Print" pitchFamily="34" charset="-120"/>
               </a:rPr>
               <a:t>自分のペースで楽しむ</a:t>
             </a:r>
@@ -6083,7 +6193,7 @@
           </a:xfrm>
           <a:prstGeom prst="roundRect">
             <a:avLst>
-              <a:gd name="adj" fmla="val 3077"/>
+              <a:gd name="adj" fmla="val 1282"/>
             </a:avLst>
           </a:prstGeom>
           <a:solidFill>
@@ -6126,9 +6236,9 @@
                 <a:solidFill>
                   <a:schemeClr val="accent1"/>
                 </a:solidFill>
-                <a:latin typeface="BIZ UDPゴシック" pitchFamily="34" charset="0"/>
-                <a:ea typeface="BIZ UDPゴシック" pitchFamily="34" charset="-122"/>
-                <a:cs typeface="BIZ UDPゴシック" pitchFamily="34" charset="-120"/>
+                <a:latin typeface="Noto Sans JP Print" pitchFamily="34" charset="0"/>
+                <a:ea typeface="Noto Sans JP Print" pitchFamily="34" charset="-122"/>
+                <a:cs typeface="Noto Sans JP Print" pitchFamily="34" charset="-120"/>
               </a:rPr>
               <a:t>学校の持久走のイメージ</a:t>
             </a:r>
@@ -6169,9 +6279,9 @@
                 <a:solidFill>
                   <a:schemeClr val="tx2"/>
                 </a:solidFill>
-                <a:latin typeface="BIZ UDPゴシック" pitchFamily="34" charset="0"/>
-                <a:ea typeface="BIZ UDPゴシック" pitchFamily="34" charset="-122"/>
-                <a:cs typeface="BIZ UDPゴシック" pitchFamily="34" charset="-120"/>
+                <a:latin typeface="Noto Sans JP Print" pitchFamily="34" charset="0"/>
+                <a:ea typeface="Noto Sans JP Print" pitchFamily="34" charset="-122"/>
+                <a:cs typeface="Noto Sans JP Print" pitchFamily="34" charset="-120"/>
               </a:rPr>
               <a:t>きつい・苦しい</a:t>
             </a:r>
@@ -6190,9 +6300,9 @@
                 <a:solidFill>
                   <a:schemeClr val="tx2"/>
                 </a:solidFill>
-                <a:latin typeface="BIZ UDPゴシック" pitchFamily="34" charset="0"/>
-                <a:ea typeface="BIZ UDPゴシック" pitchFamily="34" charset="-122"/>
-                <a:cs typeface="BIZ UDPゴシック" pitchFamily="34" charset="-120"/>
+                <a:latin typeface="Noto Sans JP Print" pitchFamily="34" charset="0"/>
+                <a:ea typeface="Noto Sans JP Print" pitchFamily="34" charset="-122"/>
+                <a:cs typeface="Noto Sans JP Print" pitchFamily="34" charset="-120"/>
               </a:rPr>
               <a:t>止まってはいけない</a:t>
             </a:r>
@@ -6211,9 +6321,9 @@
                 <a:solidFill>
                   <a:schemeClr val="tx2"/>
                 </a:solidFill>
-                <a:latin typeface="BIZ UDPゴシック" pitchFamily="34" charset="0"/>
-                <a:ea typeface="BIZ UDPゴシック" pitchFamily="34" charset="-122"/>
-                <a:cs typeface="BIZ UDPゴシック" pitchFamily="34" charset="-120"/>
+                <a:latin typeface="Noto Sans JP Print" pitchFamily="34" charset="0"/>
+                <a:ea typeface="Noto Sans JP Print" pitchFamily="34" charset="-122"/>
+                <a:cs typeface="Noto Sans JP Print" pitchFamily="34" charset="-120"/>
               </a:rPr>
               <a:t>順位で比べられる</a:t>
             </a:r>
@@ -6251,8 +6361,11 @@
             <a:lvl1pPr>
               <a:defRPr sz="1100">
                 <a:solidFill>
-                  <a:srgbClr val="6B7A90"/>
-                </a:solidFill>
+                  <a:srgbClr val="7C828D"/>
+                </a:solidFill>
+                <a:latin typeface="Noto Sans JP Print Black"/>
+                <a:ea typeface="Noto Sans JP Print Black"/>
+                <a:cs typeface="Noto Sans JP Print Black"/>
               </a:defRPr>
             </a:lvl1pPr>
           </a:lstStyle>
@@ -6301,7 +6414,7 @@
         </p:nvSpPr>
         <p:spPr>
           <a:xfrm>
-            <a:off x="548640" y="320040"/>
+            <a:off x="548640" y="274320"/>
             <a:ext cx="7315200" cy="320040"/>
           </a:xfrm>
           <a:prstGeom prst="rect">
@@ -6339,8 +6452,8 @@
         </p:nvSpPr>
         <p:spPr>
           <a:xfrm>
-            <a:off x="548640" y="685800"/>
-            <a:ext cx="11064240" cy="1143000"/>
+            <a:off x="548640" y="594360"/>
+            <a:ext cx="11064240" cy="1325880"/>
           </a:xfrm>
           <a:prstGeom prst="rect">
             <a:avLst/>
@@ -6353,17 +6466,43 @@
           <a:lstStyle/>
           <a:p>
             <a:pPr algn="l" indent="0" marL="0">
-              <a:buNone/>
-            </a:pPr>
-            <a:r>
-              <a:rPr lang="en-US" sz="3000" b="1" dirty="0">
+              <a:lnSpc>
+                <a:spcPct val="90000"/>
+              </a:lnSpc>
+              <a:buNone/>
+            </a:pPr>
+            <a:r>
+              <a:rPr lang="en-US" sz="3600" dirty="0">
                 <a:solidFill>
                   <a:schemeClr val="tx2"/>
                 </a:solidFill>
-              </a:rPr>
-              <a:t>週1回以上運動する大人は、約半分しかいない</a:t>
-            </a:r>
-            <a:endParaRPr lang="en-US" sz="3000" dirty="0"/>
+                <a:latin typeface="Noto Sans JP Print Black" pitchFamily="34" charset="0"/>
+                <a:ea typeface="Noto Sans JP Print Black" pitchFamily="34" charset="-122"/>
+                <a:cs typeface="Noto Sans JP Print Black" pitchFamily="34" charset="-120"/>
+              </a:rPr>
+              <a:t>週1回以上運動する大人は、</a:t>
+            </a:r>
+            <a:endParaRPr lang="en-US" sz="3600" dirty="0"/>
+          </a:p>
+          <a:p>
+            <a:pPr algn="l" indent="0" marL="0">
+              <a:lnSpc>
+                <a:spcPct val="90000"/>
+              </a:lnSpc>
+              <a:buNone/>
+            </a:pPr>
+            <a:r>
+              <a:rPr lang="en-US" sz="3600" dirty="0">
+                <a:solidFill>
+                  <a:schemeClr val="tx2"/>
+                </a:solidFill>
+                <a:latin typeface="Noto Sans JP Print Black" pitchFamily="34" charset="0"/>
+                <a:ea typeface="Noto Sans JP Print Black" pitchFamily="34" charset="-122"/>
+                <a:cs typeface="Noto Sans JP Print Black" pitchFamily="34" charset="-120"/>
+              </a:rPr>
+              <a:t>約半分しかいない</a:t>
+            </a:r>
+            <a:endParaRPr lang="en-US" sz="3600" dirty="0"/>
           </a:p>
         </p:txBody>
       </p:sp>
@@ -6392,13 +6531,13 @@
               <a:buNone/>
             </a:pPr>
             <a:r>
-              <a:rPr lang="en-US" sz="9600" b="1" dirty="0">
+              <a:rPr lang="en-US" sz="11000" b="1" dirty="0">
                 <a:solidFill>
                   <a:schemeClr val="accent1"/>
                 </a:solidFill>
-                <a:latin typeface="BIZ UDPゴシック" pitchFamily="34" charset="0"/>
-                <a:ea typeface="BIZ UDPゴシック" pitchFamily="34" charset="-122"/>
-                <a:cs typeface="BIZ UDPゴシック" pitchFamily="34" charset="-120"/>
+                <a:latin typeface="Noto Sans JP Print Black" pitchFamily="34" charset="0"/>
+                <a:ea typeface="Noto Sans JP Print Black" pitchFamily="34" charset="-122"/>
+                <a:cs typeface="Noto Sans JP Print Black" pitchFamily="34" charset="-120"/>
               </a:rPr>
               <a:t>52.5</a:t>
             </a:r>
@@ -6406,13 +6545,13 @@
               <a:buNone/>
             </a:pPr>
             <a:r>
-              <a:rPr lang="en-US" sz="4000" b="1" dirty="0">
+              <a:rPr lang="en-US" sz="4400" b="1" dirty="0">
                 <a:solidFill>
                   <a:schemeClr val="accent1"/>
                 </a:solidFill>
-                <a:latin typeface="BIZ UDPゴシック" pitchFamily="34" charset="0"/>
-                <a:ea typeface="BIZ UDPゴシック" pitchFamily="34" charset="-122"/>
-                <a:cs typeface="BIZ UDPゴシック" pitchFamily="34" charset="-120"/>
+                <a:latin typeface="Noto Sans JP Print Black" pitchFamily="34" charset="0"/>
+                <a:ea typeface="Noto Sans JP Print Black" pitchFamily="34" charset="-122"/>
+                <a:cs typeface="Noto Sans JP Print Black" pitchFamily="34" charset="-120"/>
               </a:rPr>
               <a:t> %</a:t>
             </a:r>
@@ -6449,9 +6588,9 @@
                 <a:solidFill>
                   <a:schemeClr val="tx2"/>
                 </a:solidFill>
-                <a:latin typeface="BIZ UDPゴシック" pitchFamily="34" charset="0"/>
-                <a:ea typeface="BIZ UDPゴシック" pitchFamily="34" charset="-122"/>
-                <a:cs typeface="BIZ UDPゴシック" pitchFamily="34" charset="-120"/>
+                <a:latin typeface="Noto Sans JP Print" pitchFamily="34" charset="0"/>
+                <a:ea typeface="Noto Sans JP Print" pitchFamily="34" charset="-122"/>
+                <a:cs typeface="Noto Sans JP Print" pitchFamily="34" charset="-120"/>
               </a:rPr>
               <a:t>週1日以上 運動・スポーツをする</a:t>
             </a:r>
@@ -6466,9 +6605,9 @@
                 <a:solidFill>
                   <a:schemeClr val="tx2"/>
                 </a:solidFill>
-                <a:latin typeface="BIZ UDPゴシック" pitchFamily="34" charset="0"/>
-                <a:ea typeface="BIZ UDPゴシック" pitchFamily="34" charset="-122"/>
-                <a:cs typeface="BIZ UDPゴシック" pitchFamily="34" charset="-120"/>
+                <a:latin typeface="Noto Sans JP Print" pitchFamily="34" charset="0"/>
+                <a:ea typeface="Noto Sans JP Print" pitchFamily="34" charset="-122"/>
+                <a:cs typeface="Noto Sans JP Print" pitchFamily="34" charset="-120"/>
               </a:rPr>
               <a:t>20歳以上の割合（令和6年度）</a:t>
             </a:r>
@@ -6505,9 +6644,9 @@
                 <a:solidFill>
                   <a:schemeClr val="accent4"/>
                 </a:solidFill>
-                <a:latin typeface="BIZ UDPゴシック" pitchFamily="34" charset="0"/>
-                <a:ea typeface="BIZ UDPゴシック" pitchFamily="34" charset="-122"/>
-                <a:cs typeface="BIZ UDPゴシック" pitchFamily="34" charset="-120"/>
+                <a:latin typeface="Noto Sans JP Print" pitchFamily="34" charset="0"/>
+                <a:ea typeface="Noto Sans JP Print" pitchFamily="34" charset="-122"/>
+                <a:cs typeface="Noto Sans JP Print" pitchFamily="34" charset="-120"/>
               </a:rPr>
               <a:t>実際</a:t>
             </a:r>
@@ -6528,7 +6667,7 @@
           </a:xfrm>
           <a:prstGeom prst="roundRect">
             <a:avLst>
-              <a:gd name="adj" fmla="val 20000"/>
+              <a:gd name="adj" fmla="val 8333"/>
             </a:avLst>
           </a:prstGeom>
           <a:solidFill>
@@ -6555,7 +6694,7 @@
           </a:xfrm>
           <a:prstGeom prst="roundRect">
             <a:avLst>
-              <a:gd name="adj" fmla="val 20000"/>
+              <a:gd name="adj" fmla="val 8333"/>
             </a:avLst>
           </a:prstGeom>
           <a:solidFill>
@@ -6594,17 +6733,17 @@
               <a:buNone/>
             </a:pPr>
             <a:r>
-              <a:rPr lang="en-US" sz="1600" b="1" dirty="0">
+              <a:rPr lang="en-US" sz="1800" b="1" dirty="0">
                 <a:solidFill>
                   <a:schemeClr val="bg1"/>
                 </a:solidFill>
-                <a:latin typeface="BIZ UDPゴシック" pitchFamily="34" charset="0"/>
-                <a:ea typeface="BIZ UDPゴシック" pitchFamily="34" charset="-122"/>
-                <a:cs typeface="BIZ UDPゴシック" pitchFamily="34" charset="-120"/>
+                <a:latin typeface="Noto Sans JP Print Black" pitchFamily="34" charset="0"/>
+                <a:ea typeface="Noto Sans JP Print Black" pitchFamily="34" charset="-122"/>
+                <a:cs typeface="Noto Sans JP Print Black" pitchFamily="34" charset="-120"/>
               </a:rPr>
               <a:t>52.5%</a:t>
             </a:r>
-            <a:endParaRPr lang="en-US" sz="1600" dirty="0"/>
+            <a:endParaRPr lang="en-US" sz="1800" dirty="0"/>
           </a:p>
         </p:txBody>
       </p:sp>
@@ -6637,9 +6776,9 @@
                 <a:solidFill>
                   <a:schemeClr val="accent4"/>
                 </a:solidFill>
-                <a:latin typeface="BIZ UDPゴシック" pitchFamily="34" charset="0"/>
-                <a:ea typeface="BIZ UDPゴシック" pitchFamily="34" charset="-122"/>
-                <a:cs typeface="BIZ UDPゴシック" pitchFamily="34" charset="-120"/>
+                <a:latin typeface="Noto Sans JP Print" pitchFamily="34" charset="0"/>
+                <a:ea typeface="Noto Sans JP Print" pitchFamily="34" charset="-122"/>
+                <a:cs typeface="Noto Sans JP Print" pitchFamily="34" charset="-120"/>
               </a:rPr>
               <a:t>国の目標</a:t>
             </a:r>
@@ -6660,7 +6799,7 @@
           </a:xfrm>
           <a:prstGeom prst="roundRect">
             <a:avLst>
-              <a:gd name="adj" fmla="val 20000"/>
+              <a:gd name="adj" fmla="val 8333"/>
             </a:avLst>
           </a:prstGeom>
           <a:solidFill>
@@ -6687,7 +6826,7 @@
           </a:xfrm>
           <a:prstGeom prst="roundRect">
             <a:avLst>
-              <a:gd name="adj" fmla="val 20000"/>
+              <a:gd name="adj" fmla="val 8333"/>
             </a:avLst>
           </a:prstGeom>
           <a:solidFill>
@@ -6726,17 +6865,17 @@
               <a:buNone/>
             </a:pPr>
             <a:r>
-              <a:rPr lang="en-US" sz="1600" b="1" dirty="0">
+              <a:rPr lang="en-US" sz="1800" b="1" dirty="0">
                 <a:solidFill>
                   <a:schemeClr val="bg1"/>
                 </a:solidFill>
-                <a:latin typeface="BIZ UDPゴシック" pitchFamily="34" charset="0"/>
-                <a:ea typeface="BIZ UDPゴシック" pitchFamily="34" charset="-122"/>
-                <a:cs typeface="BIZ UDPゴシック" pitchFamily="34" charset="-120"/>
+                <a:latin typeface="Noto Sans JP Print Black" pitchFamily="34" charset="0"/>
+                <a:ea typeface="Noto Sans JP Print Black" pitchFamily="34" charset="-122"/>
+                <a:cs typeface="Noto Sans JP Print Black" pitchFamily="34" charset="-120"/>
               </a:rPr>
               <a:t>70%</a:t>
             </a:r>
-            <a:endParaRPr lang="en-US" sz="1600" dirty="0"/>
+            <a:endParaRPr lang="en-US" sz="1800" dirty="0"/>
           </a:p>
         </p:txBody>
       </p:sp>
@@ -6753,7 +6892,7 @@
           </a:xfrm>
           <a:prstGeom prst="roundRect">
             <a:avLst>
-              <a:gd name="adj" fmla="val 12632"/>
+              <a:gd name="adj" fmla="val 5263"/>
             </a:avLst>
           </a:prstGeom>
           <a:solidFill>
@@ -6796,9 +6935,9 @@
                 <a:solidFill>
                   <a:schemeClr val="tx2"/>
                 </a:solidFill>
-                <a:latin typeface="BIZ UDPゴシック" pitchFamily="34" charset="0"/>
-                <a:ea typeface="BIZ UDPゴシック" pitchFamily="34" charset="-122"/>
-                <a:cs typeface="BIZ UDPゴシック" pitchFamily="34" charset="-120"/>
+                <a:latin typeface="Noto Sans JP Print" pitchFamily="34" charset="0"/>
+                <a:ea typeface="Noto Sans JP Print" pitchFamily="34" charset="-122"/>
+                <a:cs typeface="Noto Sans JP Print" pitchFamily="34" charset="-120"/>
               </a:rPr>
               <a:t>小学校で「嫌い」にさせないことは、一生の運動習慣に関わる</a:t>
             </a:r>
@@ -6835,9 +6974,9 @@
                 <a:solidFill>
                   <a:schemeClr val="accent4"/>
                 </a:solidFill>
-                <a:latin typeface="BIZ UDPゴシック" pitchFamily="34" charset="0"/>
-                <a:ea typeface="BIZ UDPゴシック" pitchFamily="34" charset="-122"/>
-                <a:cs typeface="BIZ UDPゴシック" pitchFamily="34" charset="-120"/>
+                <a:latin typeface="Noto Sans JP Print" pitchFamily="34" charset="0"/>
+                <a:ea typeface="Noto Sans JP Print" pitchFamily="34" charset="-122"/>
+                <a:cs typeface="Noto Sans JP Print" pitchFamily="34" charset="-120"/>
               </a:rPr>
               <a:t>出典：スポーツ庁「スポーツの実施状況等に関する世論調査」（令和6年度）、第3期スポーツ基本計画</a:t>
             </a:r>
@@ -6875,8 +7014,11 @@
             <a:lvl1pPr>
               <a:defRPr sz="1100">
                 <a:solidFill>
-                  <a:srgbClr val="6B7A90"/>
-                </a:solidFill>
+                  <a:srgbClr val="7C828D"/>
+                </a:solidFill>
+                <a:latin typeface="Noto Sans JP Print Black"/>
+                <a:ea typeface="Noto Sans JP Print Black"/>
+                <a:cs typeface="Noto Sans JP Print Black"/>
               </a:defRPr>
             </a:lvl1pPr>
           </a:lstStyle>
@@ -6925,7 +7067,7 @@
         </p:nvSpPr>
         <p:spPr>
           <a:xfrm>
-            <a:off x="548640" y="320040"/>
+            <a:off x="548640" y="274320"/>
             <a:ext cx="7315200" cy="320040"/>
           </a:xfrm>
           <a:prstGeom prst="rect">
@@ -6963,8 +7105,8 @@
         </p:nvSpPr>
         <p:spPr>
           <a:xfrm>
-            <a:off x="548640" y="685800"/>
-            <a:ext cx="11064240" cy="1143000"/>
+            <a:off x="548640" y="594360"/>
+            <a:ext cx="11064240" cy="1325880"/>
           </a:xfrm>
           <a:prstGeom prst="rect">
             <a:avLst/>
@@ -6977,17 +7119,43 @@
           <a:lstStyle/>
           <a:p>
             <a:pPr algn="l" indent="0" marL="0">
-              <a:buNone/>
-            </a:pPr>
-            <a:r>
-              <a:rPr lang="en-US" sz="3000" b="1" dirty="0">
+              <a:lnSpc>
+                <a:spcPct val="90000"/>
+              </a:lnSpc>
+              <a:buNone/>
+            </a:pPr>
+            <a:r>
+              <a:rPr lang="en-US" sz="3600" dirty="0">
                 <a:solidFill>
                   <a:schemeClr val="tx2"/>
                 </a:solidFill>
-              </a:rPr>
-              <a:t>子どもが走れなくなるのは「苦しい」から。その正体は？</a:t>
-            </a:r>
-            <a:endParaRPr lang="en-US" sz="3000" dirty="0"/>
+                <a:latin typeface="Noto Sans JP Print Black" pitchFamily="34" charset="0"/>
+                <a:ea typeface="Noto Sans JP Print Black" pitchFamily="34" charset="-122"/>
+                <a:cs typeface="Noto Sans JP Print Black" pitchFamily="34" charset="-120"/>
+              </a:rPr>
+              <a:t>子どもが走れなくなるのは「苦しい」から。</a:t>
+            </a:r>
+            <a:endParaRPr lang="en-US" sz="3600" dirty="0"/>
+          </a:p>
+          <a:p>
+            <a:pPr algn="l" indent="0" marL="0">
+              <a:lnSpc>
+                <a:spcPct val="90000"/>
+              </a:lnSpc>
+              <a:buNone/>
+            </a:pPr>
+            <a:r>
+              <a:rPr lang="en-US" sz="3600" dirty="0">
+                <a:solidFill>
+                  <a:schemeClr val="tx2"/>
+                </a:solidFill>
+                <a:latin typeface="Noto Sans JP Print Black" pitchFamily="34" charset="0"/>
+                <a:ea typeface="Noto Sans JP Print Black" pitchFamily="34" charset="-122"/>
+                <a:cs typeface="Noto Sans JP Print Black" pitchFamily="34" charset="-120"/>
+              </a:rPr>
+              <a:t>その正体は？</a:t>
+            </a:r>
+            <a:endParaRPr lang="en-US" sz="3600" dirty="0"/>
           </a:p>
         </p:txBody>
       </p:sp>
@@ -7045,9 +7213,9 @@
                 <a:solidFill>
                   <a:schemeClr val="accent1"/>
                 </a:solidFill>
-                <a:latin typeface="BIZ UDPゴシック" pitchFamily="34" charset="0"/>
-                <a:ea typeface="BIZ UDPゴシック" pitchFamily="34" charset="-122"/>
-                <a:cs typeface="BIZ UDPゴシック" pitchFamily="34" charset="-120"/>
+                <a:latin typeface="Noto Sans JP Print" pitchFamily="34" charset="0"/>
+                <a:ea typeface="Noto Sans JP Print" pitchFamily="34" charset="-122"/>
+                <a:cs typeface="Noto Sans JP Print" pitchFamily="34" charset="-120"/>
               </a:rPr>
               <a:t>疲れた…</a:t>
             </a:r>
@@ -7109,9 +7277,9 @@
                 <a:solidFill>
                   <a:schemeClr val="accent1"/>
                 </a:solidFill>
-                <a:latin typeface="BIZ UDPゴシック" pitchFamily="34" charset="0"/>
-                <a:ea typeface="BIZ UDPゴシック" pitchFamily="34" charset="-122"/>
-                <a:cs typeface="BIZ UDPゴシック" pitchFamily="34" charset="-120"/>
+                <a:latin typeface="Noto Sans JP Print" pitchFamily="34" charset="0"/>
+                <a:ea typeface="Noto Sans JP Print" pitchFamily="34" charset="-122"/>
+                <a:cs typeface="Noto Sans JP Print" pitchFamily="34" charset="-120"/>
               </a:rPr>
               <a:t>きつい…</a:t>
             </a:r>
@@ -7173,9 +7341,9 @@
                 <a:solidFill>
                   <a:schemeClr val="accent1"/>
                 </a:solidFill>
-                <a:latin typeface="BIZ UDPゴシック" pitchFamily="34" charset="0"/>
-                <a:ea typeface="BIZ UDPゴシック" pitchFamily="34" charset="-122"/>
-                <a:cs typeface="BIZ UDPゴシック" pitchFamily="34" charset="-120"/>
+                <a:latin typeface="Noto Sans JP Print" pitchFamily="34" charset="0"/>
+                <a:ea typeface="Noto Sans JP Print" pitchFamily="34" charset="-122"/>
+                <a:cs typeface="Noto Sans JP Print" pitchFamily="34" charset="-120"/>
               </a:rPr>
               <a:t>苦しい…</a:t>
             </a:r>
@@ -7212,9 +7380,9 @@
                 <a:solidFill>
                   <a:schemeClr val="tx2"/>
                 </a:solidFill>
-                <a:latin typeface="BIZ UDPゴシック" pitchFamily="34" charset="0"/>
-                <a:ea typeface="BIZ UDPゴシック" pitchFamily="34" charset="-122"/>
-                <a:cs typeface="BIZ UDPゴシック" pitchFamily="34" charset="-120"/>
+                <a:latin typeface="Noto Sans JP Print" pitchFamily="34" charset="0"/>
+                <a:ea typeface="Noto Sans JP Print" pitchFamily="34" charset="-122"/>
+                <a:cs typeface="Noto Sans JP Print" pitchFamily="34" charset="-120"/>
               </a:rPr>
               <a:t>その正体は？</a:t>
             </a:r>
@@ -7252,8 +7420,11 @@
             <a:lvl1pPr>
               <a:defRPr sz="1100">
                 <a:solidFill>
-                  <a:srgbClr val="6B7A90"/>
-                </a:solidFill>
+                  <a:srgbClr val="7C828D"/>
+                </a:solidFill>
+                <a:latin typeface="Noto Sans JP Print Black"/>
+                <a:ea typeface="Noto Sans JP Print Black"/>
+                <a:cs typeface="Noto Sans JP Print Black"/>
               </a:defRPr>
             </a:lvl1pPr>
           </a:lstStyle>
@@ -7302,7 +7473,7 @@
         </p:nvSpPr>
         <p:spPr>
           <a:xfrm>
-            <a:off x="548640" y="320040"/>
+            <a:off x="548640" y="274320"/>
             <a:ext cx="7315200" cy="320040"/>
           </a:xfrm>
           <a:prstGeom prst="rect">
@@ -7340,8 +7511,8 @@
         </p:nvSpPr>
         <p:spPr>
           <a:xfrm>
-            <a:off x="548640" y="685800"/>
-            <a:ext cx="11064240" cy="1143000"/>
+            <a:off x="548640" y="594360"/>
+            <a:ext cx="11064240" cy="1325880"/>
           </a:xfrm>
           <a:prstGeom prst="rect">
             <a:avLst/>
@@ -7354,17 +7525,43 @@
           <a:lstStyle/>
           <a:p>
             <a:pPr algn="l" indent="0" marL="0">
-              <a:buNone/>
-            </a:pPr>
-            <a:r>
-              <a:rPr lang="en-US" sz="3000" b="1" dirty="0">
+              <a:lnSpc>
+                <a:spcPct val="90000"/>
+              </a:lnSpc>
+              <a:buNone/>
+            </a:pPr>
+            <a:r>
+              <a:rPr lang="en-US" sz="3600" dirty="0">
                 <a:solidFill>
                   <a:schemeClr val="tx2"/>
                 </a:solidFill>
-              </a:rPr>
-              <a:t>長く動くには酸素がいる。だから息と心臓が速くなる</a:t>
-            </a:r>
-            <a:endParaRPr lang="en-US" sz="3000" dirty="0"/>
+                <a:latin typeface="Noto Sans JP Print Black" pitchFamily="34" charset="0"/>
+                <a:ea typeface="Noto Sans JP Print Black" pitchFamily="34" charset="-122"/>
+                <a:cs typeface="Noto Sans JP Print Black" pitchFamily="34" charset="-120"/>
+              </a:rPr>
+              <a:t>長く動くには酸素がいる。</a:t>
+            </a:r>
+            <a:endParaRPr lang="en-US" sz="3600" dirty="0"/>
+          </a:p>
+          <a:p>
+            <a:pPr algn="l" indent="0" marL="0">
+              <a:lnSpc>
+                <a:spcPct val="90000"/>
+              </a:lnSpc>
+              <a:buNone/>
+            </a:pPr>
+            <a:r>
+              <a:rPr lang="en-US" sz="3600" dirty="0">
+                <a:solidFill>
+                  <a:schemeClr val="tx2"/>
+                </a:solidFill>
+                <a:latin typeface="Noto Sans JP Print Black" pitchFamily="34" charset="0"/>
+                <a:ea typeface="Noto Sans JP Print Black" pitchFamily="34" charset="-122"/>
+                <a:cs typeface="Noto Sans JP Print Black" pitchFamily="34" charset="-120"/>
+              </a:rPr>
+              <a:t>だから息と心臓が速くなる</a:t>
+            </a:r>
+            <a:endParaRPr lang="en-US" sz="3600" dirty="0"/>
           </a:p>
         </p:txBody>
       </p:sp>
@@ -7381,7 +7578,7 @@
           </a:xfrm>
           <a:prstGeom prst="roundRect">
             <a:avLst>
-              <a:gd name="adj" fmla="val 3934"/>
+              <a:gd name="adj" fmla="val 1639"/>
             </a:avLst>
           </a:prstGeom>
           <a:solidFill>
@@ -7424,9 +7621,9 @@
                 <a:solidFill>
                   <a:schemeClr val="tx2"/>
                 </a:solidFill>
-                <a:latin typeface="BIZ UDPゴシック" pitchFamily="34" charset="0"/>
-                <a:ea typeface="BIZ UDPゴシック" pitchFamily="34" charset="-122"/>
-                <a:cs typeface="BIZ UDPゴシック" pitchFamily="34" charset="-120"/>
+                <a:latin typeface="Noto Sans JP Print" pitchFamily="34" charset="0"/>
+                <a:ea typeface="Noto Sans JP Print" pitchFamily="34" charset="-122"/>
+                <a:cs typeface="Noto Sans JP Print" pitchFamily="34" charset="-120"/>
               </a:rPr>
               <a:t>〜10秒</a:t>
             </a:r>
@@ -7463,9 +7660,9 @@
                 <a:solidFill>
                   <a:schemeClr val="tx2"/>
                 </a:solidFill>
-                <a:latin typeface="BIZ UDPゴシック" pitchFamily="34" charset="0"/>
-                <a:ea typeface="BIZ UDPゴシック" pitchFamily="34" charset="-122"/>
-                <a:cs typeface="BIZ UDPゴシック" pitchFamily="34" charset="-120"/>
+                <a:latin typeface="Noto Sans JP Print" pitchFamily="34" charset="0"/>
+                <a:ea typeface="Noto Sans JP Print" pitchFamily="34" charset="-122"/>
+                <a:cs typeface="Noto Sans JP Print" pitchFamily="34" charset="-120"/>
               </a:rPr>
               <a:t>すぐ使える</a:t>
             </a:r>
@@ -7480,9 +7677,9 @@
                 <a:solidFill>
                   <a:schemeClr val="tx2"/>
                 </a:solidFill>
-                <a:latin typeface="BIZ UDPゴシック" pitchFamily="34" charset="0"/>
-                <a:ea typeface="BIZ UDPゴシック" pitchFamily="34" charset="-122"/>
-                <a:cs typeface="BIZ UDPゴシック" pitchFamily="34" charset="-120"/>
+                <a:latin typeface="Noto Sans JP Print" pitchFamily="34" charset="0"/>
+                <a:ea typeface="Noto Sans JP Print" pitchFamily="34" charset="-122"/>
+                <a:cs typeface="Noto Sans JP Print" pitchFamily="34" charset="-120"/>
               </a:rPr>
               <a:t>エネルギー</a:t>
             </a:r>
@@ -7519,9 +7716,9 @@
                 <a:solidFill>
                   <a:schemeClr val="tx1"/>
                 </a:solidFill>
-                <a:latin typeface="BIZ UDPゴシック" pitchFamily="34" charset="0"/>
-                <a:ea typeface="BIZ UDPゴシック" pitchFamily="34" charset="-122"/>
-                <a:cs typeface="BIZ UDPゴシック" pitchFamily="34" charset="-120"/>
+                <a:latin typeface="Noto Sans JP Print" pitchFamily="34" charset="0"/>
+                <a:ea typeface="Noto Sans JP Print" pitchFamily="34" charset="-122"/>
+                <a:cs typeface="Noto Sans JP Print" pitchFamily="34" charset="-120"/>
               </a:rPr>
               <a:t>筋肉にためてある分を使う</a:t>
             </a:r>
@@ -7542,7 +7739,7 @@
           </a:xfrm>
           <a:prstGeom prst="roundRect">
             <a:avLst>
-              <a:gd name="adj" fmla="val 3934"/>
+              <a:gd name="adj" fmla="val 1639"/>
             </a:avLst>
           </a:prstGeom>
           <a:solidFill>
@@ -7585,9 +7782,9 @@
                 <a:solidFill>
                   <a:schemeClr val="tx2"/>
                 </a:solidFill>
-                <a:latin typeface="BIZ UDPゴシック" pitchFamily="34" charset="0"/>
-                <a:ea typeface="BIZ UDPゴシック" pitchFamily="34" charset="-122"/>
-                <a:cs typeface="BIZ UDPゴシック" pitchFamily="34" charset="-120"/>
+                <a:latin typeface="Noto Sans JP Print" pitchFamily="34" charset="0"/>
+                <a:ea typeface="Noto Sans JP Print" pitchFamily="34" charset="-122"/>
+                <a:cs typeface="Noto Sans JP Print" pitchFamily="34" charset="-120"/>
               </a:rPr>
               <a:t>〜2分</a:t>
             </a:r>
@@ -7624,9 +7821,9 @@
                 <a:solidFill>
                   <a:schemeClr val="tx2"/>
                 </a:solidFill>
-                <a:latin typeface="BIZ UDPゴシック" pitchFamily="34" charset="0"/>
-                <a:ea typeface="BIZ UDPゴシック" pitchFamily="34" charset="-122"/>
-                <a:cs typeface="BIZ UDPゴシック" pitchFamily="34" charset="-120"/>
+                <a:latin typeface="Noto Sans JP Print" pitchFamily="34" charset="0"/>
+                <a:ea typeface="Noto Sans JP Print" pitchFamily="34" charset="-122"/>
+                <a:cs typeface="Noto Sans JP Print" pitchFamily="34" charset="-120"/>
               </a:rPr>
               <a:t>糖を素早く</a:t>
             </a:r>
@@ -7641,9 +7838,9 @@
                 <a:solidFill>
                   <a:schemeClr val="tx2"/>
                 </a:solidFill>
-                <a:latin typeface="BIZ UDPゴシック" pitchFamily="34" charset="0"/>
-                <a:ea typeface="BIZ UDPゴシック" pitchFamily="34" charset="-122"/>
-                <a:cs typeface="BIZ UDPゴシック" pitchFamily="34" charset="-120"/>
+                <a:latin typeface="Noto Sans JP Print" pitchFamily="34" charset="0"/>
+                <a:ea typeface="Noto Sans JP Print" pitchFamily="34" charset="-122"/>
+                <a:cs typeface="Noto Sans JP Print" pitchFamily="34" charset="-120"/>
               </a:rPr>
               <a:t>分解する</a:t>
             </a:r>
@@ -7680,9 +7877,9 @@
                 <a:solidFill>
                   <a:schemeClr val="tx1"/>
                 </a:solidFill>
-                <a:latin typeface="BIZ UDPゴシック" pitchFamily="34" charset="0"/>
-                <a:ea typeface="BIZ UDPゴシック" pitchFamily="34" charset="-122"/>
-                <a:cs typeface="BIZ UDPゴシック" pitchFamily="34" charset="-120"/>
+                <a:latin typeface="Noto Sans JP Print" pitchFamily="34" charset="0"/>
+                <a:ea typeface="Noto Sans JP Print" pitchFamily="34" charset="-122"/>
+                <a:cs typeface="Noto Sans JP Print" pitchFamily="34" charset="-120"/>
               </a:rPr>
               <a:t>短い全力の運動の主役</a:t>
             </a:r>
@@ -7703,7 +7900,7 @@
           </a:xfrm>
           <a:prstGeom prst="roundRect">
             <a:avLst>
-              <a:gd name="adj" fmla="val 3934"/>
+              <a:gd name="adj" fmla="val 1639"/>
             </a:avLst>
           </a:prstGeom>
           <a:solidFill>
@@ -7746,9 +7943,9 @@
                 <a:solidFill>
                   <a:schemeClr val="accent1"/>
                 </a:solidFill>
-                <a:latin typeface="BIZ UDPゴシック" pitchFamily="34" charset="0"/>
-                <a:ea typeface="BIZ UDPゴシック" pitchFamily="34" charset="-122"/>
-                <a:cs typeface="BIZ UDPゴシック" pitchFamily="34" charset="-120"/>
+                <a:latin typeface="Noto Sans JP Print" pitchFamily="34" charset="0"/>
+                <a:ea typeface="Noto Sans JP Print" pitchFamily="34" charset="-122"/>
+                <a:cs typeface="Noto Sans JP Print" pitchFamily="34" charset="-120"/>
               </a:rPr>
               <a:t>2分〜</a:t>
             </a:r>
@@ -7785,9 +7982,9 @@
                 <a:solidFill>
                   <a:schemeClr val="tx2"/>
                 </a:solidFill>
-                <a:latin typeface="BIZ UDPゴシック" pitchFamily="34" charset="0"/>
-                <a:ea typeface="BIZ UDPゴシック" pitchFamily="34" charset="-122"/>
-                <a:cs typeface="BIZ UDPゴシック" pitchFamily="34" charset="-120"/>
+                <a:latin typeface="Noto Sans JP Print" pitchFamily="34" charset="0"/>
+                <a:ea typeface="Noto Sans JP Print" pitchFamily="34" charset="-122"/>
+                <a:cs typeface="Noto Sans JP Print" pitchFamily="34" charset="-120"/>
               </a:rPr>
               <a:t>酸素を使って</a:t>
             </a:r>
@@ -7802,9 +7999,9 @@
                 <a:solidFill>
                   <a:schemeClr val="tx2"/>
                 </a:solidFill>
-                <a:latin typeface="BIZ UDPゴシック" pitchFamily="34" charset="0"/>
-                <a:ea typeface="BIZ UDPゴシック" pitchFamily="34" charset="-122"/>
-                <a:cs typeface="BIZ UDPゴシック" pitchFamily="34" charset="-120"/>
+                <a:latin typeface="Noto Sans JP Print" pitchFamily="34" charset="0"/>
+                <a:ea typeface="Noto Sans JP Print" pitchFamily="34" charset="-122"/>
+                <a:cs typeface="Noto Sans JP Print" pitchFamily="34" charset="-120"/>
               </a:rPr>
               <a:t>糖・脂肪を燃やす</a:t>
             </a:r>
@@ -7841,9 +8038,9 @@
                 <a:solidFill>
                   <a:schemeClr val="tx1"/>
                 </a:solidFill>
-                <a:latin typeface="BIZ UDPゴシック" pitchFamily="34" charset="0"/>
-                <a:ea typeface="BIZ UDPゴシック" pitchFamily="34" charset="-122"/>
-                <a:cs typeface="BIZ UDPゴシック" pitchFamily="34" charset="-120"/>
+                <a:latin typeface="Noto Sans JP Print" pitchFamily="34" charset="0"/>
+                <a:ea typeface="Noto Sans JP Print" pitchFamily="34" charset="-122"/>
+                <a:cs typeface="Noto Sans JP Print" pitchFamily="34" charset="-120"/>
               </a:rPr>
               <a:t>長く動くときの主役</a:t>
             </a:r>
@@ -7889,7 +8086,7 @@
           </a:xfrm>
           <a:prstGeom prst="roundRect">
             <a:avLst>
-              <a:gd name="adj" fmla="val 14118"/>
+              <a:gd name="adj" fmla="val 5882"/>
             </a:avLst>
           </a:prstGeom>
           <a:solidFill>
@@ -7932,9 +8129,9 @@
                 <a:solidFill>
                   <a:schemeClr val="bg1"/>
                 </a:solidFill>
-                <a:latin typeface="BIZ UDPゴシック" pitchFamily="34" charset="0"/>
-                <a:ea typeface="BIZ UDPゴシック" pitchFamily="34" charset="-122"/>
-                <a:cs typeface="BIZ UDPゴシック" pitchFamily="34" charset="-120"/>
+                <a:latin typeface="Noto Sans JP Print" pitchFamily="34" charset="0"/>
+                <a:ea typeface="Noto Sans JP Print" pitchFamily="34" charset="-122"/>
+                <a:cs typeface="Noto Sans JP Print" pitchFamily="34" charset="-120"/>
               </a:rPr>
               <a:t>酸素をたくさん取り込もうとする　→　呼吸が速くなる・心拍数が上がる</a:t>
             </a:r>
@@ -7972,8 +8169,11 @@
             <a:lvl1pPr>
               <a:defRPr sz="1100">
                 <a:solidFill>
-                  <a:srgbClr val="6B7A90"/>
-                </a:solidFill>
+                  <a:srgbClr val="7C828D"/>
+                </a:solidFill>
+                <a:latin typeface="Noto Sans JP Print Black"/>
+                <a:ea typeface="Noto Sans JP Print Black"/>
+                <a:cs typeface="Noto Sans JP Print Black"/>
               </a:defRPr>
             </a:lvl1pPr>
           </a:lstStyle>
@@ -8022,7 +8222,7 @@
         </p:nvSpPr>
         <p:spPr>
           <a:xfrm>
-            <a:off x="548640" y="320040"/>
+            <a:off x="548640" y="274320"/>
             <a:ext cx="7315200" cy="320040"/>
           </a:xfrm>
           <a:prstGeom prst="rect">
@@ -8060,8 +8260,8 @@
         </p:nvSpPr>
         <p:spPr>
           <a:xfrm>
-            <a:off x="548640" y="685800"/>
-            <a:ext cx="11064240" cy="1143000"/>
+            <a:off x="548640" y="594360"/>
+            <a:ext cx="11064240" cy="1325880"/>
           </a:xfrm>
           <a:prstGeom prst="rect">
             <a:avLst/>
@@ -8074,17 +8274,43 @@
           <a:lstStyle/>
           <a:p>
             <a:pPr algn="l" indent="0" marL="0">
-              <a:buNone/>
-            </a:pPr>
-            <a:r>
-              <a:rPr lang="en-US" sz="3000" b="1" dirty="0">
+              <a:lnSpc>
+                <a:spcPct val="90000"/>
+              </a:lnSpc>
+              <a:buNone/>
+            </a:pPr>
+            <a:r>
+              <a:rPr lang="en-US" sz="3600" dirty="0">
                 <a:solidFill>
                   <a:schemeClr val="tx2"/>
                 </a:solidFill>
-              </a:rPr>
-              <a:t>「苦しい」は、脳がかけるブレーキ。慣れると感じ方が変わる</a:t>
-            </a:r>
-            <a:endParaRPr lang="en-US" sz="3000" dirty="0"/>
+                <a:latin typeface="Noto Sans JP Print Black" pitchFamily="34" charset="0"/>
+                <a:ea typeface="Noto Sans JP Print Black" pitchFamily="34" charset="-122"/>
+                <a:cs typeface="Noto Sans JP Print Black" pitchFamily="34" charset="-120"/>
+              </a:rPr>
+              <a:t>「苦しい」は、脳がかけるブレーキ。</a:t>
+            </a:r>
+            <a:endParaRPr lang="en-US" sz="3600" dirty="0"/>
+          </a:p>
+          <a:p>
+            <a:pPr algn="l" indent="0" marL="0">
+              <a:lnSpc>
+                <a:spcPct val="90000"/>
+              </a:lnSpc>
+              <a:buNone/>
+            </a:pPr>
+            <a:r>
+              <a:rPr lang="en-US" sz="3600" dirty="0">
+                <a:solidFill>
+                  <a:schemeClr val="tx2"/>
+                </a:solidFill>
+                <a:latin typeface="Noto Sans JP Print Black" pitchFamily="34" charset="0"/>
+                <a:ea typeface="Noto Sans JP Print Black" pitchFamily="34" charset="-122"/>
+                <a:cs typeface="Noto Sans JP Print Black" pitchFamily="34" charset="-120"/>
+              </a:rPr>
+              <a:t>慣れると感じ方が変わる</a:t>
+            </a:r>
+            <a:endParaRPr lang="en-US" sz="3600" dirty="0"/>
           </a:p>
         </p:txBody>
       </p:sp>
@@ -8101,7 +8327,7 @@
           </a:xfrm>
           <a:prstGeom prst="roundRect">
             <a:avLst>
-              <a:gd name="adj" fmla="val 6667"/>
+              <a:gd name="adj" fmla="val 2778"/>
             </a:avLst>
           </a:prstGeom>
           <a:solidFill>
@@ -8144,9 +8370,9 @@
                 <a:solidFill>
                   <a:schemeClr val="tx2"/>
                 </a:solidFill>
-                <a:latin typeface="BIZ UDPゴシック" pitchFamily="34" charset="0"/>
-                <a:ea typeface="BIZ UDPゴシック" pitchFamily="34" charset="-122"/>
-                <a:cs typeface="BIZ UDPゴシック" pitchFamily="34" charset="-120"/>
+                <a:latin typeface="Noto Sans JP Print" pitchFamily="34" charset="0"/>
+                <a:ea typeface="Noto Sans JP Print" pitchFamily="34" charset="-122"/>
+                <a:cs typeface="Noto Sans JP Print" pitchFamily="34" charset="-120"/>
               </a:rPr>
               <a:t>呼吸・心拍数が</a:t>
             </a:r>
@@ -8161,9 +8387,9 @@
                 <a:solidFill>
                   <a:schemeClr val="tx2"/>
                 </a:solidFill>
-                <a:latin typeface="BIZ UDPゴシック" pitchFamily="34" charset="0"/>
-                <a:ea typeface="BIZ UDPゴシック" pitchFamily="34" charset="-122"/>
-                <a:cs typeface="BIZ UDPゴシック" pitchFamily="34" charset="-120"/>
+                <a:latin typeface="Noto Sans JP Print" pitchFamily="34" charset="0"/>
+                <a:ea typeface="Noto Sans JP Print" pitchFamily="34" charset="-122"/>
+                <a:cs typeface="Noto Sans JP Print" pitchFamily="34" charset="-120"/>
               </a:rPr>
               <a:t>上がる</a:t>
             </a:r>
@@ -8209,7 +8435,7 @@
           </a:xfrm>
           <a:prstGeom prst="roundRect">
             <a:avLst>
-              <a:gd name="adj" fmla="val 6667"/>
+              <a:gd name="adj" fmla="val 2778"/>
             </a:avLst>
           </a:prstGeom>
           <a:solidFill>
@@ -8252,9 +8478,9 @@
                 <a:solidFill>
                   <a:schemeClr val="tx2"/>
                 </a:solidFill>
-                <a:latin typeface="BIZ UDPゴシック" pitchFamily="34" charset="0"/>
-                <a:ea typeface="BIZ UDPゴシック" pitchFamily="34" charset="-122"/>
-                <a:cs typeface="BIZ UDPゴシック" pitchFamily="34" charset="-120"/>
+                <a:latin typeface="Noto Sans JP Print" pitchFamily="34" charset="0"/>
+                <a:ea typeface="Noto Sans JP Print" pitchFamily="34" charset="-122"/>
+                <a:cs typeface="Noto Sans JP Print" pitchFamily="34" charset="-120"/>
               </a:rPr>
               <a:t>脳が</a:t>
             </a:r>
@@ -8269,9 +8495,9 @@
                 <a:solidFill>
                   <a:schemeClr val="tx2"/>
                 </a:solidFill>
-                <a:latin typeface="BIZ UDPゴシック" pitchFamily="34" charset="0"/>
-                <a:ea typeface="BIZ UDPゴシック" pitchFamily="34" charset="-122"/>
-                <a:cs typeface="BIZ UDPゴシック" pitchFamily="34" charset="-120"/>
+                <a:latin typeface="Noto Sans JP Print" pitchFamily="34" charset="0"/>
+                <a:ea typeface="Noto Sans JP Print" pitchFamily="34" charset="-122"/>
+                <a:cs typeface="Noto Sans JP Print" pitchFamily="34" charset="-120"/>
               </a:rPr>
               <a:t>「苦しい」と感じる</a:t>
             </a:r>
@@ -8317,7 +8543,7 @@
           </a:xfrm>
           <a:prstGeom prst="roundRect">
             <a:avLst>
-              <a:gd name="adj" fmla="val 6667"/>
+              <a:gd name="adj" fmla="val 2778"/>
             </a:avLst>
           </a:prstGeom>
           <a:solidFill>
@@ -8360,9 +8586,9 @@
                 <a:solidFill>
                   <a:schemeClr val="accent1"/>
                 </a:solidFill>
-                <a:latin typeface="BIZ UDPゴシック" pitchFamily="34" charset="0"/>
-                <a:ea typeface="BIZ UDPゴシック" pitchFamily="34" charset="-122"/>
-                <a:cs typeface="BIZ UDPゴシック" pitchFamily="34" charset="-120"/>
+                <a:latin typeface="Noto Sans JP Print" pitchFamily="34" charset="0"/>
+                <a:ea typeface="Noto Sans JP Print" pitchFamily="34" charset="-122"/>
+                <a:cs typeface="Noto Sans JP Print" pitchFamily="34" charset="-120"/>
               </a:rPr>
               <a:t>ブレーキが</a:t>
             </a:r>
@@ -8377,9 +8603,9 @@
                 <a:solidFill>
                   <a:schemeClr val="accent1"/>
                 </a:solidFill>
-                <a:latin typeface="BIZ UDPゴシック" pitchFamily="34" charset="0"/>
-                <a:ea typeface="BIZ UDPゴシック" pitchFamily="34" charset="-122"/>
-                <a:cs typeface="BIZ UDPゴシック" pitchFamily="34" charset="-120"/>
+                <a:latin typeface="Noto Sans JP Print" pitchFamily="34" charset="0"/>
+                <a:ea typeface="Noto Sans JP Print" pitchFamily="34" charset="-122"/>
+                <a:cs typeface="Noto Sans JP Print" pitchFamily="34" charset="-120"/>
               </a:rPr>
               <a:t>かかる</a:t>
             </a:r>
@@ -8400,7 +8626,7 @@
           </a:xfrm>
           <a:prstGeom prst="roundRect">
             <a:avLst>
-              <a:gd name="adj" fmla="val 7059"/>
+              <a:gd name="adj" fmla="val 2941"/>
             </a:avLst>
           </a:prstGeom>
           <a:solidFill>
@@ -8443,9 +8669,9 @@
                 <a:solidFill>
                   <a:schemeClr val="accent2"/>
                 </a:solidFill>
-                <a:latin typeface="BIZ UDPゴシック" pitchFamily="34" charset="0"/>
-                <a:ea typeface="BIZ UDPゴシック" pitchFamily="34" charset="-122"/>
-                <a:cs typeface="BIZ UDPゴシック" pitchFamily="34" charset="-120"/>
+                <a:latin typeface="Noto Sans JP Print" pitchFamily="34" charset="0"/>
+                <a:ea typeface="Noto Sans JP Print" pitchFamily="34" charset="-122"/>
+                <a:cs typeface="Noto Sans JP Print" pitchFamily="34" charset="-120"/>
               </a:rPr>
               <a:t>感じ方は変えられる</a:t>
             </a:r>
@@ -8486,9 +8712,9 @@
                 <a:solidFill>
                   <a:schemeClr val="tx2"/>
                 </a:solidFill>
-                <a:latin typeface="BIZ UDPゴシック" pitchFamily="34" charset="0"/>
-                <a:ea typeface="BIZ UDPゴシック" pitchFamily="34" charset="-122"/>
-                <a:cs typeface="BIZ UDPゴシック" pitchFamily="34" charset="-120"/>
+                <a:latin typeface="Noto Sans JP Print" pitchFamily="34" charset="0"/>
+                <a:ea typeface="Noto Sans JP Print" pitchFamily="34" charset="-122"/>
+                <a:cs typeface="Noto Sans JP Print" pitchFamily="34" charset="-120"/>
               </a:rPr>
               <a:t>同じ心拍数でも、慣れると「まだ大丈夫」と感じる</a:t>
             </a:r>
@@ -8507,9 +8733,9 @@
                 <a:solidFill>
                   <a:schemeClr val="tx2"/>
                 </a:solidFill>
-                <a:latin typeface="BIZ UDPゴシック" pitchFamily="34" charset="0"/>
-                <a:ea typeface="BIZ UDPゴシック" pitchFamily="34" charset="-122"/>
-                <a:cs typeface="BIZ UDPゴシック" pitchFamily="34" charset="-120"/>
+                <a:latin typeface="Noto Sans JP Print" pitchFamily="34" charset="0"/>
+                <a:ea typeface="Noto Sans JP Print" pitchFamily="34" charset="-122"/>
+                <a:cs typeface="Noto Sans JP Print" pitchFamily="34" charset="-120"/>
               </a:rPr>
               <a:t>ゴールまでの見通しがあると、苦しさは軽くなる</a:t>
             </a:r>
@@ -8546,9 +8772,9 @@
                 <a:solidFill>
                   <a:schemeClr val="accent1"/>
                 </a:solidFill>
-                <a:latin typeface="BIZ UDPゴシック" pitchFamily="34" charset="0"/>
-                <a:ea typeface="BIZ UDPゴシック" pitchFamily="34" charset="-122"/>
-                <a:cs typeface="BIZ UDPゴシック" pitchFamily="34" charset="-120"/>
+                <a:latin typeface="Noto Sans JP Print" pitchFamily="34" charset="0"/>
+                <a:ea typeface="Noto Sans JP Print" pitchFamily="34" charset="-122"/>
+                <a:cs typeface="Noto Sans JP Print" pitchFamily="34" charset="-120"/>
               </a:rPr>
               <a:t>※胸の痛み・めまい・顔色の悪さは「本当の危険サイン」（→ 8章）</a:t>
             </a:r>
@@ -8586,8 +8812,11 @@
             <a:lvl1pPr>
               <a:defRPr sz="1100">
                 <a:solidFill>
-                  <a:srgbClr val="6B7A90"/>
-                </a:solidFill>
+                  <a:srgbClr val="7C828D"/>
+                </a:solidFill>
+                <a:latin typeface="Noto Sans JP Print Black"/>
+                <a:ea typeface="Noto Sans JP Print Black"/>
+                <a:cs typeface="Noto Sans JP Print Black"/>
               </a:defRPr>
             </a:lvl1pPr>
           </a:lstStyle>
@@ -8636,7 +8865,7 @@
         </p:nvSpPr>
         <p:spPr>
           <a:xfrm>
-            <a:off x="548640" y="320040"/>
+            <a:off x="548640" y="274320"/>
             <a:ext cx="7315200" cy="320040"/>
           </a:xfrm>
           <a:prstGeom prst="rect">
@@ -8674,8 +8903,8 @@
         </p:nvSpPr>
         <p:spPr>
           <a:xfrm>
-            <a:off x="548640" y="685800"/>
-            <a:ext cx="11064240" cy="1143000"/>
+            <a:off x="548640" y="594360"/>
+            <a:ext cx="11064240" cy="1325880"/>
           </a:xfrm>
           <a:prstGeom prst="rect">
             <a:avLst/>
@@ -8688,17 +8917,23 @@
           <a:lstStyle/>
           <a:p>
             <a:pPr algn="l" indent="0" marL="0">
-              <a:buNone/>
-            </a:pPr>
-            <a:r>
-              <a:rPr lang="en-US" sz="3000" b="1" dirty="0">
+              <a:lnSpc>
+                <a:spcPct val="90000"/>
+              </a:lnSpc>
+              <a:buNone/>
+            </a:pPr>
+            <a:r>
+              <a:rPr lang="en-US" sz="3600" dirty="0">
                 <a:solidFill>
                   <a:schemeClr val="tx2"/>
                 </a:solidFill>
+                <a:latin typeface="Noto Sans JP Print Black" pitchFamily="34" charset="0"/>
+                <a:ea typeface="Noto Sans JP Print Black" pitchFamily="34" charset="-122"/>
+                <a:cs typeface="Noto Sans JP Print Black" pitchFamily="34" charset="-120"/>
               </a:rPr>
               <a:t>「もう走れない」には2種類ある</a:t>
             </a:r>
-            <a:endParaRPr lang="en-US" sz="3000" dirty="0"/>
+            <a:endParaRPr lang="en-US" sz="3600" dirty="0"/>
           </a:p>
         </p:txBody>
       </p:sp>
@@ -8715,7 +8950,7 @@
           </a:xfrm>
           <a:prstGeom prst="roundRect">
             <a:avLst>
-              <a:gd name="adj" fmla="val 3333"/>
+              <a:gd name="adj" fmla="val 1389"/>
             </a:avLst>
           </a:prstGeom>
           <a:solidFill>
@@ -8783,9 +9018,9 @@
                 <a:solidFill>
                   <a:schemeClr val="bg1"/>
                 </a:solidFill>
-                <a:latin typeface="BIZ UDPゴシック" pitchFamily="34" charset="0"/>
-                <a:ea typeface="BIZ UDPゴシック" pitchFamily="34" charset="-122"/>
-                <a:cs typeface="BIZ UDPゴシック" pitchFamily="34" charset="-120"/>
+                <a:latin typeface="Noto Sans JP Print Black" pitchFamily="34" charset="0"/>
+                <a:ea typeface="Noto Sans JP Print Black" pitchFamily="34" charset="-122"/>
+                <a:cs typeface="Noto Sans JP Print Black" pitchFamily="34" charset="-120"/>
               </a:rPr>
               <a:t>1</a:t>
             </a:r>
@@ -8822,9 +9057,9 @@
                 <a:solidFill>
                   <a:schemeClr val="tx2"/>
                 </a:solidFill>
-                <a:latin typeface="BIZ UDPゴシック" pitchFamily="34" charset="0"/>
-                <a:ea typeface="BIZ UDPゴシック" pitchFamily="34" charset="-122"/>
-                <a:cs typeface="BIZ UDPゴシック" pitchFamily="34" charset="-120"/>
+                <a:latin typeface="Noto Sans JP Print" pitchFamily="34" charset="0"/>
+                <a:ea typeface="Noto Sans JP Print" pitchFamily="34" charset="-122"/>
+                <a:cs typeface="Noto Sans JP Print" pitchFamily="34" charset="-120"/>
               </a:rPr>
               <a:t>エネルギー切れ</a:t>
             </a:r>
@@ -8861,9 +9096,9 @@
                 <a:solidFill>
                   <a:schemeClr val="tx1"/>
                 </a:solidFill>
-                <a:latin typeface="BIZ UDPゴシック" pitchFamily="34" charset="0"/>
-                <a:ea typeface="BIZ UDPゴシック" pitchFamily="34" charset="-122"/>
-                <a:cs typeface="BIZ UDPゴシック" pitchFamily="34" charset="-120"/>
+                <a:latin typeface="Noto Sans JP Print" pitchFamily="34" charset="0"/>
+                <a:ea typeface="Noto Sans JP Print" pitchFamily="34" charset="-122"/>
+                <a:cs typeface="Noto Sans JP Print" pitchFamily="34" charset="-120"/>
               </a:rPr>
               <a:t>足が重くなり、動かなくなる</a:t>
             </a:r>
@@ -8884,9 +9119,9 @@
                 <a:solidFill>
                   <a:schemeClr val="tx1"/>
                 </a:solidFill>
-                <a:latin typeface="BIZ UDPゴシック" pitchFamily="34" charset="0"/>
-                <a:ea typeface="BIZ UDPゴシック" pitchFamily="34" charset="-122"/>
-                <a:cs typeface="BIZ UDPゴシック" pitchFamily="34" charset="-120"/>
+                <a:latin typeface="Noto Sans JP Print" pitchFamily="34" charset="0"/>
+                <a:ea typeface="Noto Sans JP Print" pitchFamily="34" charset="-122"/>
+                <a:cs typeface="Noto Sans JP Print" pitchFamily="34" charset="-120"/>
               </a:rPr>
               <a:t>小学生の数分間の持久走では、まず起こらない</a:t>
             </a:r>
@@ -8907,7 +9142,7 @@
           </a:xfrm>
           <a:prstGeom prst="roundRect">
             <a:avLst>
-              <a:gd name="adj" fmla="val 3333"/>
+              <a:gd name="adj" fmla="val 1389"/>
             </a:avLst>
           </a:prstGeom>
           <a:solidFill>
@@ -8975,9 +9210,9 @@
                 <a:solidFill>
                   <a:schemeClr val="bg1"/>
                 </a:solidFill>
-                <a:latin typeface="BIZ UDPゴシック" pitchFamily="34" charset="0"/>
-                <a:ea typeface="BIZ UDPゴシック" pitchFamily="34" charset="-122"/>
-                <a:cs typeface="BIZ UDPゴシック" pitchFamily="34" charset="-120"/>
+                <a:latin typeface="Noto Sans JP Print Black" pitchFamily="34" charset="0"/>
+                <a:ea typeface="Noto Sans JP Print Black" pitchFamily="34" charset="-122"/>
+                <a:cs typeface="Noto Sans JP Print Black" pitchFamily="34" charset="-120"/>
               </a:rPr>
               <a:t>2</a:t>
             </a:r>
@@ -9014,9 +9249,9 @@
                 <a:solidFill>
                   <a:schemeClr val="tx2"/>
                 </a:solidFill>
-                <a:latin typeface="BIZ UDPゴシック" pitchFamily="34" charset="0"/>
-                <a:ea typeface="BIZ UDPゴシック" pitchFamily="34" charset="-122"/>
-                <a:cs typeface="BIZ UDPゴシック" pitchFamily="34" charset="-120"/>
+                <a:latin typeface="Noto Sans JP Print" pitchFamily="34" charset="0"/>
+                <a:ea typeface="Noto Sans JP Print" pitchFamily="34" charset="-122"/>
+                <a:cs typeface="Noto Sans JP Print" pitchFamily="34" charset="-120"/>
               </a:rPr>
               <a:t>酸素不足（息切れ）</a:t>
             </a:r>
@@ -9053,9 +9288,9 @@
                 <a:solidFill>
                   <a:schemeClr val="tx1"/>
                 </a:solidFill>
-                <a:latin typeface="BIZ UDPゴシック" pitchFamily="34" charset="0"/>
-                <a:ea typeface="BIZ UDPゴシック" pitchFamily="34" charset="-122"/>
-                <a:cs typeface="BIZ UDPゴシック" pitchFamily="34" charset="-120"/>
+                <a:latin typeface="Noto Sans JP Print" pitchFamily="34" charset="0"/>
+                <a:ea typeface="Noto Sans JP Print" pitchFamily="34" charset="-122"/>
+                <a:cs typeface="Noto Sans JP Print" pitchFamily="34" charset="-120"/>
               </a:rPr>
               <a:t>呼吸・心拍数が上がりすぎて</a:t>
             </a:r>
@@ -9070,9 +9305,9 @@
                 <a:solidFill>
                   <a:schemeClr val="tx1"/>
                 </a:solidFill>
-                <a:latin typeface="BIZ UDPゴシック" pitchFamily="34" charset="0"/>
-                <a:ea typeface="BIZ UDPゴシック" pitchFamily="34" charset="-122"/>
-                <a:cs typeface="BIZ UDPゴシック" pitchFamily="34" charset="-120"/>
+                <a:latin typeface="Noto Sans JP Print" pitchFamily="34" charset="0"/>
+                <a:ea typeface="Noto Sans JP Print" pitchFamily="34" charset="-122"/>
+                <a:cs typeface="Noto Sans JP Print" pitchFamily="34" charset="-120"/>
               </a:rPr>
               <a:t>「苦しくてもうダメ」となる</a:t>
             </a:r>
@@ -9093,9 +9328,9 @@
                 <a:solidFill>
                   <a:schemeClr val="tx1"/>
                 </a:solidFill>
-                <a:latin typeface="BIZ UDPゴシック" pitchFamily="34" charset="0"/>
-                <a:ea typeface="BIZ UDPゴシック" pitchFamily="34" charset="-122"/>
-                <a:cs typeface="BIZ UDPゴシック" pitchFamily="34" charset="-120"/>
+                <a:latin typeface="Noto Sans JP Print" pitchFamily="34" charset="0"/>
+                <a:ea typeface="Noto Sans JP Print" pitchFamily="34" charset="-122"/>
+                <a:cs typeface="Noto Sans JP Print" pitchFamily="34" charset="-120"/>
               </a:rPr>
               <a:t>ペースを落とせば、また走れる</a:t>
             </a:r>
@@ -9132,9 +9367,9 @@
                 <a:solidFill>
                   <a:schemeClr val="tx2"/>
                 </a:solidFill>
-                <a:latin typeface="BIZ UDPゴシック" pitchFamily="34" charset="0"/>
-                <a:ea typeface="BIZ UDPゴシック" pitchFamily="34" charset="-122"/>
-                <a:cs typeface="BIZ UDPゴシック" pitchFamily="34" charset="-120"/>
+                <a:latin typeface="Noto Sans JP Print" pitchFamily="34" charset="0"/>
+                <a:ea typeface="Noto Sans JP Print" pitchFamily="34" charset="-122"/>
+                <a:cs typeface="Noto Sans JP Print" pitchFamily="34" charset="-120"/>
               </a:rPr>
               <a:t>小学生の「もう走れない」は、ほとんどが「ペースが速すぎる」</a:t>
             </a:r>
@@ -9172,8 +9407,11 @@
             <a:lvl1pPr>
               <a:defRPr sz="1100">
                 <a:solidFill>
-                  <a:srgbClr val="6B7A90"/>
-                </a:solidFill>
+                  <a:srgbClr val="7C828D"/>
+                </a:solidFill>
+                <a:latin typeface="Noto Sans JP Print Black"/>
+                <a:ea typeface="Noto Sans JP Print Black"/>
+                <a:cs typeface="Noto Sans JP Print Black"/>
               </a:defRPr>
             </a:lvl1pPr>
           </a:lstStyle>
@@ -9222,7 +9460,7 @@
         </p:nvSpPr>
         <p:spPr>
           <a:xfrm>
-            <a:off x="548640" y="320040"/>
+            <a:off x="548640" y="274320"/>
             <a:ext cx="7315200" cy="320040"/>
           </a:xfrm>
           <a:prstGeom prst="rect">
@@ -9260,8 +9498,8 @@
         </p:nvSpPr>
         <p:spPr>
           <a:xfrm>
-            <a:off x="548640" y="685800"/>
-            <a:ext cx="11064240" cy="1143000"/>
+            <a:off x="548640" y="594360"/>
+            <a:ext cx="11064240" cy="1325880"/>
           </a:xfrm>
           <a:prstGeom prst="rect">
             <a:avLst/>
@@ -9274,17 +9512,43 @@
           <a:lstStyle/>
           <a:p>
             <a:pPr algn="l" indent="0" marL="0">
-              <a:buNone/>
-            </a:pPr>
-            <a:r>
-              <a:rPr lang="en-US" sz="3000" b="1" dirty="0">
+              <a:lnSpc>
+                <a:spcPct val="90000"/>
+              </a:lnSpc>
+              <a:buNone/>
+            </a:pPr>
+            <a:r>
+              <a:rPr lang="en-US" sz="3600" dirty="0">
                 <a:solidFill>
                   <a:schemeClr val="tx2"/>
                 </a:solidFill>
-              </a:rPr>
-              <a:t>子どもは本来、大人より疲れにくく、回復も早い</a:t>
-            </a:r>
-            <a:endParaRPr lang="en-US" sz="3000" dirty="0"/>
+                <a:latin typeface="Noto Sans JP Print Black" pitchFamily="34" charset="0"/>
+                <a:ea typeface="Noto Sans JP Print Black" pitchFamily="34" charset="-122"/>
+                <a:cs typeface="Noto Sans JP Print Black" pitchFamily="34" charset="-120"/>
+              </a:rPr>
+              <a:t>子どもは本来、</a:t>
+            </a:r>
+            <a:endParaRPr lang="en-US" sz="3600" dirty="0"/>
+          </a:p>
+          <a:p>
+            <a:pPr algn="l" indent="0" marL="0">
+              <a:lnSpc>
+                <a:spcPct val="90000"/>
+              </a:lnSpc>
+              <a:buNone/>
+            </a:pPr>
+            <a:r>
+              <a:rPr lang="en-US" sz="3600" dirty="0">
+                <a:solidFill>
+                  <a:schemeClr val="tx2"/>
+                </a:solidFill>
+                <a:latin typeface="Noto Sans JP Print Black" pitchFamily="34" charset="0"/>
+                <a:ea typeface="Noto Sans JP Print Black" pitchFamily="34" charset="-122"/>
+                <a:cs typeface="Noto Sans JP Print Black" pitchFamily="34" charset="-120"/>
+              </a:rPr>
+              <a:t>大人より疲れにくく、回復も早い</a:t>
+            </a:r>
+            <a:endParaRPr lang="en-US" sz="3600" dirty="0"/>
           </a:p>
         </p:txBody>
       </p:sp>
@@ -9301,7 +9565,7 @@
           </a:xfrm>
           <a:prstGeom prst="roundRect">
             <a:avLst>
-              <a:gd name="adj" fmla="val 2927"/>
+              <a:gd name="adj" fmla="val 1220"/>
             </a:avLst>
           </a:prstGeom>
           <a:solidFill>
@@ -9344,9 +9608,9 @@
                 <a:solidFill>
                   <a:schemeClr val="tx2"/>
                 </a:solidFill>
-                <a:latin typeface="BIZ UDPゴシック" pitchFamily="34" charset="0"/>
-                <a:ea typeface="BIZ UDPゴシック" pitchFamily="34" charset="-122"/>
-                <a:cs typeface="BIZ UDPゴシック" pitchFamily="34" charset="-120"/>
+                <a:latin typeface="Noto Sans JP Print" pitchFamily="34" charset="0"/>
+                <a:ea typeface="Noto Sans JP Print" pitchFamily="34" charset="-122"/>
+                <a:cs typeface="Noto Sans JP Print" pitchFamily="34" charset="-120"/>
               </a:rPr>
               <a:t>研究でわかっていること</a:t>
             </a:r>
@@ -9387,9 +9651,9 @@
                 <a:solidFill>
                   <a:schemeClr val="tx1"/>
                 </a:solidFill>
-                <a:latin typeface="BIZ UDPゴシック" pitchFamily="34" charset="0"/>
-                <a:ea typeface="BIZ UDPゴシック" pitchFamily="34" charset="-122"/>
-                <a:cs typeface="BIZ UDPゴシック" pitchFamily="34" charset="-120"/>
+                <a:latin typeface="Noto Sans JP Print" pitchFamily="34" charset="0"/>
+                <a:ea typeface="Noto Sans JP Print" pitchFamily="34" charset="-122"/>
+                <a:cs typeface="Noto Sans JP Print" pitchFamily="34" charset="-120"/>
               </a:rPr>
               <a:t>酸素を使う仕組みに頼る割合が高い</a:t>
             </a:r>
@@ -9408,9 +9672,9 @@
                 <a:solidFill>
                   <a:schemeClr val="tx1"/>
                 </a:solidFill>
-                <a:latin typeface="BIZ UDPゴシック" pitchFamily="34" charset="0"/>
-                <a:ea typeface="BIZ UDPゴシック" pitchFamily="34" charset="-122"/>
-                <a:cs typeface="BIZ UDPゴシック" pitchFamily="34" charset="-120"/>
+                <a:latin typeface="Noto Sans JP Print" pitchFamily="34" charset="0"/>
+                <a:ea typeface="Noto Sans JP Print" pitchFamily="34" charset="-122"/>
+                <a:cs typeface="Noto Sans JP Print" pitchFamily="34" charset="-120"/>
               </a:rPr>
               <a:t>大人より疲れにくい</a:t>
             </a:r>
@@ -9429,9 +9693,9 @@
                 <a:solidFill>
                   <a:schemeClr val="tx1"/>
                 </a:solidFill>
-                <a:latin typeface="BIZ UDPゴシック" pitchFamily="34" charset="0"/>
-                <a:ea typeface="BIZ UDPゴシック" pitchFamily="34" charset="-122"/>
-                <a:cs typeface="BIZ UDPゴシック" pitchFamily="34" charset="-120"/>
+                <a:latin typeface="Noto Sans JP Print" pitchFamily="34" charset="0"/>
+                <a:ea typeface="Noto Sans JP Print" pitchFamily="34" charset="-122"/>
+                <a:cs typeface="Noto Sans JP Print" pitchFamily="34" charset="-120"/>
               </a:rPr>
               <a:t>運動後の回復が早い</a:t>
             </a:r>
@@ -9452,7 +9716,7 @@
           </a:xfrm>
           <a:prstGeom prst="roundRect">
             <a:avLst>
-              <a:gd name="adj" fmla="val 2927"/>
+              <a:gd name="adj" fmla="val 1220"/>
             </a:avLst>
           </a:prstGeom>
           <a:solidFill>
@@ -9495,9 +9759,9 @@
                 <a:solidFill>
                   <a:schemeClr val="accent5"/>
                 </a:solidFill>
-                <a:latin typeface="BIZ UDPゴシック" pitchFamily="34" charset="0"/>
-                <a:ea typeface="BIZ UDPゴシック" pitchFamily="34" charset="-122"/>
-                <a:cs typeface="BIZ UDPゴシック" pitchFamily="34" charset="-120"/>
+                <a:latin typeface="Noto Sans JP Print" pitchFamily="34" charset="0"/>
+                <a:ea typeface="Noto Sans JP Print" pitchFamily="34" charset="-122"/>
+                <a:cs typeface="Noto Sans JP Print" pitchFamily="34" charset="-120"/>
               </a:rPr>
               <a:t>たとえば休み時間の</a:t>
             </a:r>
@@ -9534,9 +9798,9 @@
                 <a:solidFill>
                   <a:schemeClr val="bg1"/>
                 </a:solidFill>
-                <a:latin typeface="BIZ UDPゴシック" pitchFamily="34" charset="0"/>
-                <a:ea typeface="BIZ UDPゴシック" pitchFamily="34" charset="-122"/>
-                <a:cs typeface="BIZ UDPゴシック" pitchFamily="34" charset="-120"/>
+                <a:latin typeface="Noto Sans JP Print" pitchFamily="34" charset="0"/>
+                <a:ea typeface="Noto Sans JP Print" pitchFamily="34" charset="-122"/>
+                <a:cs typeface="Noto Sans JP Print" pitchFamily="34" charset="-120"/>
               </a:rPr>
               <a:t>鬼ごっこ</a:t>
             </a:r>
@@ -9573,9 +9837,9 @@
                 <a:solidFill>
                   <a:schemeClr val="bg1"/>
                 </a:solidFill>
-                <a:latin typeface="BIZ UDPゴシック" pitchFamily="34" charset="0"/>
-                <a:ea typeface="BIZ UDPゴシック" pitchFamily="34" charset="-122"/>
-                <a:cs typeface="BIZ UDPゴシック" pitchFamily="34" charset="-120"/>
+                <a:latin typeface="Noto Sans JP Print" pitchFamily="34" charset="0"/>
+                <a:ea typeface="Noto Sans JP Print" pitchFamily="34" charset="-122"/>
+                <a:cs typeface="Noto Sans JP Print" pitchFamily="34" charset="-120"/>
               </a:rPr>
               <a:t>20分走り回っても平気。</a:t>
             </a:r>
@@ -9590,9 +9854,9 @@
                 <a:solidFill>
                   <a:schemeClr val="bg1"/>
                 </a:solidFill>
-                <a:latin typeface="BIZ UDPゴシック" pitchFamily="34" charset="0"/>
-                <a:ea typeface="BIZ UDPゴシック" pitchFamily="34" charset="-122"/>
-                <a:cs typeface="BIZ UDPゴシック" pitchFamily="34" charset="-120"/>
+                <a:latin typeface="Noto Sans JP Print" pitchFamily="34" charset="0"/>
+                <a:ea typeface="Noto Sans JP Print" pitchFamily="34" charset="-122"/>
+                <a:cs typeface="Noto Sans JP Print" pitchFamily="34" charset="-120"/>
               </a:rPr>
               <a:t>苦手にしているのは、</a:t>
             </a:r>
@@ -9607,9 +9871,9 @@
                 <a:solidFill>
                   <a:schemeClr val="bg1"/>
                 </a:solidFill>
-                <a:latin typeface="BIZ UDPゴシック" pitchFamily="34" charset="0"/>
-                <a:ea typeface="BIZ UDPゴシック" pitchFamily="34" charset="-122"/>
-                <a:cs typeface="BIZ UDPゴシック" pitchFamily="34" charset="-120"/>
+                <a:latin typeface="Noto Sans JP Print" pitchFamily="34" charset="0"/>
+                <a:ea typeface="Noto Sans JP Print" pitchFamily="34" charset="-122"/>
+                <a:cs typeface="Noto Sans JP Print" pitchFamily="34" charset="-120"/>
               </a:rPr>
               <a:t>走らせ方かもしれない</a:t>
             </a:r>
@@ -9646,9 +9910,9 @@
                 <a:solidFill>
                   <a:schemeClr val="accent4"/>
                 </a:solidFill>
-                <a:latin typeface="BIZ UDPゴシック" pitchFamily="34" charset="0"/>
-                <a:ea typeface="BIZ UDPゴシック" pitchFamily="34" charset="-122"/>
-                <a:cs typeface="BIZ UDPゴシック" pitchFamily="34" charset="-120"/>
+                <a:latin typeface="Noto Sans JP Print" pitchFamily="34" charset="0"/>
+                <a:ea typeface="Noto Sans JP Print" pitchFamily="34" charset="-122"/>
+                <a:cs typeface="Noto Sans JP Print" pitchFamily="34" charset="-120"/>
               </a:rPr>
               <a:t>出典：Birat et al. (2018) Frontiers in Physiology ほか</a:t>
             </a:r>
@@ -9686,8 +9950,11 @@
             <a:lvl1pPr>
               <a:defRPr sz="1100">
                 <a:solidFill>
-                  <a:srgbClr val="6B7A90"/>
-                </a:solidFill>
+                  <a:srgbClr val="7C828D"/>
+                </a:solidFill>
+                <a:latin typeface="Noto Sans JP Print Black"/>
+                <a:ea typeface="Noto Sans JP Print Black"/>
+                <a:cs typeface="Noto Sans JP Print Black"/>
               </a:defRPr>
             </a:lvl1pPr>
           </a:lstStyle>
@@ -9736,7 +10003,7 @@
         </p:nvSpPr>
         <p:spPr>
           <a:xfrm>
-            <a:off x="548640" y="320040"/>
+            <a:off x="548640" y="274320"/>
             <a:ext cx="7315200" cy="320040"/>
           </a:xfrm>
           <a:prstGeom prst="rect">
@@ -9774,8 +10041,8 @@
         </p:nvSpPr>
         <p:spPr>
           <a:xfrm>
-            <a:off x="548640" y="685800"/>
-            <a:ext cx="11064240" cy="1143000"/>
+            <a:off x="548640" y="594360"/>
+            <a:ext cx="11064240" cy="1325880"/>
           </a:xfrm>
           <a:prstGeom prst="rect">
             <a:avLst/>
@@ -9788,17 +10055,23 @@
           <a:lstStyle/>
           <a:p>
             <a:pPr algn="l" indent="0" marL="0">
-              <a:buNone/>
-            </a:pPr>
-            <a:r>
-              <a:rPr lang="en-US" sz="3000" b="1" dirty="0">
+              <a:lnSpc>
+                <a:spcPct val="90000"/>
+              </a:lnSpc>
+              <a:buNone/>
+            </a:pPr>
+            <a:r>
+              <a:rPr lang="en-US" sz="3600" dirty="0">
                 <a:solidFill>
                   <a:schemeClr val="tx2"/>
                 </a:solidFill>
+                <a:latin typeface="Noto Sans JP Print Black" pitchFamily="34" charset="0"/>
+                <a:ea typeface="Noto Sans JP Print Black" pitchFamily="34" charset="-122"/>
+                <a:cs typeface="Noto Sans JP Print Black" pitchFamily="34" charset="-120"/>
               </a:rPr>
               <a:t>持続する力を高める方法は、3つある</a:t>
             </a:r>
-            <a:endParaRPr lang="en-US" sz="3000" dirty="0"/>
+            <a:endParaRPr lang="en-US" sz="3600" dirty="0"/>
           </a:p>
         </p:txBody>
       </p:sp>
@@ -9815,7 +10088,7 @@
           </a:xfrm>
           <a:prstGeom prst="roundRect">
             <a:avLst>
-              <a:gd name="adj" fmla="val 3117"/>
+              <a:gd name="adj" fmla="val 1299"/>
             </a:avLst>
           </a:prstGeom>
           <a:solidFill>
@@ -9883,9 +10156,9 @@
                 <a:solidFill>
                   <a:schemeClr val="bg1"/>
                 </a:solidFill>
-                <a:latin typeface="BIZ UDPゴシック" pitchFamily="34" charset="0"/>
-                <a:ea typeface="BIZ UDPゴシック" pitchFamily="34" charset="-122"/>
-                <a:cs typeface="BIZ UDPゴシック" pitchFamily="34" charset="-120"/>
+                <a:latin typeface="Noto Sans JP Print Black" pitchFamily="34" charset="0"/>
+                <a:ea typeface="Noto Sans JP Print Black" pitchFamily="34" charset="-122"/>
+                <a:cs typeface="Noto Sans JP Print Black" pitchFamily="34" charset="-120"/>
               </a:rPr>
               <a:t>1</a:t>
             </a:r>
@@ -9922,9 +10195,9 @@
                 <a:solidFill>
                   <a:schemeClr val="tx2"/>
                 </a:solidFill>
-                <a:latin typeface="BIZ UDPゴシック" pitchFamily="34" charset="0"/>
-                <a:ea typeface="BIZ UDPゴシック" pitchFamily="34" charset="-122"/>
-                <a:cs typeface="BIZ UDPゴシック" pitchFamily="34" charset="-120"/>
+                <a:latin typeface="Noto Sans JP Print" pitchFamily="34" charset="0"/>
+                <a:ea typeface="Noto Sans JP Print" pitchFamily="34" charset="-122"/>
+                <a:cs typeface="Noto Sans JP Print" pitchFamily="34" charset="-120"/>
               </a:rPr>
               <a:t>心拍数を</a:t>
             </a:r>
@@ -9939,9 +10212,9 @@
                 <a:solidFill>
                   <a:schemeClr val="tx2"/>
                 </a:solidFill>
-                <a:latin typeface="BIZ UDPゴシック" pitchFamily="34" charset="0"/>
-                <a:ea typeface="BIZ UDPゴシック" pitchFamily="34" charset="-122"/>
-                <a:cs typeface="BIZ UDPゴシック" pitchFamily="34" charset="-120"/>
+                <a:latin typeface="Noto Sans JP Print" pitchFamily="34" charset="0"/>
+                <a:ea typeface="Noto Sans JP Print" pitchFamily="34" charset="-122"/>
+                <a:cs typeface="Noto Sans JP Print" pitchFamily="34" charset="-120"/>
               </a:rPr>
               <a:t>上がりにくくする</a:t>
             </a:r>
@@ -9978,9 +10251,9 @@
                 <a:solidFill>
                   <a:schemeClr val="tx1"/>
                 </a:solidFill>
-                <a:latin typeface="BIZ UDPゴシック" pitchFamily="34" charset="0"/>
-                <a:ea typeface="BIZ UDPゴシック" pitchFamily="34" charset="-122"/>
-                <a:cs typeface="BIZ UDPゴシック" pitchFamily="34" charset="-120"/>
+                <a:latin typeface="Noto Sans JP Print" pitchFamily="34" charset="0"/>
+                <a:ea typeface="Noto Sans JP Print" pitchFamily="34" charset="-122"/>
+                <a:cs typeface="Noto Sans JP Print" pitchFamily="34" charset="-120"/>
               </a:rPr>
               <a:t>心臓・肺を鍛える</a:t>
             </a:r>
@@ -9995,9 +10268,9 @@
                 <a:solidFill>
                   <a:schemeClr val="tx1"/>
                 </a:solidFill>
-                <a:latin typeface="BIZ UDPゴシック" pitchFamily="34" charset="0"/>
-                <a:ea typeface="BIZ UDPゴシック" pitchFamily="34" charset="-122"/>
-                <a:cs typeface="BIZ UDPゴシック" pitchFamily="34" charset="-120"/>
+                <a:latin typeface="Noto Sans JP Print" pitchFamily="34" charset="0"/>
+                <a:ea typeface="Noto Sans JP Print" pitchFamily="34" charset="-122"/>
+                <a:cs typeface="Noto Sans JP Print" pitchFamily="34" charset="-120"/>
               </a:rPr>
               <a:t>例：インターバル</a:t>
             </a:r>
@@ -10018,7 +10291,7 @@
           </a:xfrm>
           <a:prstGeom prst="roundRect">
             <a:avLst>
-              <a:gd name="adj" fmla="val 20000"/>
+              <a:gd name="adj" fmla="val 8333"/>
             </a:avLst>
           </a:prstGeom>
           <a:solidFill>
@@ -10061,9 +10334,9 @@
                 <a:solidFill>
                   <a:schemeClr val="accent1"/>
                 </a:solidFill>
-                <a:latin typeface="BIZ UDPゴシック" pitchFamily="34" charset="0"/>
-                <a:ea typeface="BIZ UDPゴシック" pitchFamily="34" charset="-122"/>
-                <a:cs typeface="BIZ UDPゴシック" pitchFamily="34" charset="-120"/>
+                <a:latin typeface="Noto Sans JP Print" pitchFamily="34" charset="0"/>
+                <a:ea typeface="Noto Sans JP Print" pitchFamily="34" charset="-122"/>
+                <a:cs typeface="Noto Sans JP Print" pitchFamily="34" charset="-120"/>
               </a:rPr>
               <a:t>負荷：強い</a:t>
             </a:r>
@@ -10084,7 +10357,7 @@
           </a:xfrm>
           <a:prstGeom prst="roundRect">
             <a:avLst>
-              <a:gd name="adj" fmla="val 3117"/>
+              <a:gd name="adj" fmla="val 1299"/>
             </a:avLst>
           </a:prstGeom>
           <a:solidFill>
@@ -10152,9 +10425,9 @@
                 <a:solidFill>
                   <a:schemeClr val="bg1"/>
                 </a:solidFill>
-                <a:latin typeface="BIZ UDPゴシック" pitchFamily="34" charset="0"/>
-                <a:ea typeface="BIZ UDPゴシック" pitchFamily="34" charset="-122"/>
-                <a:cs typeface="BIZ UDPゴシック" pitchFamily="34" charset="-120"/>
+                <a:latin typeface="Noto Sans JP Print Black" pitchFamily="34" charset="0"/>
+                <a:ea typeface="Noto Sans JP Print Black" pitchFamily="34" charset="-122"/>
+                <a:cs typeface="Noto Sans JP Print Black" pitchFamily="34" charset="-120"/>
               </a:rPr>
               <a:t>2</a:t>
             </a:r>
@@ -10191,9 +10464,9 @@
                 <a:solidFill>
                   <a:schemeClr val="tx2"/>
                 </a:solidFill>
-                <a:latin typeface="BIZ UDPゴシック" pitchFamily="34" charset="0"/>
-                <a:ea typeface="BIZ UDPゴシック" pitchFamily="34" charset="-122"/>
-                <a:cs typeface="BIZ UDPゴシック" pitchFamily="34" charset="-120"/>
+                <a:latin typeface="Noto Sans JP Print" pitchFamily="34" charset="0"/>
+                <a:ea typeface="Noto Sans JP Print" pitchFamily="34" charset="-122"/>
+                <a:cs typeface="Noto Sans JP Print" pitchFamily="34" charset="-120"/>
               </a:rPr>
               <a:t>上がった心拍数に</a:t>
             </a:r>
@@ -10208,9 +10481,9 @@
                 <a:solidFill>
                   <a:schemeClr val="tx2"/>
                 </a:solidFill>
-                <a:latin typeface="BIZ UDPゴシック" pitchFamily="34" charset="0"/>
-                <a:ea typeface="BIZ UDPゴシック" pitchFamily="34" charset="-122"/>
-                <a:cs typeface="BIZ UDPゴシック" pitchFamily="34" charset="-120"/>
+                <a:latin typeface="Noto Sans JP Print" pitchFamily="34" charset="0"/>
+                <a:ea typeface="Noto Sans JP Print" pitchFamily="34" charset="-122"/>
+                <a:cs typeface="Noto Sans JP Print" pitchFamily="34" charset="-120"/>
               </a:rPr>
               <a:t>脳を慣らす</a:t>
             </a:r>
@@ -10247,9 +10520,9 @@
                 <a:solidFill>
                   <a:schemeClr val="tx1"/>
                 </a:solidFill>
-                <a:latin typeface="BIZ UDPゴシック" pitchFamily="34" charset="0"/>
-                <a:ea typeface="BIZ UDPゴシック" pitchFamily="34" charset="-122"/>
-                <a:cs typeface="BIZ UDPゴシック" pitchFamily="34" charset="-120"/>
+                <a:latin typeface="Noto Sans JP Print" pitchFamily="34" charset="0"/>
+                <a:ea typeface="Noto Sans JP Print" pitchFamily="34" charset="-122"/>
+                <a:cs typeface="Noto Sans JP Print" pitchFamily="34" charset="-120"/>
               </a:rPr>
               <a:t>ゆっくり長く動き続ける</a:t>
             </a:r>
@@ -10264,9 +10537,9 @@
                 <a:solidFill>
                   <a:schemeClr val="tx1"/>
                 </a:solidFill>
-                <a:latin typeface="BIZ UDPゴシック" pitchFamily="34" charset="0"/>
-                <a:ea typeface="BIZ UDPゴシック" pitchFamily="34" charset="-122"/>
-                <a:cs typeface="BIZ UDPゴシック" pitchFamily="34" charset="-120"/>
+                <a:latin typeface="Noto Sans JP Print" pitchFamily="34" charset="0"/>
+                <a:ea typeface="Noto Sans JP Print" pitchFamily="34" charset="-122"/>
+                <a:cs typeface="Noto Sans JP Print" pitchFamily="34" charset="-120"/>
               </a:rPr>
               <a:t>例：ジョギング</a:t>
             </a:r>
@@ -10287,7 +10560,7 @@
           </a:xfrm>
           <a:prstGeom prst="roundRect">
             <a:avLst>
-              <a:gd name="adj" fmla="val 20000"/>
+              <a:gd name="adj" fmla="val 8333"/>
             </a:avLst>
           </a:prstGeom>
           <a:solidFill>
@@ -10330,9 +10603,9 @@
                 <a:solidFill>
                   <a:schemeClr val="accent2"/>
                 </a:solidFill>
-                <a:latin typeface="BIZ UDPゴシック" pitchFamily="34" charset="0"/>
-                <a:ea typeface="BIZ UDPゴシック" pitchFamily="34" charset="-122"/>
-                <a:cs typeface="BIZ UDPゴシック" pitchFamily="34" charset="-120"/>
+                <a:latin typeface="Noto Sans JP Print" pitchFamily="34" charset="0"/>
+                <a:ea typeface="Noto Sans JP Print" pitchFamily="34" charset="-122"/>
+                <a:cs typeface="Noto Sans JP Print" pitchFamily="34" charset="-120"/>
               </a:rPr>
               <a:t>負荷：弱い〜中くらい</a:t>
             </a:r>
@@ -10353,7 +10626,7 @@
           </a:xfrm>
           <a:prstGeom prst="roundRect">
             <a:avLst>
-              <a:gd name="adj" fmla="val 3117"/>
+              <a:gd name="adj" fmla="val 1299"/>
             </a:avLst>
           </a:prstGeom>
           <a:solidFill>
@@ -10421,9 +10694,9 @@
                 <a:solidFill>
                   <a:schemeClr val="bg1"/>
                 </a:solidFill>
-                <a:latin typeface="BIZ UDPゴシック" pitchFamily="34" charset="0"/>
-                <a:ea typeface="BIZ UDPゴシック" pitchFamily="34" charset="-122"/>
-                <a:cs typeface="BIZ UDPゴシック" pitchFamily="34" charset="-120"/>
+                <a:latin typeface="Noto Sans JP Print Black" pitchFamily="34" charset="0"/>
+                <a:ea typeface="Noto Sans JP Print Black" pitchFamily="34" charset="-122"/>
+                <a:cs typeface="Noto Sans JP Print Black" pitchFamily="34" charset="-120"/>
               </a:rPr>
               <a:t>3</a:t>
             </a:r>
@@ -10460,9 +10733,9 @@
                 <a:solidFill>
                   <a:schemeClr val="tx2"/>
                 </a:solidFill>
-                <a:latin typeface="BIZ UDPゴシック" pitchFamily="34" charset="0"/>
-                <a:ea typeface="BIZ UDPゴシック" pitchFamily="34" charset="-122"/>
-                <a:cs typeface="BIZ UDPゴシック" pitchFamily="34" charset="-120"/>
+                <a:latin typeface="Noto Sans JP Print" pitchFamily="34" charset="0"/>
+                <a:ea typeface="Noto Sans JP Print" pitchFamily="34" charset="-122"/>
+                <a:cs typeface="Noto Sans JP Print" pitchFamily="34" charset="-120"/>
               </a:rPr>
               <a:t>苦しさに</a:t>
             </a:r>
@@ -10477,9 +10750,9 @@
                 <a:solidFill>
                   <a:schemeClr val="tx2"/>
                 </a:solidFill>
-                <a:latin typeface="BIZ UDPゴシック" pitchFamily="34" charset="0"/>
-                <a:ea typeface="BIZ UDPゴシック" pitchFamily="34" charset="-122"/>
-                <a:cs typeface="BIZ UDPゴシック" pitchFamily="34" charset="-120"/>
+                <a:latin typeface="Noto Sans JP Print" pitchFamily="34" charset="0"/>
+                <a:ea typeface="Noto Sans JP Print" pitchFamily="34" charset="-122"/>
+                <a:cs typeface="Noto Sans JP Print" pitchFamily="34" charset="-120"/>
               </a:rPr>
               <a:t>耐えて走る</a:t>
             </a:r>
@@ -10516,9 +10789,9 @@
                 <a:solidFill>
                   <a:schemeClr val="tx1"/>
                 </a:solidFill>
-                <a:latin typeface="BIZ UDPゴシック" pitchFamily="34" charset="0"/>
-                <a:ea typeface="BIZ UDPゴシック" pitchFamily="34" charset="-122"/>
-                <a:cs typeface="BIZ UDPゴシック" pitchFamily="34" charset="-120"/>
+                <a:latin typeface="Noto Sans JP Print" pitchFamily="34" charset="0"/>
+                <a:ea typeface="Noto Sans JP Print" pitchFamily="34" charset="-122"/>
+                <a:cs typeface="Noto Sans JP Print" pitchFamily="34" charset="-120"/>
               </a:rPr>
               <a:t>きつい状態で走る</a:t>
             </a:r>
@@ -10533,9 +10806,9 @@
                 <a:solidFill>
                   <a:schemeClr val="tx1"/>
                 </a:solidFill>
-                <a:latin typeface="BIZ UDPゴシック" pitchFamily="34" charset="0"/>
-                <a:ea typeface="BIZ UDPゴシック" pitchFamily="34" charset="-122"/>
-                <a:cs typeface="BIZ UDPゴシック" pitchFamily="34" charset="-120"/>
+                <a:latin typeface="Noto Sans JP Print" pitchFamily="34" charset="0"/>
+                <a:ea typeface="Noto Sans JP Print" pitchFamily="34" charset="-122"/>
+                <a:cs typeface="Noto Sans JP Print" pitchFamily="34" charset="-120"/>
               </a:rPr>
               <a:t>例：タイムトライアル</a:t>
             </a:r>
@@ -10556,7 +10829,7 @@
           </a:xfrm>
           <a:prstGeom prst="roundRect">
             <a:avLst>
-              <a:gd name="adj" fmla="val 20000"/>
+              <a:gd name="adj" fmla="val 8333"/>
             </a:avLst>
           </a:prstGeom>
           <a:solidFill>
@@ -10599,9 +10872,9 @@
                 <a:solidFill>
                   <a:schemeClr val="accent1"/>
                 </a:solidFill>
-                <a:latin typeface="BIZ UDPゴシック" pitchFamily="34" charset="0"/>
-                <a:ea typeface="BIZ UDPゴシック" pitchFamily="34" charset="-122"/>
-                <a:cs typeface="BIZ UDPゴシック" pitchFamily="34" charset="-120"/>
+                <a:latin typeface="Noto Sans JP Print" pitchFamily="34" charset="0"/>
+                <a:ea typeface="Noto Sans JP Print" pitchFamily="34" charset="-122"/>
+                <a:cs typeface="Noto Sans JP Print" pitchFamily="34" charset="-120"/>
               </a:rPr>
               <a:t>負荷：強い</a:t>
             </a:r>
@@ -10639,8 +10912,11 @@
             <a:lvl1pPr>
               <a:defRPr sz="1100">
                 <a:solidFill>
-                  <a:srgbClr val="6B7A90"/>
-                </a:solidFill>
+                  <a:srgbClr val="7C828D"/>
+                </a:solidFill>
+                <a:latin typeface="Noto Sans JP Print Black"/>
+                <a:ea typeface="Noto Sans JP Print Black"/>
+                <a:cs typeface="Noto Sans JP Print Black"/>
               </a:defRPr>
             </a:lvl1pPr>
           </a:lstStyle>
@@ -10689,7 +10965,7 @@
         </p:nvSpPr>
         <p:spPr>
           <a:xfrm>
-            <a:off x="548640" y="320040"/>
+            <a:off x="548640" y="274320"/>
             <a:ext cx="7315200" cy="320040"/>
           </a:xfrm>
           <a:prstGeom prst="rect">
@@ -10727,8 +11003,8 @@
         </p:nvSpPr>
         <p:spPr>
           <a:xfrm>
-            <a:off x="548640" y="685800"/>
-            <a:ext cx="11064240" cy="1143000"/>
+            <a:off x="548640" y="594360"/>
+            <a:ext cx="11064240" cy="1325880"/>
           </a:xfrm>
           <a:prstGeom prst="rect">
             <a:avLst/>
@@ -10741,17 +11017,43 @@
           <a:lstStyle/>
           <a:p>
             <a:pPr algn="l" indent="0" marL="0">
-              <a:buNone/>
-            </a:pPr>
-            <a:r>
-              <a:rPr lang="en-US" sz="3000" b="1" dirty="0">
+              <a:lnSpc>
+                <a:spcPct val="90000"/>
+              </a:lnSpc>
+              <a:buNone/>
+            </a:pPr>
+            <a:r>
+              <a:rPr lang="en-US" sz="3600" dirty="0">
                 <a:solidFill>
                   <a:schemeClr val="tx2"/>
                 </a:solidFill>
-              </a:rPr>
-              <a:t>大切にしてきたのは「納得できる、理由のある努力」</a:t>
-            </a:r>
-            <a:endParaRPr lang="en-US" sz="3000" dirty="0"/>
+                <a:latin typeface="Noto Sans JP Print Black" pitchFamily="34" charset="0"/>
+                <a:ea typeface="Noto Sans JP Print Black" pitchFamily="34" charset="-122"/>
+                <a:cs typeface="Noto Sans JP Print Black" pitchFamily="34" charset="-120"/>
+              </a:rPr>
+              <a:t>大切にしてきたのは</a:t>
+            </a:r>
+            <a:endParaRPr lang="en-US" sz="3600" dirty="0"/>
+          </a:p>
+          <a:p>
+            <a:pPr algn="l" indent="0" marL="0">
+              <a:lnSpc>
+                <a:spcPct val="90000"/>
+              </a:lnSpc>
+              <a:buNone/>
+            </a:pPr>
+            <a:r>
+              <a:rPr lang="en-US" sz="3600" dirty="0">
+                <a:solidFill>
+                  <a:schemeClr val="tx2"/>
+                </a:solidFill>
+                <a:latin typeface="Noto Sans JP Print Black" pitchFamily="34" charset="0"/>
+                <a:ea typeface="Noto Sans JP Print Black" pitchFamily="34" charset="-122"/>
+                <a:cs typeface="Noto Sans JP Print Black" pitchFamily="34" charset="-120"/>
+              </a:rPr>
+              <a:t>「納得できる、理由のある努力」</a:t>
+            </a:r>
+            <a:endParaRPr lang="en-US" sz="3600" dirty="0"/>
           </a:p>
         </p:txBody>
       </p:sp>
@@ -10780,17 +11082,31 @@
               <a:buNone/>
             </a:pPr>
             <a:r>
-              <a:rPr lang="en-US" sz="4000" b="1" dirty="0">
+              <a:rPr lang="en-US" sz="4800" b="1" dirty="0">
                 <a:solidFill>
                   <a:schemeClr val="accent1"/>
                 </a:solidFill>
-                <a:latin typeface="BIZ UDPゴシック" pitchFamily="34" charset="0"/>
-                <a:ea typeface="BIZ UDPゴシック" pitchFamily="34" charset="-122"/>
-                <a:cs typeface="BIZ UDPゴシック" pitchFamily="34" charset="-120"/>
-              </a:rPr>
-              <a:t>3回</a:t>
-            </a:r>
-            <a:endParaRPr lang="en-US" sz="4000" dirty="0"/>
+                <a:latin typeface="Noto Sans JP Print Black" pitchFamily="34" charset="0"/>
+                <a:ea typeface="Noto Sans JP Print Black" pitchFamily="34" charset="-122"/>
+                <a:cs typeface="Noto Sans JP Print Black" pitchFamily="34" charset="-120"/>
+              </a:rPr>
+              <a:t>3</a:t>
+            </a:r>
+            <a:pPr indent="0" marL="0">
+              <a:buNone/>
+            </a:pPr>
+            <a:r>
+              <a:rPr lang="en-US" sz="2400" b="1" dirty="0">
+                <a:solidFill>
+                  <a:schemeClr val="accent1"/>
+                </a:solidFill>
+                <a:latin typeface="Noto Sans JP Print" pitchFamily="34" charset="0"/>
+                <a:ea typeface="Noto Sans JP Print" pitchFamily="34" charset="-122"/>
+                <a:cs typeface="Noto Sans JP Print" pitchFamily="34" charset="-120"/>
+              </a:rPr>
+              <a:t>回</a:t>
+            </a:r>
+            <a:endParaRPr lang="en-US" sz="1600" dirty="0"/>
           </a:p>
         </p:txBody>
       </p:sp>
@@ -10823,9 +11139,9 @@
                 <a:solidFill>
                   <a:schemeClr val="tx2"/>
                 </a:solidFill>
-                <a:latin typeface="BIZ UDPゴシック" pitchFamily="34" charset="0"/>
-                <a:ea typeface="BIZ UDPゴシック" pitchFamily="34" charset="-122"/>
-                <a:cs typeface="BIZ UDPゴシック" pitchFamily="34" charset="-120"/>
+                <a:latin typeface="Noto Sans JP Print" pitchFamily="34" charset="0"/>
+                <a:ea typeface="Noto Sans JP Print" pitchFamily="34" charset="-122"/>
+                <a:cs typeface="Noto Sans JP Print" pitchFamily="34" charset="-120"/>
               </a:rPr>
               <a:t>駅伝 全国大会出場</a:t>
             </a:r>
@@ -10862,9 +11178,9 @@
                 <a:solidFill>
                   <a:schemeClr val="accent4"/>
                 </a:solidFill>
-                <a:latin typeface="BIZ UDPゴシック" pitchFamily="34" charset="0"/>
-                <a:ea typeface="BIZ UDPゴシック" pitchFamily="34" charset="-122"/>
-                <a:cs typeface="BIZ UDPゴシック" pitchFamily="34" charset="-120"/>
+                <a:latin typeface="Noto Sans JP Print" pitchFamily="34" charset="0"/>
+                <a:ea typeface="Noto Sans JP Print" pitchFamily="34" charset="-122"/>
+                <a:cs typeface="Noto Sans JP Print" pitchFamily="34" charset="-120"/>
               </a:rPr>
               <a:t>8位・9位・20位</a:t>
             </a:r>
@@ -10897,17 +11213,31 @@
               <a:buNone/>
             </a:pPr>
             <a:r>
-              <a:rPr lang="en-US" sz="4000" b="1" dirty="0">
+              <a:rPr lang="en-US" sz="4800" b="1" dirty="0">
                 <a:solidFill>
                   <a:schemeClr val="accent1"/>
                 </a:solidFill>
-                <a:latin typeface="BIZ UDPゴシック" pitchFamily="34" charset="0"/>
-                <a:ea typeface="BIZ UDPゴシック" pitchFamily="34" charset="-122"/>
-                <a:cs typeface="BIZ UDPゴシック" pitchFamily="34" charset="-120"/>
-              </a:rPr>
-              <a:t>12年連続</a:t>
-            </a:r>
-            <a:endParaRPr lang="en-US" sz="4000" dirty="0"/>
+                <a:latin typeface="Noto Sans JP Print Black" pitchFamily="34" charset="0"/>
+                <a:ea typeface="Noto Sans JP Print Black" pitchFamily="34" charset="-122"/>
+                <a:cs typeface="Noto Sans JP Print Black" pitchFamily="34" charset="-120"/>
+              </a:rPr>
+              <a:t>12</a:t>
+            </a:r>
+            <a:pPr indent="0" marL="0">
+              <a:buNone/>
+            </a:pPr>
+            <a:r>
+              <a:rPr lang="en-US" sz="2400" b="1" dirty="0">
+                <a:solidFill>
+                  <a:schemeClr val="accent1"/>
+                </a:solidFill>
+                <a:latin typeface="Noto Sans JP Print" pitchFamily="34" charset="0"/>
+                <a:ea typeface="Noto Sans JP Print" pitchFamily="34" charset="-122"/>
+                <a:cs typeface="Noto Sans JP Print" pitchFamily="34" charset="-120"/>
+              </a:rPr>
+              <a:t>年連続</a:t>
+            </a:r>
+            <a:endParaRPr lang="en-US" sz="1600" dirty="0"/>
           </a:p>
         </p:txBody>
       </p:sp>
@@ -10940,9 +11270,9 @@
                 <a:solidFill>
                   <a:schemeClr val="tx2"/>
                 </a:solidFill>
-                <a:latin typeface="BIZ UDPゴシック" pitchFamily="34" charset="0"/>
-                <a:ea typeface="BIZ UDPゴシック" pitchFamily="34" charset="-122"/>
-                <a:cs typeface="BIZ UDPゴシック" pitchFamily="34" charset="-120"/>
+                <a:latin typeface="Noto Sans JP Print" pitchFamily="34" charset="0"/>
+                <a:ea typeface="Noto Sans JP Print" pitchFamily="34" charset="-122"/>
+                <a:cs typeface="Noto Sans JP Print" pitchFamily="34" charset="-120"/>
               </a:rPr>
               <a:t>市総体 優勝</a:t>
             </a:r>
@@ -10979,9 +11309,9 @@
                 <a:solidFill>
                   <a:schemeClr val="accent4"/>
                 </a:solidFill>
-                <a:latin typeface="BIZ UDPゴシック" pitchFamily="34" charset="0"/>
-                <a:ea typeface="BIZ UDPゴシック" pitchFamily="34" charset="-122"/>
-                <a:cs typeface="BIZ UDPゴシック" pitchFamily="34" charset="-120"/>
+                <a:latin typeface="Noto Sans JP Print" pitchFamily="34" charset="0"/>
+                <a:ea typeface="Noto Sans JP Print" pitchFamily="34" charset="-122"/>
+                <a:cs typeface="Noto Sans JP Print" pitchFamily="34" charset="-120"/>
               </a:rPr>
               <a:t>陸上競技部</a:t>
             </a:r>
@@ -11014,17 +11344,31 @@
               <a:buNone/>
             </a:pPr>
             <a:r>
-              <a:rPr lang="en-US" sz="4000" b="1" dirty="0">
+              <a:rPr lang="en-US" sz="4800" b="1" dirty="0">
                 <a:solidFill>
                   <a:schemeClr val="accent1"/>
                 </a:solidFill>
-                <a:latin typeface="BIZ UDPゴシック" pitchFamily="34" charset="0"/>
-                <a:ea typeface="BIZ UDPゴシック" pitchFamily="34" charset="-122"/>
-                <a:cs typeface="BIZ UDPゴシック" pitchFamily="34" charset="-120"/>
-              </a:rPr>
-              <a:t>48本</a:t>
-            </a:r>
-            <a:endParaRPr lang="en-US" sz="4000" dirty="0"/>
+                <a:latin typeface="Noto Sans JP Print Black" pitchFamily="34" charset="0"/>
+                <a:ea typeface="Noto Sans JP Print Black" pitchFamily="34" charset="-122"/>
+                <a:cs typeface="Noto Sans JP Print Black" pitchFamily="34" charset="-120"/>
+              </a:rPr>
+              <a:t>48</a:t>
+            </a:r>
+            <a:pPr indent="0" marL="0">
+              <a:buNone/>
+            </a:pPr>
+            <a:r>
+              <a:rPr lang="en-US" sz="2400" b="1" dirty="0">
+                <a:solidFill>
+                  <a:schemeClr val="accent1"/>
+                </a:solidFill>
+                <a:latin typeface="Noto Sans JP Print" pitchFamily="34" charset="0"/>
+                <a:ea typeface="Noto Sans JP Print" pitchFamily="34" charset="-122"/>
+                <a:cs typeface="Noto Sans JP Print" pitchFamily="34" charset="-120"/>
+              </a:rPr>
+              <a:t>本</a:t>
+            </a:r>
+            <a:endParaRPr lang="en-US" sz="1600" dirty="0"/>
           </a:p>
         </p:txBody>
       </p:sp>
@@ -11057,9 +11401,9 @@
                 <a:solidFill>
                   <a:schemeClr val="tx2"/>
                 </a:solidFill>
-                <a:latin typeface="BIZ UDPゴシック" pitchFamily="34" charset="0"/>
-                <a:ea typeface="BIZ UDPゴシック" pitchFamily="34" charset="-122"/>
-                <a:cs typeface="BIZ UDPゴシック" pitchFamily="34" charset="-120"/>
+                <a:latin typeface="Noto Sans JP Print" pitchFamily="34" charset="0"/>
+                <a:ea typeface="Noto Sans JP Print" pitchFamily="34" charset="-122"/>
+                <a:cs typeface="Noto Sans JP Print" pitchFamily="34" charset="-120"/>
               </a:rPr>
               <a:t>獲得した優勝旗</a:t>
             </a:r>
@@ -11080,7 +11424,7 @@
           </a:xfrm>
           <a:prstGeom prst="roundRect">
             <a:avLst>
-              <a:gd name="adj" fmla="val 2791"/>
+              <a:gd name="adj" fmla="val 1163"/>
             </a:avLst>
           </a:prstGeom>
           <a:solidFill>
@@ -11123,9 +11467,9 @@
                 <a:solidFill>
                   <a:schemeClr val="accent5"/>
                 </a:solidFill>
-                <a:latin typeface="BIZ UDPゴシック" pitchFamily="34" charset="0"/>
-                <a:ea typeface="BIZ UDPゴシック" pitchFamily="34" charset="-122"/>
-                <a:cs typeface="BIZ UDPゴシック" pitchFamily="34" charset="-120"/>
+                <a:latin typeface="Noto Sans JP Print" pitchFamily="34" charset="0"/>
+                <a:ea typeface="Noto Sans JP Print" pitchFamily="34" charset="-122"/>
+                <a:cs typeface="Noto Sans JP Print" pitchFamily="34" charset="-120"/>
               </a:rPr>
               <a:t>指導で心がけてきたこと</a:t>
             </a:r>
@@ -11162,9 +11506,9 @@
                 <a:solidFill>
                   <a:schemeClr val="bg1"/>
                 </a:solidFill>
-                <a:latin typeface="BIZ UDPゴシック" pitchFamily="34" charset="0"/>
-                <a:ea typeface="BIZ UDPゴシック" pitchFamily="34" charset="-122"/>
-                <a:cs typeface="BIZ UDPゴシック" pitchFamily="34" charset="-120"/>
+                <a:latin typeface="Noto Sans JP Print" pitchFamily="34" charset="0"/>
+                <a:ea typeface="Noto Sans JP Print" pitchFamily="34" charset="-122"/>
+                <a:cs typeface="Noto Sans JP Print" pitchFamily="34" charset="-120"/>
               </a:rPr>
               <a:t>納得できる、</a:t>
             </a:r>
@@ -11179,9 +11523,9 @@
                 <a:solidFill>
                   <a:schemeClr val="bg1"/>
                 </a:solidFill>
-                <a:latin typeface="BIZ UDPゴシック" pitchFamily="34" charset="0"/>
-                <a:ea typeface="BIZ UDPゴシック" pitchFamily="34" charset="-122"/>
-                <a:cs typeface="BIZ UDPゴシック" pitchFamily="34" charset="-120"/>
+                <a:latin typeface="Noto Sans JP Print" pitchFamily="34" charset="0"/>
+                <a:ea typeface="Noto Sans JP Print" pitchFamily="34" charset="-122"/>
+                <a:cs typeface="Noto Sans JP Print" pitchFamily="34" charset="-120"/>
               </a:rPr>
               <a:t>理由のある努力</a:t>
             </a:r>
@@ -11218,9 +11562,9 @@
                 <a:solidFill>
                   <a:schemeClr val="bg1"/>
                 </a:solidFill>
-                <a:latin typeface="BIZ UDPゴシック" pitchFamily="34" charset="0"/>
-                <a:ea typeface="BIZ UDPゴシック" pitchFamily="34" charset="-122"/>
-                <a:cs typeface="BIZ UDPゴシック" pitchFamily="34" charset="-120"/>
+                <a:latin typeface="Noto Sans JP Print" pitchFamily="34" charset="0"/>
+                <a:ea typeface="Noto Sans JP Print" pitchFamily="34" charset="-122"/>
+                <a:cs typeface="Noto Sans JP Print" pitchFamily="34" charset="-120"/>
               </a:rPr>
               <a:t>「なぜこの練習をするのか」を</a:t>
             </a:r>
@@ -11235,9 +11579,9 @@
                 <a:solidFill>
                   <a:schemeClr val="bg1"/>
                 </a:solidFill>
-                <a:latin typeface="BIZ UDPゴシック" pitchFamily="34" charset="0"/>
-                <a:ea typeface="BIZ UDPゴシック" pitchFamily="34" charset="-122"/>
-                <a:cs typeface="BIZ UDPゴシック" pitchFamily="34" charset="-120"/>
+                <a:latin typeface="Noto Sans JP Print" pitchFamily="34" charset="0"/>
+                <a:ea typeface="Noto Sans JP Print" pitchFamily="34" charset="-122"/>
+                <a:cs typeface="Noto Sans JP Print" pitchFamily="34" charset="-120"/>
               </a:rPr>
               <a:t>選手自身がわかっていること</a:t>
             </a:r>
@@ -11275,8 +11619,11 @@
             <a:lvl1pPr>
               <a:defRPr sz="1100">
                 <a:solidFill>
-                  <a:srgbClr val="6B7A90"/>
-                </a:solidFill>
+                  <a:srgbClr val="7C828D"/>
+                </a:solidFill>
+                <a:latin typeface="Noto Sans JP Print Black"/>
+                <a:ea typeface="Noto Sans JP Print Black"/>
+                <a:cs typeface="Noto Sans JP Print Black"/>
               </a:defRPr>
             </a:lvl1pPr>
           </a:lstStyle>
@@ -11325,7 +11672,7 @@
         </p:nvSpPr>
         <p:spPr>
           <a:xfrm>
-            <a:off x="548640" y="320040"/>
+            <a:off x="548640" y="274320"/>
             <a:ext cx="7315200" cy="320040"/>
           </a:xfrm>
           <a:prstGeom prst="rect">
@@ -11363,8 +11710,8 @@
         </p:nvSpPr>
         <p:spPr>
           <a:xfrm>
-            <a:off x="548640" y="685800"/>
-            <a:ext cx="11064240" cy="1143000"/>
+            <a:off x="548640" y="594360"/>
+            <a:ext cx="11064240" cy="1325880"/>
           </a:xfrm>
           <a:prstGeom prst="rect">
             <a:avLst/>
@@ -11377,17 +11724,23 @@
           <a:lstStyle/>
           <a:p>
             <a:pPr algn="l" indent="0" marL="0">
-              <a:buNone/>
-            </a:pPr>
-            <a:r>
-              <a:rPr lang="en-US" sz="3000" b="1" dirty="0">
+              <a:lnSpc>
+                <a:spcPct val="90000"/>
+              </a:lnSpc>
+              <a:buNone/>
+            </a:pPr>
+            <a:r>
+              <a:rPr lang="en-US" sz="3600" dirty="0">
                 <a:solidFill>
                   <a:schemeClr val="tx2"/>
                 </a:solidFill>
+                <a:latin typeface="Noto Sans JP Print Black" pitchFamily="34" charset="0"/>
+                <a:ea typeface="Noto Sans JP Print Black" pitchFamily="34" charset="-122"/>
+                <a:cs typeface="Noto Sans JP Print Black" pitchFamily="34" charset="-120"/>
               </a:rPr>
               <a:t>小学生には、どれを選びますか？</a:t>
             </a:r>
-            <a:endParaRPr lang="en-US" sz="3000" dirty="0"/>
+            <a:endParaRPr lang="en-US" sz="3600" dirty="0"/>
           </a:p>
         </p:txBody>
       </p:sp>
@@ -11404,7 +11757,7 @@
           </a:xfrm>
           <a:prstGeom prst="roundRect">
             <a:avLst>
-              <a:gd name="adj" fmla="val 4138"/>
+              <a:gd name="adj" fmla="val 1724"/>
             </a:avLst>
           </a:prstGeom>
           <a:solidFill>
@@ -11472,9 +11825,9 @@
                 <a:solidFill>
                   <a:schemeClr val="bg1"/>
                 </a:solidFill>
-                <a:latin typeface="BIZ UDPゴシック" pitchFamily="34" charset="0"/>
-                <a:ea typeface="BIZ UDPゴシック" pitchFamily="34" charset="-122"/>
-                <a:cs typeface="BIZ UDPゴシック" pitchFamily="34" charset="-120"/>
+                <a:latin typeface="Noto Sans JP Print Black" pitchFamily="34" charset="0"/>
+                <a:ea typeface="Noto Sans JP Print Black" pitchFamily="34" charset="-122"/>
+                <a:cs typeface="Noto Sans JP Print Black" pitchFamily="34" charset="-120"/>
               </a:rPr>
               <a:t>1</a:t>
             </a:r>
@@ -11511,9 +11864,9 @@
                 <a:solidFill>
                   <a:schemeClr val="tx2"/>
                 </a:solidFill>
-                <a:latin typeface="BIZ UDPゴシック" pitchFamily="34" charset="0"/>
-                <a:ea typeface="BIZ UDPゴシック" pitchFamily="34" charset="-122"/>
-                <a:cs typeface="BIZ UDPゴシック" pitchFamily="34" charset="-120"/>
+                <a:latin typeface="Noto Sans JP Print" pitchFamily="34" charset="0"/>
+                <a:ea typeface="Noto Sans JP Print" pitchFamily="34" charset="-122"/>
+                <a:cs typeface="Noto Sans JP Print" pitchFamily="34" charset="-120"/>
               </a:rPr>
               <a:t>心拍数を上がりにくくする</a:t>
             </a:r>
@@ -11550,9 +11903,9 @@
                 <a:solidFill>
                   <a:schemeClr val="accent4"/>
                 </a:solidFill>
-                <a:latin typeface="BIZ UDPゴシック" pitchFamily="34" charset="0"/>
-                <a:ea typeface="BIZ UDPゴシック" pitchFamily="34" charset="-122"/>
-                <a:cs typeface="BIZ UDPゴシック" pitchFamily="34" charset="-120"/>
+                <a:latin typeface="Noto Sans JP Print" pitchFamily="34" charset="0"/>
+                <a:ea typeface="Noto Sans JP Print" pitchFamily="34" charset="-122"/>
+                <a:cs typeface="Noto Sans JP Print" pitchFamily="34" charset="-120"/>
               </a:rPr>
               <a:t>インターバル</a:t>
             </a:r>
@@ -11573,7 +11926,7 @@
           </a:xfrm>
           <a:prstGeom prst="roundRect">
             <a:avLst>
-              <a:gd name="adj" fmla="val 4138"/>
+              <a:gd name="adj" fmla="val 1724"/>
             </a:avLst>
           </a:prstGeom>
           <a:solidFill>
@@ -11641,9 +11994,9 @@
                 <a:solidFill>
                   <a:schemeClr val="bg1"/>
                 </a:solidFill>
-                <a:latin typeface="BIZ UDPゴシック" pitchFamily="34" charset="0"/>
-                <a:ea typeface="BIZ UDPゴシック" pitchFamily="34" charset="-122"/>
-                <a:cs typeface="BIZ UDPゴシック" pitchFamily="34" charset="-120"/>
+                <a:latin typeface="Noto Sans JP Print Black" pitchFamily="34" charset="0"/>
+                <a:ea typeface="Noto Sans JP Print Black" pitchFamily="34" charset="-122"/>
+                <a:cs typeface="Noto Sans JP Print Black" pitchFamily="34" charset="-120"/>
               </a:rPr>
               <a:t>2</a:t>
             </a:r>
@@ -11680,9 +12033,9 @@
                 <a:solidFill>
                   <a:schemeClr val="tx2"/>
                 </a:solidFill>
-                <a:latin typeface="BIZ UDPゴシック" pitchFamily="34" charset="0"/>
-                <a:ea typeface="BIZ UDPゴシック" pitchFamily="34" charset="-122"/>
-                <a:cs typeface="BIZ UDPゴシック" pitchFamily="34" charset="-120"/>
+                <a:latin typeface="Noto Sans JP Print" pitchFamily="34" charset="0"/>
+                <a:ea typeface="Noto Sans JP Print" pitchFamily="34" charset="-122"/>
+                <a:cs typeface="Noto Sans JP Print" pitchFamily="34" charset="-120"/>
               </a:rPr>
               <a:t>上がった心拍数に慣らす</a:t>
             </a:r>
@@ -11719,9 +12072,9 @@
                 <a:solidFill>
                   <a:schemeClr val="accent4"/>
                 </a:solidFill>
-                <a:latin typeface="BIZ UDPゴシック" pitchFamily="34" charset="0"/>
-                <a:ea typeface="BIZ UDPゴシック" pitchFamily="34" charset="-122"/>
-                <a:cs typeface="BIZ UDPゴシック" pitchFamily="34" charset="-120"/>
+                <a:latin typeface="Noto Sans JP Print" pitchFamily="34" charset="0"/>
+                <a:ea typeface="Noto Sans JP Print" pitchFamily="34" charset="-122"/>
+                <a:cs typeface="Noto Sans JP Print" pitchFamily="34" charset="-120"/>
               </a:rPr>
               <a:t>ゆっくり長く</a:t>
             </a:r>
@@ -11742,7 +12095,7 @@
           </a:xfrm>
           <a:prstGeom prst="roundRect">
             <a:avLst>
-              <a:gd name="adj" fmla="val 4138"/>
+              <a:gd name="adj" fmla="val 1724"/>
             </a:avLst>
           </a:prstGeom>
           <a:solidFill>
@@ -11810,9 +12163,9 @@
                 <a:solidFill>
                   <a:schemeClr val="bg1"/>
                 </a:solidFill>
-                <a:latin typeface="BIZ UDPゴシック" pitchFamily="34" charset="0"/>
-                <a:ea typeface="BIZ UDPゴシック" pitchFamily="34" charset="-122"/>
-                <a:cs typeface="BIZ UDPゴシック" pitchFamily="34" charset="-120"/>
+                <a:latin typeface="Noto Sans JP Print Black" pitchFamily="34" charset="0"/>
+                <a:ea typeface="Noto Sans JP Print Black" pitchFamily="34" charset="-122"/>
+                <a:cs typeface="Noto Sans JP Print Black" pitchFamily="34" charset="-120"/>
               </a:rPr>
               <a:t>3</a:t>
             </a:r>
@@ -11849,9 +12202,9 @@
                 <a:solidFill>
                   <a:schemeClr val="tx2"/>
                 </a:solidFill>
-                <a:latin typeface="BIZ UDPゴシック" pitchFamily="34" charset="0"/>
-                <a:ea typeface="BIZ UDPゴシック" pitchFamily="34" charset="-122"/>
-                <a:cs typeface="BIZ UDPゴシック" pitchFamily="34" charset="-120"/>
+                <a:latin typeface="Noto Sans JP Print" pitchFamily="34" charset="0"/>
+                <a:ea typeface="Noto Sans JP Print" pitchFamily="34" charset="-122"/>
+                <a:cs typeface="Noto Sans JP Print" pitchFamily="34" charset="-120"/>
               </a:rPr>
               <a:t>苦しさに耐える</a:t>
             </a:r>
@@ -11888,9 +12241,9 @@
                 <a:solidFill>
                   <a:schemeClr val="accent4"/>
                 </a:solidFill>
-                <a:latin typeface="BIZ UDPゴシック" pitchFamily="34" charset="0"/>
-                <a:ea typeface="BIZ UDPゴシック" pitchFamily="34" charset="-122"/>
-                <a:cs typeface="BIZ UDPゴシック" pitchFamily="34" charset="-120"/>
+                <a:latin typeface="Noto Sans JP Print" pitchFamily="34" charset="0"/>
+                <a:ea typeface="Noto Sans JP Print" pitchFamily="34" charset="-122"/>
+                <a:cs typeface="Noto Sans JP Print" pitchFamily="34" charset="-120"/>
               </a:rPr>
               <a:t>タイムトライアル</a:t>
             </a:r>
@@ -11952,9 +12305,9 @@
                 <a:solidFill>
                   <a:schemeClr val="bg1"/>
                 </a:solidFill>
-                <a:latin typeface="BIZ UDPゴシック" pitchFamily="34" charset="0"/>
-                <a:ea typeface="BIZ UDPゴシック" pitchFamily="34" charset="-122"/>
-                <a:cs typeface="BIZ UDPゴシック" pitchFamily="34" charset="-120"/>
+                <a:latin typeface="Noto Sans JP Print" pitchFamily="34" charset="0"/>
+                <a:ea typeface="Noto Sans JP Print" pitchFamily="34" charset="-122"/>
+                <a:cs typeface="Noto Sans JP Print" pitchFamily="34" charset="-120"/>
               </a:rPr>
               <a:t>3分</a:t>
             </a:r>
@@ -11991,9 +12344,9 @@
                 <a:solidFill>
                   <a:schemeClr val="tx2"/>
                 </a:solidFill>
-                <a:latin typeface="BIZ UDPゴシック" pitchFamily="34" charset="0"/>
-                <a:ea typeface="BIZ UDPゴシック" pitchFamily="34" charset="-122"/>
-                <a:cs typeface="BIZ UDPゴシック" pitchFamily="34" charset="-120"/>
+                <a:latin typeface="Noto Sans JP Print" pitchFamily="34" charset="0"/>
+                <a:ea typeface="Noto Sans JP Print" pitchFamily="34" charset="-122"/>
+                <a:cs typeface="Noto Sans JP Print" pitchFamily="34" charset="-120"/>
               </a:rPr>
               <a:t>理由も一緒に。今、自分のクラスの練習はどれに近いですか？</a:t>
             </a:r>
@@ -12031,8 +12384,11 @@
             <a:lvl1pPr>
               <a:defRPr sz="1100">
                 <a:solidFill>
-                  <a:srgbClr val="6B7A90"/>
-                </a:solidFill>
+                  <a:srgbClr val="7C828D"/>
+                </a:solidFill>
+                <a:latin typeface="Noto Sans JP Print Black"/>
+                <a:ea typeface="Noto Sans JP Print Black"/>
+                <a:cs typeface="Noto Sans JP Print Black"/>
               </a:defRPr>
             </a:lvl1pPr>
           </a:lstStyle>
@@ -12081,7 +12437,7 @@
         </p:nvSpPr>
         <p:spPr>
           <a:xfrm>
-            <a:off x="548640" y="320040"/>
+            <a:off x="548640" y="274320"/>
             <a:ext cx="7315200" cy="320040"/>
           </a:xfrm>
           <a:prstGeom prst="rect">
@@ -12119,8 +12475,8 @@
         </p:nvSpPr>
         <p:spPr>
           <a:xfrm>
-            <a:off x="548640" y="685800"/>
-            <a:ext cx="11064240" cy="1143000"/>
+            <a:off x="548640" y="594360"/>
+            <a:ext cx="11064240" cy="1325880"/>
           </a:xfrm>
           <a:prstGeom prst="rect">
             <a:avLst/>
@@ -12133,17 +12489,43 @@
           <a:lstStyle/>
           <a:p>
             <a:pPr algn="l" indent="0" marL="0">
-              <a:buNone/>
-            </a:pPr>
-            <a:r>
-              <a:rPr lang="en-US" sz="3000" b="1" dirty="0">
+              <a:lnSpc>
+                <a:spcPct val="90000"/>
+              </a:lnSpc>
+              <a:buNone/>
+            </a:pPr>
+            <a:r>
+              <a:rPr lang="en-US" sz="3600" dirty="0">
                 <a:solidFill>
                   <a:schemeClr val="tx2"/>
                 </a:solidFill>
-              </a:rPr>
-              <a:t>主役は②。目安は「おしゃべりできる速さ」</a:t>
-            </a:r>
-            <a:endParaRPr lang="en-US" sz="3000" dirty="0"/>
+                <a:latin typeface="Noto Sans JP Print Black" pitchFamily="34" charset="0"/>
+                <a:ea typeface="Noto Sans JP Print Black" pitchFamily="34" charset="-122"/>
+                <a:cs typeface="Noto Sans JP Print Black" pitchFamily="34" charset="-120"/>
+              </a:rPr>
+              <a:t>主役は②。</a:t>
+            </a:r>
+            <a:endParaRPr lang="en-US" sz="3600" dirty="0"/>
+          </a:p>
+          <a:p>
+            <a:pPr algn="l" indent="0" marL="0">
+              <a:lnSpc>
+                <a:spcPct val="90000"/>
+              </a:lnSpc>
+              <a:buNone/>
+            </a:pPr>
+            <a:r>
+              <a:rPr lang="en-US" sz="3600" dirty="0">
+                <a:solidFill>
+                  <a:schemeClr val="tx2"/>
+                </a:solidFill>
+                <a:latin typeface="Noto Sans JP Print Black" pitchFamily="34" charset="0"/>
+                <a:ea typeface="Noto Sans JP Print Black" pitchFamily="34" charset="-122"/>
+                <a:cs typeface="Noto Sans JP Print Black" pitchFamily="34" charset="-120"/>
+              </a:rPr>
+              <a:t>目安は「おしゃべりできる速さ」</a:t>
+            </a:r>
+            <a:endParaRPr lang="en-US" sz="3600" dirty="0"/>
           </a:p>
         </p:txBody>
       </p:sp>
@@ -12160,7 +12542,7 @@
           </a:xfrm>
           <a:prstGeom prst="roundRect">
             <a:avLst>
-              <a:gd name="adj" fmla="val 2857"/>
+              <a:gd name="adj" fmla="val 1190"/>
             </a:avLst>
           </a:prstGeom>
           <a:solidFill>
@@ -12228,9 +12610,9 @@
                 <a:solidFill>
                   <a:schemeClr val="bg1"/>
                 </a:solidFill>
-                <a:latin typeface="BIZ UDPゴシック" pitchFamily="34" charset="0"/>
-                <a:ea typeface="BIZ UDPゴシック" pitchFamily="34" charset="-122"/>
-                <a:cs typeface="BIZ UDPゴシック" pitchFamily="34" charset="-120"/>
+                <a:latin typeface="Noto Sans JP Print Black" pitchFamily="34" charset="0"/>
+                <a:ea typeface="Noto Sans JP Print Black" pitchFamily="34" charset="-122"/>
+                <a:cs typeface="Noto Sans JP Print Black" pitchFamily="34" charset="-120"/>
               </a:rPr>
               <a:t>2</a:t>
             </a:r>
@@ -12267,9 +12649,9 @@
                 <a:solidFill>
                   <a:schemeClr val="bg1"/>
                 </a:solidFill>
-                <a:latin typeface="BIZ UDPゴシック" pitchFamily="34" charset="0"/>
-                <a:ea typeface="BIZ UDPゴシック" pitchFamily="34" charset="-122"/>
-                <a:cs typeface="BIZ UDPゴシック" pitchFamily="34" charset="-120"/>
+                <a:latin typeface="Noto Sans JP Print" pitchFamily="34" charset="0"/>
+                <a:ea typeface="Noto Sans JP Print" pitchFamily="34" charset="-122"/>
+                <a:cs typeface="Noto Sans JP Print" pitchFamily="34" charset="-120"/>
               </a:rPr>
               <a:t>おしゃべりできる速さで、</a:t>
             </a:r>
@@ -12284,9 +12666,9 @@
                 <a:solidFill>
                   <a:schemeClr val="bg1"/>
                 </a:solidFill>
-                <a:latin typeface="BIZ UDPゴシック" pitchFamily="34" charset="0"/>
-                <a:ea typeface="BIZ UDPゴシック" pitchFamily="34" charset="-122"/>
-                <a:cs typeface="BIZ UDPゴシック" pitchFamily="34" charset="-120"/>
+                <a:latin typeface="Noto Sans JP Print" pitchFamily="34" charset="0"/>
+                <a:ea typeface="Noto Sans JP Print" pitchFamily="34" charset="-122"/>
+                <a:cs typeface="Noto Sans JP Print" pitchFamily="34" charset="-120"/>
               </a:rPr>
               <a:t>ゆっくり長く</a:t>
             </a:r>
@@ -12323,9 +12705,9 @@
                 <a:solidFill>
                   <a:schemeClr val="accent5"/>
                 </a:solidFill>
-                <a:latin typeface="BIZ UDPゴシック" pitchFamily="34" charset="0"/>
-                <a:ea typeface="BIZ UDPゴシック" pitchFamily="34" charset="-122"/>
-                <a:cs typeface="BIZ UDPゴシック" pitchFamily="34" charset="-120"/>
+                <a:latin typeface="Noto Sans JP Print" pitchFamily="34" charset="0"/>
+                <a:ea typeface="Noto Sans JP Print" pitchFamily="34" charset="-122"/>
+                <a:cs typeface="Noto Sans JP Print" pitchFamily="34" charset="-120"/>
               </a:rPr>
               <a:t>＝ 学習指導要領の「無理のない速さ」</a:t>
             </a:r>
@@ -12346,7 +12728,7 @@
           </a:xfrm>
           <a:prstGeom prst="roundRect">
             <a:avLst>
-              <a:gd name="adj" fmla="val 6000"/>
+              <a:gd name="adj" fmla="val 2500"/>
             </a:avLst>
           </a:prstGeom>
           <a:solidFill>
@@ -12389,9 +12771,9 @@
                 <a:solidFill>
                   <a:schemeClr val="accent1"/>
                 </a:solidFill>
-                <a:latin typeface="BIZ UDPゴシック" pitchFamily="34" charset="0"/>
-                <a:ea typeface="BIZ UDPゴシック" pitchFamily="34" charset="-122"/>
-                <a:cs typeface="BIZ UDPゴシック" pitchFamily="34" charset="-120"/>
+                <a:latin typeface="Noto Sans JP Print" pitchFamily="34" charset="0"/>
+                <a:ea typeface="Noto Sans JP Print" pitchFamily="34" charset="-122"/>
+                <a:cs typeface="Noto Sans JP Print" pitchFamily="34" charset="-120"/>
               </a:rPr>
               <a:t>③は「嫌い」を生みやすい</a:t>
             </a:r>
@@ -12428,11 +12810,28 @@
                 <a:solidFill>
                   <a:schemeClr val="tx1"/>
                 </a:solidFill>
-                <a:latin typeface="BIZ UDPゴシック" pitchFamily="34" charset="0"/>
-                <a:ea typeface="BIZ UDPゴシック" pitchFamily="34" charset="-122"/>
-                <a:cs typeface="BIZ UDPゴシック" pitchFamily="34" charset="-120"/>
-              </a:rPr>
-              <a:t>①も負荷が強く、小学生で積極的に選ぶ必要はない</a:t>
+                <a:latin typeface="Noto Sans JP Print" pitchFamily="34" charset="0"/>
+                <a:ea typeface="Noto Sans JP Print" pitchFamily="34" charset="-122"/>
+                <a:cs typeface="Noto Sans JP Print" pitchFamily="34" charset="-120"/>
+              </a:rPr>
+              <a:t>①も負荷が強く、</a:t>
+            </a:r>
+            <a:endParaRPr lang="en-US" sz="1500" dirty="0"/>
+          </a:p>
+          <a:p>
+            <a:pPr indent="0" marL="0">
+              <a:buNone/>
+            </a:pPr>
+            <a:r>
+              <a:rPr lang="en-US" sz="1500" dirty="0">
+                <a:solidFill>
+                  <a:schemeClr val="tx1"/>
+                </a:solidFill>
+                <a:latin typeface="Noto Sans JP Print" pitchFamily="34" charset="0"/>
+                <a:ea typeface="Noto Sans JP Print" pitchFamily="34" charset="-122"/>
+                <a:cs typeface="Noto Sans JP Print" pitchFamily="34" charset="-120"/>
+              </a:rPr>
+              <a:t>小学生で積極的に選ぶ必要はない</a:t>
             </a:r>
             <a:endParaRPr lang="en-US" sz="1500" dirty="0"/>
           </a:p>
@@ -12451,7 +12850,7 @@
           </a:xfrm>
           <a:prstGeom prst="roundRect">
             <a:avLst>
-              <a:gd name="adj" fmla="val 6000"/>
+              <a:gd name="adj" fmla="val 2500"/>
             </a:avLst>
           </a:prstGeom>
           <a:solidFill>
@@ -12494,9 +12893,9 @@
                 <a:solidFill>
                   <a:schemeClr val="tx2"/>
                 </a:solidFill>
-                <a:latin typeface="BIZ UDPゴシック" pitchFamily="34" charset="0"/>
-                <a:ea typeface="BIZ UDPゴシック" pitchFamily="34" charset="-122"/>
-                <a:cs typeface="BIZ UDPゴシック" pitchFamily="34" charset="-120"/>
+                <a:latin typeface="Noto Sans JP Print" pitchFamily="34" charset="0"/>
+                <a:ea typeface="Noto Sans JP Print" pitchFamily="34" charset="-122"/>
+                <a:cs typeface="Noto Sans JP Print" pitchFamily="34" charset="-120"/>
               </a:rPr>
               <a:t>子どもの心拍数は別もの</a:t>
             </a:r>
@@ -12533,11 +12932,28 @@
                 <a:solidFill>
                   <a:schemeClr val="tx1"/>
                 </a:solidFill>
-                <a:latin typeface="BIZ UDPゴシック" pitchFamily="34" charset="0"/>
-                <a:ea typeface="BIZ UDPゴシック" pitchFamily="34" charset="-122"/>
-                <a:cs typeface="BIZ UDPゴシック" pitchFamily="34" charset="-120"/>
-              </a:rPr>
-              <a:t>大人向けの「220−年齢」の式は当てはまらない</a:t>
+                <a:latin typeface="Noto Sans JP Print" pitchFamily="34" charset="0"/>
+                <a:ea typeface="Noto Sans JP Print" pitchFamily="34" charset="-122"/>
+                <a:cs typeface="Noto Sans JP Print" pitchFamily="34" charset="-120"/>
+              </a:rPr>
+              <a:t>大人向けの「220−年齢」の式は</a:t>
+            </a:r>
+            <a:endParaRPr lang="en-US" sz="1500" dirty="0"/>
+          </a:p>
+          <a:p>
+            <a:pPr indent="0" marL="0">
+              <a:buNone/>
+            </a:pPr>
+            <a:r>
+              <a:rPr lang="en-US" sz="1500" dirty="0">
+                <a:solidFill>
+                  <a:schemeClr val="tx1"/>
+                </a:solidFill>
+                <a:latin typeface="Noto Sans JP Print" pitchFamily="34" charset="0"/>
+                <a:ea typeface="Noto Sans JP Print" pitchFamily="34" charset="-122"/>
+                <a:cs typeface="Noto Sans JP Print" pitchFamily="34" charset="-120"/>
+              </a:rPr>
+              <a:t>当てはまらない</a:t>
             </a:r>
             <a:endParaRPr lang="en-US" sz="1500" dirty="0"/>
           </a:p>
@@ -12573,8 +12989,11 @@
             <a:lvl1pPr>
               <a:defRPr sz="1100">
                 <a:solidFill>
-                  <a:srgbClr val="6B7A90"/>
-                </a:solidFill>
+                  <a:srgbClr val="7C828D"/>
+                </a:solidFill>
+                <a:latin typeface="Noto Sans JP Print Black"/>
+                <a:ea typeface="Noto Sans JP Print Black"/>
+                <a:cs typeface="Noto Sans JP Print Black"/>
               </a:defRPr>
             </a:lvl1pPr>
           </a:lstStyle>
@@ -12623,7 +13042,7 @@
         </p:nvSpPr>
         <p:spPr>
           <a:xfrm>
-            <a:off x="548640" y="320040"/>
+            <a:off x="548640" y="274320"/>
             <a:ext cx="7315200" cy="320040"/>
           </a:xfrm>
           <a:prstGeom prst="rect">
@@ -12661,8 +13080,8 @@
         </p:nvSpPr>
         <p:spPr>
           <a:xfrm>
-            <a:off x="548640" y="685800"/>
-            <a:ext cx="11064240" cy="1143000"/>
+            <a:off x="548640" y="594360"/>
+            <a:ext cx="11064240" cy="1325880"/>
           </a:xfrm>
           <a:prstGeom prst="rect">
             <a:avLst/>
@@ -12675,17 +13094,43 @@
           <a:lstStyle/>
           <a:p>
             <a:pPr algn="l" indent="0" marL="0">
-              <a:buNone/>
-            </a:pPr>
-            <a:r>
-              <a:rPr lang="en-US" sz="3000" b="1" dirty="0">
+              <a:lnSpc>
+                <a:spcPct val="90000"/>
+              </a:lnSpc>
+              <a:buNone/>
+            </a:pPr>
+            <a:r>
+              <a:rPr lang="en-US" sz="3600" dirty="0">
                 <a:solidFill>
                   <a:schemeClr val="tx2"/>
                 </a:solidFill>
-              </a:rPr>
-              <a:t>嫌いになる理由は「止まれない」と「目的がない」</a:t>
-            </a:r>
-            <a:endParaRPr lang="en-US" sz="3000" dirty="0"/>
+                <a:latin typeface="Noto Sans JP Print Black" pitchFamily="34" charset="0"/>
+                <a:ea typeface="Noto Sans JP Print Black" pitchFamily="34" charset="-122"/>
+                <a:cs typeface="Noto Sans JP Print Black" pitchFamily="34" charset="-120"/>
+              </a:rPr>
+              <a:t>嫌いになる理由は</a:t>
+            </a:r>
+            <a:endParaRPr lang="en-US" sz="3600" dirty="0"/>
+          </a:p>
+          <a:p>
+            <a:pPr algn="l" indent="0" marL="0">
+              <a:lnSpc>
+                <a:spcPct val="90000"/>
+              </a:lnSpc>
+              <a:buNone/>
+            </a:pPr>
+            <a:r>
+              <a:rPr lang="en-US" sz="3600" dirty="0">
+                <a:solidFill>
+                  <a:schemeClr val="tx2"/>
+                </a:solidFill>
+                <a:latin typeface="Noto Sans JP Print Black" pitchFamily="34" charset="0"/>
+                <a:ea typeface="Noto Sans JP Print Black" pitchFamily="34" charset="-122"/>
+                <a:cs typeface="Noto Sans JP Print Black" pitchFamily="34" charset="-120"/>
+              </a:rPr>
+              <a:t>「止まれない」と「目的がない」</a:t>
+            </a:r>
+            <a:endParaRPr lang="en-US" sz="3600" dirty="0"/>
           </a:p>
         </p:txBody>
       </p:sp>
@@ -12702,7 +13147,7 @@
           </a:xfrm>
           <a:prstGeom prst="roundRect">
             <a:avLst>
-              <a:gd name="adj" fmla="val 6316"/>
+              <a:gd name="adj" fmla="val 2632"/>
             </a:avLst>
           </a:prstGeom>
           <a:solidFill>
@@ -12770,9 +13215,9 @@
                 <a:solidFill>
                   <a:schemeClr val="bg1"/>
                 </a:solidFill>
-                <a:latin typeface="BIZ UDPゴシック" pitchFamily="34" charset="0"/>
-                <a:ea typeface="BIZ UDPゴシック" pitchFamily="34" charset="-122"/>
-                <a:cs typeface="BIZ UDPゴシック" pitchFamily="34" charset="-120"/>
+                <a:latin typeface="Noto Sans JP Print Black" pitchFamily="34" charset="0"/>
+                <a:ea typeface="Noto Sans JP Print Black" pitchFamily="34" charset="-122"/>
+                <a:cs typeface="Noto Sans JP Print Black" pitchFamily="34" charset="-120"/>
               </a:rPr>
               <a:t>1</a:t>
             </a:r>
@@ -12809,9 +13254,9 @@
                 <a:solidFill>
                   <a:schemeClr val="accent4"/>
                 </a:solidFill>
-                <a:latin typeface="BIZ UDPゴシック" pitchFamily="34" charset="0"/>
-                <a:ea typeface="BIZ UDPゴシック" pitchFamily="34" charset="-122"/>
-                <a:cs typeface="BIZ UDPゴシック" pitchFamily="34" charset="-120"/>
+                <a:latin typeface="Noto Sans JP Print" pitchFamily="34" charset="0"/>
+                <a:ea typeface="Noto Sans JP Print" pitchFamily="34" charset="-122"/>
+                <a:cs typeface="Noto Sans JP Print" pitchFamily="34" charset="-120"/>
               </a:rPr>
               <a:t>苦しくても、止まれない</a:t>
             </a:r>
@@ -12857,7 +13302,7 @@
           </a:xfrm>
           <a:prstGeom prst="roundRect">
             <a:avLst>
-              <a:gd name="adj" fmla="val 6316"/>
+              <a:gd name="adj" fmla="val 2632"/>
             </a:avLst>
           </a:prstGeom>
           <a:solidFill>
@@ -12900,9 +13345,9 @@
                 <a:solidFill>
                   <a:schemeClr val="accent1"/>
                 </a:solidFill>
-                <a:latin typeface="BIZ UDPゴシック" pitchFamily="34" charset="0"/>
-                <a:ea typeface="BIZ UDPゴシック" pitchFamily="34" charset="-122"/>
-                <a:cs typeface="BIZ UDPゴシック" pitchFamily="34" charset="-120"/>
+                <a:latin typeface="Noto Sans JP Print" pitchFamily="34" charset="0"/>
+                <a:ea typeface="Noto Sans JP Print" pitchFamily="34" charset="-122"/>
+                <a:cs typeface="Noto Sans JP Print" pitchFamily="34" charset="-120"/>
               </a:rPr>
               <a:t>きつくなったら、</a:t>
             </a:r>
@@ -12917,9 +13362,9 @@
                 <a:solidFill>
                   <a:schemeClr val="accent1"/>
                 </a:solidFill>
-                <a:latin typeface="BIZ UDPゴシック" pitchFamily="34" charset="0"/>
-                <a:ea typeface="BIZ UDPゴシック" pitchFamily="34" charset="-122"/>
-                <a:cs typeface="BIZ UDPゴシック" pitchFamily="34" charset="-120"/>
+                <a:latin typeface="Noto Sans JP Print" pitchFamily="34" charset="0"/>
+                <a:ea typeface="Noto Sans JP Print" pitchFamily="34" charset="-122"/>
+                <a:cs typeface="Noto Sans JP Print" pitchFamily="34" charset="-120"/>
               </a:rPr>
               <a:t>いつでも止まっていい</a:t>
             </a:r>
@@ -12940,7 +13385,7 @@
           </a:xfrm>
           <a:prstGeom prst="roundRect">
             <a:avLst>
-              <a:gd name="adj" fmla="val 6316"/>
+              <a:gd name="adj" fmla="val 2632"/>
             </a:avLst>
           </a:prstGeom>
           <a:solidFill>
@@ -13008,9 +13453,9 @@
                 <a:solidFill>
                   <a:schemeClr val="bg1"/>
                 </a:solidFill>
-                <a:latin typeface="BIZ UDPゴシック" pitchFamily="34" charset="0"/>
-                <a:ea typeface="BIZ UDPゴシック" pitchFamily="34" charset="-122"/>
-                <a:cs typeface="BIZ UDPゴシック" pitchFamily="34" charset="-120"/>
+                <a:latin typeface="Noto Sans JP Print Black" pitchFamily="34" charset="0"/>
+                <a:ea typeface="Noto Sans JP Print Black" pitchFamily="34" charset="-122"/>
+                <a:cs typeface="Noto Sans JP Print Black" pitchFamily="34" charset="-120"/>
               </a:rPr>
               <a:t>2</a:t>
             </a:r>
@@ -13047,9 +13492,9 @@
                 <a:solidFill>
                   <a:schemeClr val="accent4"/>
                 </a:solidFill>
-                <a:latin typeface="BIZ UDPゴシック" pitchFamily="34" charset="0"/>
-                <a:ea typeface="BIZ UDPゴシック" pitchFamily="34" charset="-122"/>
-                <a:cs typeface="BIZ UDPゴシック" pitchFamily="34" charset="-120"/>
+                <a:latin typeface="Noto Sans JP Print" pitchFamily="34" charset="0"/>
+                <a:ea typeface="Noto Sans JP Print" pitchFamily="34" charset="-122"/>
+                <a:cs typeface="Noto Sans JP Print" pitchFamily="34" charset="-120"/>
               </a:rPr>
               <a:t>走る目的がない</a:t>
             </a:r>
@@ -13095,7 +13540,7 @@
           </a:xfrm>
           <a:prstGeom prst="roundRect">
             <a:avLst>
-              <a:gd name="adj" fmla="val 6316"/>
+              <a:gd name="adj" fmla="val 2632"/>
             </a:avLst>
           </a:prstGeom>
           <a:solidFill>
@@ -13138,9 +13583,9 @@
                 <a:solidFill>
                   <a:schemeClr val="accent1"/>
                 </a:solidFill>
-                <a:latin typeface="BIZ UDPゴシック" pitchFamily="34" charset="0"/>
-                <a:ea typeface="BIZ UDPゴシック" pitchFamily="34" charset="-122"/>
-                <a:cs typeface="BIZ UDPゴシック" pitchFamily="34" charset="-120"/>
+                <a:latin typeface="Noto Sans JP Print" pitchFamily="34" charset="0"/>
+                <a:ea typeface="Noto Sans JP Print" pitchFamily="34" charset="-122"/>
+                <a:cs typeface="Noto Sans JP Print" pitchFamily="34" charset="-120"/>
               </a:rPr>
               <a:t>走る目的を</a:t>
             </a:r>
@@ -13155,9 +13600,9 @@
                 <a:solidFill>
                   <a:schemeClr val="accent1"/>
                 </a:solidFill>
-                <a:latin typeface="BIZ UDPゴシック" pitchFamily="34" charset="0"/>
-                <a:ea typeface="BIZ UDPゴシック" pitchFamily="34" charset="-122"/>
-                <a:cs typeface="BIZ UDPゴシック" pitchFamily="34" charset="-120"/>
+                <a:latin typeface="Noto Sans JP Print" pitchFamily="34" charset="0"/>
+                <a:ea typeface="Noto Sans JP Print" pitchFamily="34" charset="-122"/>
+                <a:cs typeface="Noto Sans JP Print" pitchFamily="34" charset="-120"/>
               </a:rPr>
               <a:t>つくる</a:t>
             </a:r>
@@ -13195,8 +13640,11 @@
             <a:lvl1pPr>
               <a:defRPr sz="1100">
                 <a:solidFill>
-                  <a:srgbClr val="6B7A90"/>
-                </a:solidFill>
+                  <a:srgbClr val="7C828D"/>
+                </a:solidFill>
+                <a:latin typeface="Noto Sans JP Print Black"/>
+                <a:ea typeface="Noto Sans JP Print Black"/>
+                <a:cs typeface="Noto Sans JP Print Black"/>
               </a:defRPr>
             </a:lvl1pPr>
           </a:lstStyle>
@@ -13245,7 +13693,7 @@
         </p:nvSpPr>
         <p:spPr>
           <a:xfrm>
-            <a:off x="548640" y="320040"/>
+            <a:off x="548640" y="274320"/>
             <a:ext cx="7315200" cy="320040"/>
           </a:xfrm>
           <a:prstGeom prst="rect">
@@ -13283,8 +13731,8 @@
         </p:nvSpPr>
         <p:spPr>
           <a:xfrm>
-            <a:off x="548640" y="685800"/>
-            <a:ext cx="11064240" cy="1143000"/>
+            <a:off x="548640" y="594360"/>
+            <a:ext cx="11064240" cy="1325880"/>
           </a:xfrm>
           <a:prstGeom prst="rect">
             <a:avLst/>
@@ -13297,17 +13745,43 @@
           <a:lstStyle/>
           <a:p>
             <a:pPr algn="l" indent="0" marL="0">
-              <a:buNone/>
-            </a:pPr>
-            <a:r>
-              <a:rPr lang="en-US" sz="3000" b="1" dirty="0">
+              <a:lnSpc>
+                <a:spcPct val="90000"/>
+              </a:lnSpc>
+              <a:buNone/>
+            </a:pPr>
+            <a:r>
+              <a:rPr lang="en-US" sz="3600" dirty="0">
                 <a:solidFill>
                   <a:schemeClr val="tx2"/>
                 </a:solidFill>
-              </a:rPr>
-              <a:t>原則は「ゆっくり・短く・選べる・ためる」</a:t>
-            </a:r>
-            <a:endParaRPr lang="en-US" sz="3000" dirty="0"/>
+                <a:latin typeface="Noto Sans JP Print Black" pitchFamily="34" charset="0"/>
+                <a:ea typeface="Noto Sans JP Print Black" pitchFamily="34" charset="-122"/>
+                <a:cs typeface="Noto Sans JP Print Black" pitchFamily="34" charset="-120"/>
+              </a:rPr>
+              <a:t>原則は</a:t>
+            </a:r>
+            <a:endParaRPr lang="en-US" sz="3600" dirty="0"/>
+          </a:p>
+          <a:p>
+            <a:pPr algn="l" indent="0" marL="0">
+              <a:lnSpc>
+                <a:spcPct val="90000"/>
+              </a:lnSpc>
+              <a:buNone/>
+            </a:pPr>
+            <a:r>
+              <a:rPr lang="en-US" sz="3600" dirty="0">
+                <a:solidFill>
+                  <a:schemeClr val="tx2"/>
+                </a:solidFill>
+                <a:latin typeface="Noto Sans JP Print Black" pitchFamily="34" charset="0"/>
+                <a:ea typeface="Noto Sans JP Print Black" pitchFamily="34" charset="-122"/>
+                <a:cs typeface="Noto Sans JP Print Black" pitchFamily="34" charset="-120"/>
+              </a:rPr>
+              <a:t>「ゆっくり・短く・選べる・ためる」</a:t>
+            </a:r>
+            <a:endParaRPr lang="en-US" sz="3600" dirty="0"/>
           </a:p>
         </p:txBody>
       </p:sp>
@@ -13324,7 +13798,7 @@
           </a:xfrm>
           <a:prstGeom prst="roundRect">
             <a:avLst>
-              <a:gd name="adj" fmla="val 4211"/>
+              <a:gd name="adj" fmla="val 1754"/>
             </a:avLst>
           </a:prstGeom>
           <a:solidFill>
@@ -13392,9 +13866,9 @@
                 <a:solidFill>
                   <a:schemeClr val="bg1"/>
                 </a:solidFill>
-                <a:latin typeface="BIZ UDPゴシック" pitchFamily="34" charset="0"/>
-                <a:ea typeface="BIZ UDPゴシック" pitchFamily="34" charset="-122"/>
-                <a:cs typeface="BIZ UDPゴシック" pitchFamily="34" charset="-120"/>
+                <a:latin typeface="Noto Sans JP Print Black" pitchFamily="34" charset="0"/>
+                <a:ea typeface="Noto Sans JP Print Black" pitchFamily="34" charset="-122"/>
+                <a:cs typeface="Noto Sans JP Print Black" pitchFamily="34" charset="-120"/>
               </a:rPr>
               <a:t>1</a:t>
             </a:r>
@@ -13431,9 +13905,9 @@
                 <a:solidFill>
                   <a:schemeClr val="tx2"/>
                 </a:solidFill>
-                <a:latin typeface="BIZ UDPゴシック" pitchFamily="34" charset="0"/>
-                <a:ea typeface="BIZ UDPゴシック" pitchFamily="34" charset="-122"/>
-                <a:cs typeface="BIZ UDPゴシック" pitchFamily="34" charset="-120"/>
+                <a:latin typeface="Noto Sans JP Print" pitchFamily="34" charset="0"/>
+                <a:ea typeface="Noto Sans JP Print" pitchFamily="34" charset="-122"/>
+                <a:cs typeface="Noto Sans JP Print" pitchFamily="34" charset="-120"/>
               </a:rPr>
               <a:t>ゆっくり</a:t>
             </a:r>
@@ -13470,9 +13944,9 @@
                 <a:solidFill>
                   <a:schemeClr val="tx1"/>
                 </a:solidFill>
-                <a:latin typeface="BIZ UDPゴシック" pitchFamily="34" charset="0"/>
-                <a:ea typeface="BIZ UDPゴシック" pitchFamily="34" charset="-122"/>
-                <a:cs typeface="BIZ UDPゴシック" pitchFamily="34" charset="-120"/>
+                <a:latin typeface="Noto Sans JP Print" pitchFamily="34" charset="0"/>
+                <a:ea typeface="Noto Sans JP Print" pitchFamily="34" charset="-122"/>
+                <a:cs typeface="Noto Sans JP Print" pitchFamily="34" charset="-120"/>
               </a:rPr>
               <a:t>おしゃべりできる</a:t>
             </a:r>
@@ -13487,9 +13961,9 @@
                 <a:solidFill>
                   <a:schemeClr val="tx1"/>
                 </a:solidFill>
-                <a:latin typeface="BIZ UDPゴシック" pitchFamily="34" charset="0"/>
-                <a:ea typeface="BIZ UDPゴシック" pitchFamily="34" charset="-122"/>
-                <a:cs typeface="BIZ UDPゴシック" pitchFamily="34" charset="-120"/>
+                <a:latin typeface="Noto Sans JP Print" pitchFamily="34" charset="0"/>
+                <a:ea typeface="Noto Sans JP Print" pitchFamily="34" charset="-122"/>
+                <a:cs typeface="Noto Sans JP Print" pitchFamily="34" charset="-120"/>
               </a:rPr>
               <a:t>速さで</a:t>
             </a:r>
@@ -13510,7 +13984,7 @@
           </a:xfrm>
           <a:prstGeom prst="roundRect">
             <a:avLst>
-              <a:gd name="adj" fmla="val 4211"/>
+              <a:gd name="adj" fmla="val 1754"/>
             </a:avLst>
           </a:prstGeom>
           <a:solidFill>
@@ -13578,9 +14052,9 @@
                 <a:solidFill>
                   <a:schemeClr val="bg1"/>
                 </a:solidFill>
-                <a:latin typeface="BIZ UDPゴシック" pitchFamily="34" charset="0"/>
-                <a:ea typeface="BIZ UDPゴシック" pitchFamily="34" charset="-122"/>
-                <a:cs typeface="BIZ UDPゴシック" pitchFamily="34" charset="-120"/>
+                <a:latin typeface="Noto Sans JP Print Black" pitchFamily="34" charset="0"/>
+                <a:ea typeface="Noto Sans JP Print Black" pitchFamily="34" charset="-122"/>
+                <a:cs typeface="Noto Sans JP Print Black" pitchFamily="34" charset="-120"/>
               </a:rPr>
               <a:t>2</a:t>
             </a:r>
@@ -13617,9 +14091,9 @@
                 <a:solidFill>
                   <a:schemeClr val="tx2"/>
                 </a:solidFill>
-                <a:latin typeface="BIZ UDPゴシック" pitchFamily="34" charset="0"/>
-                <a:ea typeface="BIZ UDPゴシック" pitchFamily="34" charset="-122"/>
-                <a:cs typeface="BIZ UDPゴシック" pitchFamily="34" charset="-120"/>
+                <a:latin typeface="Noto Sans JP Print" pitchFamily="34" charset="0"/>
+                <a:ea typeface="Noto Sans JP Print" pitchFamily="34" charset="-122"/>
+                <a:cs typeface="Noto Sans JP Print" pitchFamily="34" charset="-120"/>
               </a:rPr>
               <a:t>短く</a:t>
             </a:r>
@@ -13656,9 +14130,9 @@
                 <a:solidFill>
                   <a:schemeClr val="tx1"/>
                 </a:solidFill>
-                <a:latin typeface="BIZ UDPゴシック" pitchFamily="34" charset="0"/>
-                <a:ea typeface="BIZ UDPゴシック" pitchFamily="34" charset="-122"/>
-                <a:cs typeface="BIZ UDPゴシック" pitchFamily="34" charset="-120"/>
+                <a:latin typeface="Noto Sans JP Print" pitchFamily="34" charset="0"/>
+                <a:ea typeface="Noto Sans JP Print" pitchFamily="34" charset="-122"/>
+                <a:cs typeface="Noto Sans JP Print" pitchFamily="34" charset="-120"/>
               </a:rPr>
               <a:t>5分程度から始めて</a:t>
             </a:r>
@@ -13673,9 +14147,9 @@
                 <a:solidFill>
                   <a:schemeClr val="tx1"/>
                 </a:solidFill>
-                <a:latin typeface="BIZ UDPゴシック" pitchFamily="34" charset="0"/>
-                <a:ea typeface="BIZ UDPゴシック" pitchFamily="34" charset="-122"/>
-                <a:cs typeface="BIZ UDPゴシック" pitchFamily="34" charset="-120"/>
+                <a:latin typeface="Noto Sans JP Print" pitchFamily="34" charset="0"/>
+                <a:ea typeface="Noto Sans JP Print" pitchFamily="34" charset="-122"/>
+                <a:cs typeface="Noto Sans JP Print" pitchFamily="34" charset="-120"/>
               </a:rPr>
               <a:t>少しずつ伸ばす</a:t>
             </a:r>
@@ -13696,7 +14170,7 @@
           </a:xfrm>
           <a:prstGeom prst="roundRect">
             <a:avLst>
-              <a:gd name="adj" fmla="val 4211"/>
+              <a:gd name="adj" fmla="val 1754"/>
             </a:avLst>
           </a:prstGeom>
           <a:solidFill>
@@ -13764,9 +14238,9 @@
                 <a:solidFill>
                   <a:schemeClr val="bg1"/>
                 </a:solidFill>
-                <a:latin typeface="BIZ UDPゴシック" pitchFamily="34" charset="0"/>
-                <a:ea typeface="BIZ UDPゴシック" pitchFamily="34" charset="-122"/>
-                <a:cs typeface="BIZ UDPゴシック" pitchFamily="34" charset="-120"/>
+                <a:latin typeface="Noto Sans JP Print Black" pitchFamily="34" charset="0"/>
+                <a:ea typeface="Noto Sans JP Print Black" pitchFamily="34" charset="-122"/>
+                <a:cs typeface="Noto Sans JP Print Black" pitchFamily="34" charset="-120"/>
               </a:rPr>
               <a:t>3</a:t>
             </a:r>
@@ -13803,9 +14277,9 @@
                 <a:solidFill>
                   <a:schemeClr val="tx2"/>
                 </a:solidFill>
-                <a:latin typeface="BIZ UDPゴシック" pitchFamily="34" charset="0"/>
-                <a:ea typeface="BIZ UDPゴシック" pitchFamily="34" charset="-122"/>
-                <a:cs typeface="BIZ UDPゴシック" pitchFamily="34" charset="-120"/>
+                <a:latin typeface="Noto Sans JP Print" pitchFamily="34" charset="0"/>
+                <a:ea typeface="Noto Sans JP Print" pitchFamily="34" charset="-122"/>
+                <a:cs typeface="Noto Sans JP Print" pitchFamily="34" charset="-120"/>
               </a:rPr>
               <a:t>選べる</a:t>
             </a:r>
@@ -13842,9 +14316,9 @@
                 <a:solidFill>
                   <a:schemeClr val="tx1"/>
                 </a:solidFill>
-                <a:latin typeface="BIZ UDPゴシック" pitchFamily="34" charset="0"/>
-                <a:ea typeface="BIZ UDPゴシック" pitchFamily="34" charset="-122"/>
-                <a:cs typeface="BIZ UDPゴシック" pitchFamily="34" charset="-120"/>
+                <a:latin typeface="Noto Sans JP Print" pitchFamily="34" charset="0"/>
+                <a:ea typeface="Noto Sans JP Print" pitchFamily="34" charset="-122"/>
+                <a:cs typeface="Noto Sans JP Print" pitchFamily="34" charset="-120"/>
               </a:rPr>
               <a:t>ペース・コース・</a:t>
             </a:r>
@@ -13859,9 +14333,9 @@
                 <a:solidFill>
                   <a:schemeClr val="tx1"/>
                 </a:solidFill>
-                <a:latin typeface="BIZ UDPゴシック" pitchFamily="34" charset="0"/>
-                <a:ea typeface="BIZ UDPゴシック" pitchFamily="34" charset="-122"/>
-                <a:cs typeface="BIZ UDPゴシック" pitchFamily="34" charset="-120"/>
+                <a:latin typeface="Noto Sans JP Print" pitchFamily="34" charset="0"/>
+                <a:ea typeface="Noto Sans JP Print" pitchFamily="34" charset="-122"/>
+                <a:cs typeface="Noto Sans JP Print" pitchFamily="34" charset="-120"/>
               </a:rPr>
               <a:t>歩くかを自分で選ぶ</a:t>
             </a:r>
@@ -13882,7 +14356,7 @@
           </a:xfrm>
           <a:prstGeom prst="roundRect">
             <a:avLst>
-              <a:gd name="adj" fmla="val 4211"/>
+              <a:gd name="adj" fmla="val 1754"/>
             </a:avLst>
           </a:prstGeom>
           <a:solidFill>
@@ -13950,9 +14424,9 @@
                 <a:solidFill>
                   <a:schemeClr val="bg1"/>
                 </a:solidFill>
-                <a:latin typeface="BIZ UDPゴシック" pitchFamily="34" charset="0"/>
-                <a:ea typeface="BIZ UDPゴシック" pitchFamily="34" charset="-122"/>
-                <a:cs typeface="BIZ UDPゴシック" pitchFamily="34" charset="-120"/>
+                <a:latin typeface="Noto Sans JP Print Black" pitchFamily="34" charset="0"/>
+                <a:ea typeface="Noto Sans JP Print Black" pitchFamily="34" charset="-122"/>
+                <a:cs typeface="Noto Sans JP Print Black" pitchFamily="34" charset="-120"/>
               </a:rPr>
               <a:t>4</a:t>
             </a:r>
@@ -13989,9 +14463,9 @@
                 <a:solidFill>
                   <a:schemeClr val="tx2"/>
                 </a:solidFill>
-                <a:latin typeface="BIZ UDPゴシック" pitchFamily="34" charset="0"/>
-                <a:ea typeface="BIZ UDPゴシック" pitchFamily="34" charset="-122"/>
-                <a:cs typeface="BIZ UDPゴシック" pitchFamily="34" charset="-120"/>
+                <a:latin typeface="Noto Sans JP Print" pitchFamily="34" charset="0"/>
+                <a:ea typeface="Noto Sans JP Print" pitchFamily="34" charset="-122"/>
+                <a:cs typeface="Noto Sans JP Print" pitchFamily="34" charset="-120"/>
               </a:rPr>
               <a:t>ためる</a:t>
             </a:r>
@@ -14028,9 +14502,9 @@
                 <a:solidFill>
                   <a:schemeClr val="tx1"/>
                 </a:solidFill>
-                <a:latin typeface="BIZ UDPゴシック" pitchFamily="34" charset="0"/>
-                <a:ea typeface="BIZ UDPゴシック" pitchFamily="34" charset="-122"/>
-                <a:cs typeface="BIZ UDPゴシック" pitchFamily="34" charset="-120"/>
+                <a:latin typeface="Noto Sans JP Print" pitchFamily="34" charset="0"/>
+                <a:ea typeface="Noto Sans JP Print" pitchFamily="34" charset="-122"/>
+                <a:cs typeface="Noto Sans JP Print" pitchFamily="34" charset="-120"/>
               </a:rPr>
               <a:t>走った距離や時間を</a:t>
             </a:r>
@@ -14045,9 +14519,9 @@
                 <a:solidFill>
                   <a:schemeClr val="tx1"/>
                 </a:solidFill>
-                <a:latin typeface="BIZ UDPゴシック" pitchFamily="34" charset="0"/>
-                <a:ea typeface="BIZ UDPゴシック" pitchFamily="34" charset="-122"/>
-                <a:cs typeface="BIZ UDPゴシック" pitchFamily="34" charset="-120"/>
+                <a:latin typeface="Noto Sans JP Print" pitchFamily="34" charset="0"/>
+                <a:ea typeface="Noto Sans JP Print" pitchFamily="34" charset="-122"/>
+                <a:cs typeface="Noto Sans JP Print" pitchFamily="34" charset="-120"/>
               </a:rPr>
               <a:t>記録して積み上げる</a:t>
             </a:r>
@@ -14085,8 +14559,11 @@
             <a:lvl1pPr>
               <a:defRPr sz="1100">
                 <a:solidFill>
-                  <a:srgbClr val="6B7A90"/>
-                </a:solidFill>
+                  <a:srgbClr val="7C828D"/>
+                </a:solidFill>
+                <a:latin typeface="Noto Sans JP Print Black"/>
+                <a:ea typeface="Noto Sans JP Print Black"/>
+                <a:cs typeface="Noto Sans JP Print Black"/>
               </a:defRPr>
             </a:lvl1pPr>
           </a:lstStyle>
@@ -14135,7 +14612,7 @@
         </p:nvSpPr>
         <p:spPr>
           <a:xfrm>
-            <a:off x="548640" y="320040"/>
+            <a:off x="548640" y="274320"/>
             <a:ext cx="7315200" cy="320040"/>
           </a:xfrm>
           <a:prstGeom prst="rect">
@@ -14173,8 +14650,8 @@
         </p:nvSpPr>
         <p:spPr>
           <a:xfrm>
-            <a:off x="548640" y="685800"/>
-            <a:ext cx="11064240" cy="1143000"/>
+            <a:off x="548640" y="594360"/>
+            <a:ext cx="11064240" cy="1325880"/>
           </a:xfrm>
           <a:prstGeom prst="rect">
             <a:avLst/>
@@ -14187,17 +14664,23 @@
           <a:lstStyle/>
           <a:p>
             <a:pPr algn="l" indent="0" marL="0">
-              <a:buNone/>
-            </a:pPr>
-            <a:r>
-              <a:rPr lang="en-US" sz="3000" b="1" dirty="0">
+              <a:lnSpc>
+                <a:spcPct val="90000"/>
+              </a:lnSpc>
+              <a:buNone/>
+            </a:pPr>
+            <a:r>
+              <a:rPr lang="en-US" sz="3600" dirty="0">
                 <a:solidFill>
                   <a:schemeClr val="tx2"/>
                 </a:solidFill>
+                <a:latin typeface="Noto Sans JP Print Black" pitchFamily="34" charset="0"/>
+                <a:ea typeface="Noto Sans JP Print Black" pitchFamily="34" charset="-122"/>
+                <a:cs typeface="Noto Sans JP Print Black" pitchFamily="34" charset="-120"/>
               </a:rPr>
               <a:t>自分の「ちょうどいいペース」を知る</a:t>
             </a:r>
-            <a:endParaRPr lang="en-US" sz="3000" dirty="0"/>
+            <a:endParaRPr lang="en-US" sz="3600" dirty="0"/>
           </a:p>
         </p:txBody>
       </p:sp>
@@ -14214,7 +14697,7 @@
           </a:xfrm>
           <a:prstGeom prst="roundRect">
             <a:avLst>
-              <a:gd name="adj" fmla="val 3117"/>
+              <a:gd name="adj" fmla="val 1299"/>
             </a:avLst>
           </a:prstGeom>
           <a:solidFill>
@@ -14282,9 +14765,9 @@
                 <a:solidFill>
                   <a:schemeClr val="bg1"/>
                 </a:solidFill>
-                <a:latin typeface="BIZ UDPゴシック" pitchFamily="34" charset="0"/>
-                <a:ea typeface="BIZ UDPゴシック" pitchFamily="34" charset="-122"/>
-                <a:cs typeface="BIZ UDPゴシック" pitchFamily="34" charset="-120"/>
+                <a:latin typeface="Noto Sans JP Print Black" pitchFamily="34" charset="0"/>
+                <a:ea typeface="Noto Sans JP Print Black" pitchFamily="34" charset="-122"/>
+                <a:cs typeface="Noto Sans JP Print Black" pitchFamily="34" charset="-120"/>
               </a:rPr>
               <a:t>1</a:t>
             </a:r>
@@ -14321,9 +14804,9 @@
                 <a:solidFill>
                   <a:schemeClr val="tx2"/>
                 </a:solidFill>
-                <a:latin typeface="BIZ UDPゴシック" pitchFamily="34" charset="0"/>
-                <a:ea typeface="BIZ UDPゴシック" pitchFamily="34" charset="-122"/>
-                <a:cs typeface="BIZ UDPゴシック" pitchFamily="34" charset="-120"/>
+                <a:latin typeface="Noto Sans JP Print" pitchFamily="34" charset="0"/>
+                <a:ea typeface="Noto Sans JP Print" pitchFamily="34" charset="-122"/>
+                <a:cs typeface="Noto Sans JP Print" pitchFamily="34" charset="-120"/>
               </a:rPr>
               <a:t>おしゃべり走</a:t>
             </a:r>
@@ -14360,9 +14843,9 @@
                 <a:solidFill>
                   <a:schemeClr val="tx1"/>
                 </a:solidFill>
-                <a:latin typeface="BIZ UDPゴシック" pitchFamily="34" charset="0"/>
-                <a:ea typeface="BIZ UDPゴシック" pitchFamily="34" charset="-122"/>
-                <a:cs typeface="BIZ UDPゴシック" pitchFamily="34" charset="-120"/>
+                <a:latin typeface="Noto Sans JP Print" pitchFamily="34" charset="0"/>
+                <a:ea typeface="Noto Sans JP Print" pitchFamily="34" charset="-122"/>
+                <a:cs typeface="Noto Sans JP Print" pitchFamily="34" charset="-120"/>
               </a:rPr>
               <a:t>2〜3人で、話しながら</a:t>
             </a:r>
@@ -14377,9 +14860,9 @@
                 <a:solidFill>
                   <a:schemeClr val="tx1"/>
                 </a:solidFill>
-                <a:latin typeface="BIZ UDPゴシック" pitchFamily="34" charset="0"/>
-                <a:ea typeface="BIZ UDPゴシック" pitchFamily="34" charset="-122"/>
-                <a:cs typeface="BIZ UDPゴシック" pitchFamily="34" charset="-120"/>
+                <a:latin typeface="Noto Sans JP Print" pitchFamily="34" charset="0"/>
+                <a:ea typeface="Noto Sans JP Print" pitchFamily="34" charset="-122"/>
+                <a:cs typeface="Noto Sans JP Print" pitchFamily="34" charset="-120"/>
               </a:rPr>
               <a:t>走れる速さで。</a:t>
             </a:r>
@@ -14394,9 +14877,9 @@
                 <a:solidFill>
                   <a:schemeClr val="tx1"/>
                 </a:solidFill>
-                <a:latin typeface="BIZ UDPゴシック" pitchFamily="34" charset="0"/>
-                <a:ea typeface="BIZ UDPゴシック" pitchFamily="34" charset="-122"/>
-                <a:cs typeface="BIZ UDPゴシック" pitchFamily="34" charset="-120"/>
+                <a:latin typeface="Noto Sans JP Print" pitchFamily="34" charset="0"/>
+                <a:ea typeface="Noto Sans JP Print" pitchFamily="34" charset="-122"/>
+                <a:cs typeface="Noto Sans JP Print" pitchFamily="34" charset="-120"/>
               </a:rPr>
               <a:t>話せなくなったら</a:t>
             </a:r>
@@ -14411,9 +14894,9 @@
                 <a:solidFill>
                   <a:schemeClr val="tx1"/>
                 </a:solidFill>
-                <a:latin typeface="BIZ UDPゴシック" pitchFamily="34" charset="0"/>
-                <a:ea typeface="BIZ UDPゴシック" pitchFamily="34" charset="-122"/>
-                <a:cs typeface="BIZ UDPゴシック" pitchFamily="34" charset="-120"/>
+                <a:latin typeface="Noto Sans JP Print" pitchFamily="34" charset="0"/>
+                <a:ea typeface="Noto Sans JP Print" pitchFamily="34" charset="-122"/>
+                <a:cs typeface="Noto Sans JP Print" pitchFamily="34" charset="-120"/>
               </a:rPr>
               <a:t>速すぎる合図</a:t>
             </a:r>
@@ -14434,7 +14917,7 @@
           </a:xfrm>
           <a:prstGeom prst="roundRect">
             <a:avLst>
-              <a:gd name="adj" fmla="val 3117"/>
+              <a:gd name="adj" fmla="val 1299"/>
             </a:avLst>
           </a:prstGeom>
           <a:solidFill>
@@ -14502,9 +14985,9 @@
                 <a:solidFill>
                   <a:schemeClr val="bg1"/>
                 </a:solidFill>
-                <a:latin typeface="BIZ UDPゴシック" pitchFamily="34" charset="0"/>
-                <a:ea typeface="BIZ UDPゴシック" pitchFamily="34" charset="-122"/>
-                <a:cs typeface="BIZ UDPゴシック" pitchFamily="34" charset="-120"/>
+                <a:latin typeface="Noto Sans JP Print Black" pitchFamily="34" charset="0"/>
+                <a:ea typeface="Noto Sans JP Print Black" pitchFamily="34" charset="-122"/>
+                <a:cs typeface="Noto Sans JP Print Black" pitchFamily="34" charset="-120"/>
               </a:rPr>
               <a:t>2</a:t>
             </a:r>
@@ -14541,9 +15024,9 @@
                 <a:solidFill>
                   <a:schemeClr val="tx2"/>
                 </a:solidFill>
-                <a:latin typeface="BIZ UDPゴシック" pitchFamily="34" charset="0"/>
-                <a:ea typeface="BIZ UDPゴシック" pitchFamily="34" charset="-122"/>
-                <a:cs typeface="BIZ UDPゴシック" pitchFamily="34" charset="-120"/>
+                <a:latin typeface="Noto Sans JP Print" pitchFamily="34" charset="0"/>
+                <a:ea typeface="Noto Sans JP Print" pitchFamily="34" charset="-122"/>
+                <a:cs typeface="Noto Sans JP Print" pitchFamily="34" charset="-120"/>
               </a:rPr>
               <a:t>ペア走</a:t>
             </a:r>
@@ -14580,9 +15063,9 @@
                 <a:solidFill>
                   <a:schemeClr val="tx1"/>
                 </a:solidFill>
-                <a:latin typeface="BIZ UDPゴシック" pitchFamily="34" charset="0"/>
-                <a:ea typeface="BIZ UDPゴシック" pitchFamily="34" charset="-122"/>
-                <a:cs typeface="BIZ UDPゴシック" pitchFamily="34" charset="-120"/>
+                <a:latin typeface="Noto Sans JP Print" pitchFamily="34" charset="0"/>
+                <a:ea typeface="Noto Sans JP Print" pitchFamily="34" charset="-122"/>
+                <a:cs typeface="Noto Sans JP Print" pitchFamily="34" charset="-120"/>
               </a:rPr>
               <a:t>友達と並んで、</a:t>
             </a:r>
@@ -14597,9 +15080,9 @@
                 <a:solidFill>
                   <a:schemeClr val="tx1"/>
                 </a:solidFill>
-                <a:latin typeface="BIZ UDPゴシック" pitchFamily="34" charset="0"/>
-                <a:ea typeface="BIZ UDPゴシック" pitchFamily="34" charset="-122"/>
-                <a:cs typeface="BIZ UDPゴシック" pitchFamily="34" charset="-120"/>
+                <a:latin typeface="Noto Sans JP Print" pitchFamily="34" charset="0"/>
+                <a:ea typeface="Noto Sans JP Print" pitchFamily="34" charset="-122"/>
+                <a:cs typeface="Noto Sans JP Print" pitchFamily="34" charset="-120"/>
               </a:rPr>
               <a:t>同じペースで。</a:t>
             </a:r>
@@ -14614,9 +15097,9 @@
                 <a:solidFill>
                   <a:schemeClr val="tx1"/>
                 </a:solidFill>
-                <a:latin typeface="BIZ UDPゴシック" pitchFamily="34" charset="0"/>
-                <a:ea typeface="BIZ UDPゴシック" pitchFamily="34" charset="-122"/>
-                <a:cs typeface="BIZ UDPゴシック" pitchFamily="34" charset="-120"/>
+                <a:latin typeface="Noto Sans JP Print" pitchFamily="34" charset="0"/>
+                <a:ea typeface="Noto Sans JP Print" pitchFamily="34" charset="-122"/>
+                <a:cs typeface="Noto Sans JP Print" pitchFamily="34" charset="-120"/>
               </a:rPr>
               <a:t>ペースを合わせるのが目標</a:t>
             </a:r>
@@ -14637,7 +15120,7 @@
           </a:xfrm>
           <a:prstGeom prst="roundRect">
             <a:avLst>
-              <a:gd name="adj" fmla="val 3117"/>
+              <a:gd name="adj" fmla="val 1299"/>
             </a:avLst>
           </a:prstGeom>
           <a:solidFill>
@@ -14705,9 +15188,9 @@
                 <a:solidFill>
                   <a:schemeClr val="bg1"/>
                 </a:solidFill>
-                <a:latin typeface="BIZ UDPゴシック" pitchFamily="34" charset="0"/>
-                <a:ea typeface="BIZ UDPゴシック" pitchFamily="34" charset="-122"/>
-                <a:cs typeface="BIZ UDPゴシック" pitchFamily="34" charset="-120"/>
+                <a:latin typeface="Noto Sans JP Print Black" pitchFamily="34" charset="0"/>
+                <a:ea typeface="Noto Sans JP Print Black" pitchFamily="34" charset="-122"/>
+                <a:cs typeface="Noto Sans JP Print Black" pitchFamily="34" charset="-120"/>
               </a:rPr>
               <a:t>3</a:t>
             </a:r>
@@ -14744,9 +15227,9 @@
                 <a:solidFill>
                   <a:schemeClr val="tx2"/>
                 </a:solidFill>
-                <a:latin typeface="BIZ UDPゴシック" pitchFamily="34" charset="0"/>
-                <a:ea typeface="BIZ UDPゴシック" pitchFamily="34" charset="-122"/>
-                <a:cs typeface="BIZ UDPゴシック" pitchFamily="34" charset="-120"/>
+                <a:latin typeface="Noto Sans JP Print" pitchFamily="34" charset="0"/>
+                <a:ea typeface="Noto Sans JP Print" pitchFamily="34" charset="-122"/>
+                <a:cs typeface="Noto Sans JP Print" pitchFamily="34" charset="-120"/>
               </a:rPr>
               <a:t>脈を測る</a:t>
             </a:r>
@@ -14783,9 +15266,9 @@
                 <a:solidFill>
                   <a:schemeClr val="tx1"/>
                 </a:solidFill>
-                <a:latin typeface="BIZ UDPゴシック" pitchFamily="34" charset="0"/>
-                <a:ea typeface="BIZ UDPゴシック" pitchFamily="34" charset="-122"/>
-                <a:cs typeface="BIZ UDPゴシック" pitchFamily="34" charset="-120"/>
+                <a:latin typeface="Noto Sans JP Print" pitchFamily="34" charset="0"/>
+                <a:ea typeface="Noto Sans JP Print" pitchFamily="34" charset="-122"/>
+                <a:cs typeface="Noto Sans JP Print" pitchFamily="34" charset="-120"/>
               </a:rPr>
               <a:t>走る前と後に</a:t>
             </a:r>
@@ -14800,9 +15283,9 @@
                 <a:solidFill>
                   <a:schemeClr val="tx1"/>
                 </a:solidFill>
-                <a:latin typeface="BIZ UDPゴシック" pitchFamily="34" charset="0"/>
-                <a:ea typeface="BIZ UDPゴシック" pitchFamily="34" charset="-122"/>
-                <a:cs typeface="BIZ UDPゴシック" pitchFamily="34" charset="-120"/>
+                <a:latin typeface="Noto Sans JP Print" pitchFamily="34" charset="0"/>
+                <a:ea typeface="Noto Sans JP Print" pitchFamily="34" charset="-122"/>
+                <a:cs typeface="Noto Sans JP Print" pitchFamily="34" charset="-120"/>
               </a:rPr>
               <a:t>15秒数えて4倍。</a:t>
             </a:r>
@@ -14817,9 +15300,9 @@
                 <a:solidFill>
                   <a:schemeClr val="tx1"/>
                 </a:solidFill>
-                <a:latin typeface="BIZ UDPゴシック" pitchFamily="34" charset="0"/>
-                <a:ea typeface="BIZ UDPゴシック" pitchFamily="34" charset="-122"/>
-                <a:cs typeface="BIZ UDPゴシック" pitchFamily="34" charset="-120"/>
+                <a:latin typeface="Noto Sans JP Print" pitchFamily="34" charset="0"/>
+                <a:ea typeface="Noto Sans JP Print" pitchFamily="34" charset="-122"/>
+                <a:cs typeface="Noto Sans JP Print" pitchFamily="34" charset="-120"/>
               </a:rPr>
               <a:t>自分の体の変化がわかる</a:t>
             </a:r>
@@ -14857,8 +15340,11 @@
             <a:lvl1pPr>
               <a:defRPr sz="1100">
                 <a:solidFill>
-                  <a:srgbClr val="6B7A90"/>
-                </a:solidFill>
+                  <a:srgbClr val="7C828D"/>
+                </a:solidFill>
+                <a:latin typeface="Noto Sans JP Print Black"/>
+                <a:ea typeface="Noto Sans JP Print Black"/>
+                <a:cs typeface="Noto Sans JP Print Black"/>
               </a:defRPr>
             </a:lvl1pPr>
           </a:lstStyle>
@@ -14907,7 +15393,7 @@
         </p:nvSpPr>
         <p:spPr>
           <a:xfrm>
-            <a:off x="548640" y="320040"/>
+            <a:off x="548640" y="274320"/>
             <a:ext cx="7315200" cy="320040"/>
           </a:xfrm>
           <a:prstGeom prst="rect">
@@ -14945,8 +15431,8 @@
         </p:nvSpPr>
         <p:spPr>
           <a:xfrm>
-            <a:off x="548640" y="685800"/>
-            <a:ext cx="11064240" cy="1143000"/>
+            <a:off x="548640" y="594360"/>
+            <a:ext cx="11064240" cy="1325880"/>
           </a:xfrm>
           <a:prstGeom prst="rect">
             <a:avLst/>
@@ -14959,17 +15445,23 @@
           <a:lstStyle/>
           <a:p>
             <a:pPr algn="l" indent="0" marL="0">
-              <a:buNone/>
-            </a:pPr>
-            <a:r>
-              <a:rPr lang="en-US" sz="3000" b="1" dirty="0">
+              <a:lnSpc>
+                <a:spcPct val="90000"/>
+              </a:lnSpc>
+              <a:buNone/>
+            </a:pPr>
+            <a:r>
+              <a:rPr lang="en-US" sz="3600" dirty="0">
                 <a:solidFill>
                   <a:schemeClr val="tx2"/>
                 </a:solidFill>
+                <a:latin typeface="Noto Sans JP Print Black" pitchFamily="34" charset="0"/>
+                <a:ea typeface="Noto Sans JP Print Black" pitchFamily="34" charset="-122"/>
+                <a:cs typeface="Noto Sans JP Print Black" pitchFamily="34" charset="-120"/>
               </a:rPr>
               <a:t>走る目的と、楽しさを足す</a:t>
             </a:r>
-            <a:endParaRPr lang="en-US" sz="3000" dirty="0"/>
+            <a:endParaRPr lang="en-US" sz="3600" dirty="0"/>
           </a:p>
         </p:txBody>
       </p:sp>
@@ -14986,7 +15478,7 @@
           </a:xfrm>
           <a:prstGeom prst="roundRect">
             <a:avLst>
-              <a:gd name="adj" fmla="val 6154"/>
+              <a:gd name="adj" fmla="val 2564"/>
             </a:avLst>
           </a:prstGeom>
           <a:solidFill>
@@ -15054,9 +15546,9 @@
                 <a:solidFill>
                   <a:schemeClr val="bg1"/>
                 </a:solidFill>
-                <a:latin typeface="BIZ UDPゴシック" pitchFamily="34" charset="0"/>
-                <a:ea typeface="BIZ UDPゴシック" pitchFamily="34" charset="-122"/>
-                <a:cs typeface="BIZ UDPゴシック" pitchFamily="34" charset="-120"/>
+                <a:latin typeface="Noto Sans JP Print Black" pitchFamily="34" charset="0"/>
+                <a:ea typeface="Noto Sans JP Print Black" pitchFamily="34" charset="-122"/>
+                <a:cs typeface="Noto Sans JP Print Black" pitchFamily="34" charset="-120"/>
               </a:rPr>
               <a:t>1</a:t>
             </a:r>
@@ -15093,9 +15585,9 @@
                 <a:solidFill>
                   <a:schemeClr val="tx2"/>
                 </a:solidFill>
-                <a:latin typeface="BIZ UDPゴシック" pitchFamily="34" charset="0"/>
-                <a:ea typeface="BIZ UDPゴシック" pitchFamily="34" charset="-122"/>
-                <a:cs typeface="BIZ UDPゴシック" pitchFamily="34" charset="-120"/>
+                <a:latin typeface="Noto Sans JP Print" pitchFamily="34" charset="0"/>
+                <a:ea typeface="Noto Sans JP Print" pitchFamily="34" charset="-122"/>
+                <a:cs typeface="Noto Sans JP Print" pitchFamily="34" charset="-120"/>
               </a:rPr>
               <a:t>ピタリ賞</a:t>
             </a:r>
@@ -15132,9 +15624,9 @@
                 <a:solidFill>
                   <a:schemeClr val="tx1"/>
                 </a:solidFill>
-                <a:latin typeface="BIZ UDPゴシック" pitchFamily="34" charset="0"/>
-                <a:ea typeface="BIZ UDPゴシック" pitchFamily="34" charset="-122"/>
-                <a:cs typeface="BIZ UDPゴシック" pitchFamily="34" charset="-120"/>
+                <a:latin typeface="Noto Sans JP Print" pitchFamily="34" charset="0"/>
+                <a:ea typeface="Noto Sans JP Print" pitchFamily="34" charset="-122"/>
+                <a:cs typeface="Noto Sans JP Print" pitchFamily="34" charset="-120"/>
               </a:rPr>
               <a:t>予想タイムとの差が小さい人が勝ち。</a:t>
             </a:r>
@@ -15149,9 +15641,9 @@
                 <a:solidFill>
                   <a:schemeClr val="tx1"/>
                 </a:solidFill>
-                <a:latin typeface="BIZ UDPゴシック" pitchFamily="34" charset="0"/>
-                <a:ea typeface="BIZ UDPゴシック" pitchFamily="34" charset="-122"/>
-                <a:cs typeface="BIZ UDPゴシック" pitchFamily="34" charset="-120"/>
+                <a:latin typeface="Noto Sans JP Print" pitchFamily="34" charset="0"/>
+                <a:ea typeface="Noto Sans JP Print" pitchFamily="34" charset="-122"/>
+                <a:cs typeface="Noto Sans JP Print" pitchFamily="34" charset="-120"/>
               </a:rPr>
               <a:t>速くなくても勝てる</a:t>
             </a:r>
@@ -15172,7 +15664,7 @@
           </a:xfrm>
           <a:prstGeom prst="roundRect">
             <a:avLst>
-              <a:gd name="adj" fmla="val 6154"/>
+              <a:gd name="adj" fmla="val 2564"/>
             </a:avLst>
           </a:prstGeom>
           <a:solidFill>
@@ -15240,9 +15732,9 @@
                 <a:solidFill>
                   <a:schemeClr val="bg1"/>
                 </a:solidFill>
-                <a:latin typeface="BIZ UDPゴシック" pitchFamily="34" charset="0"/>
-                <a:ea typeface="BIZ UDPゴシック" pitchFamily="34" charset="-122"/>
-                <a:cs typeface="BIZ UDPゴシック" pitchFamily="34" charset="-120"/>
+                <a:latin typeface="Noto Sans JP Print Black" pitchFamily="34" charset="0"/>
+                <a:ea typeface="Noto Sans JP Print Black" pitchFamily="34" charset="-122"/>
+                <a:cs typeface="Noto Sans JP Print Black" pitchFamily="34" charset="-120"/>
               </a:rPr>
               <a:t>2</a:t>
             </a:r>
@@ -15279,9 +15771,9 @@
                 <a:solidFill>
                   <a:schemeClr val="tx2"/>
                 </a:solidFill>
-                <a:latin typeface="BIZ UDPゴシック" pitchFamily="34" charset="0"/>
-                <a:ea typeface="BIZ UDPゴシック" pitchFamily="34" charset="-122"/>
-                <a:cs typeface="BIZ UDPゴシック" pitchFamily="34" charset="-120"/>
+                <a:latin typeface="Noto Sans JP Print" pitchFamily="34" charset="0"/>
+                <a:ea typeface="Noto Sans JP Print" pitchFamily="34" charset="-122"/>
+                <a:cs typeface="Noto Sans JP Print" pitchFamily="34" charset="-120"/>
               </a:rPr>
               <a:t>日本一周マップ</a:t>
             </a:r>
@@ -15318,11 +15810,28 @@
                 <a:solidFill>
                   <a:schemeClr val="tx1"/>
                 </a:solidFill>
-                <a:latin typeface="BIZ UDPゴシック" pitchFamily="34" charset="0"/>
-                <a:ea typeface="BIZ UDPゴシック" pitchFamily="34" charset="-122"/>
-                <a:cs typeface="BIZ UDPゴシック" pitchFamily="34" charset="-120"/>
-              </a:rPr>
-              <a:t>走った距離をクラスで合計し、地図でたどる</a:t>
+                <a:latin typeface="Noto Sans JP Print" pitchFamily="34" charset="0"/>
+                <a:ea typeface="Noto Sans JP Print" pitchFamily="34" charset="-122"/>
+                <a:cs typeface="Noto Sans JP Print" pitchFamily="34" charset="-120"/>
+              </a:rPr>
+              <a:t>走った距離をクラスで合計し、</a:t>
+            </a:r>
+            <a:endParaRPr lang="en-US" sz="1600" dirty="0"/>
+          </a:p>
+          <a:p>
+            <a:pPr indent="0" marL="0">
+              <a:buNone/>
+            </a:pPr>
+            <a:r>
+              <a:rPr lang="en-US" sz="1600" dirty="0">
+                <a:solidFill>
+                  <a:schemeClr val="tx1"/>
+                </a:solidFill>
+                <a:latin typeface="Noto Sans JP Print" pitchFamily="34" charset="0"/>
+                <a:ea typeface="Noto Sans JP Print" pitchFamily="34" charset="-122"/>
+                <a:cs typeface="Noto Sans JP Print" pitchFamily="34" charset="-120"/>
+              </a:rPr>
+              <a:t>地図でたどる</a:t>
             </a:r>
             <a:endParaRPr lang="en-US" sz="1600" dirty="0"/>
           </a:p>
@@ -15341,7 +15850,7 @@
           </a:xfrm>
           <a:prstGeom prst="roundRect">
             <a:avLst>
-              <a:gd name="adj" fmla="val 6154"/>
+              <a:gd name="adj" fmla="val 2564"/>
             </a:avLst>
           </a:prstGeom>
           <a:solidFill>
@@ -15409,9 +15918,9 @@
                 <a:solidFill>
                   <a:schemeClr val="bg1"/>
                 </a:solidFill>
-                <a:latin typeface="BIZ UDPゴシック" pitchFamily="34" charset="0"/>
-                <a:ea typeface="BIZ UDPゴシック" pitchFamily="34" charset="-122"/>
-                <a:cs typeface="BIZ UDPゴシック" pitchFamily="34" charset="-120"/>
+                <a:latin typeface="Noto Sans JP Print Black" pitchFamily="34" charset="0"/>
+                <a:ea typeface="Noto Sans JP Print Black" pitchFamily="34" charset="-122"/>
+                <a:cs typeface="Noto Sans JP Print Black" pitchFamily="34" charset="-120"/>
               </a:rPr>
               <a:t>3</a:t>
             </a:r>
@@ -15448,9 +15957,9 @@
                 <a:solidFill>
                   <a:schemeClr val="tx2"/>
                 </a:solidFill>
-                <a:latin typeface="BIZ UDPゴシック" pitchFamily="34" charset="0"/>
-                <a:ea typeface="BIZ UDPゴシック" pitchFamily="34" charset="-122"/>
-                <a:cs typeface="BIZ UDPゴシック" pitchFamily="34" charset="-120"/>
+                <a:latin typeface="Noto Sans JP Print" pitchFamily="34" charset="0"/>
+                <a:ea typeface="Noto Sans JP Print" pitchFamily="34" charset="-122"/>
+                <a:cs typeface="Noto Sans JP Print" pitchFamily="34" charset="-120"/>
               </a:rPr>
               <a:t>変化のあるコース</a:t>
             </a:r>
@@ -15487,9 +15996,9 @@
                 <a:solidFill>
                   <a:schemeClr val="tx1"/>
                 </a:solidFill>
-                <a:latin typeface="BIZ UDPゴシック" pitchFamily="34" charset="0"/>
-                <a:ea typeface="BIZ UDPゴシック" pitchFamily="34" charset="-122"/>
-                <a:cs typeface="BIZ UDPゴシック" pitchFamily="34" charset="-120"/>
+                <a:latin typeface="Noto Sans JP Print" pitchFamily="34" charset="0"/>
+                <a:ea typeface="Noto Sans JP Print" pitchFamily="34" charset="-122"/>
+                <a:cs typeface="Noto Sans JP Print" pitchFamily="34" charset="-120"/>
               </a:rPr>
               <a:t>坂道・芝生・校舎の周りなど</a:t>
             </a:r>
@@ -15510,7 +16019,7 @@
           </a:xfrm>
           <a:prstGeom prst="roundRect">
             <a:avLst>
-              <a:gd name="adj" fmla="val 6154"/>
+              <a:gd name="adj" fmla="val 2564"/>
             </a:avLst>
           </a:prstGeom>
           <a:solidFill>
@@ -15578,9 +16087,9 @@
                 <a:solidFill>
                   <a:schemeClr val="bg1"/>
                 </a:solidFill>
-                <a:latin typeface="BIZ UDPゴシック" pitchFamily="34" charset="0"/>
-                <a:ea typeface="BIZ UDPゴシック" pitchFamily="34" charset="-122"/>
-                <a:cs typeface="BIZ UDPゴシック" pitchFamily="34" charset="-120"/>
+                <a:latin typeface="Noto Sans JP Print Black" pitchFamily="34" charset="0"/>
+                <a:ea typeface="Noto Sans JP Print Black" pitchFamily="34" charset="-122"/>
+                <a:cs typeface="Noto Sans JP Print Black" pitchFamily="34" charset="-120"/>
               </a:rPr>
               <a:t>4</a:t>
             </a:r>
@@ -15617,9 +16126,9 @@
                 <a:solidFill>
                   <a:schemeClr val="tx2"/>
                 </a:solidFill>
-                <a:latin typeface="BIZ UDPゴシック" pitchFamily="34" charset="0"/>
-                <a:ea typeface="BIZ UDPゴシック" pitchFamily="34" charset="-122"/>
-                <a:cs typeface="BIZ UDPゴシック" pitchFamily="34" charset="-120"/>
+                <a:latin typeface="Noto Sans JP Print" pitchFamily="34" charset="0"/>
+                <a:ea typeface="Noto Sans JP Print" pitchFamily="34" charset="-122"/>
+                <a:cs typeface="Noto Sans JP Print" pitchFamily="34" charset="-120"/>
               </a:rPr>
               <a:t>鬼遊び</a:t>
             </a:r>
@@ -15656,9 +16165,9 @@
                 <a:solidFill>
                   <a:schemeClr val="tx1"/>
                 </a:solidFill>
-                <a:latin typeface="BIZ UDPゴシック" pitchFamily="34" charset="0"/>
-                <a:ea typeface="BIZ UDPゴシック" pitchFamily="34" charset="-122"/>
-                <a:cs typeface="BIZ UDPゴシック" pitchFamily="34" charset="-120"/>
+                <a:latin typeface="Noto Sans JP Print" pitchFamily="34" charset="0"/>
+                <a:ea typeface="Noto Sans JP Print" pitchFamily="34" charset="-122"/>
+                <a:cs typeface="Noto Sans JP Print" pitchFamily="34" charset="-120"/>
               </a:rPr>
               <a:t>鬼ごっこ・しっぽ取りも持続する運動</a:t>
             </a:r>
@@ -15696,8 +16205,11 @@
             <a:lvl1pPr>
               <a:defRPr sz="1100">
                 <a:solidFill>
-                  <a:srgbClr val="6B7A90"/>
-                </a:solidFill>
+                  <a:srgbClr val="7C828D"/>
+                </a:solidFill>
+                <a:latin typeface="Noto Sans JP Print Black"/>
+                <a:ea typeface="Noto Sans JP Print Black"/>
+                <a:cs typeface="Noto Sans JP Print Black"/>
               </a:defRPr>
             </a:lvl1pPr>
           </a:lstStyle>
@@ -15746,7 +16258,7 @@
         </p:nvSpPr>
         <p:spPr>
           <a:xfrm>
-            <a:off x="548640" y="320040"/>
+            <a:off x="548640" y="274320"/>
             <a:ext cx="7315200" cy="320040"/>
           </a:xfrm>
           <a:prstGeom prst="rect">
@@ -15784,8 +16296,8 @@
         </p:nvSpPr>
         <p:spPr>
           <a:xfrm>
-            <a:off x="548640" y="685800"/>
-            <a:ext cx="11064240" cy="1143000"/>
+            <a:off x="548640" y="594360"/>
+            <a:ext cx="11064240" cy="1325880"/>
           </a:xfrm>
           <a:prstGeom prst="rect">
             <a:avLst/>
@@ -15798,17 +16310,43 @@
           <a:lstStyle/>
           <a:p>
             <a:pPr algn="l" indent="0" marL="0">
-              <a:buNone/>
-            </a:pPr>
-            <a:r>
-              <a:rPr lang="en-US" sz="3000" b="1" dirty="0">
+              <a:lnSpc>
+                <a:spcPct val="90000"/>
+              </a:lnSpc>
+              <a:buNone/>
+            </a:pPr>
+            <a:r>
+              <a:rPr lang="en-US" sz="3600" dirty="0">
                 <a:solidFill>
                   <a:schemeClr val="tx2"/>
                 </a:solidFill>
-              </a:rPr>
-              <a:t>順位をつける部門にも、つけない部門にも「理由のある目標」を</a:t>
-            </a:r>
-            <a:endParaRPr lang="en-US" sz="3000" dirty="0"/>
+                <a:latin typeface="Noto Sans JP Print Black" pitchFamily="34" charset="0"/>
+                <a:ea typeface="Noto Sans JP Print Black" pitchFamily="34" charset="-122"/>
+                <a:cs typeface="Noto Sans JP Print Black" pitchFamily="34" charset="-120"/>
+              </a:rPr>
+              <a:t>順位をつける部門にも、つけない部門にも</a:t>
+            </a:r>
+            <a:endParaRPr lang="en-US" sz="3600" dirty="0"/>
+          </a:p>
+          <a:p>
+            <a:pPr algn="l" indent="0" marL="0">
+              <a:lnSpc>
+                <a:spcPct val="90000"/>
+              </a:lnSpc>
+              <a:buNone/>
+            </a:pPr>
+            <a:r>
+              <a:rPr lang="en-US" sz="3600" dirty="0">
+                <a:solidFill>
+                  <a:schemeClr val="tx2"/>
+                </a:solidFill>
+                <a:latin typeface="Noto Sans JP Print Black" pitchFamily="34" charset="0"/>
+                <a:ea typeface="Noto Sans JP Print Black" pitchFamily="34" charset="-122"/>
+                <a:cs typeface="Noto Sans JP Print Black" pitchFamily="34" charset="-120"/>
+              </a:rPr>
+              <a:t>「理由のある目標」を</a:t>
+            </a:r>
+            <a:endParaRPr lang="en-US" sz="3600" dirty="0"/>
           </a:p>
         </p:txBody>
       </p:sp>
@@ -15825,7 +16363,7 @@
           </a:xfrm>
           <a:prstGeom prst="roundRect">
             <a:avLst>
-              <a:gd name="adj" fmla="val 2857"/>
+              <a:gd name="adj" fmla="val 1190"/>
             </a:avLst>
           </a:prstGeom>
           <a:solidFill>
@@ -15868,9 +16406,9 @@
                 <a:solidFill>
                   <a:schemeClr val="tx2"/>
                 </a:solidFill>
-                <a:latin typeface="BIZ UDPゴシック" pitchFamily="34" charset="0"/>
-                <a:ea typeface="BIZ UDPゴシック" pitchFamily="34" charset="-122"/>
-                <a:cs typeface="BIZ UDPゴシック" pitchFamily="34" charset="-120"/>
+                <a:latin typeface="Noto Sans JP Print" pitchFamily="34" charset="0"/>
+                <a:ea typeface="Noto Sans JP Print" pitchFamily="34" charset="-122"/>
+                <a:cs typeface="Noto Sans JP Print" pitchFamily="34" charset="-120"/>
               </a:rPr>
               <a:t>順位をつける部門</a:t>
             </a:r>
@@ -15911,9 +16449,9 @@
                 <a:solidFill>
                   <a:schemeClr val="tx1"/>
                 </a:solidFill>
-                <a:latin typeface="BIZ UDPゴシック" pitchFamily="34" charset="0"/>
-                <a:ea typeface="BIZ UDPゴシック" pitchFamily="34" charset="-122"/>
-                <a:cs typeface="BIZ UDPゴシック" pitchFamily="34" charset="-120"/>
+                <a:latin typeface="Noto Sans JP Print" pitchFamily="34" charset="0"/>
+                <a:ea typeface="Noto Sans JP Print" pitchFamily="34" charset="-122"/>
+                <a:cs typeface="Noto Sans JP Print" pitchFamily="34" charset="-120"/>
               </a:rPr>
               <a:t>自己ベストの更新</a:t>
             </a:r>
@@ -15932,11 +16470,11 @@
                 <a:solidFill>
                   <a:schemeClr val="tx1"/>
                 </a:solidFill>
-                <a:latin typeface="BIZ UDPゴシック" pitchFamily="34" charset="0"/>
-                <a:ea typeface="BIZ UDPゴシック" pitchFamily="34" charset="-122"/>
-                <a:cs typeface="BIZ UDPゴシック" pitchFamily="34" charset="-120"/>
-              </a:rPr>
-              <a:t>ペース配分（前半を抑えて後半に上げる）</a:t>
+                <a:latin typeface="Noto Sans JP Print" pitchFamily="34" charset="0"/>
+                <a:ea typeface="Noto Sans JP Print" pitchFamily="34" charset="-122"/>
+                <a:cs typeface="Noto Sans JP Print" pitchFamily="34" charset="-120"/>
+              </a:rPr>
+              <a:t>ペース配分（後半に上げる）</a:t>
             </a:r>
             <a:endParaRPr lang="en-US" sz="1800" dirty="0"/>
           </a:p>
@@ -15953,11 +16491,11 @@
                 <a:solidFill>
                   <a:schemeClr val="tx1"/>
                 </a:solidFill>
-                <a:latin typeface="BIZ UDPゴシック" pitchFamily="34" charset="0"/>
-                <a:ea typeface="BIZ UDPゴシック" pitchFamily="34" charset="-122"/>
-                <a:cs typeface="BIZ UDPゴシック" pitchFamily="34" charset="-120"/>
-              </a:rPr>
-              <a:t>順位だけでなく「自分の走り」を振り返る</a:t>
+                <a:latin typeface="Noto Sans JP Print" pitchFamily="34" charset="0"/>
+                <a:ea typeface="Noto Sans JP Print" pitchFamily="34" charset="-122"/>
+                <a:cs typeface="Noto Sans JP Print" pitchFamily="34" charset="-120"/>
+              </a:rPr>
+              <a:t>「自分の走り」を振り返る</a:t>
             </a:r>
             <a:endParaRPr lang="en-US" sz="1800" dirty="0"/>
           </a:p>
@@ -15976,7 +16514,7 @@
           </a:xfrm>
           <a:prstGeom prst="roundRect">
             <a:avLst>
-              <a:gd name="adj" fmla="val 2857"/>
+              <a:gd name="adj" fmla="val 1190"/>
             </a:avLst>
           </a:prstGeom>
           <a:solidFill>
@@ -16019,9 +16557,9 @@
                 <a:solidFill>
                   <a:schemeClr val="accent1"/>
                 </a:solidFill>
-                <a:latin typeface="BIZ UDPゴシック" pitchFamily="34" charset="0"/>
-                <a:ea typeface="BIZ UDPゴシック" pitchFamily="34" charset="-122"/>
-                <a:cs typeface="BIZ UDPゴシック" pitchFamily="34" charset="-120"/>
+                <a:latin typeface="Noto Sans JP Print" pitchFamily="34" charset="0"/>
+                <a:ea typeface="Noto Sans JP Print" pitchFamily="34" charset="-122"/>
+                <a:cs typeface="Noto Sans JP Print" pitchFamily="34" charset="-120"/>
               </a:rPr>
               <a:t>順位をつけない部門</a:t>
             </a:r>
@@ -16062,9 +16600,9 @@
                 <a:solidFill>
                   <a:schemeClr val="tx1"/>
                 </a:solidFill>
-                <a:latin typeface="BIZ UDPゴシック" pitchFamily="34" charset="0"/>
-                <a:ea typeface="BIZ UDPゴシック" pitchFamily="34" charset="-122"/>
-                <a:cs typeface="BIZ UDPゴシック" pitchFamily="34" charset="-120"/>
+                <a:latin typeface="Noto Sans JP Print" pitchFamily="34" charset="0"/>
+                <a:ea typeface="Noto Sans JP Print" pitchFamily="34" charset="-122"/>
+                <a:cs typeface="Noto Sans JP Print" pitchFamily="34" charset="-120"/>
               </a:rPr>
               <a:t>予想タイムとの差（ピタリ賞）</a:t>
             </a:r>
@@ -16083,9 +16621,9 @@
                 <a:solidFill>
                   <a:schemeClr val="tx1"/>
                 </a:solidFill>
-                <a:latin typeface="BIZ UDPゴシック" pitchFamily="34" charset="0"/>
-                <a:ea typeface="BIZ UDPゴシック" pitchFamily="34" charset="-122"/>
-                <a:cs typeface="BIZ UDPゴシック" pitchFamily="34" charset="-120"/>
+                <a:latin typeface="Noto Sans JP Print" pitchFamily="34" charset="0"/>
+                <a:ea typeface="Noto Sans JP Print" pitchFamily="34" charset="-122"/>
+                <a:cs typeface="Noto Sans JP Print" pitchFamily="34" charset="-120"/>
               </a:rPr>
               <a:t>止まらずに走れた時間</a:t>
             </a:r>
@@ -16104,9 +16642,9 @@
                 <a:solidFill>
                   <a:schemeClr val="tx1"/>
                 </a:solidFill>
-                <a:latin typeface="BIZ UDPゴシック" pitchFamily="34" charset="0"/>
-                <a:ea typeface="BIZ UDPゴシック" pitchFamily="34" charset="-122"/>
-                <a:cs typeface="BIZ UDPゴシック" pitchFamily="34" charset="-120"/>
+                <a:latin typeface="Noto Sans JP Print" pitchFamily="34" charset="0"/>
+                <a:ea typeface="Noto Sans JP Print" pitchFamily="34" charset="-122"/>
+                <a:cs typeface="Noto Sans JP Print" pitchFamily="34" charset="-120"/>
               </a:rPr>
               <a:t>自分で決めたペースを守れたか</a:t>
             </a:r>
@@ -16144,8 +16682,11 @@
             <a:lvl1pPr>
               <a:defRPr sz="1100">
                 <a:solidFill>
-                  <a:srgbClr val="6B7A90"/>
-                </a:solidFill>
+                  <a:srgbClr val="7C828D"/>
+                </a:solidFill>
+                <a:latin typeface="Noto Sans JP Print Black"/>
+                <a:ea typeface="Noto Sans JP Print Black"/>
+                <a:cs typeface="Noto Sans JP Print Black"/>
               </a:defRPr>
             </a:lvl1pPr>
           </a:lstStyle>
@@ -16194,7 +16735,7 @@
         </p:nvSpPr>
         <p:spPr>
           <a:xfrm>
-            <a:off x="548640" y="320040"/>
+            <a:off x="548640" y="274320"/>
             <a:ext cx="7315200" cy="320040"/>
           </a:xfrm>
           <a:prstGeom prst="rect">
@@ -16232,8 +16773,8 @@
         </p:nvSpPr>
         <p:spPr>
           <a:xfrm>
-            <a:off x="548640" y="685800"/>
-            <a:ext cx="11064240" cy="1143000"/>
+            <a:off x="548640" y="594360"/>
+            <a:ext cx="11064240" cy="1325880"/>
           </a:xfrm>
           <a:prstGeom prst="rect">
             <a:avLst/>
@@ -16246,17 +16787,43 @@
           <a:lstStyle/>
           <a:p>
             <a:pPr algn="l" indent="0" marL="0">
-              <a:buNone/>
-            </a:pPr>
-            <a:r>
-              <a:rPr lang="en-US" sz="3000" b="1" dirty="0">
+              <a:lnSpc>
+                <a:spcPct val="90000"/>
+              </a:lnSpc>
+              <a:buNone/>
+            </a:pPr>
+            <a:r>
+              <a:rPr lang="en-US" sz="3600" dirty="0">
                 <a:solidFill>
                   <a:schemeClr val="tx2"/>
                 </a:solidFill>
-              </a:rPr>
-              <a:t>順位をつけない部門の子が「走ってよかった」と思えるには？</a:t>
-            </a:r>
-            <a:endParaRPr lang="en-US" sz="3000" dirty="0"/>
+                <a:latin typeface="Noto Sans JP Print Black" pitchFamily="34" charset="0"/>
+                <a:ea typeface="Noto Sans JP Print Black" pitchFamily="34" charset="-122"/>
+                <a:cs typeface="Noto Sans JP Print Black" pitchFamily="34" charset="-120"/>
+              </a:rPr>
+              <a:t>順位をつけない部門の子が</a:t>
+            </a:r>
+            <a:endParaRPr lang="en-US" sz="3600" dirty="0"/>
+          </a:p>
+          <a:p>
+            <a:pPr algn="l" indent="0" marL="0">
+              <a:lnSpc>
+                <a:spcPct val="90000"/>
+              </a:lnSpc>
+              <a:buNone/>
+            </a:pPr>
+            <a:r>
+              <a:rPr lang="en-US" sz="3600" dirty="0">
+                <a:solidFill>
+                  <a:schemeClr val="tx2"/>
+                </a:solidFill>
+                <a:latin typeface="Noto Sans JP Print Black" pitchFamily="34" charset="0"/>
+                <a:ea typeface="Noto Sans JP Print Black" pitchFamily="34" charset="-122"/>
+                <a:cs typeface="Noto Sans JP Print Black" pitchFamily="34" charset="-120"/>
+              </a:rPr>
+              <a:t>「走ってよかった」と思えるには？</a:t>
+            </a:r>
+            <a:endParaRPr lang="en-US" sz="3600" dirty="0"/>
           </a:p>
         </p:txBody>
       </p:sp>
@@ -16273,7 +16840,7 @@
           </a:xfrm>
           <a:prstGeom prst="roundRect">
             <a:avLst>
-              <a:gd name="adj" fmla="val 4615"/>
+              <a:gd name="adj" fmla="val 1923"/>
             </a:avLst>
           </a:prstGeom>
           <a:solidFill>
@@ -16316,9 +16883,9 @@
                 <a:solidFill>
                   <a:schemeClr val="accent1"/>
                 </a:solidFill>
-                <a:latin typeface="BIZ UDPゴシック" pitchFamily="34" charset="0"/>
-                <a:ea typeface="BIZ UDPゴシック" pitchFamily="34" charset="-122"/>
-                <a:cs typeface="BIZ UDPゴシック" pitchFamily="34" charset="-120"/>
+                <a:latin typeface="Noto Sans JP Print" pitchFamily="34" charset="0"/>
+                <a:ea typeface="Noto Sans JP Print" pitchFamily="34" charset="-122"/>
+                <a:cs typeface="Noto Sans JP Print" pitchFamily="34" charset="-120"/>
               </a:rPr>
               <a:t>大会までの練習</a:t>
             </a:r>
@@ -16355,9 +16922,9 @@
                 <a:solidFill>
                   <a:schemeClr val="tx2"/>
                 </a:solidFill>
-                <a:latin typeface="BIZ UDPゴシック" pitchFamily="34" charset="0"/>
-                <a:ea typeface="BIZ UDPゴシック" pitchFamily="34" charset="-122"/>
-                <a:cs typeface="BIZ UDPゴシック" pitchFamily="34" charset="-120"/>
+                <a:latin typeface="Noto Sans JP Print" pitchFamily="34" charset="0"/>
+                <a:ea typeface="Noto Sans JP Print" pitchFamily="34" charset="-122"/>
+                <a:cs typeface="Noto Sans JP Print" pitchFamily="34" charset="-120"/>
               </a:rPr>
               <a:t>どんな活動・声かけ？</a:t>
             </a:r>
@@ -16378,7 +16945,7 @@
           </a:xfrm>
           <a:prstGeom prst="roundRect">
             <a:avLst>
-              <a:gd name="adj" fmla="val 4615"/>
+              <a:gd name="adj" fmla="val 1923"/>
             </a:avLst>
           </a:prstGeom>
           <a:solidFill>
@@ -16421,9 +16988,9 @@
                 <a:solidFill>
                   <a:schemeClr val="accent1"/>
                 </a:solidFill>
-                <a:latin typeface="BIZ UDPゴシック" pitchFamily="34" charset="0"/>
-                <a:ea typeface="BIZ UDPゴシック" pitchFamily="34" charset="-122"/>
-                <a:cs typeface="BIZ UDPゴシック" pitchFamily="34" charset="-120"/>
+                <a:latin typeface="Noto Sans JP Print" pitchFamily="34" charset="0"/>
+                <a:ea typeface="Noto Sans JP Print" pitchFamily="34" charset="-122"/>
+                <a:cs typeface="Noto Sans JP Print" pitchFamily="34" charset="-120"/>
               </a:rPr>
               <a:t>大会当日</a:t>
             </a:r>
@@ -16460,9 +17027,9 @@
                 <a:solidFill>
                   <a:schemeClr val="tx2"/>
                 </a:solidFill>
-                <a:latin typeface="BIZ UDPゴシック" pitchFamily="34" charset="0"/>
-                <a:ea typeface="BIZ UDPゴシック" pitchFamily="34" charset="-122"/>
-                <a:cs typeface="BIZ UDPゴシック" pitchFamily="34" charset="-120"/>
+                <a:latin typeface="Noto Sans JP Print" pitchFamily="34" charset="0"/>
+                <a:ea typeface="Noto Sans JP Print" pitchFamily="34" charset="-122"/>
+                <a:cs typeface="Noto Sans JP Print" pitchFamily="34" charset="-120"/>
               </a:rPr>
               <a:t>どんな仕組み・目標？</a:t>
             </a:r>
@@ -16483,7 +17050,7 @@
           </a:xfrm>
           <a:prstGeom prst="roundRect">
             <a:avLst>
-              <a:gd name="adj" fmla="val 4615"/>
+              <a:gd name="adj" fmla="val 1923"/>
             </a:avLst>
           </a:prstGeom>
           <a:solidFill>
@@ -16526,9 +17093,9 @@
                 <a:solidFill>
                   <a:schemeClr val="accent1"/>
                 </a:solidFill>
-                <a:latin typeface="BIZ UDPゴシック" pitchFamily="34" charset="0"/>
-                <a:ea typeface="BIZ UDPゴシック" pitchFamily="34" charset="-122"/>
-                <a:cs typeface="BIZ UDPゴシック" pitchFamily="34" charset="-120"/>
+                <a:latin typeface="Noto Sans JP Print" pitchFamily="34" charset="0"/>
+                <a:ea typeface="Noto Sans JP Print" pitchFamily="34" charset="-122"/>
+                <a:cs typeface="Noto Sans JP Print" pitchFamily="34" charset="-120"/>
               </a:rPr>
               <a:t>大会の後</a:t>
             </a:r>
@@ -16565,9 +17132,9 @@
                 <a:solidFill>
                   <a:schemeClr val="tx2"/>
                 </a:solidFill>
-                <a:latin typeface="BIZ UDPゴシック" pitchFamily="34" charset="0"/>
-                <a:ea typeface="BIZ UDPゴシック" pitchFamily="34" charset="-122"/>
-                <a:cs typeface="BIZ UDPゴシック" pitchFamily="34" charset="-120"/>
+                <a:latin typeface="Noto Sans JP Print" pitchFamily="34" charset="0"/>
+                <a:ea typeface="Noto Sans JP Print" pitchFamily="34" charset="-122"/>
+                <a:cs typeface="Noto Sans JP Print" pitchFamily="34" charset="-120"/>
               </a:rPr>
               <a:t>どんな振り返り？</a:t>
             </a:r>
@@ -16629,9 +17196,9 @@
                 <a:solidFill>
                   <a:schemeClr val="bg1"/>
                 </a:solidFill>
-                <a:latin typeface="BIZ UDPゴシック" pitchFamily="34" charset="0"/>
-                <a:ea typeface="BIZ UDPゴシック" pitchFamily="34" charset="-122"/>
-                <a:cs typeface="BIZ UDPゴシック" pitchFamily="34" charset="-120"/>
+                <a:latin typeface="Noto Sans JP Print" pitchFamily="34" charset="0"/>
+                <a:ea typeface="Noto Sans JP Print" pitchFamily="34" charset="-122"/>
+                <a:cs typeface="Noto Sans JP Print" pitchFamily="34" charset="-120"/>
               </a:rPr>
               <a:t>5分</a:t>
             </a:r>
@@ -16668,9 +17235,9 @@
                 <a:solidFill>
                   <a:schemeClr val="tx2"/>
                 </a:solidFill>
-                <a:latin typeface="BIZ UDPゴシック" pitchFamily="34" charset="0"/>
-                <a:ea typeface="BIZ UDPゴシック" pitchFamily="34" charset="-122"/>
-                <a:cs typeface="BIZ UDPゴシック" pitchFamily="34" charset="-120"/>
+                <a:latin typeface="Noto Sans JP Print" pitchFamily="34" charset="0"/>
+                <a:ea typeface="Noto Sans JP Print" pitchFamily="34" charset="-122"/>
+                <a:cs typeface="Noto Sans JP Print" pitchFamily="34" charset="-120"/>
               </a:rPr>
               <a:t>3〜4人のグループで。担任以外の先生方も、ご自分の立場からアイデアをお願いします</a:t>
             </a:r>
@@ -16708,8 +17275,11 @@
             <a:lvl1pPr>
               <a:defRPr sz="1100">
                 <a:solidFill>
-                  <a:srgbClr val="6B7A90"/>
-                </a:solidFill>
+                  <a:srgbClr val="7C828D"/>
+                </a:solidFill>
+                <a:latin typeface="Noto Sans JP Print Black"/>
+                <a:ea typeface="Noto Sans JP Print Black"/>
+                <a:cs typeface="Noto Sans JP Print Black"/>
               </a:defRPr>
             </a:lvl1pPr>
           </a:lstStyle>
@@ -16758,7 +17328,7 @@
         </p:nvSpPr>
         <p:spPr>
           <a:xfrm>
-            <a:off x="548640" y="320040"/>
+            <a:off x="548640" y="274320"/>
             <a:ext cx="7315200" cy="320040"/>
           </a:xfrm>
           <a:prstGeom prst="rect">
@@ -16796,8 +17366,8 @@
         </p:nvSpPr>
         <p:spPr>
           <a:xfrm>
-            <a:off x="548640" y="685800"/>
-            <a:ext cx="11064240" cy="1143000"/>
+            <a:off x="548640" y="594360"/>
+            <a:ext cx="11064240" cy="1325880"/>
           </a:xfrm>
           <a:prstGeom prst="rect">
             <a:avLst/>
@@ -16810,17 +17380,43 @@
           <a:lstStyle/>
           <a:p>
             <a:pPr algn="l" indent="0" marL="0">
-              <a:buNone/>
-            </a:pPr>
-            <a:r>
-              <a:rPr lang="en-US" sz="3000" b="1" dirty="0">
+              <a:lnSpc>
+                <a:spcPct val="90000"/>
+              </a:lnSpc>
+              <a:buNone/>
+            </a:pPr>
+            <a:r>
+              <a:rPr lang="en-US" sz="3600" dirty="0">
                 <a:solidFill>
                   <a:schemeClr val="tx2"/>
                 </a:solidFill>
-              </a:rPr>
-              <a:t>声かけは「がんばれ」より「いいペースだね」</a:t>
-            </a:r>
-            <a:endParaRPr lang="en-US" sz="3000" dirty="0"/>
+                <a:latin typeface="Noto Sans JP Print Black" pitchFamily="34" charset="0"/>
+                <a:ea typeface="Noto Sans JP Print Black" pitchFamily="34" charset="-122"/>
+                <a:cs typeface="Noto Sans JP Print Black" pitchFamily="34" charset="-120"/>
+              </a:rPr>
+              <a:t>声かけは</a:t>
+            </a:r>
+            <a:endParaRPr lang="en-US" sz="3600" dirty="0"/>
+          </a:p>
+          <a:p>
+            <a:pPr algn="l" indent="0" marL="0">
+              <a:lnSpc>
+                <a:spcPct val="90000"/>
+              </a:lnSpc>
+              <a:buNone/>
+            </a:pPr>
+            <a:r>
+              <a:rPr lang="en-US" sz="3600" dirty="0">
+                <a:solidFill>
+                  <a:schemeClr val="tx2"/>
+                </a:solidFill>
+                <a:latin typeface="Noto Sans JP Print Black" pitchFamily="34" charset="0"/>
+                <a:ea typeface="Noto Sans JP Print Black" pitchFamily="34" charset="-122"/>
+                <a:cs typeface="Noto Sans JP Print Black" pitchFamily="34" charset="-120"/>
+              </a:rPr>
+              <a:t>「がんばれ」より「いいペースだね」</a:t>
+            </a:r>
+            <a:endParaRPr lang="en-US" sz="3600" dirty="0"/>
           </a:p>
         </p:txBody>
       </p:sp>
@@ -16837,7 +17433,7 @@
           </a:xfrm>
           <a:prstGeom prst="roundRect">
             <a:avLst>
-              <a:gd name="adj" fmla="val 2927"/>
+              <a:gd name="adj" fmla="val 1220"/>
             </a:avLst>
           </a:prstGeom>
           <a:solidFill>
@@ -16880,9 +17476,9 @@
                 <a:solidFill>
                   <a:schemeClr val="accent4"/>
                 </a:solidFill>
-                <a:latin typeface="BIZ UDPゴシック" pitchFamily="34" charset="0"/>
-                <a:ea typeface="BIZ UDPゴシック" pitchFamily="34" charset="-122"/>
-                <a:cs typeface="BIZ UDPゴシック" pitchFamily="34" charset="-120"/>
+                <a:latin typeface="Noto Sans JP Print" pitchFamily="34" charset="0"/>
+                <a:ea typeface="Noto Sans JP Print" pitchFamily="34" charset="-122"/>
+                <a:cs typeface="Noto Sans JP Print" pitchFamily="34" charset="-120"/>
               </a:rPr>
               <a:t>よく聞く声かけ</a:t>
             </a:r>
@@ -16919,9 +17515,9 @@
                 <a:solidFill>
                   <a:schemeClr val="accent4"/>
                 </a:solidFill>
-                <a:latin typeface="BIZ UDPゴシック" pitchFamily="34" charset="0"/>
-                <a:ea typeface="BIZ UDPゴシック" pitchFamily="34" charset="-122"/>
-                <a:cs typeface="BIZ UDPゴシック" pitchFamily="34" charset="-120"/>
+                <a:latin typeface="Noto Sans JP Print" pitchFamily="34" charset="0"/>
+                <a:ea typeface="Noto Sans JP Print" pitchFamily="34" charset="-122"/>
+                <a:cs typeface="Noto Sans JP Print" pitchFamily="34" charset="-120"/>
               </a:rPr>
               <a:t>「がんばれ！」</a:t>
             </a:r>
@@ -16936,9 +17532,9 @@
                 <a:solidFill>
                   <a:schemeClr val="accent4"/>
                 </a:solidFill>
-                <a:latin typeface="BIZ UDPゴシック" pitchFamily="34" charset="0"/>
-                <a:ea typeface="BIZ UDPゴシック" pitchFamily="34" charset="-122"/>
-                <a:cs typeface="BIZ UDPゴシック" pitchFamily="34" charset="-120"/>
+                <a:latin typeface="Noto Sans JP Print" pitchFamily="34" charset="0"/>
+                <a:ea typeface="Noto Sans JP Print" pitchFamily="34" charset="-122"/>
+                <a:cs typeface="Noto Sans JP Print" pitchFamily="34" charset="-120"/>
               </a:rPr>
               <a:t>「抜かれるな！」</a:t>
             </a:r>
@@ -16953,9 +17549,9 @@
                 <a:solidFill>
                   <a:schemeClr val="accent4"/>
                 </a:solidFill>
-                <a:latin typeface="BIZ UDPゴシック" pitchFamily="34" charset="0"/>
-                <a:ea typeface="BIZ UDPゴシック" pitchFamily="34" charset="-122"/>
-                <a:cs typeface="BIZ UDPゴシック" pitchFamily="34" charset="-120"/>
+                <a:latin typeface="Noto Sans JP Print" pitchFamily="34" charset="0"/>
+                <a:ea typeface="Noto Sans JP Print" pitchFamily="34" charset="-122"/>
+                <a:cs typeface="Noto Sans JP Print" pitchFamily="34" charset="-120"/>
               </a:rPr>
               <a:t>「止まるな！」</a:t>
             </a:r>
@@ -17001,7 +17597,7 @@
           </a:xfrm>
           <a:prstGeom prst="roundRect">
             <a:avLst>
-              <a:gd name="adj" fmla="val 2927"/>
+              <a:gd name="adj" fmla="val 1220"/>
             </a:avLst>
           </a:prstGeom>
           <a:solidFill>
@@ -17044,9 +17640,9 @@
                 <a:solidFill>
                   <a:schemeClr val="accent1"/>
                 </a:solidFill>
-                <a:latin typeface="BIZ UDPゴシック" pitchFamily="34" charset="0"/>
-                <a:ea typeface="BIZ UDPゴシック" pitchFamily="34" charset="-122"/>
-                <a:cs typeface="BIZ UDPゴシック" pitchFamily="34" charset="-120"/>
+                <a:latin typeface="Noto Sans JP Print" pitchFamily="34" charset="0"/>
+                <a:ea typeface="Noto Sans JP Print" pitchFamily="34" charset="-122"/>
+                <a:cs typeface="Noto Sans JP Print" pitchFamily="34" charset="-120"/>
               </a:rPr>
               <a:t>自分の走りに気づける声かけ</a:t>
             </a:r>
@@ -17083,9 +17679,9 @@
                 <a:solidFill>
                   <a:schemeClr val="tx2"/>
                 </a:solidFill>
-                <a:latin typeface="BIZ UDPゴシック" pitchFamily="34" charset="0"/>
-                <a:ea typeface="BIZ UDPゴシック" pitchFamily="34" charset="-122"/>
-                <a:cs typeface="BIZ UDPゴシック" pitchFamily="34" charset="-120"/>
+                <a:latin typeface="Noto Sans JP Print" pitchFamily="34" charset="0"/>
+                <a:ea typeface="Noto Sans JP Print" pitchFamily="34" charset="-122"/>
+                <a:cs typeface="Noto Sans JP Print" pitchFamily="34" charset="-120"/>
               </a:rPr>
               <a:t>「いいペースだね」</a:t>
             </a:r>
@@ -17100,9 +17696,9 @@
                 <a:solidFill>
                   <a:schemeClr val="tx2"/>
                 </a:solidFill>
-                <a:latin typeface="BIZ UDPゴシック" pitchFamily="34" charset="0"/>
-                <a:ea typeface="BIZ UDPゴシック" pitchFamily="34" charset="-122"/>
-                <a:cs typeface="BIZ UDPゴシック" pitchFamily="34" charset="-120"/>
+                <a:latin typeface="Noto Sans JP Print" pitchFamily="34" charset="0"/>
+                <a:ea typeface="Noto Sans JP Print" pitchFamily="34" charset="-122"/>
+                <a:cs typeface="Noto Sans JP Print" pitchFamily="34" charset="-120"/>
               </a:rPr>
               <a:t>「さっきより楽そうだね」</a:t>
             </a:r>
@@ -17117,9 +17713,9 @@
                 <a:solidFill>
                   <a:schemeClr val="tx2"/>
                 </a:solidFill>
-                <a:latin typeface="BIZ UDPゴシック" pitchFamily="34" charset="0"/>
-                <a:ea typeface="BIZ UDPゴシック" pitchFamily="34" charset="-122"/>
-                <a:cs typeface="BIZ UDPゴシック" pitchFamily="34" charset="-120"/>
+                <a:latin typeface="Noto Sans JP Print" pitchFamily="34" charset="0"/>
+                <a:ea typeface="Noto Sans JP Print" pitchFamily="34" charset="-122"/>
+                <a:cs typeface="Noto Sans JP Print" pitchFamily="34" charset="-120"/>
               </a:rPr>
               <a:t>「自分で決めたペースを</a:t>
             </a:r>
@@ -17134,9 +17730,9 @@
                 <a:solidFill>
                   <a:schemeClr val="tx2"/>
                 </a:solidFill>
-                <a:latin typeface="BIZ UDPゴシック" pitchFamily="34" charset="0"/>
-                <a:ea typeface="BIZ UDPゴシック" pitchFamily="34" charset="-122"/>
-                <a:cs typeface="BIZ UDPゴシック" pitchFamily="34" charset="-120"/>
+                <a:latin typeface="Noto Sans JP Print" pitchFamily="34" charset="0"/>
+                <a:ea typeface="Noto Sans JP Print" pitchFamily="34" charset="-122"/>
+                <a:cs typeface="Noto Sans JP Print" pitchFamily="34" charset="-120"/>
               </a:rPr>
               <a:t>　守れてるよ」</a:t>
             </a:r>
@@ -17174,8 +17770,11 @@
             <a:lvl1pPr>
               <a:defRPr sz="1100">
                 <a:solidFill>
-                  <a:srgbClr val="6B7A90"/>
-                </a:solidFill>
+                  <a:srgbClr val="7C828D"/>
+                </a:solidFill>
+                <a:latin typeface="Noto Sans JP Print Black"/>
+                <a:ea typeface="Noto Sans JP Print Black"/>
+                <a:cs typeface="Noto Sans JP Print Black"/>
               </a:defRPr>
             </a:lvl1pPr>
           </a:lstStyle>
@@ -17224,7 +17823,7 @@
         </p:nvSpPr>
         <p:spPr>
           <a:xfrm>
-            <a:off x="548640" y="320040"/>
+            <a:off x="548640" y="274320"/>
             <a:ext cx="7315200" cy="320040"/>
           </a:xfrm>
           <a:prstGeom prst="rect">
@@ -17262,8 +17861,8 @@
         </p:nvSpPr>
         <p:spPr>
           <a:xfrm>
-            <a:off x="548640" y="685800"/>
-            <a:ext cx="11064240" cy="1143000"/>
+            <a:off x="548640" y="594360"/>
+            <a:ext cx="11064240" cy="1325880"/>
           </a:xfrm>
           <a:prstGeom prst="rect">
             <a:avLst/>
@@ -17276,31 +17875,43 @@
           <a:lstStyle/>
           <a:p>
             <a:pPr algn="l" indent="0" marL="0">
-              <a:buNone/>
-            </a:pPr>
-            <a:r>
-              <a:rPr lang="en-US" sz="3000" b="1" dirty="0">
+              <a:lnSpc>
+                <a:spcPct val="90000"/>
+              </a:lnSpc>
+              <a:buNone/>
+            </a:pPr>
+            <a:r>
+              <a:rPr lang="en-US" sz="3600" dirty="0">
                 <a:solidFill>
                   <a:schemeClr val="tx2"/>
                 </a:solidFill>
+                <a:latin typeface="Noto Sans JP Print Black" pitchFamily="34" charset="0"/>
+                <a:ea typeface="Noto Sans JP Print Black" pitchFamily="34" charset="-122"/>
+                <a:cs typeface="Noto Sans JP Print Black" pitchFamily="34" charset="-120"/>
               </a:rPr>
               <a:t>学校での心臓突然死は毎年10人前後。</a:t>
             </a:r>
-            <a:endParaRPr lang="en-US" sz="3000" dirty="0"/>
+            <a:endParaRPr lang="en-US" sz="3600" dirty="0"/>
           </a:p>
           <a:p>
             <a:pPr algn="l" indent="0" marL="0">
-              <a:buNone/>
-            </a:pPr>
-            <a:r>
-              <a:rPr lang="en-US" sz="3000" b="1" dirty="0">
+              <a:lnSpc>
+                <a:spcPct val="90000"/>
+              </a:lnSpc>
+              <a:buNone/>
+            </a:pPr>
+            <a:r>
+              <a:rPr lang="en-US" sz="3600" dirty="0">
                 <a:solidFill>
                   <a:schemeClr val="tx2"/>
                 </a:solidFill>
+                <a:latin typeface="Noto Sans JP Print Black" pitchFamily="34" charset="0"/>
+                <a:ea typeface="Noto Sans JP Print Black" pitchFamily="34" charset="-122"/>
+                <a:cs typeface="Noto Sans JP Print Black" pitchFamily="34" charset="-120"/>
               </a:rPr>
               <a:t>約3分の2は運動に関連して起きている</a:t>
             </a:r>
-            <a:endParaRPr lang="en-US" sz="3000" dirty="0"/>
+            <a:endParaRPr lang="en-US" sz="3600" dirty="0"/>
           </a:p>
         </p:txBody>
       </p:sp>
@@ -17329,13 +17940,13 @@
               <a:buNone/>
             </a:pPr>
             <a:r>
-              <a:rPr lang="en-US" sz="9600" b="1" dirty="0">
+              <a:rPr lang="en-US" sz="11000" b="1" dirty="0">
                 <a:solidFill>
                   <a:schemeClr val="accent1"/>
                 </a:solidFill>
-                <a:latin typeface="BIZ UDPゴシック" pitchFamily="34" charset="0"/>
-                <a:ea typeface="BIZ UDPゴシック" pitchFamily="34" charset="-122"/>
-                <a:cs typeface="BIZ UDPゴシック" pitchFamily="34" charset="-120"/>
+                <a:latin typeface="Noto Sans JP Print Black" pitchFamily="34" charset="0"/>
+                <a:ea typeface="Noto Sans JP Print Black" pitchFamily="34" charset="-122"/>
+                <a:cs typeface="Noto Sans JP Print Black" pitchFamily="34" charset="-120"/>
               </a:rPr>
               <a:t>10</a:t>
             </a:r>
@@ -17347,9 +17958,9 @@
                 <a:solidFill>
                   <a:schemeClr val="tx2"/>
                 </a:solidFill>
-                <a:latin typeface="BIZ UDPゴシック" pitchFamily="34" charset="0"/>
-                <a:ea typeface="BIZ UDPゴシック" pitchFamily="34" charset="-122"/>
-                <a:cs typeface="BIZ UDPゴシック" pitchFamily="34" charset="-120"/>
+                <a:latin typeface="Noto Sans JP Print" pitchFamily="34" charset="0"/>
+                <a:ea typeface="Noto Sans JP Print" pitchFamily="34" charset="-122"/>
+                <a:cs typeface="Noto Sans JP Print" pitchFamily="34" charset="-120"/>
               </a:rPr>
               <a:t> 人前後</a:t>
             </a:r>
@@ -17386,9 +17997,9 @@
                 <a:solidFill>
                   <a:schemeClr val="tx2"/>
                 </a:solidFill>
-                <a:latin typeface="BIZ UDPゴシック" pitchFamily="34" charset="0"/>
-                <a:ea typeface="BIZ UDPゴシック" pitchFamily="34" charset="-122"/>
-                <a:cs typeface="BIZ UDPゴシック" pitchFamily="34" charset="-120"/>
+                <a:latin typeface="Noto Sans JP Print" pitchFamily="34" charset="0"/>
+                <a:ea typeface="Noto Sans JP Print" pitchFamily="34" charset="-122"/>
+                <a:cs typeface="Noto Sans JP Print" pitchFamily="34" charset="-120"/>
               </a:rPr>
               <a:t>学校の管理下での心臓突然死（毎年）</a:t>
             </a:r>
@@ -17421,15 +18032,29 @@
               <a:buNone/>
             </a:pPr>
             <a:r>
-              <a:rPr lang="en-US" sz="8000" b="1" dirty="0">
+              <a:rPr lang="en-US" sz="4000" b="1" dirty="0">
                 <a:solidFill>
                   <a:schemeClr val="accent1"/>
                 </a:solidFill>
-                <a:latin typeface="BIZ UDPゴシック" pitchFamily="34" charset="0"/>
-                <a:ea typeface="BIZ UDPゴシック" pitchFamily="34" charset="-122"/>
-                <a:cs typeface="BIZ UDPゴシック" pitchFamily="34" charset="-120"/>
-              </a:rPr>
-              <a:t>約 2/3</a:t>
+                <a:latin typeface="Noto Sans JP Print" pitchFamily="34" charset="0"/>
+                <a:ea typeface="Noto Sans JP Print" pitchFamily="34" charset="-122"/>
+                <a:cs typeface="Noto Sans JP Print" pitchFamily="34" charset="-120"/>
+              </a:rPr>
+              <a:t>約 </a:t>
+            </a:r>
+            <a:pPr indent="0" marL="0">
+              <a:buNone/>
+            </a:pPr>
+            <a:r>
+              <a:rPr lang="en-US" sz="11000" b="1" dirty="0">
+                <a:solidFill>
+                  <a:schemeClr val="accent1"/>
+                </a:solidFill>
+                <a:latin typeface="Noto Sans JP Print Black" pitchFamily="34" charset="0"/>
+                <a:ea typeface="Noto Sans JP Print Black" pitchFamily="34" charset="-122"/>
+                <a:cs typeface="Noto Sans JP Print Black" pitchFamily="34" charset="-120"/>
+              </a:rPr>
+              <a:t>2/3</a:t>
             </a:r>
             <a:endParaRPr lang="en-US" sz="1600" dirty="0"/>
           </a:p>
@@ -17464,9 +18089,9 @@
                 <a:solidFill>
                   <a:schemeClr val="tx2"/>
                 </a:solidFill>
-                <a:latin typeface="BIZ UDPゴシック" pitchFamily="34" charset="0"/>
-                <a:ea typeface="BIZ UDPゴシック" pitchFamily="34" charset="-122"/>
-                <a:cs typeface="BIZ UDPゴシック" pitchFamily="34" charset="-120"/>
+                <a:latin typeface="Noto Sans JP Print" pitchFamily="34" charset="0"/>
+                <a:ea typeface="Noto Sans JP Print" pitchFamily="34" charset="-122"/>
+                <a:cs typeface="Noto Sans JP Print" pitchFamily="34" charset="-120"/>
               </a:rPr>
               <a:t>そのうち運動に関連して起きた割合</a:t>
             </a:r>
@@ -17487,7 +18112,7 @@
           </a:xfrm>
           <a:prstGeom prst="roundRect">
             <a:avLst>
-              <a:gd name="adj" fmla="val 8000"/>
+              <a:gd name="adj" fmla="val 3333"/>
             </a:avLst>
           </a:prstGeom>
           <a:solidFill>
@@ -17530,9 +18155,9 @@
                 <a:solidFill>
                   <a:schemeClr val="accent1"/>
                 </a:solidFill>
-                <a:latin typeface="BIZ UDPゴシック" pitchFamily="34" charset="0"/>
-                <a:ea typeface="BIZ UDPゴシック" pitchFamily="34" charset="-122"/>
-                <a:cs typeface="BIZ UDPゴシック" pitchFamily="34" charset="-120"/>
+                <a:latin typeface="Noto Sans JP Print" pitchFamily="34" charset="0"/>
+                <a:ea typeface="Noto Sans JP Print" pitchFamily="34" charset="-122"/>
+                <a:cs typeface="Noto Sans JP Print" pitchFamily="34" charset="-120"/>
               </a:rPr>
               <a:t>本当の危険サイン：胸の痛み・めまい・顔色の悪さ・急に座り込む</a:t>
             </a:r>
@@ -17569,9 +18194,9 @@
                 <a:solidFill>
                   <a:schemeClr val="tx1"/>
                 </a:solidFill>
-                <a:latin typeface="BIZ UDPゴシック" pitchFamily="34" charset="0"/>
-                <a:ea typeface="BIZ UDPゴシック" pitchFamily="34" charset="-122"/>
-                <a:cs typeface="BIZ UDPゴシック" pitchFamily="34" charset="-120"/>
+                <a:latin typeface="Noto Sans JP Print" pitchFamily="34" charset="0"/>
+                <a:ea typeface="Noto Sans JP Print" pitchFamily="34" charset="-122"/>
+                <a:cs typeface="Noto Sans JP Print" pitchFamily="34" charset="-120"/>
               </a:rPr>
               <a:t>心臓検診で異常がなかった子にも起こりうる</a:t>
             </a:r>
@@ -17608,9 +18233,9 @@
                 <a:solidFill>
                   <a:schemeClr val="accent4"/>
                 </a:solidFill>
-                <a:latin typeface="BIZ UDPゴシック" pitchFamily="34" charset="0"/>
-                <a:ea typeface="BIZ UDPゴシック" pitchFamily="34" charset="-122"/>
-                <a:cs typeface="BIZ UDPゴシック" pitchFamily="34" charset="-120"/>
+                <a:latin typeface="Noto Sans JP Print" pitchFamily="34" charset="0"/>
+                <a:ea typeface="Noto Sans JP Print" pitchFamily="34" charset="-122"/>
+                <a:cs typeface="Noto Sans JP Print" pitchFamily="34" charset="-120"/>
               </a:rPr>
               <a:t>出典：日本スポーツ振興センター「学校の管理下の災害」、山形県「学校における心臓突然死の防止」資料</a:t>
             </a:r>
@@ -17648,8 +18273,11 @@
             <a:lvl1pPr>
               <a:defRPr sz="1100">
                 <a:solidFill>
-                  <a:srgbClr val="6B7A90"/>
-                </a:solidFill>
+                  <a:srgbClr val="7C828D"/>
+                </a:solidFill>
+                <a:latin typeface="Noto Sans JP Print Black"/>
+                <a:ea typeface="Noto Sans JP Print Black"/>
+                <a:cs typeface="Noto Sans JP Print Black"/>
               </a:defRPr>
             </a:lvl1pPr>
           </a:lstStyle>
@@ -17698,7 +18326,7 @@
         </p:nvSpPr>
         <p:spPr>
           <a:xfrm>
-            <a:off x="548640" y="320040"/>
+            <a:off x="548640" y="274320"/>
             <a:ext cx="7315200" cy="320040"/>
           </a:xfrm>
           <a:prstGeom prst="rect">
@@ -17736,8 +18364,8 @@
         </p:nvSpPr>
         <p:spPr>
           <a:xfrm>
-            <a:off x="548640" y="685800"/>
-            <a:ext cx="11064240" cy="1143000"/>
+            <a:off x="548640" y="594360"/>
+            <a:ext cx="11064240" cy="1325880"/>
           </a:xfrm>
           <a:prstGeom prst="rect">
             <a:avLst/>
@@ -17750,17 +18378,43 @@
           <a:lstStyle/>
           <a:p>
             <a:pPr algn="l" indent="0" marL="0">
-              <a:buNone/>
-            </a:pPr>
-            <a:r>
-              <a:rPr lang="en-US" sz="3000" b="1" dirty="0">
+              <a:lnSpc>
+                <a:spcPct val="90000"/>
+              </a:lnSpc>
+              <a:buNone/>
+            </a:pPr>
+            <a:r>
+              <a:rPr lang="en-US" sz="3600" dirty="0">
                 <a:solidFill>
                   <a:schemeClr val="tx2"/>
                 </a:solidFill>
-              </a:rPr>
-              <a:t>子どもたちは、マラソン大会を楽しみにしていますか？</a:t>
-            </a:r>
-            <a:endParaRPr lang="en-US" sz="3000" dirty="0"/>
+                <a:latin typeface="Noto Sans JP Print Black" pitchFamily="34" charset="0"/>
+                <a:ea typeface="Noto Sans JP Print Black" pitchFamily="34" charset="-122"/>
+                <a:cs typeface="Noto Sans JP Print Black" pitchFamily="34" charset="-120"/>
+              </a:rPr>
+              <a:t>子どもたちは、</a:t>
+            </a:r>
+            <a:endParaRPr lang="en-US" sz="3600" dirty="0"/>
+          </a:p>
+          <a:p>
+            <a:pPr algn="l" indent="0" marL="0">
+              <a:lnSpc>
+                <a:spcPct val="90000"/>
+              </a:lnSpc>
+              <a:buNone/>
+            </a:pPr>
+            <a:r>
+              <a:rPr lang="en-US" sz="3600" dirty="0">
+                <a:solidFill>
+                  <a:schemeClr val="tx2"/>
+                </a:solidFill>
+                <a:latin typeface="Noto Sans JP Print Black" pitchFamily="34" charset="0"/>
+                <a:ea typeface="Noto Sans JP Print Black" pitchFamily="34" charset="-122"/>
+                <a:cs typeface="Noto Sans JP Print Black" pitchFamily="34" charset="-120"/>
+              </a:rPr>
+              <a:t>マラソン大会を楽しみにしていますか？</a:t>
+            </a:r>
+            <a:endParaRPr lang="en-US" sz="3600" dirty="0"/>
           </a:p>
         </p:txBody>
       </p:sp>
@@ -17777,7 +18431,7 @@
           </a:xfrm>
           <a:prstGeom prst="roundRect">
             <a:avLst>
-              <a:gd name="adj" fmla="val 4000"/>
+              <a:gd name="adj" fmla="val 1667"/>
             </a:avLst>
           </a:prstGeom>
           <a:solidFill>
@@ -17845,9 +18499,9 @@
                 <a:solidFill>
                   <a:schemeClr val="bg1"/>
                 </a:solidFill>
-                <a:latin typeface="BIZ UDPゴシック" pitchFamily="34" charset="0"/>
-                <a:ea typeface="BIZ UDPゴシック" pitchFamily="34" charset="-122"/>
-                <a:cs typeface="BIZ UDPゴシック" pitchFamily="34" charset="-120"/>
+                <a:latin typeface="Noto Sans JP Print Black" pitchFamily="34" charset="0"/>
+                <a:ea typeface="Noto Sans JP Print Black" pitchFamily="34" charset="-122"/>
+                <a:cs typeface="Noto Sans JP Print Black" pitchFamily="34" charset="-120"/>
               </a:rPr>
               <a:t>1</a:t>
             </a:r>
@@ -17880,17 +18534,17 @@
               <a:buNone/>
             </a:pPr>
             <a:r>
-              <a:rPr lang="en-US" sz="2000" b="1" dirty="0">
+              <a:rPr lang="en-US" sz="1800" b="1" dirty="0">
                 <a:solidFill>
                   <a:schemeClr val="tx2"/>
                 </a:solidFill>
-                <a:latin typeface="BIZ UDPゴシック" pitchFamily="34" charset="0"/>
-                <a:ea typeface="BIZ UDPゴシック" pitchFamily="34" charset="-122"/>
-                <a:cs typeface="BIZ UDPゴシック" pitchFamily="34" charset="-120"/>
+                <a:latin typeface="Noto Sans JP Print" pitchFamily="34" charset="0"/>
+                <a:ea typeface="Noto Sans JP Print" pitchFamily="34" charset="-122"/>
+                <a:cs typeface="Noto Sans JP Print" pitchFamily="34" charset="-120"/>
               </a:rPr>
               <a:t>楽しみにしている子が多い</a:t>
             </a:r>
-            <a:endParaRPr lang="en-US" sz="2000" dirty="0"/>
+            <a:endParaRPr lang="en-US" sz="1800" dirty="0"/>
           </a:p>
         </p:txBody>
       </p:sp>
@@ -17907,7 +18561,7 @@
           </a:xfrm>
           <a:prstGeom prst="roundRect">
             <a:avLst>
-              <a:gd name="adj" fmla="val 4000"/>
+              <a:gd name="adj" fmla="val 1667"/>
             </a:avLst>
           </a:prstGeom>
           <a:solidFill>
@@ -17975,9 +18629,9 @@
                 <a:solidFill>
                   <a:schemeClr val="bg1"/>
                 </a:solidFill>
-                <a:latin typeface="BIZ UDPゴシック" pitchFamily="34" charset="0"/>
-                <a:ea typeface="BIZ UDPゴシック" pitchFamily="34" charset="-122"/>
-                <a:cs typeface="BIZ UDPゴシック" pitchFamily="34" charset="-120"/>
+                <a:latin typeface="Noto Sans JP Print Black" pitchFamily="34" charset="0"/>
+                <a:ea typeface="Noto Sans JP Print Black" pitchFamily="34" charset="-122"/>
+                <a:cs typeface="Noto Sans JP Print Black" pitchFamily="34" charset="-120"/>
               </a:rPr>
               <a:t>2</a:t>
             </a:r>
@@ -18010,17 +18664,17 @@
               <a:buNone/>
             </a:pPr>
             <a:r>
-              <a:rPr lang="en-US" sz="2000" b="1" dirty="0">
+              <a:rPr lang="en-US" sz="1800" b="1" dirty="0">
                 <a:solidFill>
                   <a:schemeClr val="tx2"/>
                 </a:solidFill>
-                <a:latin typeface="BIZ UDPゴシック" pitchFamily="34" charset="0"/>
-                <a:ea typeface="BIZ UDPゴシック" pitchFamily="34" charset="-122"/>
-                <a:cs typeface="BIZ UDPゴシック" pitchFamily="34" charset="-120"/>
+                <a:latin typeface="Noto Sans JP Print" pitchFamily="34" charset="0"/>
+                <a:ea typeface="Noto Sans JP Print" pitchFamily="34" charset="-122"/>
+                <a:cs typeface="Noto Sans JP Print" pitchFamily="34" charset="-120"/>
               </a:rPr>
               <a:t>半々くらい</a:t>
             </a:r>
-            <a:endParaRPr lang="en-US" sz="2000" dirty="0"/>
+            <a:endParaRPr lang="en-US" sz="1800" dirty="0"/>
           </a:p>
         </p:txBody>
       </p:sp>
@@ -18037,7 +18691,7 @@
           </a:xfrm>
           <a:prstGeom prst="roundRect">
             <a:avLst>
-              <a:gd name="adj" fmla="val 4000"/>
+              <a:gd name="adj" fmla="val 1667"/>
             </a:avLst>
           </a:prstGeom>
           <a:solidFill>
@@ -18105,9 +18759,9 @@
                 <a:solidFill>
                   <a:schemeClr val="bg1"/>
                 </a:solidFill>
-                <a:latin typeface="BIZ UDPゴシック" pitchFamily="34" charset="0"/>
-                <a:ea typeface="BIZ UDPゴシック" pitchFamily="34" charset="-122"/>
-                <a:cs typeface="BIZ UDPゴシック" pitchFamily="34" charset="-120"/>
+                <a:latin typeface="Noto Sans JP Print Black" pitchFamily="34" charset="0"/>
+                <a:ea typeface="Noto Sans JP Print Black" pitchFamily="34" charset="-122"/>
+                <a:cs typeface="Noto Sans JP Print Black" pitchFamily="34" charset="-120"/>
               </a:rPr>
               <a:t>3</a:t>
             </a:r>
@@ -18140,17 +18794,17 @@
               <a:buNone/>
             </a:pPr>
             <a:r>
-              <a:rPr lang="en-US" sz="2000" b="1" dirty="0">
+              <a:rPr lang="en-US" sz="1800" b="1" dirty="0">
                 <a:solidFill>
                   <a:schemeClr val="tx2"/>
                 </a:solidFill>
-                <a:latin typeface="BIZ UDPゴシック" pitchFamily="34" charset="0"/>
-                <a:ea typeface="BIZ UDPゴシック" pitchFamily="34" charset="-122"/>
-                <a:cs typeface="BIZ UDPゴシック" pitchFamily="34" charset="-120"/>
+                <a:latin typeface="Noto Sans JP Print" pitchFamily="34" charset="0"/>
+                <a:ea typeface="Noto Sans JP Print" pitchFamily="34" charset="-122"/>
+                <a:cs typeface="Noto Sans JP Print" pitchFamily="34" charset="-120"/>
               </a:rPr>
               <a:t>いやがっている子が多い</a:t>
             </a:r>
-            <a:endParaRPr lang="en-US" sz="2000" dirty="0"/>
+            <a:endParaRPr lang="en-US" sz="1800" dirty="0"/>
           </a:p>
         </p:txBody>
       </p:sp>
@@ -18183,9 +18837,9 @@
                 <a:solidFill>
                   <a:schemeClr val="accent4"/>
                 </a:solidFill>
-                <a:latin typeface="BIZ UDPゴシック" pitchFamily="34" charset="0"/>
-                <a:ea typeface="BIZ UDPゴシック" pitchFamily="34" charset="-122"/>
-                <a:cs typeface="BIZ UDPゴシック" pitchFamily="34" charset="-120"/>
+                <a:latin typeface="Noto Sans JP Print" pitchFamily="34" charset="0"/>
+                <a:ea typeface="Noto Sans JP Print" pitchFamily="34" charset="-122"/>
+                <a:cs typeface="Noto Sans JP Print" pitchFamily="34" charset="-120"/>
               </a:rPr>
               <a:t>挙手でお答えください</a:t>
             </a:r>
@@ -18223,8 +18877,11 @@
             <a:lvl1pPr>
               <a:defRPr sz="1100">
                 <a:solidFill>
-                  <a:srgbClr val="6B7A90"/>
-                </a:solidFill>
+                  <a:srgbClr val="7C828D"/>
+                </a:solidFill>
+                <a:latin typeface="Noto Sans JP Print Black"/>
+                <a:ea typeface="Noto Sans JP Print Black"/>
+                <a:cs typeface="Noto Sans JP Print Black"/>
               </a:defRPr>
             </a:lvl1pPr>
           </a:lstStyle>
@@ -18273,7 +18930,7 @@
         </p:nvSpPr>
         <p:spPr>
           <a:xfrm>
-            <a:off x="548640" y="320040"/>
+            <a:off x="548640" y="274320"/>
             <a:ext cx="7315200" cy="320040"/>
           </a:xfrm>
           <a:prstGeom prst="rect">
@@ -18311,8 +18968,8 @@
         </p:nvSpPr>
         <p:spPr>
           <a:xfrm>
-            <a:off x="548640" y="685800"/>
-            <a:ext cx="11064240" cy="1143000"/>
+            <a:off x="548640" y="594360"/>
+            <a:ext cx="11064240" cy="1325880"/>
           </a:xfrm>
           <a:prstGeom prst="rect">
             <a:avLst/>
@@ -18325,31 +18982,43 @@
           <a:lstStyle/>
           <a:p>
             <a:pPr algn="l" indent="0" marL="0">
-              <a:buNone/>
-            </a:pPr>
-            <a:r>
-              <a:rPr lang="en-US" sz="3000" b="1" dirty="0">
+              <a:lnSpc>
+                <a:spcPct val="90000"/>
+              </a:lnSpc>
+              <a:buNone/>
+            </a:pPr>
+            <a:r>
+              <a:rPr lang="en-US" sz="3600" dirty="0">
                 <a:solidFill>
                   <a:schemeClr val="tx2"/>
                 </a:solidFill>
-              </a:rPr>
-              <a:t>危ないのは「ゴール前のスパート」と「ゴール直後」。</a:t>
-            </a:r>
-            <a:endParaRPr lang="en-US" sz="3000" dirty="0"/>
+                <a:latin typeface="Noto Sans JP Print Black" pitchFamily="34" charset="0"/>
+                <a:ea typeface="Noto Sans JP Print Black" pitchFamily="34" charset="-122"/>
+                <a:cs typeface="Noto Sans JP Print Black" pitchFamily="34" charset="-120"/>
+              </a:rPr>
+              <a:t>ゴール前とゴール直後は、</a:t>
+            </a:r>
+            <a:endParaRPr lang="en-US" sz="3600" dirty="0"/>
           </a:p>
           <a:p>
             <a:pPr algn="l" indent="0" marL="0">
-              <a:buNone/>
-            </a:pPr>
-            <a:r>
-              <a:rPr lang="en-US" sz="3000" b="1" dirty="0">
+              <a:lnSpc>
+                <a:spcPct val="90000"/>
+              </a:lnSpc>
+              <a:buNone/>
+            </a:pPr>
+            <a:r>
+              <a:rPr lang="en-US" sz="3600" dirty="0">
                 <a:solidFill>
                   <a:schemeClr val="tx2"/>
                 </a:solidFill>
+                <a:latin typeface="Noto Sans JP Print Black" pitchFamily="34" charset="0"/>
+                <a:ea typeface="Noto Sans JP Print Black" pitchFamily="34" charset="-122"/>
+                <a:cs typeface="Noto Sans JP Print Black" pitchFamily="34" charset="-120"/>
               </a:rPr>
               <a:t>全職員で見守る</a:t>
             </a:r>
-            <a:endParaRPr lang="en-US" sz="3000" dirty="0"/>
+            <a:endParaRPr lang="en-US" sz="3600" dirty="0"/>
           </a:p>
         </p:txBody>
       </p:sp>
@@ -18405,9 +19074,9 @@
                 <a:solidFill>
                   <a:schemeClr val="accent4"/>
                 </a:solidFill>
-                <a:latin typeface="BIZ UDPゴシック" pitchFamily="34" charset="0"/>
-                <a:ea typeface="BIZ UDPゴシック" pitchFamily="34" charset="-122"/>
-                <a:cs typeface="BIZ UDPゴシック" pitchFamily="34" charset="-120"/>
+                <a:latin typeface="Noto Sans JP Print" pitchFamily="34" charset="0"/>
+                <a:ea typeface="Noto Sans JP Print" pitchFamily="34" charset="-122"/>
+                <a:cs typeface="Noto Sans JP Print" pitchFamily="34" charset="-120"/>
               </a:rPr>
               <a:t>スタート</a:t>
             </a:r>
@@ -18469,9 +19138,9 @@
                 <a:solidFill>
                   <a:schemeClr val="bg1"/>
                 </a:solidFill>
-                <a:latin typeface="BIZ UDPゴシック" pitchFamily="34" charset="0"/>
-                <a:ea typeface="BIZ UDPゴシック" pitchFamily="34" charset="-122"/>
-                <a:cs typeface="BIZ UDPゴシック" pitchFamily="34" charset="-120"/>
+                <a:latin typeface="Noto Sans JP Print Black" pitchFamily="34" charset="0"/>
+                <a:ea typeface="Noto Sans JP Print Black" pitchFamily="34" charset="-122"/>
+                <a:cs typeface="Noto Sans JP Print Black" pitchFamily="34" charset="-120"/>
               </a:rPr>
               <a:t>S</a:t>
             </a:r>
@@ -18492,7 +19161,7 @@
           </a:xfrm>
           <a:prstGeom prst="roundRect">
             <a:avLst>
-              <a:gd name="adj" fmla="val 13333"/>
+              <a:gd name="adj" fmla="val 5556"/>
             </a:avLst>
           </a:prstGeom>
           <a:solidFill>
@@ -18535,9 +19204,9 @@
                 <a:solidFill>
                   <a:schemeClr val="accent1"/>
                 </a:solidFill>
-                <a:latin typeface="BIZ UDPゴシック" pitchFamily="34" charset="0"/>
-                <a:ea typeface="BIZ UDPゴシック" pitchFamily="34" charset="-122"/>
-                <a:cs typeface="BIZ UDPゴシック" pitchFamily="34" charset="-120"/>
+                <a:latin typeface="Noto Sans JP Print" pitchFamily="34" charset="0"/>
+                <a:ea typeface="Noto Sans JP Print" pitchFamily="34" charset="-122"/>
+                <a:cs typeface="Noto Sans JP Print" pitchFamily="34" charset="-120"/>
               </a:rPr>
               <a:t>ゴール前</a:t>
             </a:r>
@@ -18552,9 +19221,9 @@
                 <a:solidFill>
                   <a:schemeClr val="accent1"/>
                 </a:solidFill>
-                <a:latin typeface="BIZ UDPゴシック" pitchFamily="34" charset="0"/>
-                <a:ea typeface="BIZ UDPゴシック" pitchFamily="34" charset="-122"/>
-                <a:cs typeface="BIZ UDPゴシック" pitchFamily="34" charset="-120"/>
+                <a:latin typeface="Noto Sans JP Print" pitchFamily="34" charset="0"/>
+                <a:ea typeface="Noto Sans JP Print" pitchFamily="34" charset="-122"/>
+                <a:cs typeface="Noto Sans JP Print" pitchFamily="34" charset="-120"/>
               </a:rPr>
               <a:t>スパート</a:t>
             </a:r>
@@ -18616,9 +19285,9 @@
                 <a:solidFill>
                   <a:schemeClr val="bg1"/>
                 </a:solidFill>
-                <a:latin typeface="BIZ UDPゴシック" pitchFamily="34" charset="0"/>
-                <a:ea typeface="BIZ UDPゴシック" pitchFamily="34" charset="-122"/>
-                <a:cs typeface="BIZ UDPゴシック" pitchFamily="34" charset="-120"/>
+                <a:latin typeface="Noto Sans JP Print Black" pitchFamily="34" charset="0"/>
+                <a:ea typeface="Noto Sans JP Print Black" pitchFamily="34" charset="-122"/>
+                <a:cs typeface="Noto Sans JP Print Black" pitchFamily="34" charset="-120"/>
               </a:rPr>
               <a:t>G</a:t>
             </a:r>
@@ -18655,9 +19324,9 @@
                 <a:solidFill>
                   <a:schemeClr val="accent1"/>
                 </a:solidFill>
-                <a:latin typeface="BIZ UDPゴシック" pitchFamily="34" charset="0"/>
-                <a:ea typeface="BIZ UDPゴシック" pitchFamily="34" charset="-122"/>
-                <a:cs typeface="BIZ UDPゴシック" pitchFamily="34" charset="-120"/>
+                <a:latin typeface="Noto Sans JP Print" pitchFamily="34" charset="0"/>
+                <a:ea typeface="Noto Sans JP Print" pitchFamily="34" charset="-122"/>
+                <a:cs typeface="Noto Sans JP Print" pitchFamily="34" charset="-120"/>
               </a:rPr>
               <a:t>ゴール直後</a:t>
             </a:r>
@@ -18678,7 +19347,7 @@
           </a:xfrm>
           <a:prstGeom prst="roundRect">
             <a:avLst>
-              <a:gd name="adj" fmla="val 4800"/>
+              <a:gd name="adj" fmla="val 2000"/>
             </a:avLst>
           </a:prstGeom>
           <a:solidFill>
@@ -18721,9 +19390,9 @@
                 <a:solidFill>
                   <a:schemeClr val="tx2"/>
                 </a:solidFill>
-                <a:latin typeface="BIZ UDPゴシック" pitchFamily="34" charset="0"/>
-                <a:ea typeface="BIZ UDPゴシック" pitchFamily="34" charset="-122"/>
-                <a:cs typeface="BIZ UDPゴシック" pitchFamily="34" charset="-120"/>
+                <a:latin typeface="Noto Sans JP Print" pitchFamily="34" charset="0"/>
+                <a:ea typeface="Noto Sans JP Print" pitchFamily="34" charset="-122"/>
+                <a:cs typeface="Noto Sans JP Print" pitchFamily="34" charset="-120"/>
               </a:rPr>
               <a:t>大会前に確認すること</a:t>
             </a:r>
@@ -18764,9 +19433,9 @@
                 <a:solidFill>
                   <a:schemeClr val="tx1"/>
                 </a:solidFill>
-                <a:latin typeface="BIZ UDPゴシック" pitchFamily="34" charset="0"/>
-                <a:ea typeface="BIZ UDPゴシック" pitchFamily="34" charset="-122"/>
-                <a:cs typeface="BIZ UDPゴシック" pitchFamily="34" charset="-120"/>
+                <a:latin typeface="Noto Sans JP Print" pitchFamily="34" charset="0"/>
+                <a:ea typeface="Noto Sans JP Print" pitchFamily="34" charset="-122"/>
+                <a:cs typeface="Noto Sans JP Print" pitchFamily="34" charset="-120"/>
               </a:rPr>
               <a:t>AEDの位置（どこからでも数分で届くか）</a:t>
             </a:r>
@@ -18785,9 +19454,9 @@
                 <a:solidFill>
                   <a:schemeClr val="tx1"/>
                 </a:solidFill>
-                <a:latin typeface="BIZ UDPゴシック" pitchFamily="34" charset="0"/>
-                <a:ea typeface="BIZ UDPゴシック" pitchFamily="34" charset="-122"/>
-                <a:cs typeface="BIZ UDPゴシック" pitchFamily="34" charset="-120"/>
+                <a:latin typeface="Noto Sans JP Print" pitchFamily="34" charset="0"/>
+                <a:ea typeface="Noto Sans JP Print" pitchFamily="34" charset="-122"/>
+                <a:cs typeface="Noto Sans JP Print" pitchFamily="34" charset="-120"/>
               </a:rPr>
               <a:t>ゴール付近に様子を見る担当を置く</a:t>
             </a:r>
@@ -18828,9 +19497,9 @@
                 <a:solidFill>
                   <a:schemeClr val="tx1"/>
                 </a:solidFill>
-                <a:latin typeface="BIZ UDPゴシック" pitchFamily="34" charset="0"/>
-                <a:ea typeface="BIZ UDPゴシック" pitchFamily="34" charset="-122"/>
-                <a:cs typeface="BIZ UDPゴシック" pitchFamily="34" charset="-120"/>
+                <a:latin typeface="Noto Sans JP Print" pitchFamily="34" charset="0"/>
+                <a:ea typeface="Noto Sans JP Print" pitchFamily="34" charset="-122"/>
+                <a:cs typeface="Noto Sans JP Print" pitchFamily="34" charset="-120"/>
               </a:rPr>
               <a:t>座り込んだ子には必ず声をかける</a:t>
             </a:r>
@@ -18849,9 +19518,9 @@
                 <a:solidFill>
                   <a:schemeClr val="tx1"/>
                 </a:solidFill>
-                <a:latin typeface="BIZ UDPゴシック" pitchFamily="34" charset="0"/>
-                <a:ea typeface="BIZ UDPゴシック" pitchFamily="34" charset="-122"/>
-                <a:cs typeface="BIZ UDPゴシック" pitchFamily="34" charset="-120"/>
+                <a:latin typeface="Noto Sans JP Print" pitchFamily="34" charset="0"/>
+                <a:ea typeface="Noto Sans JP Print" pitchFamily="34" charset="-122"/>
+                <a:cs typeface="Noto Sans JP Print" pitchFamily="34" charset="-120"/>
               </a:rPr>
               <a:t>心臓検診・管理指導表の確認</a:t>
             </a:r>
@@ -18870,9 +19539,9 @@
                 <a:solidFill>
                   <a:schemeClr val="tx1"/>
                 </a:solidFill>
-                <a:latin typeface="BIZ UDPゴシック" pitchFamily="34" charset="0"/>
-                <a:ea typeface="BIZ UDPゴシック" pitchFamily="34" charset="-122"/>
-                <a:cs typeface="BIZ UDPゴシック" pitchFamily="34" charset="-120"/>
+                <a:latin typeface="Noto Sans JP Print" pitchFamily="34" charset="0"/>
+                <a:ea typeface="Noto Sans JP Print" pitchFamily="34" charset="-122"/>
+                <a:cs typeface="Noto Sans JP Print" pitchFamily="34" charset="-120"/>
               </a:rPr>
               <a:t>緊急時の対応計画の共有</a:t>
             </a:r>
@@ -18910,8 +19579,11 @@
             <a:lvl1pPr>
               <a:defRPr sz="1100">
                 <a:solidFill>
-                  <a:srgbClr val="6B7A90"/>
-                </a:solidFill>
+                  <a:srgbClr val="7C828D"/>
+                </a:solidFill>
+                <a:latin typeface="Noto Sans JP Print Black"/>
+                <a:ea typeface="Noto Sans JP Print Black"/>
+                <a:cs typeface="Noto Sans JP Print Black"/>
               </a:defRPr>
             </a:lvl1pPr>
           </a:lstStyle>
@@ -18960,8 +19632,8 @@
         </p:nvSpPr>
         <p:spPr>
           <a:xfrm>
-            <a:off x="731520" y="1828800"/>
-            <a:ext cx="10698480" cy="1828800"/>
+            <a:off x="731520" y="1463040"/>
+            <a:ext cx="10698480" cy="2194560"/>
           </a:xfrm>
           <a:prstGeom prst="rect">
             <a:avLst/>
@@ -18974,31 +19646,63 @@
           <a:lstStyle/>
           <a:p>
             <a:pPr algn="l" indent="0" marL="0">
-              <a:buNone/>
-            </a:pPr>
-            <a:r>
-              <a:rPr lang="en-US" sz="4400" b="1" dirty="0">
+              <a:lnSpc>
+                <a:spcPct val="110000"/>
+              </a:lnSpc>
+              <a:buNone/>
+            </a:pPr>
+            <a:r>
+              <a:rPr lang="en-US" sz="4800" dirty="0">
                 <a:solidFill>
                   <a:schemeClr val="bg1"/>
                 </a:solidFill>
-              </a:rPr>
-              <a:t>育てたいのは「耐える子」ではなく、</a:t>
-            </a:r>
-            <a:endParaRPr lang="en-US" sz="4400" dirty="0"/>
+                <a:latin typeface="Noto Sans JP Print Black" pitchFamily="34" charset="0"/>
+                <a:ea typeface="Noto Sans JP Print Black" pitchFamily="34" charset="-122"/>
+                <a:cs typeface="Noto Sans JP Print Black" pitchFamily="34" charset="-120"/>
+              </a:rPr>
+              <a:t>育てたいのは</a:t>
+            </a:r>
+            <a:endParaRPr lang="en-US" sz="4800" dirty="0"/>
           </a:p>
           <a:p>
             <a:pPr algn="l" indent="0" marL="0">
-              <a:buNone/>
-            </a:pPr>
-            <a:r>
-              <a:rPr lang="en-US" sz="4400" b="1" dirty="0">
+              <a:lnSpc>
+                <a:spcPct val="110000"/>
+              </a:lnSpc>
+              <a:buNone/>
+            </a:pPr>
+            <a:r>
+              <a:rPr lang="en-US" sz="4800" dirty="0">
                 <a:solidFill>
                   <a:schemeClr val="bg1"/>
                 </a:solidFill>
-              </a:rPr>
-              <a:t>「理由を持って、また走りたくなる子」</a:t>
-            </a:r>
-            <a:endParaRPr lang="en-US" sz="4400" dirty="0"/>
+                <a:latin typeface="Noto Sans JP Print Black" pitchFamily="34" charset="0"/>
+                <a:ea typeface="Noto Sans JP Print Black" pitchFamily="34" charset="-122"/>
+                <a:cs typeface="Noto Sans JP Print Black" pitchFamily="34" charset="-120"/>
+              </a:rPr>
+              <a:t>「理由を持って、</a:t>
+            </a:r>
+            <a:endParaRPr lang="en-US" sz="4800" dirty="0"/>
+          </a:p>
+          <a:p>
+            <a:pPr algn="l" indent="0" marL="0">
+              <a:lnSpc>
+                <a:spcPct val="110000"/>
+              </a:lnSpc>
+              <a:buNone/>
+            </a:pPr>
+            <a:r>
+              <a:rPr lang="en-US" sz="4800" dirty="0">
+                <a:solidFill>
+                  <a:schemeClr val="bg1"/>
+                </a:solidFill>
+                <a:latin typeface="Noto Sans JP Print Black" pitchFamily="34" charset="0"/>
+                <a:ea typeface="Noto Sans JP Print Black" pitchFamily="34" charset="-122"/>
+                <a:cs typeface="Noto Sans JP Print Black" pitchFamily="34" charset="-120"/>
+              </a:rPr>
+              <a:t>また走りたくなる子」</a:t>
+            </a:r>
+            <a:endParaRPr lang="en-US" sz="4800" dirty="0"/>
           </a:p>
         </p:txBody>
       </p:sp>
@@ -19024,6 +19728,20 @@
         <p:txBody>
           <a:bodyPr wrap="square" lIns="0" tIns="0" rIns="0" bIns="0" rtlCol="0" anchor="t"/>
           <a:lstStyle/>
+          <a:p>
+            <a:pPr indent="0" marL="0">
+              <a:buNone/>
+            </a:pPr>
+            <a:r>
+              <a:rPr lang="en-US" sz="2000" dirty="0">
+                <a:solidFill>
+                  <a:schemeClr val="accent5"/>
+                </a:solidFill>
+              </a:rPr>
+              <a:t>「耐える子」ではなく。</a:t>
+            </a:r>
+            <a:endParaRPr lang="en-US" sz="2000" dirty="0"/>
+          </a:p>
           <a:p>
             <a:pPr indent="0" marL="0">
               <a:buNone/>
@@ -19075,7 +19793,7 @@
         </p:nvSpPr>
         <p:spPr>
           <a:xfrm>
-            <a:off x="548640" y="320040"/>
+            <a:off x="548640" y="274320"/>
             <a:ext cx="7315200" cy="320040"/>
           </a:xfrm>
           <a:prstGeom prst="rect">
@@ -19113,8 +19831,8 @@
         </p:nvSpPr>
         <p:spPr>
           <a:xfrm>
-            <a:off x="548640" y="685800"/>
-            <a:ext cx="11064240" cy="1143000"/>
+            <a:off x="548640" y="594360"/>
+            <a:ext cx="11064240" cy="1325880"/>
           </a:xfrm>
           <a:prstGeom prst="rect">
             <a:avLst/>
@@ -19127,17 +19845,23 @@
           <a:lstStyle/>
           <a:p>
             <a:pPr algn="l" indent="0" marL="0">
-              <a:buNone/>
-            </a:pPr>
-            <a:r>
-              <a:rPr lang="en-US" sz="3000" b="1" dirty="0">
+              <a:lnSpc>
+                <a:spcPct val="90000"/>
+              </a:lnSpc>
+              <a:buNone/>
+            </a:pPr>
+            <a:r>
+              <a:rPr lang="en-US" sz="3600" dirty="0">
                 <a:solidFill>
                   <a:schemeClr val="tx2"/>
                 </a:solidFill>
+                <a:latin typeface="Noto Sans JP Print Black" pitchFamily="34" charset="0"/>
+                <a:ea typeface="Noto Sans JP Print Black" pitchFamily="34" charset="-122"/>
+                <a:cs typeface="Noto Sans JP Print Black" pitchFamily="34" charset="-120"/>
               </a:rPr>
               <a:t>参考資料</a:t>
             </a:r>
-            <a:endParaRPr lang="en-US" sz="3000" dirty="0"/>
+            <a:endParaRPr lang="en-US" sz="3600" dirty="0"/>
           </a:p>
         </p:txBody>
       </p:sp>
@@ -19174,9 +19898,9 @@
                 <a:solidFill>
                   <a:schemeClr val="tx1"/>
                 </a:solidFill>
-                <a:latin typeface="BIZ UDPゴシック" pitchFamily="34" charset="0"/>
-                <a:ea typeface="BIZ UDPゴシック" pitchFamily="34" charset="-122"/>
-                <a:cs typeface="BIZ UDPゴシック" pitchFamily="34" charset="-120"/>
+                <a:latin typeface="Noto Sans JP Print" pitchFamily="34" charset="0"/>
+                <a:ea typeface="Noto Sans JP Print" pitchFamily="34" charset="-122"/>
+                <a:cs typeface="Noto Sans JP Print" pitchFamily="34" charset="-120"/>
               </a:rPr>
               <a:t>文部科学省『小学校学習指導要領（平成29年告示）』『同 解説 体育編』『同 解説 特別活動編』</a:t>
             </a:r>
@@ -19195,9 +19919,9 @@
                 <a:solidFill>
                   <a:schemeClr val="tx1"/>
                 </a:solidFill>
-                <a:latin typeface="BIZ UDPゴシック" pitchFamily="34" charset="0"/>
-                <a:ea typeface="BIZ UDPゴシック" pitchFamily="34" charset="-122"/>
-                <a:cs typeface="BIZ UDPゴシック" pitchFamily="34" charset="-120"/>
+                <a:latin typeface="Noto Sans JP Print" pitchFamily="34" charset="0"/>
+                <a:ea typeface="Noto Sans JP Print" pitchFamily="34" charset="-122"/>
+                <a:cs typeface="Noto Sans JP Print" pitchFamily="34" charset="-120"/>
               </a:rPr>
               <a:t>文部科学省『中学校学習指導要領（平成29年告示）』</a:t>
             </a:r>
@@ -19216,9 +19940,9 @@
                 <a:solidFill>
                   <a:schemeClr val="tx1"/>
                 </a:solidFill>
-                <a:latin typeface="BIZ UDPゴシック" pitchFamily="34" charset="0"/>
-                <a:ea typeface="BIZ UDPゴシック" pitchFamily="34" charset="-122"/>
-                <a:cs typeface="BIZ UDPゴシック" pitchFamily="34" charset="-120"/>
+                <a:latin typeface="Noto Sans JP Print" pitchFamily="34" charset="0"/>
+                <a:ea typeface="Noto Sans JP Print" pitchFamily="34" charset="-122"/>
+                <a:cs typeface="Noto Sans JP Print" pitchFamily="34" charset="-120"/>
               </a:rPr>
               <a:t>スポーツ庁『スポーツの実施状況等に関する世論調査』（令和6年度）</a:t>
             </a:r>
@@ -19237,9 +19961,9 @@
                 <a:solidFill>
                   <a:schemeClr val="tx1"/>
                 </a:solidFill>
-                <a:latin typeface="BIZ UDPゴシック" pitchFamily="34" charset="0"/>
-                <a:ea typeface="BIZ UDPゴシック" pitchFamily="34" charset="-122"/>
-                <a:cs typeface="BIZ UDPゴシック" pitchFamily="34" charset="-120"/>
+                <a:latin typeface="Noto Sans JP Print" pitchFamily="34" charset="0"/>
+                <a:ea typeface="Noto Sans JP Print" pitchFamily="34" charset="-122"/>
+                <a:cs typeface="Noto Sans JP Print" pitchFamily="34" charset="-120"/>
               </a:rPr>
               <a:t>日本スポーツ振興センター『学校の管理下の災害』、学校安全Web</a:t>
             </a:r>
@@ -19258,9 +19982,9 @@
                 <a:solidFill>
                   <a:schemeClr val="tx1"/>
                 </a:solidFill>
-                <a:latin typeface="BIZ UDPゴシック" pitchFamily="34" charset="0"/>
-                <a:ea typeface="BIZ UDPゴシック" pitchFamily="34" charset="-122"/>
-                <a:cs typeface="BIZ UDPゴシック" pitchFamily="34" charset="-120"/>
+                <a:latin typeface="Noto Sans JP Print" pitchFamily="34" charset="0"/>
+                <a:ea typeface="Noto Sans JP Print" pitchFamily="34" charset="-122"/>
+                <a:cs typeface="Noto Sans JP Print" pitchFamily="34" charset="-120"/>
               </a:rPr>
               <a:t>山形県教育委員会『学校における心臓突然死の防止』</a:t>
             </a:r>
@@ -19279,9 +20003,9 @@
                 <a:solidFill>
                   <a:schemeClr val="tx1"/>
                 </a:solidFill>
-                <a:latin typeface="BIZ UDPゴシック" pitchFamily="34" charset="0"/>
-                <a:ea typeface="BIZ UDPゴシック" pitchFamily="34" charset="-122"/>
-                <a:cs typeface="BIZ UDPゴシック" pitchFamily="34" charset="-120"/>
+                <a:latin typeface="Noto Sans JP Print" pitchFamily="34" charset="0"/>
+                <a:ea typeface="Noto Sans JP Print" pitchFamily="34" charset="-122"/>
+                <a:cs typeface="Noto Sans JP Print" pitchFamily="34" charset="-120"/>
               </a:rPr>
               <a:t>Birat A. et al. (2018) Metabolic and Fatigue Profiles Are Comparable Between Prepubertal Children and Well-Trained Adult Endurance Athletes. Frontiers in Physiology</a:t>
             </a:r>
@@ -19300,9 +20024,9 @@
                 <a:solidFill>
                   <a:schemeClr val="tx1"/>
                 </a:solidFill>
-                <a:latin typeface="BIZ UDPゴシック" pitchFamily="34" charset="0"/>
-                <a:ea typeface="BIZ UDPゴシック" pitchFamily="34" charset="-122"/>
-                <a:cs typeface="BIZ UDPゴシック" pitchFamily="34" charset="-120"/>
+                <a:latin typeface="Noto Sans JP Print" pitchFamily="34" charset="0"/>
+                <a:ea typeface="Noto Sans JP Print" pitchFamily="34" charset="-122"/>
+                <a:cs typeface="Noto Sans JP Print" pitchFamily="34" charset="-120"/>
               </a:rPr>
               <a:t>Verschuren O. et al. (2011) The 220-age equation does not predict maximum heart rate in children and adolescents. Dev Med Child Neurol</a:t>
             </a:r>
@@ -19340,8 +20064,11 @@
             <a:lvl1pPr>
               <a:defRPr sz="1100">
                 <a:solidFill>
-                  <a:srgbClr val="6B7A90"/>
-                </a:solidFill>
+                  <a:srgbClr val="7C828D"/>
+                </a:solidFill>
+                <a:latin typeface="Noto Sans JP Print Black"/>
+                <a:ea typeface="Noto Sans JP Print Black"/>
+                <a:cs typeface="Noto Sans JP Print Black"/>
               </a:defRPr>
             </a:lvl1pPr>
           </a:lstStyle>
@@ -19390,7 +20117,7 @@
         </p:nvSpPr>
         <p:spPr>
           <a:xfrm>
-            <a:off x="548640" y="320040"/>
+            <a:off x="548640" y="274320"/>
             <a:ext cx="7315200" cy="320040"/>
           </a:xfrm>
           <a:prstGeom prst="rect">
@@ -19428,8 +20155,8 @@
         </p:nvSpPr>
         <p:spPr>
           <a:xfrm>
-            <a:off x="548640" y="685800"/>
-            <a:ext cx="11064240" cy="1143000"/>
+            <a:off x="548640" y="594360"/>
+            <a:ext cx="11064240" cy="1325880"/>
           </a:xfrm>
           <a:prstGeom prst="rect">
             <a:avLst/>
@@ -19442,17 +20169,23 @@
           <a:lstStyle/>
           <a:p>
             <a:pPr algn="l" indent="0" marL="0">
-              <a:buNone/>
-            </a:pPr>
-            <a:r>
-              <a:rPr lang="en-US" sz="3000" b="1" dirty="0">
+              <a:lnSpc>
+                <a:spcPct val="90000"/>
+              </a:lnSpc>
+              <a:buNone/>
+            </a:pPr>
+            <a:r>
+              <a:rPr lang="en-US" sz="3600" dirty="0">
                 <a:solidFill>
                   <a:schemeClr val="tx2"/>
                 </a:solidFill>
+                <a:latin typeface="Noto Sans JP Print Black" pitchFamily="34" charset="0"/>
+                <a:ea typeface="Noto Sans JP Print Black" pitchFamily="34" charset="-122"/>
+                <a:cs typeface="Noto Sans JP Print Black" pitchFamily="34" charset="-120"/>
               </a:rPr>
               <a:t>小学校の体育に「長距離走」はない</a:t>
             </a:r>
-            <a:endParaRPr lang="en-US" sz="3000" dirty="0"/>
+            <a:endParaRPr lang="en-US" sz="3600" dirty="0"/>
           </a:p>
         </p:txBody>
       </p:sp>
@@ -19469,7 +20202,7 @@
           </a:xfrm>
           <a:prstGeom prst="roundRect">
             <a:avLst>
-              <a:gd name="adj" fmla="val 2791"/>
+              <a:gd name="adj" fmla="val 1163"/>
             </a:avLst>
           </a:prstGeom>
           <a:solidFill>
@@ -19512,9 +20245,9 @@
                 <a:solidFill>
                   <a:schemeClr val="tx2"/>
                 </a:solidFill>
-                <a:latin typeface="BIZ UDPゴシック" pitchFamily="34" charset="0"/>
-                <a:ea typeface="BIZ UDPゴシック" pitchFamily="34" charset="-122"/>
-                <a:cs typeface="BIZ UDPゴシック" pitchFamily="34" charset="-120"/>
+                <a:latin typeface="Noto Sans JP Print" pitchFamily="34" charset="0"/>
+                <a:ea typeface="Noto Sans JP Print" pitchFamily="34" charset="-122"/>
+                <a:cs typeface="Noto Sans JP Print" pitchFamily="34" charset="-120"/>
               </a:rPr>
               <a:t>小学校（高学年）陸上運動</a:t>
             </a:r>
@@ -19555,9 +20288,9 @@
                 <a:solidFill>
                   <a:schemeClr val="tx1"/>
                 </a:solidFill>
-                <a:latin typeface="BIZ UDPゴシック" pitchFamily="34" charset="0"/>
-                <a:ea typeface="BIZ UDPゴシック" pitchFamily="34" charset="-122"/>
-                <a:cs typeface="BIZ UDPゴシック" pitchFamily="34" charset="-120"/>
+                <a:latin typeface="Noto Sans JP Print" pitchFamily="34" charset="0"/>
+                <a:ea typeface="Noto Sans JP Print" pitchFamily="34" charset="-122"/>
+                <a:cs typeface="Noto Sans JP Print" pitchFamily="34" charset="-120"/>
               </a:rPr>
               <a:t>短距離走・リレー</a:t>
             </a:r>
@@ -19576,9 +20309,9 @@
                 <a:solidFill>
                   <a:schemeClr val="tx1"/>
                 </a:solidFill>
-                <a:latin typeface="BIZ UDPゴシック" pitchFamily="34" charset="0"/>
-                <a:ea typeface="BIZ UDPゴシック" pitchFamily="34" charset="-122"/>
-                <a:cs typeface="BIZ UDPゴシック" pitchFamily="34" charset="-120"/>
+                <a:latin typeface="Noto Sans JP Print" pitchFamily="34" charset="0"/>
+                <a:ea typeface="Noto Sans JP Print" pitchFamily="34" charset="-122"/>
+                <a:cs typeface="Noto Sans JP Print" pitchFamily="34" charset="-120"/>
               </a:rPr>
               <a:t>ハードル走</a:t>
             </a:r>
@@ -19597,9 +20330,9 @@
                 <a:solidFill>
                   <a:schemeClr val="tx1"/>
                 </a:solidFill>
-                <a:latin typeface="BIZ UDPゴシック" pitchFamily="34" charset="0"/>
-                <a:ea typeface="BIZ UDPゴシック" pitchFamily="34" charset="-122"/>
-                <a:cs typeface="BIZ UDPゴシック" pitchFamily="34" charset="-120"/>
+                <a:latin typeface="Noto Sans JP Print" pitchFamily="34" charset="0"/>
+                <a:ea typeface="Noto Sans JP Print" pitchFamily="34" charset="-122"/>
+                <a:cs typeface="Noto Sans JP Print" pitchFamily="34" charset="-120"/>
               </a:rPr>
               <a:t>走り幅跳び</a:t>
             </a:r>
@@ -19618,9 +20351,9 @@
                 <a:solidFill>
                   <a:schemeClr val="tx1"/>
                 </a:solidFill>
-                <a:latin typeface="BIZ UDPゴシック" pitchFamily="34" charset="0"/>
-                <a:ea typeface="BIZ UDPゴシック" pitchFamily="34" charset="-122"/>
-                <a:cs typeface="BIZ UDPゴシック" pitchFamily="34" charset="-120"/>
+                <a:latin typeface="Noto Sans JP Print" pitchFamily="34" charset="0"/>
+                <a:ea typeface="Noto Sans JP Print" pitchFamily="34" charset="-122"/>
+                <a:cs typeface="Noto Sans JP Print" pitchFamily="34" charset="-120"/>
               </a:rPr>
               <a:t>走り高跳び</a:t>
             </a:r>
@@ -19657,9 +20390,9 @@
                 <a:solidFill>
                   <a:schemeClr val="accent1"/>
                 </a:solidFill>
-                <a:latin typeface="BIZ UDPゴシック" pitchFamily="34" charset="0"/>
-                <a:ea typeface="BIZ UDPゴシック" pitchFamily="34" charset="-122"/>
-                <a:cs typeface="BIZ UDPゴシック" pitchFamily="34" charset="-120"/>
+                <a:latin typeface="Noto Sans JP Print" pitchFamily="34" charset="0"/>
+                <a:ea typeface="Noto Sans JP Print" pitchFamily="34" charset="-122"/>
+                <a:cs typeface="Noto Sans JP Print" pitchFamily="34" charset="-120"/>
               </a:rPr>
               <a:t>長距離走は……ない</a:t>
             </a:r>
@@ -19705,7 +20438,7 @@
           </a:xfrm>
           <a:prstGeom prst="roundRect">
             <a:avLst>
-              <a:gd name="adj" fmla="val 2791"/>
+              <a:gd name="adj" fmla="val 1163"/>
             </a:avLst>
           </a:prstGeom>
           <a:solidFill>
@@ -19748,9 +20481,9 @@
                 <a:solidFill>
                   <a:schemeClr val="accent5"/>
                 </a:solidFill>
-                <a:latin typeface="BIZ UDPゴシック" pitchFamily="34" charset="0"/>
-                <a:ea typeface="BIZ UDPゴシック" pitchFamily="34" charset="-122"/>
-                <a:cs typeface="BIZ UDPゴシック" pitchFamily="34" charset="-120"/>
+                <a:latin typeface="Noto Sans JP Print" pitchFamily="34" charset="0"/>
+                <a:ea typeface="Noto Sans JP Print" pitchFamily="34" charset="-122"/>
+                <a:cs typeface="Noto Sans JP Print" pitchFamily="34" charset="-120"/>
               </a:rPr>
               <a:t>中学校 陸上競技</a:t>
             </a:r>
@@ -19787,9 +20520,9 @@
                 <a:solidFill>
                   <a:schemeClr val="bg1"/>
                 </a:solidFill>
-                <a:latin typeface="BIZ UDPゴシック" pitchFamily="34" charset="0"/>
-                <a:ea typeface="BIZ UDPゴシック" pitchFamily="34" charset="-122"/>
-                <a:cs typeface="BIZ UDPゴシック" pitchFamily="34" charset="-120"/>
+                <a:latin typeface="Noto Sans JP Print" pitchFamily="34" charset="0"/>
+                <a:ea typeface="Noto Sans JP Print" pitchFamily="34" charset="-122"/>
+                <a:cs typeface="Noto Sans JP Print" pitchFamily="34" charset="-120"/>
               </a:rPr>
               <a:t>長距離走</a:t>
             </a:r>
@@ -19826,9 +20559,9 @@
                 <a:solidFill>
                   <a:schemeClr val="bg1"/>
                 </a:solidFill>
-                <a:latin typeface="BIZ UDPゴシック" pitchFamily="34" charset="0"/>
-                <a:ea typeface="BIZ UDPゴシック" pitchFamily="34" charset="-122"/>
-                <a:cs typeface="BIZ UDPゴシック" pitchFamily="34" charset="-120"/>
+                <a:latin typeface="Noto Sans JP Print" pitchFamily="34" charset="0"/>
+                <a:ea typeface="Noto Sans JP Print" pitchFamily="34" charset="-122"/>
+                <a:cs typeface="Noto Sans JP Print" pitchFamily="34" charset="-120"/>
               </a:rPr>
               <a:t>1000〜3000m程度</a:t>
             </a:r>
@@ -19865,9 +20598,9 @@
                 <a:solidFill>
                   <a:schemeClr val="accent5"/>
                 </a:solidFill>
-                <a:latin typeface="BIZ UDPゴシック" pitchFamily="34" charset="0"/>
-                <a:ea typeface="BIZ UDPゴシック" pitchFamily="34" charset="-122"/>
-                <a:cs typeface="BIZ UDPゴシック" pitchFamily="34" charset="-120"/>
+                <a:latin typeface="Noto Sans JP Print" pitchFamily="34" charset="0"/>
+                <a:ea typeface="Noto Sans JP Print" pitchFamily="34" charset="-122"/>
+                <a:cs typeface="Noto Sans JP Print" pitchFamily="34" charset="-120"/>
               </a:rPr>
               <a:t>「長距離走」として扱うのは中学校から</a:t>
             </a:r>
@@ -19904,9 +20637,9 @@
                 <a:solidFill>
                   <a:schemeClr val="accent4"/>
                 </a:solidFill>
-                <a:latin typeface="BIZ UDPゴシック" pitchFamily="34" charset="0"/>
-                <a:ea typeface="BIZ UDPゴシック" pitchFamily="34" charset="-122"/>
-                <a:cs typeface="BIZ UDPゴシック" pitchFamily="34" charset="-120"/>
+                <a:latin typeface="Noto Sans JP Print" pitchFamily="34" charset="0"/>
+                <a:ea typeface="Noto Sans JP Print" pitchFamily="34" charset="-122"/>
+                <a:cs typeface="Noto Sans JP Print" pitchFamily="34" charset="-120"/>
               </a:rPr>
               <a:t>出典：小学校・中学校学習指導要領（平成29年告示）</a:t>
             </a:r>
@@ -19944,8 +20677,11 @@
             <a:lvl1pPr>
               <a:defRPr sz="1100">
                 <a:solidFill>
-                  <a:srgbClr val="6B7A90"/>
-                </a:solidFill>
+                  <a:srgbClr val="7C828D"/>
+                </a:solidFill>
+                <a:latin typeface="Noto Sans JP Print Black"/>
+                <a:ea typeface="Noto Sans JP Print Black"/>
+                <a:cs typeface="Noto Sans JP Print Black"/>
               </a:defRPr>
             </a:lvl1pPr>
           </a:lstStyle>
@@ -19994,7 +20730,7 @@
         </p:nvSpPr>
         <p:spPr>
           <a:xfrm>
-            <a:off x="548640" y="320040"/>
+            <a:off x="548640" y="274320"/>
             <a:ext cx="7315200" cy="320040"/>
           </a:xfrm>
           <a:prstGeom prst="rect">
@@ -20032,8 +20768,8 @@
         </p:nvSpPr>
         <p:spPr>
           <a:xfrm>
-            <a:off x="548640" y="685800"/>
-            <a:ext cx="11064240" cy="1143000"/>
+            <a:off x="548640" y="594360"/>
+            <a:ext cx="11064240" cy="1325880"/>
           </a:xfrm>
           <a:prstGeom prst="rect">
             <a:avLst/>
@@ -20046,17 +20782,43 @@
           <a:lstStyle/>
           <a:p>
             <a:pPr algn="l" indent="0" marL="0">
-              <a:buNone/>
-            </a:pPr>
-            <a:r>
-              <a:rPr lang="en-US" sz="3000" b="1" dirty="0">
+              <a:lnSpc>
+                <a:spcPct val="90000"/>
+              </a:lnSpc>
+              <a:buNone/>
+            </a:pPr>
+            <a:r>
+              <a:rPr lang="en-US" sz="3600" dirty="0">
                 <a:solidFill>
                   <a:schemeClr val="tx2"/>
                 </a:solidFill>
-              </a:rPr>
-              <a:t>あるのは「無理のない速さで5〜6分程度」の持久走</a:t>
-            </a:r>
-            <a:endParaRPr lang="en-US" sz="3000" dirty="0"/>
+                <a:latin typeface="Noto Sans JP Print Black" pitchFamily="34" charset="0"/>
+                <a:ea typeface="Noto Sans JP Print Black" pitchFamily="34" charset="-122"/>
+                <a:cs typeface="Noto Sans JP Print Black" pitchFamily="34" charset="-120"/>
+              </a:rPr>
+              <a:t>あるのは</a:t>
+            </a:r>
+            <a:endParaRPr lang="en-US" sz="3600" dirty="0"/>
+          </a:p>
+          <a:p>
+            <a:pPr algn="l" indent="0" marL="0">
+              <a:lnSpc>
+                <a:spcPct val="90000"/>
+              </a:lnSpc>
+              <a:buNone/>
+            </a:pPr>
+            <a:r>
+              <a:rPr lang="en-US" sz="3600" dirty="0">
+                <a:solidFill>
+                  <a:schemeClr val="tx2"/>
+                </a:solidFill>
+                <a:latin typeface="Noto Sans JP Print Black" pitchFamily="34" charset="0"/>
+                <a:ea typeface="Noto Sans JP Print Black" pitchFamily="34" charset="-122"/>
+                <a:cs typeface="Noto Sans JP Print Black" pitchFamily="34" charset="-120"/>
+              </a:rPr>
+              <a:t>「無理のない速さで5〜6分程度」の持久走</a:t>
+            </a:r>
+            <a:endParaRPr lang="en-US" sz="3600" dirty="0"/>
           </a:p>
         </p:txBody>
       </p:sp>
@@ -20073,7 +20835,7 @@
           </a:xfrm>
           <a:prstGeom prst="roundRect">
             <a:avLst>
-              <a:gd name="adj" fmla="val 15000"/>
+              <a:gd name="adj" fmla="val 6250"/>
             </a:avLst>
           </a:prstGeom>
           <a:solidFill>
@@ -20116,9 +20878,9 @@
                 <a:solidFill>
                   <a:schemeClr val="bg1"/>
                 </a:solidFill>
-                <a:latin typeface="BIZ UDPゴシック" pitchFamily="34" charset="0"/>
-                <a:ea typeface="BIZ UDPゴシック" pitchFamily="34" charset="-122"/>
-                <a:cs typeface="BIZ UDPゴシック" pitchFamily="34" charset="-120"/>
+                <a:latin typeface="Noto Sans JP Print" pitchFamily="34" charset="0"/>
+                <a:ea typeface="Noto Sans JP Print" pitchFamily="34" charset="-122"/>
+                <a:cs typeface="Noto Sans JP Print" pitchFamily="34" charset="-120"/>
               </a:rPr>
               <a:t>体つくり運動</a:t>
             </a:r>
@@ -20139,7 +20901,7 @@
           </a:xfrm>
           <a:prstGeom prst="roundRect">
             <a:avLst>
-              <a:gd name="adj" fmla="val 17143"/>
+              <a:gd name="adj" fmla="val 7143"/>
             </a:avLst>
           </a:prstGeom>
           <a:solidFill>
@@ -20182,9 +20944,9 @@
                 <a:solidFill>
                   <a:schemeClr val="accent4"/>
                 </a:solidFill>
-                <a:latin typeface="BIZ UDPゴシック" pitchFamily="34" charset="0"/>
-                <a:ea typeface="BIZ UDPゴシック" pitchFamily="34" charset="-122"/>
-                <a:cs typeface="BIZ UDPゴシック" pitchFamily="34" charset="-120"/>
+                <a:latin typeface="Noto Sans JP Print" pitchFamily="34" charset="0"/>
+                <a:ea typeface="Noto Sans JP Print" pitchFamily="34" charset="-122"/>
+                <a:cs typeface="Noto Sans JP Print" pitchFamily="34" charset="-120"/>
               </a:rPr>
               <a:t>体ほぐしの運動</a:t>
             </a:r>
@@ -20205,7 +20967,7 @@
           </a:xfrm>
           <a:prstGeom prst="roundRect">
             <a:avLst>
-              <a:gd name="adj" fmla="val 17143"/>
+              <a:gd name="adj" fmla="val 7143"/>
             </a:avLst>
           </a:prstGeom>
           <a:solidFill>
@@ -20248,9 +21010,9 @@
                 <a:solidFill>
                   <a:schemeClr val="tx2"/>
                 </a:solidFill>
-                <a:latin typeface="BIZ UDPゴシック" pitchFamily="34" charset="0"/>
-                <a:ea typeface="BIZ UDPゴシック" pitchFamily="34" charset="-122"/>
-                <a:cs typeface="BIZ UDPゴシック" pitchFamily="34" charset="-120"/>
+                <a:latin typeface="Noto Sans JP Print" pitchFamily="34" charset="0"/>
+                <a:ea typeface="Noto Sans JP Print" pitchFamily="34" charset="-122"/>
+                <a:cs typeface="Noto Sans JP Print" pitchFamily="34" charset="-120"/>
               </a:rPr>
               <a:t>体の動きを高める運動</a:t>
             </a:r>
@@ -20271,7 +21033,7 @@
           </a:xfrm>
           <a:prstGeom prst="roundRect">
             <a:avLst>
-              <a:gd name="adj" fmla="val 12000"/>
+              <a:gd name="adj" fmla="val 5000"/>
             </a:avLst>
           </a:prstGeom>
           <a:solidFill>
@@ -20314,9 +21076,9 @@
                 <a:solidFill>
                   <a:schemeClr val="accent1"/>
                 </a:solidFill>
-                <a:latin typeface="BIZ UDPゴシック" pitchFamily="34" charset="0"/>
-                <a:ea typeface="BIZ UDPゴシック" pitchFamily="34" charset="-122"/>
-                <a:cs typeface="BIZ UDPゴシック" pitchFamily="34" charset="-120"/>
+                <a:latin typeface="Noto Sans JP Print" pitchFamily="34" charset="0"/>
+                <a:ea typeface="Noto Sans JP Print" pitchFamily="34" charset="-122"/>
+                <a:cs typeface="Noto Sans JP Print" pitchFamily="34" charset="-120"/>
               </a:rPr>
               <a:t>動きを持続する能力を</a:t>
             </a:r>
@@ -20331,9 +21093,9 @@
                 <a:solidFill>
                   <a:schemeClr val="accent1"/>
                 </a:solidFill>
-                <a:latin typeface="BIZ UDPゴシック" pitchFamily="34" charset="0"/>
-                <a:ea typeface="BIZ UDPゴシック" pitchFamily="34" charset="-122"/>
-                <a:cs typeface="BIZ UDPゴシック" pitchFamily="34" charset="-120"/>
+                <a:latin typeface="Noto Sans JP Print" pitchFamily="34" charset="0"/>
+                <a:ea typeface="Noto Sans JP Print" pitchFamily="34" charset="-122"/>
+                <a:cs typeface="Noto Sans JP Print" pitchFamily="34" charset="-120"/>
               </a:rPr>
               <a:t>高めるための運動</a:t>
             </a:r>
@@ -20395,9 +21157,9 @@
                 <a:solidFill>
                   <a:schemeClr val="accent4"/>
                 </a:solidFill>
-                <a:latin typeface="BIZ UDPゴシック" pitchFamily="34" charset="0"/>
-                <a:ea typeface="BIZ UDPゴシック" pitchFamily="34" charset="-122"/>
-                <a:cs typeface="BIZ UDPゴシック" pitchFamily="34" charset="-120"/>
+                <a:latin typeface="Noto Sans JP Print" pitchFamily="34" charset="0"/>
+                <a:ea typeface="Noto Sans JP Print" pitchFamily="34" charset="-122"/>
+                <a:cs typeface="Noto Sans JP Print" pitchFamily="34" charset="-120"/>
               </a:rPr>
               <a:t>高学年の例示</a:t>
             </a:r>
@@ -20430,15 +21192,43 @@
               <a:buNone/>
             </a:pPr>
             <a:r>
-              <a:rPr lang="en-US" sz="8000" b="1" dirty="0">
+              <a:rPr lang="en-US" sz="9600" b="1" dirty="0">
                 <a:solidFill>
                   <a:schemeClr val="accent1"/>
                 </a:solidFill>
-                <a:latin typeface="BIZ UDPゴシック" pitchFamily="34" charset="0"/>
-                <a:ea typeface="BIZ UDPゴシック" pitchFamily="34" charset="-122"/>
-                <a:cs typeface="BIZ UDPゴシック" pitchFamily="34" charset="-120"/>
-              </a:rPr>
-              <a:t>5〜6</a:t>
+                <a:latin typeface="Noto Sans JP Print Black" pitchFamily="34" charset="0"/>
+                <a:ea typeface="Noto Sans JP Print Black" pitchFamily="34" charset="-122"/>
+                <a:cs typeface="Noto Sans JP Print Black" pitchFamily="34" charset="-120"/>
+              </a:rPr>
+              <a:t>5</a:t>
+            </a:r>
+            <a:pPr indent="0" marL="0">
+              <a:buNone/>
+            </a:pPr>
+            <a:r>
+              <a:rPr lang="en-US" sz="6000" b="1" dirty="0">
+                <a:solidFill>
+                  <a:schemeClr val="accent1"/>
+                </a:solidFill>
+                <a:latin typeface="Noto Sans JP Print" pitchFamily="34" charset="0"/>
+                <a:ea typeface="Noto Sans JP Print" pitchFamily="34" charset="-122"/>
+                <a:cs typeface="Noto Sans JP Print" pitchFamily="34" charset="-120"/>
+              </a:rPr>
+              <a:t>〜</a:t>
+            </a:r>
+            <a:pPr indent="0" marL="0">
+              <a:buNone/>
+            </a:pPr>
+            <a:r>
+              <a:rPr lang="en-US" sz="9600" b="1" dirty="0">
+                <a:solidFill>
+                  <a:schemeClr val="accent1"/>
+                </a:solidFill>
+                <a:latin typeface="Noto Sans JP Print Black" pitchFamily="34" charset="0"/>
+                <a:ea typeface="Noto Sans JP Print Black" pitchFamily="34" charset="-122"/>
+                <a:cs typeface="Noto Sans JP Print Black" pitchFamily="34" charset="-120"/>
+              </a:rPr>
+              <a:t>6</a:t>
             </a:r>
             <a:pPr indent="0" marL="0">
               <a:buNone/>
@@ -20448,9 +21238,9 @@
                 <a:solidFill>
                   <a:schemeClr val="tx2"/>
                 </a:solidFill>
-                <a:latin typeface="BIZ UDPゴシック" pitchFamily="34" charset="0"/>
-                <a:ea typeface="BIZ UDPゴシック" pitchFamily="34" charset="-122"/>
-                <a:cs typeface="BIZ UDPゴシック" pitchFamily="34" charset="-120"/>
+                <a:latin typeface="Noto Sans JP Print" pitchFamily="34" charset="0"/>
+                <a:ea typeface="Noto Sans JP Print" pitchFamily="34" charset="-122"/>
+                <a:cs typeface="Noto Sans JP Print" pitchFamily="34" charset="-120"/>
               </a:rPr>
               <a:t> 分程度</a:t>
             </a:r>
@@ -20487,9 +21277,9 @@
                 <a:solidFill>
                   <a:schemeClr val="tx2"/>
                 </a:solidFill>
-                <a:latin typeface="BIZ UDPゴシック" pitchFamily="34" charset="0"/>
-                <a:ea typeface="BIZ UDPゴシック" pitchFamily="34" charset="-122"/>
-                <a:cs typeface="BIZ UDPゴシック" pitchFamily="34" charset="-120"/>
+                <a:latin typeface="Noto Sans JP Print" pitchFamily="34" charset="0"/>
+                <a:ea typeface="Noto Sans JP Print" pitchFamily="34" charset="-122"/>
+                <a:cs typeface="Noto Sans JP Print" pitchFamily="34" charset="-120"/>
               </a:rPr>
               <a:t>無理のない速さで</a:t>
             </a:r>
@@ -20530,9 +21320,9 @@
                 <a:solidFill>
                   <a:schemeClr val="tx1"/>
                 </a:solidFill>
-                <a:latin typeface="BIZ UDPゴシック" pitchFamily="34" charset="0"/>
-                <a:ea typeface="BIZ UDPゴシック" pitchFamily="34" charset="-122"/>
-                <a:cs typeface="BIZ UDPゴシック" pitchFamily="34" charset="-120"/>
+                <a:latin typeface="Noto Sans JP Print" pitchFamily="34" charset="0"/>
+                <a:ea typeface="Noto Sans JP Print" pitchFamily="34" charset="-122"/>
+                <a:cs typeface="Noto Sans JP Print" pitchFamily="34" charset="-120"/>
               </a:rPr>
               <a:t>エアロビクスなどの全身運動を続ける</a:t>
             </a:r>
@@ -20551,9 +21341,9 @@
                 <a:solidFill>
                   <a:schemeClr val="tx1"/>
                 </a:solidFill>
-                <a:latin typeface="BIZ UDPゴシック" pitchFamily="34" charset="0"/>
-                <a:ea typeface="BIZ UDPゴシック" pitchFamily="34" charset="-122"/>
-                <a:cs typeface="BIZ UDPゴシック" pitchFamily="34" charset="-120"/>
+                <a:latin typeface="Noto Sans JP Print" pitchFamily="34" charset="0"/>
+                <a:ea typeface="Noto Sans JP Print" pitchFamily="34" charset="-122"/>
+                <a:cs typeface="Noto Sans JP Print" pitchFamily="34" charset="-120"/>
               </a:rPr>
               <a:t>変化のある地形などを移動する</a:t>
             </a:r>
@@ -20590,9 +21380,9 @@
                 <a:solidFill>
                   <a:schemeClr val="accent4"/>
                 </a:solidFill>
-                <a:latin typeface="BIZ UDPゴシック" pitchFamily="34" charset="0"/>
-                <a:ea typeface="BIZ UDPゴシック" pitchFamily="34" charset="-122"/>
-                <a:cs typeface="BIZ UDPゴシック" pitchFamily="34" charset="-120"/>
+                <a:latin typeface="Noto Sans JP Print" pitchFamily="34" charset="0"/>
+                <a:ea typeface="Noto Sans JP Print" pitchFamily="34" charset="-122"/>
+                <a:cs typeface="Noto Sans JP Print" pitchFamily="34" charset="-120"/>
               </a:rPr>
               <a:t>出典：小学校学習指導要領（平成29年告示）解説 体育編</a:t>
             </a:r>
@@ -20630,8 +21420,11 @@
             <a:lvl1pPr>
               <a:defRPr sz="1100">
                 <a:solidFill>
-                  <a:srgbClr val="6B7A90"/>
-                </a:solidFill>
+                  <a:srgbClr val="7C828D"/>
+                </a:solidFill>
+                <a:latin typeface="Noto Sans JP Print Black"/>
+                <a:ea typeface="Noto Sans JP Print Black"/>
+                <a:cs typeface="Noto Sans JP Print Black"/>
               </a:defRPr>
             </a:lvl1pPr>
           </a:lstStyle>
@@ -20680,7 +21473,7 @@
         </p:nvSpPr>
         <p:spPr>
           <a:xfrm>
-            <a:off x="548640" y="320040"/>
+            <a:off x="548640" y="274320"/>
             <a:ext cx="7315200" cy="320040"/>
           </a:xfrm>
           <a:prstGeom prst="rect">
@@ -20718,8 +21511,8 @@
         </p:nvSpPr>
         <p:spPr>
           <a:xfrm>
-            <a:off x="548640" y="685800"/>
-            <a:ext cx="11064240" cy="1143000"/>
+            <a:off x="548640" y="594360"/>
+            <a:ext cx="11064240" cy="1325880"/>
           </a:xfrm>
           <a:prstGeom prst="rect">
             <a:avLst/>
@@ -20732,31 +21525,43 @@
           <a:lstStyle/>
           <a:p>
             <a:pPr algn="l" indent="0" marL="0">
-              <a:buNone/>
-            </a:pPr>
-            <a:r>
-              <a:rPr lang="en-US" sz="3000" b="1" dirty="0">
+              <a:lnSpc>
+                <a:spcPct val="90000"/>
+              </a:lnSpc>
+              <a:buNone/>
+            </a:pPr>
+            <a:r>
+              <a:rPr lang="en-US" sz="3600" dirty="0">
                 <a:solidFill>
                   <a:schemeClr val="tx2"/>
                 </a:solidFill>
+                <a:latin typeface="Noto Sans JP Print Black" pitchFamily="34" charset="0"/>
+                <a:ea typeface="Noto Sans JP Print Black" pitchFamily="34" charset="-122"/>
+                <a:cs typeface="Noto Sans JP Print Black" pitchFamily="34" charset="-120"/>
               </a:rPr>
               <a:t>大会は特別活動の「体育的行事」。</a:t>
             </a:r>
-            <a:endParaRPr lang="en-US" sz="3000" dirty="0"/>
+            <a:endParaRPr lang="en-US" sz="3600" dirty="0"/>
           </a:p>
           <a:p>
             <a:pPr algn="l" indent="0" marL="0">
-              <a:buNone/>
-            </a:pPr>
-            <a:r>
-              <a:rPr lang="en-US" sz="3000" b="1" dirty="0">
+              <a:lnSpc>
+                <a:spcPct val="90000"/>
+              </a:lnSpc>
+              <a:buNone/>
+            </a:pPr>
+            <a:r>
+              <a:rPr lang="en-US" sz="3600" dirty="0">
                 <a:solidFill>
                   <a:schemeClr val="tx2"/>
                 </a:solidFill>
+                <a:latin typeface="Noto Sans JP Print Black" pitchFamily="34" charset="0"/>
+                <a:ea typeface="Noto Sans JP Print Black" pitchFamily="34" charset="-122"/>
+                <a:cs typeface="Noto Sans JP Print Black" pitchFamily="34" charset="-120"/>
               </a:rPr>
               <a:t>ねらいの一つは「運動に親しむ態度」</a:t>
             </a:r>
-            <a:endParaRPr lang="en-US" sz="3000" dirty="0"/>
+            <a:endParaRPr lang="en-US" sz="3600" dirty="0"/>
           </a:p>
         </p:txBody>
       </p:sp>
@@ -20789,9 +21594,9 @@
                 <a:solidFill>
                   <a:schemeClr val="accent4"/>
                 </a:solidFill>
-                <a:latin typeface="BIZ UDPゴシック" pitchFamily="34" charset="0"/>
-                <a:ea typeface="BIZ UDPゴシック" pitchFamily="34" charset="-122"/>
-                <a:cs typeface="BIZ UDPゴシック" pitchFamily="34" charset="-120"/>
+                <a:latin typeface="Noto Sans JP Print" pitchFamily="34" charset="0"/>
+                <a:ea typeface="Noto Sans JP Print" pitchFamily="34" charset="-122"/>
+                <a:cs typeface="Noto Sans JP Print" pitchFamily="34" charset="-120"/>
               </a:rPr>
               <a:t>健康安全・体育的行事のねらい（要旨）</a:t>
             </a:r>
@@ -20812,7 +21617,7 @@
           </a:xfrm>
           <a:prstGeom prst="roundRect">
             <a:avLst>
-              <a:gd name="adj" fmla="val 9600"/>
+              <a:gd name="adj" fmla="val 4000"/>
             </a:avLst>
           </a:prstGeom>
           <a:solidFill>
@@ -20855,9 +21660,9 @@
                 <a:solidFill>
                   <a:schemeClr val="tx2"/>
                 </a:solidFill>
-                <a:latin typeface="BIZ UDPゴシック" pitchFamily="34" charset="0"/>
-                <a:ea typeface="BIZ UDPゴシック" pitchFamily="34" charset="-122"/>
-                <a:cs typeface="BIZ UDPゴシック" pitchFamily="34" charset="-120"/>
+                <a:latin typeface="Noto Sans JP Print" pitchFamily="34" charset="0"/>
+                <a:ea typeface="Noto Sans JP Print" pitchFamily="34" charset="-122"/>
+                <a:cs typeface="Noto Sans JP Print" pitchFamily="34" charset="-120"/>
               </a:rPr>
               <a:t>心身の健全な発達</a:t>
             </a:r>
@@ -20878,7 +21683,7 @@
           </a:xfrm>
           <a:prstGeom prst="roundRect">
             <a:avLst>
-              <a:gd name="adj" fmla="val 9600"/>
+              <a:gd name="adj" fmla="val 4000"/>
             </a:avLst>
           </a:prstGeom>
           <a:solidFill>
@@ -20921,9 +21726,9 @@
                 <a:solidFill>
                   <a:schemeClr val="tx2"/>
                 </a:solidFill>
-                <a:latin typeface="BIZ UDPゴシック" pitchFamily="34" charset="0"/>
-                <a:ea typeface="BIZ UDPゴシック" pitchFamily="34" charset="-122"/>
-                <a:cs typeface="BIZ UDPゴシック" pitchFamily="34" charset="-120"/>
+                <a:latin typeface="Noto Sans JP Print" pitchFamily="34" charset="0"/>
+                <a:ea typeface="Noto Sans JP Print" pitchFamily="34" charset="-122"/>
+                <a:cs typeface="Noto Sans JP Print" pitchFamily="34" charset="-120"/>
               </a:rPr>
               <a:t>健康の保持増進</a:t>
             </a:r>
@@ -20944,7 +21749,7 @@
           </a:xfrm>
           <a:prstGeom prst="roundRect">
             <a:avLst>
-              <a:gd name="adj" fmla="val 9600"/>
+              <a:gd name="adj" fmla="val 4000"/>
             </a:avLst>
           </a:prstGeom>
           <a:solidFill>
@@ -20987,9 +21792,9 @@
                 <a:solidFill>
                   <a:schemeClr val="bg1"/>
                 </a:solidFill>
-                <a:latin typeface="BIZ UDPゴシック" pitchFamily="34" charset="0"/>
-                <a:ea typeface="BIZ UDPゴシック" pitchFamily="34" charset="-122"/>
-                <a:cs typeface="BIZ UDPゴシック" pitchFamily="34" charset="-120"/>
+                <a:latin typeface="Noto Sans JP Print" pitchFamily="34" charset="0"/>
+                <a:ea typeface="Noto Sans JP Print" pitchFamily="34" charset="-122"/>
+                <a:cs typeface="Noto Sans JP Print" pitchFamily="34" charset="-120"/>
               </a:rPr>
               <a:t>運動に親しむ態度の育成</a:t>
             </a:r>
@@ -21010,7 +21815,7 @@
           </a:xfrm>
           <a:prstGeom prst="roundRect">
             <a:avLst>
-              <a:gd name="adj" fmla="val 9600"/>
+              <a:gd name="adj" fmla="val 4000"/>
             </a:avLst>
           </a:prstGeom>
           <a:solidFill>
@@ -21053,9 +21858,9 @@
                 <a:solidFill>
                   <a:schemeClr val="tx2"/>
                 </a:solidFill>
-                <a:latin typeface="BIZ UDPゴシック" pitchFamily="34" charset="0"/>
-                <a:ea typeface="BIZ UDPゴシック" pitchFamily="34" charset="-122"/>
-                <a:cs typeface="BIZ UDPゴシック" pitchFamily="34" charset="-120"/>
+                <a:latin typeface="Noto Sans JP Print" pitchFamily="34" charset="0"/>
+                <a:ea typeface="Noto Sans JP Print" pitchFamily="34" charset="-122"/>
+                <a:cs typeface="Noto Sans JP Print" pitchFamily="34" charset="-120"/>
               </a:rPr>
               <a:t>責任感や連帯感の涵養</a:t>
             </a:r>
@@ -21076,7 +21881,7 @@
           </a:xfrm>
           <a:prstGeom prst="roundRect">
             <a:avLst>
-              <a:gd name="adj" fmla="val 9600"/>
+              <a:gd name="adj" fmla="val 4000"/>
             </a:avLst>
           </a:prstGeom>
           <a:solidFill>
@@ -21119,9 +21924,9 @@
                 <a:solidFill>
                   <a:schemeClr val="tx2"/>
                 </a:solidFill>
-                <a:latin typeface="BIZ UDPゴシック" pitchFamily="34" charset="0"/>
-                <a:ea typeface="BIZ UDPゴシック" pitchFamily="34" charset="-122"/>
-                <a:cs typeface="BIZ UDPゴシック" pitchFamily="34" charset="-120"/>
+                <a:latin typeface="Noto Sans JP Print" pitchFamily="34" charset="0"/>
+                <a:ea typeface="Noto Sans JP Print" pitchFamily="34" charset="-122"/>
+                <a:cs typeface="Noto Sans JP Print" pitchFamily="34" charset="-120"/>
               </a:rPr>
               <a:t>体力の向上</a:t>
             </a:r>
@@ -21158,9 +21963,9 @@
                 <a:solidFill>
                   <a:schemeClr val="accent1"/>
                 </a:solidFill>
-                <a:latin typeface="BIZ UDPゴシック" pitchFamily="34" charset="0"/>
-                <a:ea typeface="BIZ UDPゴシック" pitchFamily="34" charset="-122"/>
-                <a:cs typeface="BIZ UDPゴシック" pitchFamily="34" charset="-120"/>
+                <a:latin typeface="Noto Sans JP Print" pitchFamily="34" charset="0"/>
+                <a:ea typeface="Noto Sans JP Print" pitchFamily="34" charset="-122"/>
+                <a:cs typeface="Noto Sans JP Print" pitchFamily="34" charset="-120"/>
               </a:rPr>
               <a:t>「体力の向上」と並んで</a:t>
             </a:r>
@@ -21175,9 +21980,9 @@
                 <a:solidFill>
                   <a:schemeClr val="accent1"/>
                 </a:solidFill>
-                <a:latin typeface="BIZ UDPゴシック" pitchFamily="34" charset="0"/>
-                <a:ea typeface="BIZ UDPゴシック" pitchFamily="34" charset="-122"/>
-                <a:cs typeface="BIZ UDPゴシック" pitchFamily="34" charset="-120"/>
+                <a:latin typeface="Noto Sans JP Print" pitchFamily="34" charset="0"/>
+                <a:ea typeface="Noto Sans JP Print" pitchFamily="34" charset="-122"/>
+                <a:cs typeface="Noto Sans JP Print" pitchFamily="34" charset="-120"/>
               </a:rPr>
               <a:t>「親しむ」がある</a:t>
             </a:r>
@@ -21214,9 +22019,9 @@
                 <a:solidFill>
                   <a:schemeClr val="accent4"/>
                 </a:solidFill>
-                <a:latin typeface="BIZ UDPゴシック" pitchFamily="34" charset="0"/>
-                <a:ea typeface="BIZ UDPゴシック" pitchFamily="34" charset="-122"/>
-                <a:cs typeface="BIZ UDPゴシック" pitchFamily="34" charset="-120"/>
+                <a:latin typeface="Noto Sans JP Print" pitchFamily="34" charset="0"/>
+                <a:ea typeface="Noto Sans JP Print" pitchFamily="34" charset="-122"/>
+                <a:cs typeface="Noto Sans JP Print" pitchFamily="34" charset="-120"/>
               </a:rPr>
               <a:t>出典：小学校学習指導要領（平成29年告示）第6章 特別活動</a:t>
             </a:r>
@@ -21254,8 +22059,11 @@
             <a:lvl1pPr>
               <a:defRPr sz="1100">
                 <a:solidFill>
-                  <a:srgbClr val="6B7A90"/>
-                </a:solidFill>
+                  <a:srgbClr val="7C828D"/>
+                </a:solidFill>
+                <a:latin typeface="Noto Sans JP Print Black"/>
+                <a:ea typeface="Noto Sans JP Print Black"/>
+                <a:cs typeface="Noto Sans JP Print Black"/>
               </a:defRPr>
             </a:lvl1pPr>
           </a:lstStyle>
@@ -21304,7 +22112,7 @@
         </p:nvSpPr>
         <p:spPr>
           <a:xfrm>
-            <a:off x="548640" y="320040"/>
+            <a:off x="548640" y="274320"/>
             <a:ext cx="7315200" cy="320040"/>
           </a:xfrm>
           <a:prstGeom prst="rect">
@@ -21342,8 +22150,8 @@
         </p:nvSpPr>
         <p:spPr>
           <a:xfrm>
-            <a:off x="548640" y="685800"/>
-            <a:ext cx="11064240" cy="1143000"/>
+            <a:off x="548640" y="594360"/>
+            <a:ext cx="11064240" cy="1325880"/>
           </a:xfrm>
           <a:prstGeom prst="rect">
             <a:avLst/>
@@ -21356,17 +22164,43 @@
           <a:lstStyle/>
           <a:p>
             <a:pPr algn="l" indent="0" marL="0">
-              <a:buNone/>
-            </a:pPr>
-            <a:r>
-              <a:rPr lang="en-US" sz="3000" b="1" dirty="0">
+              <a:lnSpc>
+                <a:spcPct val="90000"/>
+              </a:lnSpc>
+              <a:buNone/>
+            </a:pPr>
+            <a:r>
+              <a:rPr lang="en-US" sz="3600" dirty="0">
                 <a:solidFill>
                   <a:schemeClr val="tx2"/>
                 </a:solidFill>
-              </a:rPr>
-              <a:t>運動会のルーツは、海軍の「隊の強さ比べ」</a:t>
-            </a:r>
-            <a:endParaRPr lang="en-US" sz="3000" dirty="0"/>
+                <a:latin typeface="Noto Sans JP Print Black" pitchFamily="34" charset="0"/>
+                <a:ea typeface="Noto Sans JP Print Black" pitchFamily="34" charset="-122"/>
+                <a:cs typeface="Noto Sans JP Print Black" pitchFamily="34" charset="-120"/>
+              </a:rPr>
+              <a:t>運動会のルーツは、</a:t>
+            </a:r>
+            <a:endParaRPr lang="en-US" sz="3600" dirty="0"/>
+          </a:p>
+          <a:p>
+            <a:pPr algn="l" indent="0" marL="0">
+              <a:lnSpc>
+                <a:spcPct val="90000"/>
+              </a:lnSpc>
+              <a:buNone/>
+            </a:pPr>
+            <a:r>
+              <a:rPr lang="en-US" sz="3600" dirty="0">
+                <a:solidFill>
+                  <a:schemeClr val="tx2"/>
+                </a:solidFill>
+                <a:latin typeface="Noto Sans JP Print Black" pitchFamily="34" charset="0"/>
+                <a:ea typeface="Noto Sans JP Print Black" pitchFamily="34" charset="-122"/>
+                <a:cs typeface="Noto Sans JP Print Black" pitchFamily="34" charset="-120"/>
+              </a:rPr>
+              <a:t>海軍の「隊の強さ比べ」</a:t>
+            </a:r>
+            <a:endParaRPr lang="en-US" sz="3600" dirty="0"/>
           </a:p>
         </p:txBody>
       </p:sp>
@@ -21443,17 +22277,17 @@
               <a:buNone/>
             </a:pPr>
             <a:r>
-              <a:rPr lang="en-US" sz="2400" b="1" dirty="0">
+              <a:rPr lang="en-US" sz="2800" b="1" dirty="0">
                 <a:solidFill>
                   <a:schemeClr val="accent1"/>
                 </a:solidFill>
-                <a:latin typeface="BIZ UDPゴシック" pitchFamily="34" charset="0"/>
-                <a:ea typeface="BIZ UDPゴシック" pitchFamily="34" charset="-122"/>
-                <a:cs typeface="BIZ UDPゴシック" pitchFamily="34" charset="-120"/>
+                <a:latin typeface="Noto Sans JP Print Black" pitchFamily="34" charset="0"/>
+                <a:ea typeface="Noto Sans JP Print Black" pitchFamily="34" charset="-122"/>
+                <a:cs typeface="Noto Sans JP Print Black" pitchFamily="34" charset="-120"/>
               </a:rPr>
               <a:t>1874年</a:t>
             </a:r>
-            <a:endParaRPr lang="en-US" sz="2400" dirty="0"/>
+            <a:endParaRPr lang="en-US" sz="2800" dirty="0"/>
           </a:p>
         </p:txBody>
       </p:sp>
@@ -21470,7 +22304,7 @@
           </a:xfrm>
           <a:prstGeom prst="roundRect">
             <a:avLst>
-              <a:gd name="adj" fmla="val 5000"/>
+              <a:gd name="adj" fmla="val 2083"/>
             </a:avLst>
           </a:prstGeom>
           <a:solidFill>
@@ -21513,9 +22347,9 @@
                 <a:solidFill>
                   <a:schemeClr val="tx2"/>
                 </a:solidFill>
-                <a:latin typeface="BIZ UDPゴシック" pitchFamily="34" charset="0"/>
-                <a:ea typeface="BIZ UDPゴシック" pitchFamily="34" charset="-122"/>
-                <a:cs typeface="BIZ UDPゴシック" pitchFamily="34" charset="-120"/>
+                <a:latin typeface="Noto Sans JP Print" pitchFamily="34" charset="0"/>
+                <a:ea typeface="Noto Sans JP Print" pitchFamily="34" charset="-122"/>
+                <a:cs typeface="Noto Sans JP Print" pitchFamily="34" charset="-120"/>
               </a:rPr>
               <a:t>海軍兵学寮</a:t>
             </a:r>
@@ -21530,9 +22364,9 @@
                 <a:solidFill>
                   <a:schemeClr val="tx2"/>
                 </a:solidFill>
-                <a:latin typeface="BIZ UDPゴシック" pitchFamily="34" charset="0"/>
-                <a:ea typeface="BIZ UDPゴシック" pitchFamily="34" charset="-122"/>
-                <a:cs typeface="BIZ UDPゴシック" pitchFamily="34" charset="-120"/>
+                <a:latin typeface="Noto Sans JP Print" pitchFamily="34" charset="0"/>
+                <a:ea typeface="Noto Sans JP Print" pitchFamily="34" charset="-122"/>
+                <a:cs typeface="Noto Sans JP Print" pitchFamily="34" charset="-120"/>
               </a:rPr>
               <a:t>「競闘遊戯」</a:t>
             </a:r>
@@ -21569,9 +22403,9 @@
                 <a:solidFill>
                   <a:schemeClr val="tx1"/>
                 </a:solidFill>
-                <a:latin typeface="BIZ UDPゴシック" pitchFamily="34" charset="0"/>
-                <a:ea typeface="BIZ UDPゴシック" pitchFamily="34" charset="-122"/>
-                <a:cs typeface="BIZ UDPゴシック" pitchFamily="34" charset="-120"/>
+                <a:latin typeface="Noto Sans JP Print" pitchFamily="34" charset="0"/>
+                <a:ea typeface="Noto Sans JP Print" pitchFamily="34" charset="-122"/>
+                <a:cs typeface="Noto Sans JP Print" pitchFamily="34" charset="-120"/>
               </a:rPr>
               <a:t>小隊ごとに訓練の成果を競う</a:t>
             </a:r>
@@ -21629,17 +22463,17 @@
               <a:buNone/>
             </a:pPr>
             <a:r>
-              <a:rPr lang="en-US" sz="2400" b="1" dirty="0">
+              <a:rPr lang="en-US" sz="2800" b="1" dirty="0">
                 <a:solidFill>
                   <a:schemeClr val="tx2"/>
                 </a:solidFill>
-                <a:latin typeface="BIZ UDPゴシック" pitchFamily="34" charset="0"/>
-                <a:ea typeface="BIZ UDPゴシック" pitchFamily="34" charset="-122"/>
-                <a:cs typeface="BIZ UDPゴシック" pitchFamily="34" charset="-120"/>
+                <a:latin typeface="Noto Sans JP Print" pitchFamily="34" charset="0"/>
+                <a:ea typeface="Noto Sans JP Print" pitchFamily="34" charset="-122"/>
+                <a:cs typeface="Noto Sans JP Print" pitchFamily="34" charset="-120"/>
               </a:rPr>
               <a:t>明治期</a:t>
             </a:r>
-            <a:endParaRPr lang="en-US" sz="2400" dirty="0"/>
+            <a:endParaRPr lang="en-US" sz="2800" dirty="0"/>
           </a:p>
         </p:txBody>
       </p:sp>
@@ -21656,7 +22490,7 @@
           </a:xfrm>
           <a:prstGeom prst="roundRect">
             <a:avLst>
-              <a:gd name="adj" fmla="val 5000"/>
+              <a:gd name="adj" fmla="val 2083"/>
             </a:avLst>
           </a:prstGeom>
           <a:solidFill>
@@ -21699,9 +22533,9 @@
                 <a:solidFill>
                   <a:schemeClr val="tx2"/>
                 </a:solidFill>
-                <a:latin typeface="BIZ UDPゴシック" pitchFamily="34" charset="0"/>
-                <a:ea typeface="BIZ UDPゴシック" pitchFamily="34" charset="-122"/>
-                <a:cs typeface="BIZ UDPゴシック" pitchFamily="34" charset="-120"/>
+                <a:latin typeface="Noto Sans JP Print" pitchFamily="34" charset="0"/>
+                <a:ea typeface="Noto Sans JP Print" pitchFamily="34" charset="-122"/>
+                <a:cs typeface="Noto Sans JP Print" pitchFamily="34" charset="-120"/>
               </a:rPr>
               <a:t>学校運動会が</a:t>
             </a:r>
@@ -21716,9 +22550,9 @@
                 <a:solidFill>
                   <a:schemeClr val="tx2"/>
                 </a:solidFill>
-                <a:latin typeface="BIZ UDPゴシック" pitchFamily="34" charset="0"/>
-                <a:ea typeface="BIZ UDPゴシック" pitchFamily="34" charset="-122"/>
-                <a:cs typeface="BIZ UDPゴシック" pitchFamily="34" charset="-120"/>
+                <a:latin typeface="Noto Sans JP Print" pitchFamily="34" charset="0"/>
+                <a:ea typeface="Noto Sans JP Print" pitchFamily="34" charset="-122"/>
+                <a:cs typeface="Noto Sans JP Print" pitchFamily="34" charset="-120"/>
               </a:rPr>
               <a:t>全国に普及</a:t>
             </a:r>
@@ -21755,9 +22589,9 @@
                 <a:solidFill>
                   <a:schemeClr val="tx1"/>
                 </a:solidFill>
-                <a:latin typeface="BIZ UDPゴシック" pitchFamily="34" charset="0"/>
-                <a:ea typeface="BIZ UDPゴシック" pitchFamily="34" charset="-122"/>
-                <a:cs typeface="BIZ UDPゴシック" pitchFamily="34" charset="-120"/>
+                <a:latin typeface="Noto Sans JP Print" pitchFamily="34" charset="0"/>
+                <a:ea typeface="Noto Sans JP Print" pitchFamily="34" charset="-122"/>
+                <a:cs typeface="Noto Sans JP Print" pitchFamily="34" charset="-120"/>
               </a:rPr>
               <a:t>体育の普及が目的</a:t>
             </a:r>
@@ -21815,17 +22649,17 @@
               <a:buNone/>
             </a:pPr>
             <a:r>
-              <a:rPr lang="en-US" sz="2400" b="1" dirty="0">
+              <a:rPr lang="en-US" sz="2800" b="1" dirty="0">
                 <a:solidFill>
                   <a:schemeClr val="tx2"/>
                 </a:solidFill>
-                <a:latin typeface="BIZ UDPゴシック" pitchFamily="34" charset="0"/>
-                <a:ea typeface="BIZ UDPゴシック" pitchFamily="34" charset="-122"/>
-                <a:cs typeface="BIZ UDPゴシック" pitchFamily="34" charset="-120"/>
+                <a:latin typeface="Noto Sans JP Print Black" pitchFamily="34" charset="0"/>
+                <a:ea typeface="Noto Sans JP Print Black" pitchFamily="34" charset="-122"/>
+                <a:cs typeface="Noto Sans JP Print Black" pitchFamily="34" charset="-120"/>
               </a:rPr>
               <a:t>1947年</a:t>
             </a:r>
-            <a:endParaRPr lang="en-US" sz="2400" dirty="0"/>
+            <a:endParaRPr lang="en-US" sz="2800" dirty="0"/>
           </a:p>
         </p:txBody>
       </p:sp>
@@ -21842,7 +22676,7 @@
           </a:xfrm>
           <a:prstGeom prst="roundRect">
             <a:avLst>
-              <a:gd name="adj" fmla="val 5000"/>
+              <a:gd name="adj" fmla="val 2083"/>
             </a:avLst>
           </a:prstGeom>
           <a:solidFill>
@@ -21885,9 +22719,9 @@
                 <a:solidFill>
                   <a:schemeClr val="tx2"/>
                 </a:solidFill>
-                <a:latin typeface="BIZ UDPゴシック" pitchFamily="34" charset="0"/>
-                <a:ea typeface="BIZ UDPゴシック" pitchFamily="34" charset="-122"/>
-                <a:cs typeface="BIZ UDPゴシック" pitchFamily="34" charset="-120"/>
+                <a:latin typeface="Noto Sans JP Print" pitchFamily="34" charset="0"/>
+                <a:ea typeface="Noto Sans JP Print" pitchFamily="34" charset="-122"/>
+                <a:cs typeface="Noto Sans JP Print" pitchFamily="34" charset="-120"/>
               </a:rPr>
               <a:t>学習指導要領</a:t>
             </a:r>
@@ -21902,9 +22736,9 @@
                 <a:solidFill>
                   <a:schemeClr val="tx2"/>
                 </a:solidFill>
-                <a:latin typeface="BIZ UDPゴシック" pitchFamily="34" charset="0"/>
-                <a:ea typeface="BIZ UDPゴシック" pitchFamily="34" charset="-122"/>
-                <a:cs typeface="BIZ UDPゴシック" pitchFamily="34" charset="-120"/>
+                <a:latin typeface="Noto Sans JP Print" pitchFamily="34" charset="0"/>
+                <a:ea typeface="Noto Sans JP Print" pitchFamily="34" charset="-122"/>
+                <a:cs typeface="Noto Sans JP Print" pitchFamily="34" charset="-120"/>
               </a:rPr>
               <a:t>（試案）</a:t>
             </a:r>
@@ -21941,9 +22775,9 @@
                 <a:solidFill>
                   <a:schemeClr val="tx1"/>
                 </a:solidFill>
-                <a:latin typeface="BIZ UDPゴシック" pitchFamily="34" charset="0"/>
-                <a:ea typeface="BIZ UDPゴシック" pitchFamily="34" charset="-122"/>
-                <a:cs typeface="BIZ UDPゴシック" pitchFamily="34" charset="-120"/>
+                <a:latin typeface="Noto Sans JP Print" pitchFamily="34" charset="0"/>
+                <a:ea typeface="Noto Sans JP Print" pitchFamily="34" charset="-122"/>
+                <a:cs typeface="Noto Sans JP Print" pitchFamily="34" charset="-120"/>
               </a:rPr>
               <a:t>戦後、初めての指導要領</a:t>
             </a:r>
@@ -22001,17 +22835,17 @@
               <a:buNone/>
             </a:pPr>
             <a:r>
-              <a:rPr lang="en-US" sz="2400" b="1" dirty="0">
+              <a:rPr lang="en-US" sz="2800" b="1" dirty="0">
                 <a:solidFill>
                   <a:schemeClr val="tx2"/>
                 </a:solidFill>
-                <a:latin typeface="BIZ UDPゴシック" pitchFamily="34" charset="0"/>
-                <a:ea typeface="BIZ UDPゴシック" pitchFamily="34" charset="-122"/>
-                <a:cs typeface="BIZ UDPゴシック" pitchFamily="34" charset="-120"/>
+                <a:latin typeface="Noto Sans JP Print Black" pitchFamily="34" charset="0"/>
+                <a:ea typeface="Noto Sans JP Print Black" pitchFamily="34" charset="-122"/>
+                <a:cs typeface="Noto Sans JP Print Black" pitchFamily="34" charset="-120"/>
               </a:rPr>
               <a:t>1958年</a:t>
             </a:r>
-            <a:endParaRPr lang="en-US" sz="2400" dirty="0"/>
+            <a:endParaRPr lang="en-US" sz="2800" dirty="0"/>
           </a:p>
         </p:txBody>
       </p:sp>
@@ -22028,7 +22862,7 @@
           </a:xfrm>
           <a:prstGeom prst="roundRect">
             <a:avLst>
-              <a:gd name="adj" fmla="val 5000"/>
+              <a:gd name="adj" fmla="val 2083"/>
             </a:avLst>
           </a:prstGeom>
           <a:solidFill>
@@ -22071,9 +22905,9 @@
                 <a:solidFill>
                   <a:schemeClr val="tx2"/>
                 </a:solidFill>
-                <a:latin typeface="BIZ UDPゴシック" pitchFamily="34" charset="0"/>
-                <a:ea typeface="BIZ UDPゴシック" pitchFamily="34" charset="-122"/>
-                <a:cs typeface="BIZ UDPゴシック" pitchFamily="34" charset="-120"/>
+                <a:latin typeface="Noto Sans JP Print" pitchFamily="34" charset="0"/>
+                <a:ea typeface="Noto Sans JP Print" pitchFamily="34" charset="-122"/>
+                <a:cs typeface="Noto Sans JP Print" pitchFamily="34" charset="-120"/>
               </a:rPr>
               <a:t>学習指導要領</a:t>
             </a:r>
@@ -22088,9 +22922,9 @@
                 <a:solidFill>
                   <a:schemeClr val="tx2"/>
                 </a:solidFill>
-                <a:latin typeface="BIZ UDPゴシック" pitchFamily="34" charset="0"/>
-                <a:ea typeface="BIZ UDPゴシック" pitchFamily="34" charset="-122"/>
-                <a:cs typeface="BIZ UDPゴシック" pitchFamily="34" charset="-120"/>
+                <a:latin typeface="Noto Sans JP Print" pitchFamily="34" charset="0"/>
+                <a:ea typeface="Noto Sans JP Print" pitchFamily="34" charset="-122"/>
+                <a:cs typeface="Noto Sans JP Print" pitchFamily="34" charset="-120"/>
               </a:rPr>
               <a:t>（告示）</a:t>
             </a:r>
@@ -22127,9 +22961,9 @@
                 <a:solidFill>
                   <a:schemeClr val="tx1"/>
                 </a:solidFill>
-                <a:latin typeface="BIZ UDPゴシック" pitchFamily="34" charset="0"/>
-                <a:ea typeface="BIZ UDPゴシック" pitchFamily="34" charset="-122"/>
-                <a:cs typeface="BIZ UDPゴシック" pitchFamily="34" charset="-120"/>
+                <a:latin typeface="Noto Sans JP Print" pitchFamily="34" charset="0"/>
+                <a:ea typeface="Noto Sans JP Print" pitchFamily="34" charset="-122"/>
+                <a:cs typeface="Noto Sans JP Print" pitchFamily="34" charset="-120"/>
               </a:rPr>
               <a:t>法的な拘束力を持つ</a:t>
             </a:r>
@@ -22166,9 +23000,9 @@
                 <a:solidFill>
                   <a:schemeClr val="accent4"/>
                 </a:solidFill>
-                <a:latin typeface="BIZ UDPゴシック" pitchFamily="34" charset="0"/>
-                <a:ea typeface="BIZ UDPゴシック" pitchFamily="34" charset="-122"/>
-                <a:cs typeface="BIZ UDPゴシック" pitchFamily="34" charset="-120"/>
+                <a:latin typeface="Noto Sans JP Print" pitchFamily="34" charset="0"/>
+                <a:ea typeface="Noto Sans JP Print" pitchFamily="34" charset="-122"/>
+                <a:cs typeface="Noto Sans JP Print" pitchFamily="34" charset="-120"/>
               </a:rPr>
               <a:t>「競わせる行事」は、学習指導要領より前からあった</a:t>
             </a:r>
@@ -22206,8 +23040,11 @@
             <a:lvl1pPr>
               <a:defRPr sz="1100">
                 <a:solidFill>
-                  <a:srgbClr val="6B7A90"/>
-                </a:solidFill>
+                  <a:srgbClr val="7C828D"/>
+                </a:solidFill>
+                <a:latin typeface="Noto Sans JP Print Black"/>
+                <a:ea typeface="Noto Sans JP Print Black"/>
+                <a:cs typeface="Noto Sans JP Print Black"/>
               </a:defRPr>
             </a:lvl1pPr>
           </a:lstStyle>
@@ -22256,7 +23093,7 @@
         </p:nvSpPr>
         <p:spPr>
           <a:xfrm>
-            <a:off x="548640" y="320040"/>
+            <a:off x="548640" y="274320"/>
             <a:ext cx="7315200" cy="320040"/>
           </a:xfrm>
           <a:prstGeom prst="rect">
@@ -22294,8 +23131,8 @@
         </p:nvSpPr>
         <p:spPr>
           <a:xfrm>
-            <a:off x="548640" y="685800"/>
-            <a:ext cx="11064240" cy="1143000"/>
+            <a:off x="548640" y="594360"/>
+            <a:ext cx="11064240" cy="1325880"/>
           </a:xfrm>
           <a:prstGeom prst="rect">
             <a:avLst/>
@@ -22308,17 +23145,43 @@
           <a:lstStyle/>
           <a:p>
             <a:pPr algn="l" indent="0" marL="0">
-              <a:buNone/>
-            </a:pPr>
-            <a:r>
-              <a:rPr lang="en-US" sz="3000" b="1" dirty="0">
+              <a:lnSpc>
+                <a:spcPct val="90000"/>
+              </a:lnSpc>
+              <a:buNone/>
+            </a:pPr>
+            <a:r>
+              <a:rPr lang="en-US" sz="3600" dirty="0">
                 <a:solidFill>
                   <a:schemeClr val="tx2"/>
                 </a:solidFill>
-              </a:rPr>
-              <a:t>私たちの大会は「行事」か、それとも「訓練」か</a:t>
-            </a:r>
-            <a:endParaRPr lang="en-US" sz="3000" dirty="0"/>
+                <a:latin typeface="Noto Sans JP Print Black" pitchFamily="34" charset="0"/>
+                <a:ea typeface="Noto Sans JP Print Black" pitchFamily="34" charset="-122"/>
+                <a:cs typeface="Noto Sans JP Print Black" pitchFamily="34" charset="-120"/>
+              </a:rPr>
+              <a:t>私たちの大会は</a:t>
+            </a:r>
+            <a:endParaRPr lang="en-US" sz="3600" dirty="0"/>
+          </a:p>
+          <a:p>
+            <a:pPr algn="l" indent="0" marL="0">
+              <a:lnSpc>
+                <a:spcPct val="90000"/>
+              </a:lnSpc>
+              <a:buNone/>
+            </a:pPr>
+            <a:r>
+              <a:rPr lang="en-US" sz="3600" dirty="0">
+                <a:solidFill>
+                  <a:schemeClr val="tx2"/>
+                </a:solidFill>
+                <a:latin typeface="Noto Sans JP Print Black" pitchFamily="34" charset="0"/>
+                <a:ea typeface="Noto Sans JP Print Black" pitchFamily="34" charset="-122"/>
+                <a:cs typeface="Noto Sans JP Print Black" pitchFamily="34" charset="-120"/>
+              </a:rPr>
+              <a:t>「行事」か、それとも「訓練」か</a:t>
+            </a:r>
+            <a:endParaRPr lang="en-US" sz="3600" dirty="0"/>
           </a:p>
         </p:txBody>
       </p:sp>
@@ -22335,7 +23198,7 @@
           </a:xfrm>
           <a:prstGeom prst="roundRect">
             <a:avLst>
-              <a:gd name="adj" fmla="val 3158"/>
+              <a:gd name="adj" fmla="val 1316"/>
             </a:avLst>
           </a:prstGeom>
           <a:solidFill>
@@ -22378,9 +23241,9 @@
                 <a:solidFill>
                   <a:schemeClr val="accent2"/>
                 </a:solidFill>
-                <a:latin typeface="BIZ UDPゴシック" pitchFamily="34" charset="0"/>
-                <a:ea typeface="BIZ UDPゴシック" pitchFamily="34" charset="-122"/>
-                <a:cs typeface="BIZ UDPゴシック" pitchFamily="34" charset="-120"/>
+                <a:latin typeface="Noto Sans JP Print" pitchFamily="34" charset="0"/>
+                <a:ea typeface="Noto Sans JP Print" pitchFamily="34" charset="-122"/>
+                <a:cs typeface="Noto Sans JP Print" pitchFamily="34" charset="-120"/>
               </a:rPr>
               <a:t>行事</a:t>
             </a:r>
@@ -22417,9 +23280,9 @@
                 <a:solidFill>
                   <a:schemeClr val="tx2"/>
                 </a:solidFill>
-                <a:latin typeface="BIZ UDPゴシック" pitchFamily="34" charset="0"/>
-                <a:ea typeface="BIZ UDPゴシック" pitchFamily="34" charset="-122"/>
-                <a:cs typeface="BIZ UDPゴシック" pitchFamily="34" charset="-120"/>
+                <a:latin typeface="Noto Sans JP Print" pitchFamily="34" charset="0"/>
+                <a:ea typeface="Noto Sans JP Print" pitchFamily="34" charset="-122"/>
+                <a:cs typeface="Noto Sans JP Print" pitchFamily="34" charset="-120"/>
               </a:rPr>
               <a:t>運動に親しむ</a:t>
             </a:r>
@@ -22434,9 +23297,9 @@
                 <a:solidFill>
                   <a:schemeClr val="tx2"/>
                 </a:solidFill>
-                <a:latin typeface="BIZ UDPゴシック" pitchFamily="34" charset="0"/>
-                <a:ea typeface="BIZ UDPゴシック" pitchFamily="34" charset="-122"/>
-                <a:cs typeface="BIZ UDPゴシック" pitchFamily="34" charset="-120"/>
+                <a:latin typeface="Noto Sans JP Print" pitchFamily="34" charset="0"/>
+                <a:ea typeface="Noto Sans JP Print" pitchFamily="34" charset="-122"/>
+                <a:cs typeface="Noto Sans JP Print" pitchFamily="34" charset="-120"/>
               </a:rPr>
               <a:t>体力を高める</a:t>
             </a:r>
@@ -22469,17 +23332,17 @@
               <a:buNone/>
             </a:pPr>
             <a:r>
-              <a:rPr lang="en-US" sz="6000" b="1" dirty="0">
+              <a:rPr lang="en-US" sz="7200" b="1" dirty="0">
                 <a:solidFill>
                   <a:schemeClr val="accent1"/>
                 </a:solidFill>
-                <a:latin typeface="BIZ UDPゴシック" pitchFamily="34" charset="0"/>
-                <a:ea typeface="BIZ UDPゴシック" pitchFamily="34" charset="-122"/>
-                <a:cs typeface="BIZ UDPゴシック" pitchFamily="34" charset="-120"/>
-              </a:rPr>
-              <a:t>？</a:t>
-            </a:r>
-            <a:endParaRPr lang="en-US" sz="6000" dirty="0"/>
+                <a:latin typeface="Noto Sans JP Print Black" pitchFamily="34" charset="0"/>
+                <a:ea typeface="Noto Sans JP Print Black" pitchFamily="34" charset="-122"/>
+                <a:cs typeface="Noto Sans JP Print Black" pitchFamily="34" charset="-120"/>
+              </a:rPr>
+              <a:t>?</a:t>
+            </a:r>
+            <a:endParaRPr lang="en-US" sz="7200" dirty="0"/>
           </a:p>
         </p:txBody>
       </p:sp>
@@ -22496,7 +23359,7 @@
           </a:xfrm>
           <a:prstGeom prst="roundRect">
             <a:avLst>
-              <a:gd name="adj" fmla="val 3158"/>
+              <a:gd name="adj" fmla="val 1316"/>
             </a:avLst>
           </a:prstGeom>
           <a:solidFill>
@@ -22539,9 +23402,9 @@
                 <a:solidFill>
                   <a:schemeClr val="accent1"/>
                 </a:solidFill>
-                <a:latin typeface="BIZ UDPゴシック" pitchFamily="34" charset="0"/>
-                <a:ea typeface="BIZ UDPゴシック" pitchFamily="34" charset="-122"/>
-                <a:cs typeface="BIZ UDPゴシック" pitchFamily="34" charset="-120"/>
+                <a:latin typeface="Noto Sans JP Print" pitchFamily="34" charset="0"/>
+                <a:ea typeface="Noto Sans JP Print" pitchFamily="34" charset="-122"/>
+                <a:cs typeface="Noto Sans JP Print" pitchFamily="34" charset="-120"/>
               </a:rPr>
               <a:t>訓練</a:t>
             </a:r>
@@ -22578,9 +23441,9 @@
                 <a:solidFill>
                   <a:schemeClr val="tx2"/>
                 </a:solidFill>
-                <a:latin typeface="BIZ UDPゴシック" pitchFamily="34" charset="0"/>
-                <a:ea typeface="BIZ UDPゴシック" pitchFamily="34" charset="-122"/>
-                <a:cs typeface="BIZ UDPゴシック" pitchFamily="34" charset="-120"/>
+                <a:latin typeface="Noto Sans JP Print" pitchFamily="34" charset="0"/>
+                <a:ea typeface="Noto Sans JP Print" pitchFamily="34" charset="-122"/>
+                <a:cs typeface="Noto Sans JP Print" pitchFamily="34" charset="-120"/>
               </a:rPr>
               <a:t>苦しさに耐える</a:t>
             </a:r>
@@ -22595,9 +23458,9 @@
                 <a:solidFill>
                   <a:schemeClr val="tx2"/>
                 </a:solidFill>
-                <a:latin typeface="BIZ UDPゴシック" pitchFamily="34" charset="0"/>
-                <a:ea typeface="BIZ UDPゴシック" pitchFamily="34" charset="-122"/>
-                <a:cs typeface="BIZ UDPゴシック" pitchFamily="34" charset="-120"/>
+                <a:latin typeface="Noto Sans JP Print" pitchFamily="34" charset="0"/>
+                <a:ea typeface="Noto Sans JP Print" pitchFamily="34" charset="-122"/>
+                <a:cs typeface="Noto Sans JP Print" pitchFamily="34" charset="-120"/>
               </a:rPr>
               <a:t>競わせる</a:t>
             </a:r>
@@ -22635,8 +23498,11 @@
             <a:lvl1pPr>
               <a:defRPr sz="1100">
                 <a:solidFill>
-                  <a:srgbClr val="6B7A90"/>
-                </a:solidFill>
+                  <a:srgbClr val="7C828D"/>
+                </a:solidFill>
+                <a:latin typeface="Noto Sans JP Print Black"/>
+                <a:ea typeface="Noto Sans JP Print Black"/>
+                <a:cs typeface="Noto Sans JP Print Black"/>
               </a:defRPr>
             </a:lvl1pPr>
           </a:lstStyle>
@@ -22685,7 +23551,7 @@
         </p:nvSpPr>
         <p:spPr>
           <a:xfrm>
-            <a:off x="548640" y="320040"/>
+            <a:off x="548640" y="274320"/>
             <a:ext cx="7315200" cy="320040"/>
           </a:xfrm>
           <a:prstGeom prst="rect">
@@ -22723,8 +23589,8 @@
         </p:nvSpPr>
         <p:spPr>
           <a:xfrm>
-            <a:off x="548640" y="685800"/>
-            <a:ext cx="11064240" cy="1143000"/>
+            <a:off x="548640" y="594360"/>
+            <a:ext cx="11064240" cy="1325880"/>
           </a:xfrm>
           <a:prstGeom prst="rect">
             <a:avLst/>
@@ -22737,31 +23603,43 @@
           <a:lstStyle/>
           <a:p>
             <a:pPr algn="l" indent="0" marL="0">
-              <a:buNone/>
-            </a:pPr>
-            <a:r>
-              <a:rPr lang="en-US" sz="3000" b="1" dirty="0">
+              <a:lnSpc>
+                <a:spcPct val="90000"/>
+              </a:lnSpc>
+              <a:buNone/>
+            </a:pPr>
+            <a:r>
+              <a:rPr lang="en-US" sz="3600" dirty="0">
                 <a:solidFill>
                   <a:schemeClr val="tx2"/>
                 </a:solidFill>
+                <a:latin typeface="Noto Sans JP Print Black" pitchFamily="34" charset="0"/>
+                <a:ea typeface="Noto Sans JP Print Black" pitchFamily="34" charset="-122"/>
+                <a:cs typeface="Noto Sans JP Print Black" pitchFamily="34" charset="-120"/>
               </a:rPr>
               <a:t>全国で戦った選手にも、</a:t>
             </a:r>
-            <a:endParaRPr lang="en-US" sz="3000" dirty="0"/>
+            <a:endParaRPr lang="en-US" sz="3600" dirty="0"/>
           </a:p>
           <a:p>
             <a:pPr algn="l" indent="0" marL="0">
-              <a:buNone/>
-            </a:pPr>
-            <a:r>
-              <a:rPr lang="en-US" sz="3000" b="1" dirty="0">
+              <a:lnSpc>
+                <a:spcPct val="90000"/>
+              </a:lnSpc>
+              <a:buNone/>
+            </a:pPr>
+            <a:r>
+              <a:rPr lang="en-US" sz="3600" dirty="0">
                 <a:solidFill>
                   <a:schemeClr val="tx2"/>
                 </a:solidFill>
-              </a:rPr>
-              <a:t>「歯を食いしばって耐えろ」とは求めてこなかった</a:t>
-            </a:r>
-            <a:endParaRPr lang="en-US" sz="3000" dirty="0"/>
+                <a:latin typeface="Noto Sans JP Print Black" pitchFamily="34" charset="0"/>
+                <a:ea typeface="Noto Sans JP Print Black" pitchFamily="34" charset="-122"/>
+                <a:cs typeface="Noto Sans JP Print Black" pitchFamily="34" charset="-120"/>
+              </a:rPr>
+              <a:t>「歯を食いしばれ」とは言わなかった</a:t>
+            </a:r>
+            <a:endParaRPr lang="en-US" sz="3600" dirty="0"/>
           </a:p>
         </p:txBody>
       </p:sp>
@@ -22778,7 +23656,7 @@
           </a:xfrm>
           <a:prstGeom prst="roundRect">
             <a:avLst>
-              <a:gd name="adj" fmla="val 3158"/>
+              <a:gd name="adj" fmla="val 1316"/>
             </a:avLst>
           </a:prstGeom>
           <a:solidFill>
@@ -22846,9 +23724,9 @@
                 <a:solidFill>
                   <a:schemeClr val="bg1"/>
                 </a:solidFill>
-                <a:latin typeface="BIZ UDPゴシック" pitchFamily="34" charset="0"/>
-                <a:ea typeface="BIZ UDPゴシック" pitchFamily="34" charset="-122"/>
-                <a:cs typeface="BIZ UDPゴシック" pitchFamily="34" charset="-120"/>
+                <a:latin typeface="Noto Sans JP Print" pitchFamily="34" charset="0"/>
+                <a:ea typeface="Noto Sans JP Print" pitchFamily="34" charset="-122"/>
+                <a:cs typeface="Noto Sans JP Print" pitchFamily="34" charset="-120"/>
               </a:rPr>
               <a:t>✕</a:t>
             </a:r>
@@ -22885,9 +23763,9 @@
                 <a:solidFill>
                   <a:schemeClr val="accent4"/>
                 </a:solidFill>
-                <a:latin typeface="BIZ UDPゴシック" pitchFamily="34" charset="0"/>
-                <a:ea typeface="BIZ UDPゴシック" pitchFamily="34" charset="-122"/>
-                <a:cs typeface="BIZ UDPゴシック" pitchFamily="34" charset="-120"/>
+                <a:latin typeface="Noto Sans JP Print" pitchFamily="34" charset="0"/>
+                <a:ea typeface="Noto Sans JP Print" pitchFamily="34" charset="-122"/>
+                <a:cs typeface="Noto Sans JP Print" pitchFamily="34" charset="-120"/>
               </a:rPr>
               <a:t>歯を食いしばって</a:t>
             </a:r>
@@ -22902,9 +23780,9 @@
                 <a:solidFill>
                   <a:schemeClr val="accent4"/>
                 </a:solidFill>
-                <a:latin typeface="BIZ UDPゴシック" pitchFamily="34" charset="0"/>
-                <a:ea typeface="BIZ UDPゴシック" pitchFamily="34" charset="-122"/>
-                <a:cs typeface="BIZ UDPゴシック" pitchFamily="34" charset="-120"/>
+                <a:latin typeface="Noto Sans JP Print" pitchFamily="34" charset="0"/>
+                <a:ea typeface="Noto Sans JP Print" pitchFamily="34" charset="-122"/>
+                <a:cs typeface="Noto Sans JP Print" pitchFamily="34" charset="-120"/>
               </a:rPr>
               <a:t>耐える</a:t>
             </a:r>
@@ -22941,9 +23819,9 @@
                 <a:solidFill>
                   <a:schemeClr val="accent4"/>
                 </a:solidFill>
-                <a:latin typeface="BIZ UDPゴシック" pitchFamily="34" charset="0"/>
-                <a:ea typeface="BIZ UDPゴシック" pitchFamily="34" charset="-122"/>
-                <a:cs typeface="BIZ UDPゴシック" pitchFamily="34" charset="-120"/>
+                <a:latin typeface="Noto Sans JP Print" pitchFamily="34" charset="0"/>
+                <a:ea typeface="Noto Sans JP Print" pitchFamily="34" charset="-122"/>
+                <a:cs typeface="Noto Sans JP Print" pitchFamily="34" charset="-120"/>
               </a:rPr>
               <a:t>どこからも求められていない</a:t>
             </a:r>
@@ -22964,7 +23842,7 @@
           </a:xfrm>
           <a:prstGeom prst="roundRect">
             <a:avLst>
-              <a:gd name="adj" fmla="val 3158"/>
+              <a:gd name="adj" fmla="val 1316"/>
             </a:avLst>
           </a:prstGeom>
           <a:solidFill>
@@ -23032,9 +23910,9 @@
                 <a:solidFill>
                   <a:schemeClr val="bg1"/>
                 </a:solidFill>
-                <a:latin typeface="BIZ UDPゴシック" pitchFamily="34" charset="0"/>
-                <a:ea typeface="BIZ UDPゴシック" pitchFamily="34" charset="-122"/>
-                <a:cs typeface="BIZ UDPゴシック" pitchFamily="34" charset="-120"/>
+                <a:latin typeface="Noto Sans JP Print" pitchFamily="34" charset="0"/>
+                <a:ea typeface="Noto Sans JP Print" pitchFamily="34" charset="-122"/>
+                <a:cs typeface="Noto Sans JP Print" pitchFamily="34" charset="-120"/>
               </a:rPr>
               <a:t>○</a:t>
             </a:r>
@@ -23071,9 +23949,9 @@
                 <a:solidFill>
                   <a:schemeClr val="bg1"/>
                 </a:solidFill>
-                <a:latin typeface="BIZ UDPゴシック" pitchFamily="34" charset="0"/>
-                <a:ea typeface="BIZ UDPゴシック" pitchFamily="34" charset="-122"/>
-                <a:cs typeface="BIZ UDPゴシック" pitchFamily="34" charset="-120"/>
+                <a:latin typeface="Noto Sans JP Print" pitchFamily="34" charset="0"/>
+                <a:ea typeface="Noto Sans JP Print" pitchFamily="34" charset="-122"/>
+                <a:cs typeface="Noto Sans JP Print" pitchFamily="34" charset="-120"/>
               </a:rPr>
               <a:t>理由をわかって、</a:t>
             </a:r>
@@ -23088,9 +23966,9 @@
                 <a:solidFill>
                   <a:schemeClr val="bg1"/>
                 </a:solidFill>
-                <a:latin typeface="BIZ UDPゴシック" pitchFamily="34" charset="0"/>
-                <a:ea typeface="BIZ UDPゴシック" pitchFamily="34" charset="-122"/>
-                <a:cs typeface="BIZ UDPゴシック" pitchFamily="34" charset="-120"/>
+                <a:latin typeface="Noto Sans JP Print" pitchFamily="34" charset="0"/>
+                <a:ea typeface="Noto Sans JP Print" pitchFamily="34" charset="-122"/>
+                <a:cs typeface="Noto Sans JP Print" pitchFamily="34" charset="-120"/>
               </a:rPr>
               <a:t>自分で考えて走る</a:t>
             </a:r>
@@ -23127,9 +24005,9 @@
                 <a:solidFill>
                   <a:schemeClr val="accent5"/>
                 </a:solidFill>
-                <a:latin typeface="BIZ UDPゴシック" pitchFamily="34" charset="0"/>
-                <a:ea typeface="BIZ UDPゴシック" pitchFamily="34" charset="-122"/>
-                <a:cs typeface="BIZ UDPゴシック" pitchFamily="34" charset="-120"/>
+                <a:latin typeface="Noto Sans JP Print" pitchFamily="34" charset="0"/>
+                <a:ea typeface="Noto Sans JP Print" pitchFamily="34" charset="-122"/>
+                <a:cs typeface="Noto Sans JP Print" pitchFamily="34" charset="-120"/>
               </a:rPr>
               <a:t>強くなった選手に共通していたこと</a:t>
             </a:r>
@@ -23167,8 +24045,11 @@
             <a:lvl1pPr>
               <a:defRPr sz="1100">
                 <a:solidFill>
-                  <a:srgbClr val="6B7A90"/>
-                </a:solidFill>
+                  <a:srgbClr val="7C828D"/>
+                </a:solidFill>
+                <a:latin typeface="Noto Sans JP Print Black"/>
+                <a:ea typeface="Noto Sans JP Print Black"/>
+                <a:cs typeface="Noto Sans JP Print Black"/>
               </a:defRPr>
             </a:lvl1pPr>
           </a:lstStyle>
@@ -23195,45 +24076,45 @@
   <a:themeElements>
     <a:clrScheme name="Marathon Lecture">
       <a:dk1>
-        <a:srgbClr val="1F2937"/>
+        <a:srgbClr val="23262D"/>
       </a:dk1>
       <a:lt1>
         <a:srgbClr val="FFFFFF"/>
       </a:lt1>
       <a:dk2>
-        <a:srgbClr val="1E3A5F"/>
+        <a:srgbClr val="16181D"/>
       </a:dk2>
       <a:lt2>
-        <a:srgbClr val="F1F4F8"/>
+        <a:srgbClr val="F2F3F5"/>
       </a:lt2>
       <a:accent1>
-        <a:srgbClr val="D9542F"/>
+        <a:srgbClr val="EE5A2F"/>
       </a:accent1>
       <a:accent2>
-        <a:srgbClr val="2E7D5B"/>
+        <a:srgbClr val="2A7F7A"/>
       </a:accent2>
       <a:accent3>
         <a:srgbClr val="F2B33D"/>
       </a:accent3>
       <a:accent4>
-        <a:srgbClr val="6B7A90"/>
+        <a:srgbClr val="7C828D"/>
       </a:accent4>
       <a:accent5>
-        <a:srgbClr val="FBE6DE"/>
+        <a:srgbClr val="FCEDE7"/>
       </a:accent5>
       <a:accent6>
-        <a:srgbClr val="E3F1EA"/>
+        <a:srgbClr val="E2EFEE"/>
       </a:accent6>
       <a:hlink>
-        <a:srgbClr val="1E3A5F"/>
+        <a:srgbClr val="16181D"/>
       </a:hlink>
       <a:folHlink>
-        <a:srgbClr val="6B7A90"/>
+        <a:srgbClr val="7C828D"/>
       </a:folHlink>
     </a:clrScheme>
     <a:fontScheme name="Marathon Lecture">
       <a:majorFont>
-        <a:latin typeface="BIZ UDPゴシック"/>
+        <a:latin typeface="Noto Sans JP Print Black"/>
         <a:ea typeface=""/>
         <a:cs typeface=""/>
         <a:font script="Jpan" typeface="游ゴシック Light"/>
@@ -23285,7 +24166,7 @@
         <a:font script="Tfng" typeface="Ebrima"/>
       </a:majorFont>
       <a:minorFont>
-        <a:latin typeface="BIZ UDPゴシック"/>
+        <a:latin typeface="Noto Sans JP Print"/>
         <a:ea typeface=""/>
         <a:cs typeface=""/>
         <a:font script="Jpan" typeface="游ゴシック"/>

--- a/マラソン大会に向けて_講義スライド.pptx
+++ b/マラソン大会に向けて_講義スライド.pptx
@@ -138,14 +138,14 @@
   <p:extLst>
     <p:ext uri="{521415D9-36F7-43E2-AB2F-B90AF26B5E84}">
       <p14:sectionLst xmlns:p14="http://schemas.microsoft.com/office/powerpoint/2010/main">
-        <p14:section name="導入" id="{f8816d52-8e5f-88d1-a33e-85547b6d92d2}">
+        <p14:section name="導入" id="{5ce70eaa-1ed1-0345-8cdb-1b84e7a062ba}">
           <p14:sldIdLst>
             <p14:sldId id="256"/>
             <p14:sldId id="257"/>
             <p14:sldId id="258"/>
           </p14:sldIdLst>
         </p14:section>
-        <p14:section name="1. 位置づけ" id="{ff3bbdc0-83ad-222d-1094-f6b0024fce32}">
+        <p14:section name="1. 位置づけ" id="{27bb1daa-2209-7ec6-8c3e-5cd21fd1bbe1}">
           <p14:sldIdLst>
             <p14:sldId id="259"/>
             <p14:sldId id="260"/>
@@ -154,20 +154,20 @@
             <p14:sldId id="263"/>
           </p14:sldIdLst>
         </p14:section>
-        <p14:section name="2. 目指す姿" id="{17f24596-7e29-0fa8-7577-8c9d0de1fa04}">
+        <p14:section name="2. 目指す姿" id="{d3e07d9a-677d-ba9e-586c-63d1c861889d}">
           <p14:sldIdLst>
             <p14:sldId id="264"/>
             <p14:sldId id="265"/>
             <p14:sldId id="266"/>
           </p14:sldIdLst>
         </p14:section>
-        <p14:section name="3. 社会の中の走ること" id="{84ad1041-81f3-2ccc-4a2c-6599466d98b5}">
+        <p14:section name="3. 社会の中の走ること" id="{0eb36679-e0b6-2560-0122-822a7e20f160}">
           <p14:sldIdLst>
             <p14:sldId id="267"/>
             <p14:sldId id="268"/>
           </p14:sldIdLst>
         </p14:section>
-        <p14:section name="4. 苦しいの正体" id="{4a9fe206-cbd7-2fec-e8dd-c84807d1236e}">
+        <p14:section name="4. 苦しいの正体" id="{9488924b-45ad-79fa-750d-4ed18b4e35bd}">
           <p14:sldIdLst>
             <p14:sldId id="269"/>
             <p14:sldId id="270"/>
@@ -176,19 +176,19 @@
             <p14:sldId id="273"/>
           </p14:sldIdLst>
         </p14:section>
-        <p14:section name="5. 3つの方法" id="{64eff787-9e08-d6ee-e2ff-813f969fa2df}">
+        <p14:section name="5. 3つの方法" id="{633ae86b-3c72-bbde-27aa-1197792c7323}">
           <p14:sldIdLst>
             <p14:sldId id="274"/>
             <p14:sldId id="275"/>
             <p14:sldId id="276"/>
           </p14:sldIdLst>
         </p14:section>
-        <p14:section name="6. 嫌いになる理由" id="{3daf02a4-88fe-aa77-241f-a4997c80f19a}">
+        <p14:section name="6. 嫌いになる理由" id="{0e892606-1409-f186-4e80-ef5015e03931}">
           <p14:sldIdLst>
             <p14:sldId id="277"/>
           </p14:sldIdLst>
         </p14:section>
-        <p14:section name="7. 大会までに何をするか" id="{f34f593e-752e-80d8-e3ff-c7bd29c6d2d9}">
+        <p14:section name="7. 大会までに何をするか" id="{de37b870-ff64-5692-c5e1-a05ec3d21d8f}">
           <p14:sldIdLst>
             <p14:sldId id="278"/>
             <p14:sldId id="279"/>
@@ -198,13 +198,13 @@
             <p14:sldId id="283"/>
           </p14:sldIdLst>
         </p14:section>
-        <p14:section name="8. 安全管理" id="{042aab8c-de19-ffbc-d01b-28979f8bf66f}">
+        <p14:section name="8. 安全管理" id="{20961c31-9574-ed8f-8449-e6f87c732ddf}">
           <p14:sldIdLst>
             <p14:sldId id="284"/>
             <p14:sldId id="285"/>
           </p14:sldIdLst>
         </p14:section>
-        <p14:section name="まとめ" id="{32747da0-fb71-da21-144e-4d6deb3151d3}">
+        <p14:section name="まとめ" id="{653c3a05-2f84-1669-c3a6-39603699df2f}">
           <p14:sldIdLst>
             <p14:sldId id="286"/>
             <p14:sldId id="287"/>
@@ -3799,7 +3799,7 @@
             <a:lvl1pPr>
               <a:defRPr sz="1100">
                 <a:solidFill>
-                  <a:srgbClr val="7C828D"/>
+                  <a:srgbClr val="727A86"/>
                 </a:solidFill>
                 <a:latin typeface="Noto Sans JP Print Black"/>
                 <a:ea typeface="Noto Sans JP Print Black"/>
@@ -3966,7 +3966,7 @@
             <a:lvl1pPr>
               <a:defRPr sz="1100">
                 <a:solidFill>
-                  <a:srgbClr val="7C828D"/>
+                  <a:srgbClr val="727A86"/>
                 </a:solidFill>
                 <a:latin typeface="Noto Sans JP Print Black"/>
                 <a:ea typeface="Noto Sans JP Print Black"/>
@@ -4039,7 +4039,7 @@
             <a:lvl1pPr>
               <a:defRPr sz="1100">
                 <a:solidFill>
-                  <a:srgbClr val="7C828D"/>
+                  <a:srgbClr val="727A86"/>
                 </a:solidFill>
                 <a:latin typeface="Noto Sans JP Print Black"/>
                 <a:ea typeface="Noto Sans JP Print Black"/>
@@ -5274,7 +5274,7 @@
             <a:lvl1pPr>
               <a:defRPr sz="1100">
                 <a:solidFill>
-                  <a:srgbClr val="7C828D"/>
+                  <a:srgbClr val="727A86"/>
                 </a:solidFill>
                 <a:latin typeface="Noto Sans JP Print Black"/>
                 <a:ea typeface="Noto Sans JP Print Black"/>
@@ -5884,7 +5884,7 @@
             <a:lvl1pPr>
               <a:defRPr sz="1100">
                 <a:solidFill>
-                  <a:srgbClr val="7C828D"/>
+                  <a:srgbClr val="727A86"/>
                 </a:solidFill>
                 <a:latin typeface="Noto Sans JP Print Black"/>
                 <a:ea typeface="Noto Sans JP Print Black"/>
@@ -6361,7 +6361,7 @@
             <a:lvl1pPr>
               <a:defRPr sz="1100">
                 <a:solidFill>
-                  <a:srgbClr val="7C828D"/>
+                  <a:srgbClr val="727A86"/>
                 </a:solidFill>
                 <a:latin typeface="Noto Sans JP Print Black"/>
                 <a:ea typeface="Noto Sans JP Print Black"/>
@@ -7014,7 +7014,7 @@
             <a:lvl1pPr>
               <a:defRPr sz="1100">
                 <a:solidFill>
-                  <a:srgbClr val="7C828D"/>
+                  <a:srgbClr val="727A86"/>
                 </a:solidFill>
                 <a:latin typeface="Noto Sans JP Print Black"/>
                 <a:ea typeface="Noto Sans JP Print Black"/>
@@ -7420,7 +7420,7 @@
             <a:lvl1pPr>
               <a:defRPr sz="1100">
                 <a:solidFill>
-                  <a:srgbClr val="7C828D"/>
+                  <a:srgbClr val="727A86"/>
                 </a:solidFill>
                 <a:latin typeface="Noto Sans JP Print Black"/>
                 <a:ea typeface="Noto Sans JP Print Black"/>
@@ -8169,7 +8169,7 @@
             <a:lvl1pPr>
               <a:defRPr sz="1100">
                 <a:solidFill>
-                  <a:srgbClr val="7C828D"/>
+                  <a:srgbClr val="727A86"/>
                 </a:solidFill>
                 <a:latin typeface="Noto Sans JP Print Black"/>
                 <a:ea typeface="Noto Sans JP Print Black"/>
@@ -8812,7 +8812,7 @@
             <a:lvl1pPr>
               <a:defRPr sz="1100">
                 <a:solidFill>
-                  <a:srgbClr val="7C828D"/>
+                  <a:srgbClr val="727A86"/>
                 </a:solidFill>
                 <a:latin typeface="Noto Sans JP Print Black"/>
                 <a:ea typeface="Noto Sans JP Print Black"/>
@@ -9407,7 +9407,7 @@
             <a:lvl1pPr>
               <a:defRPr sz="1100">
                 <a:solidFill>
-                  <a:srgbClr val="7C828D"/>
+                  <a:srgbClr val="727A86"/>
                 </a:solidFill>
                 <a:latin typeface="Noto Sans JP Print Black"/>
                 <a:ea typeface="Noto Sans JP Print Black"/>
@@ -9950,7 +9950,7 @@
             <a:lvl1pPr>
               <a:defRPr sz="1100">
                 <a:solidFill>
-                  <a:srgbClr val="7C828D"/>
+                  <a:srgbClr val="727A86"/>
                 </a:solidFill>
                 <a:latin typeface="Noto Sans JP Print Black"/>
                 <a:ea typeface="Noto Sans JP Print Black"/>
@@ -10912,7 +10912,7 @@
             <a:lvl1pPr>
               <a:defRPr sz="1100">
                 <a:solidFill>
-                  <a:srgbClr val="7C828D"/>
+                  <a:srgbClr val="727A86"/>
                 </a:solidFill>
                 <a:latin typeface="Noto Sans JP Print Black"/>
                 <a:ea typeface="Noto Sans JP Print Black"/>
@@ -11619,7 +11619,7 @@
             <a:lvl1pPr>
               <a:defRPr sz="1100">
                 <a:solidFill>
-                  <a:srgbClr val="7C828D"/>
+                  <a:srgbClr val="727A86"/>
                 </a:solidFill>
                 <a:latin typeface="Noto Sans JP Print Black"/>
                 <a:ea typeface="Noto Sans JP Print Black"/>
@@ -12384,7 +12384,7 @@
             <a:lvl1pPr>
               <a:defRPr sz="1100">
                 <a:solidFill>
-                  <a:srgbClr val="7C828D"/>
+                  <a:srgbClr val="727A86"/>
                 </a:solidFill>
                 <a:latin typeface="Noto Sans JP Print Black"/>
                 <a:ea typeface="Noto Sans JP Print Black"/>
@@ -12989,7 +12989,7 @@
             <a:lvl1pPr>
               <a:defRPr sz="1100">
                 <a:solidFill>
-                  <a:srgbClr val="7C828D"/>
+                  <a:srgbClr val="727A86"/>
                 </a:solidFill>
                 <a:latin typeface="Noto Sans JP Print Black"/>
                 <a:ea typeface="Noto Sans JP Print Black"/>
@@ -13640,7 +13640,7 @@
             <a:lvl1pPr>
               <a:defRPr sz="1100">
                 <a:solidFill>
-                  <a:srgbClr val="7C828D"/>
+                  <a:srgbClr val="727A86"/>
                 </a:solidFill>
                 <a:latin typeface="Noto Sans JP Print Black"/>
                 <a:ea typeface="Noto Sans JP Print Black"/>
@@ -14559,7 +14559,7 @@
             <a:lvl1pPr>
               <a:defRPr sz="1100">
                 <a:solidFill>
-                  <a:srgbClr val="7C828D"/>
+                  <a:srgbClr val="727A86"/>
                 </a:solidFill>
                 <a:latin typeface="Noto Sans JP Print Black"/>
                 <a:ea typeface="Noto Sans JP Print Black"/>
@@ -15340,7 +15340,7 @@
             <a:lvl1pPr>
               <a:defRPr sz="1100">
                 <a:solidFill>
-                  <a:srgbClr val="7C828D"/>
+                  <a:srgbClr val="727A86"/>
                 </a:solidFill>
                 <a:latin typeface="Noto Sans JP Print Black"/>
                 <a:ea typeface="Noto Sans JP Print Black"/>
@@ -16205,7 +16205,7 @@
             <a:lvl1pPr>
               <a:defRPr sz="1100">
                 <a:solidFill>
-                  <a:srgbClr val="7C828D"/>
+                  <a:srgbClr val="727A86"/>
                 </a:solidFill>
                 <a:latin typeface="Noto Sans JP Print Black"/>
                 <a:ea typeface="Noto Sans JP Print Black"/>
@@ -16682,7 +16682,7 @@
             <a:lvl1pPr>
               <a:defRPr sz="1100">
                 <a:solidFill>
-                  <a:srgbClr val="7C828D"/>
+                  <a:srgbClr val="727A86"/>
                 </a:solidFill>
                 <a:latin typeface="Noto Sans JP Print Black"/>
                 <a:ea typeface="Noto Sans JP Print Black"/>
@@ -17275,7 +17275,7 @@
             <a:lvl1pPr>
               <a:defRPr sz="1100">
                 <a:solidFill>
-                  <a:srgbClr val="7C828D"/>
+                  <a:srgbClr val="727A86"/>
                 </a:solidFill>
                 <a:latin typeface="Noto Sans JP Print Black"/>
                 <a:ea typeface="Noto Sans JP Print Black"/>
@@ -17770,7 +17770,7 @@
             <a:lvl1pPr>
               <a:defRPr sz="1100">
                 <a:solidFill>
-                  <a:srgbClr val="7C828D"/>
+                  <a:srgbClr val="727A86"/>
                 </a:solidFill>
                 <a:latin typeface="Noto Sans JP Print Black"/>
                 <a:ea typeface="Noto Sans JP Print Black"/>
@@ -18273,7 +18273,7 @@
             <a:lvl1pPr>
               <a:defRPr sz="1100">
                 <a:solidFill>
-                  <a:srgbClr val="7C828D"/>
+                  <a:srgbClr val="727A86"/>
                 </a:solidFill>
                 <a:latin typeface="Noto Sans JP Print Black"/>
                 <a:ea typeface="Noto Sans JP Print Black"/>
@@ -18877,7 +18877,7 @@
             <a:lvl1pPr>
               <a:defRPr sz="1100">
                 <a:solidFill>
-                  <a:srgbClr val="7C828D"/>
+                  <a:srgbClr val="727A86"/>
                 </a:solidFill>
                 <a:latin typeface="Noto Sans JP Print Black"/>
                 <a:ea typeface="Noto Sans JP Print Black"/>
@@ -19579,7 +19579,7 @@
             <a:lvl1pPr>
               <a:defRPr sz="1100">
                 <a:solidFill>
-                  <a:srgbClr val="7C828D"/>
+                  <a:srgbClr val="727A86"/>
                 </a:solidFill>
                 <a:latin typeface="Noto Sans JP Print Black"/>
                 <a:ea typeface="Noto Sans JP Print Black"/>
@@ -20064,7 +20064,7 @@
             <a:lvl1pPr>
               <a:defRPr sz="1100">
                 <a:solidFill>
-                  <a:srgbClr val="7C828D"/>
+                  <a:srgbClr val="727A86"/>
                 </a:solidFill>
                 <a:latin typeface="Noto Sans JP Print Black"/>
                 <a:ea typeface="Noto Sans JP Print Black"/>
@@ -20677,7 +20677,7 @@
             <a:lvl1pPr>
               <a:defRPr sz="1100">
                 <a:solidFill>
-                  <a:srgbClr val="7C828D"/>
+                  <a:srgbClr val="727A86"/>
                 </a:solidFill>
                 <a:latin typeface="Noto Sans JP Print Black"/>
                 <a:ea typeface="Noto Sans JP Print Black"/>
@@ -21420,7 +21420,7 @@
             <a:lvl1pPr>
               <a:defRPr sz="1100">
                 <a:solidFill>
-                  <a:srgbClr val="7C828D"/>
+                  <a:srgbClr val="727A86"/>
                 </a:solidFill>
                 <a:latin typeface="Noto Sans JP Print Black"/>
                 <a:ea typeface="Noto Sans JP Print Black"/>
@@ -22059,7 +22059,7 @@
             <a:lvl1pPr>
               <a:defRPr sz="1100">
                 <a:solidFill>
-                  <a:srgbClr val="7C828D"/>
+                  <a:srgbClr val="727A86"/>
                 </a:solidFill>
                 <a:latin typeface="Noto Sans JP Print Black"/>
                 <a:ea typeface="Noto Sans JP Print Black"/>
@@ -23040,7 +23040,7 @@
             <a:lvl1pPr>
               <a:defRPr sz="1100">
                 <a:solidFill>
-                  <a:srgbClr val="7C828D"/>
+                  <a:srgbClr val="727A86"/>
                 </a:solidFill>
                 <a:latin typeface="Noto Sans JP Print Black"/>
                 <a:ea typeface="Noto Sans JP Print Black"/>
@@ -23498,7 +23498,7 @@
             <a:lvl1pPr>
               <a:defRPr sz="1100">
                 <a:solidFill>
-                  <a:srgbClr val="7C828D"/>
+                  <a:srgbClr val="727A86"/>
                 </a:solidFill>
                 <a:latin typeface="Noto Sans JP Print Black"/>
                 <a:ea typeface="Noto Sans JP Print Black"/>
@@ -24045,7 +24045,7 @@
             <a:lvl1pPr>
               <a:defRPr sz="1100">
                 <a:solidFill>
-                  <a:srgbClr val="7C828D"/>
+                  <a:srgbClr val="727A86"/>
                 </a:solidFill>
                 <a:latin typeface="Noto Sans JP Print Black"/>
                 <a:ea typeface="Noto Sans JP Print Black"/>
@@ -24076,40 +24076,40 @@
   <a:themeElements>
     <a:clrScheme name="Marathon Lecture">
       <a:dk1>
-        <a:srgbClr val="23262D"/>
+        <a:srgbClr val="1E2533"/>
       </a:dk1>
       <a:lt1>
         <a:srgbClr val="FFFFFF"/>
       </a:lt1>
       <a:dk2>
-        <a:srgbClr val="16181D"/>
+        <a:srgbClr val="0B1F3A"/>
       </a:dk2>
       <a:lt2>
-        <a:srgbClr val="F2F3F5"/>
+        <a:srgbClr val="F0F2F5"/>
       </a:lt2>
       <a:accent1>
-        <a:srgbClr val="EE5A2F"/>
+        <a:srgbClr val="B7862B"/>
       </a:accent1>
       <a:accent2>
-        <a:srgbClr val="2A7F7A"/>
+        <a:srgbClr val="5B7083"/>
       </a:accent2>
       <a:accent3>
         <a:srgbClr val="F2B33D"/>
       </a:accent3>
       <a:accent4>
-        <a:srgbClr val="7C828D"/>
+        <a:srgbClr val="727A86"/>
       </a:accent4>
       <a:accent5>
-        <a:srgbClr val="FCEDE7"/>
+        <a:srgbClr val="F7EFDF"/>
       </a:accent5>
       <a:accent6>
-        <a:srgbClr val="E2EFEE"/>
+        <a:srgbClr val="E7ECF1"/>
       </a:accent6>
       <a:hlink>
-        <a:srgbClr val="16181D"/>
+        <a:srgbClr val="0B1F3A"/>
       </a:hlink>
       <a:folHlink>
-        <a:srgbClr val="7C828D"/>
+        <a:srgbClr val="727A86"/>
       </a:folHlink>
     </a:clrScheme>
     <a:fontScheme name="Marathon Lecture">

--- a/マラソン大会に向けて_講義スライド.pptx
+++ b/マラソン大会に向けて_講義スライド.pptx
@@ -138,14 +138,14 @@
   <p:extLst>
     <p:ext uri="{521415D9-36F7-43E2-AB2F-B90AF26B5E84}">
       <p14:sectionLst xmlns:p14="http://schemas.microsoft.com/office/powerpoint/2010/main">
-        <p14:section name="導入" id="{5ce70eaa-1ed1-0345-8cdb-1b84e7a062ba}">
+        <p14:section name="導入" id="{db167d3d-35bc-2f39-6b1b-cc62187faf85}">
           <p14:sldIdLst>
             <p14:sldId id="256"/>
             <p14:sldId id="257"/>
             <p14:sldId id="258"/>
           </p14:sldIdLst>
         </p14:section>
-        <p14:section name="1. 位置づけ" id="{27bb1daa-2209-7ec6-8c3e-5cd21fd1bbe1}">
+        <p14:section name="1. 位置づけ" id="{c6f41407-45e2-a20c-1cb1-eebbe477f5bb}">
           <p14:sldIdLst>
             <p14:sldId id="259"/>
             <p14:sldId id="260"/>
@@ -154,20 +154,20 @@
             <p14:sldId id="263"/>
           </p14:sldIdLst>
         </p14:section>
-        <p14:section name="2. 目指す姿" id="{d3e07d9a-677d-ba9e-586c-63d1c861889d}">
+        <p14:section name="2. 目指す姿" id="{f439aa2a-222d-5a1d-e0d3-d679cc60b257}">
           <p14:sldIdLst>
             <p14:sldId id="264"/>
             <p14:sldId id="265"/>
             <p14:sldId id="266"/>
           </p14:sldIdLst>
         </p14:section>
-        <p14:section name="3. 社会の中の走ること" id="{0eb36679-e0b6-2560-0122-822a7e20f160}">
+        <p14:section name="3. 社会の中の走ること" id="{5f6b2a3b-e355-611f-165c-5fc9eebbb725}">
           <p14:sldIdLst>
             <p14:sldId id="267"/>
             <p14:sldId id="268"/>
           </p14:sldIdLst>
         </p14:section>
-        <p14:section name="4. 苦しいの正体" id="{9488924b-45ad-79fa-750d-4ed18b4e35bd}">
+        <p14:section name="4. 苦しいの正体" id="{127c0267-f350-816f-9d73-aa7f5509d76f}">
           <p14:sldIdLst>
             <p14:sldId id="269"/>
             <p14:sldId id="270"/>
@@ -176,19 +176,19 @@
             <p14:sldId id="273"/>
           </p14:sldIdLst>
         </p14:section>
-        <p14:section name="5. 3つの方法" id="{633ae86b-3c72-bbde-27aa-1197792c7323}">
+        <p14:section name="5. 3つの方法" id="{a0a62b3c-ea89-c7d7-dce4-7e30c2203cbf}">
           <p14:sldIdLst>
             <p14:sldId id="274"/>
             <p14:sldId id="275"/>
             <p14:sldId id="276"/>
           </p14:sldIdLst>
         </p14:section>
-        <p14:section name="6. 嫌いになる理由" id="{0e892606-1409-f186-4e80-ef5015e03931}">
+        <p14:section name="6. 嫌いになる理由" id="{f067c49a-b732-1ad2-50de-66dfc41a4fb5}">
           <p14:sldIdLst>
             <p14:sldId id="277"/>
           </p14:sldIdLst>
         </p14:section>
-        <p14:section name="7. 大会までに何をするか" id="{de37b870-ff64-5692-c5e1-a05ec3d21d8f}">
+        <p14:section name="7. 大会までに何をするか" id="{6332405d-6719-7935-4615-7a20b06c43f7}">
           <p14:sldIdLst>
             <p14:sldId id="278"/>
             <p14:sldId id="279"/>
@@ -198,13 +198,13 @@
             <p14:sldId id="283"/>
           </p14:sldIdLst>
         </p14:section>
-        <p14:section name="8. 安全管理" id="{20961c31-9574-ed8f-8449-e6f87c732ddf}">
+        <p14:section name="8. 安全管理" id="{7045405d-15ba-9aa2-46fc-38018d68b18d}">
           <p14:sldIdLst>
             <p14:sldId id="284"/>
             <p14:sldId id="285"/>
           </p14:sldIdLst>
         </p14:section>
-        <p14:section name="まとめ" id="{653c3a05-2f84-1669-c3a6-39603699df2f}">
+        <p14:section name="まとめ" id="{2221ec6e-7d5c-61b7-a28f-b9bf92ff9563}">
           <p14:sldIdLst>
             <p14:sldId id="286"/>
             <p14:sldId id="287"/>
@@ -3799,7 +3799,7 @@
             <a:lvl1pPr>
               <a:defRPr sz="1100">
                 <a:solidFill>
-                  <a:srgbClr val="727A86"/>
+                  <a:srgbClr val="75817A"/>
                 </a:solidFill>
                 <a:latin typeface="Noto Sans JP Print Black"/>
                 <a:ea typeface="Noto Sans JP Print Black"/>
@@ -3966,7 +3966,7 @@
             <a:lvl1pPr>
               <a:defRPr sz="1100">
                 <a:solidFill>
-                  <a:srgbClr val="727A86"/>
+                  <a:srgbClr val="75817A"/>
                 </a:solidFill>
                 <a:latin typeface="Noto Sans JP Print Black"/>
                 <a:ea typeface="Noto Sans JP Print Black"/>
@@ -4039,7 +4039,7 @@
             <a:lvl1pPr>
               <a:defRPr sz="1100">
                 <a:solidFill>
-                  <a:srgbClr val="727A86"/>
+                  <a:srgbClr val="75817A"/>
                 </a:solidFill>
                 <a:latin typeface="Noto Sans JP Print Black"/>
                 <a:ea typeface="Noto Sans JP Print Black"/>
@@ -5274,7 +5274,7 @@
             <a:lvl1pPr>
               <a:defRPr sz="1100">
                 <a:solidFill>
-                  <a:srgbClr val="727A86"/>
+                  <a:srgbClr val="75817A"/>
                 </a:solidFill>
                 <a:latin typeface="Noto Sans JP Print Black"/>
                 <a:ea typeface="Noto Sans JP Print Black"/>
@@ -5884,7 +5884,7 @@
             <a:lvl1pPr>
               <a:defRPr sz="1100">
                 <a:solidFill>
-                  <a:srgbClr val="727A86"/>
+                  <a:srgbClr val="75817A"/>
                 </a:solidFill>
                 <a:latin typeface="Noto Sans JP Print Black"/>
                 <a:ea typeface="Noto Sans JP Print Black"/>
@@ -6361,7 +6361,7 @@
             <a:lvl1pPr>
               <a:defRPr sz="1100">
                 <a:solidFill>
-                  <a:srgbClr val="727A86"/>
+                  <a:srgbClr val="75817A"/>
                 </a:solidFill>
                 <a:latin typeface="Noto Sans JP Print Black"/>
                 <a:ea typeface="Noto Sans JP Print Black"/>
@@ -7014,7 +7014,7 @@
             <a:lvl1pPr>
               <a:defRPr sz="1100">
                 <a:solidFill>
-                  <a:srgbClr val="727A86"/>
+                  <a:srgbClr val="75817A"/>
                 </a:solidFill>
                 <a:latin typeface="Noto Sans JP Print Black"/>
                 <a:ea typeface="Noto Sans JP Print Black"/>
@@ -7420,7 +7420,7 @@
             <a:lvl1pPr>
               <a:defRPr sz="1100">
                 <a:solidFill>
-                  <a:srgbClr val="727A86"/>
+                  <a:srgbClr val="75817A"/>
                 </a:solidFill>
                 <a:latin typeface="Noto Sans JP Print Black"/>
                 <a:ea typeface="Noto Sans JP Print Black"/>
@@ -8169,7 +8169,7 @@
             <a:lvl1pPr>
               <a:defRPr sz="1100">
                 <a:solidFill>
-                  <a:srgbClr val="727A86"/>
+                  <a:srgbClr val="75817A"/>
                 </a:solidFill>
                 <a:latin typeface="Noto Sans JP Print Black"/>
                 <a:ea typeface="Noto Sans JP Print Black"/>
@@ -8812,7 +8812,7 @@
             <a:lvl1pPr>
               <a:defRPr sz="1100">
                 <a:solidFill>
-                  <a:srgbClr val="727A86"/>
+                  <a:srgbClr val="75817A"/>
                 </a:solidFill>
                 <a:latin typeface="Noto Sans JP Print Black"/>
                 <a:ea typeface="Noto Sans JP Print Black"/>
@@ -9407,7 +9407,7 @@
             <a:lvl1pPr>
               <a:defRPr sz="1100">
                 <a:solidFill>
-                  <a:srgbClr val="727A86"/>
+                  <a:srgbClr val="75817A"/>
                 </a:solidFill>
                 <a:latin typeface="Noto Sans JP Print Black"/>
                 <a:ea typeface="Noto Sans JP Print Black"/>
@@ -9950,7 +9950,7 @@
             <a:lvl1pPr>
               <a:defRPr sz="1100">
                 <a:solidFill>
-                  <a:srgbClr val="727A86"/>
+                  <a:srgbClr val="75817A"/>
                 </a:solidFill>
                 <a:latin typeface="Noto Sans JP Print Black"/>
                 <a:ea typeface="Noto Sans JP Print Black"/>
@@ -10912,7 +10912,7 @@
             <a:lvl1pPr>
               <a:defRPr sz="1100">
                 <a:solidFill>
-                  <a:srgbClr val="727A86"/>
+                  <a:srgbClr val="75817A"/>
                 </a:solidFill>
                 <a:latin typeface="Noto Sans JP Print Black"/>
                 <a:ea typeface="Noto Sans JP Print Black"/>
@@ -11619,7 +11619,7 @@
             <a:lvl1pPr>
               <a:defRPr sz="1100">
                 <a:solidFill>
-                  <a:srgbClr val="727A86"/>
+                  <a:srgbClr val="75817A"/>
                 </a:solidFill>
                 <a:latin typeface="Noto Sans JP Print Black"/>
                 <a:ea typeface="Noto Sans JP Print Black"/>
@@ -12384,7 +12384,7 @@
             <a:lvl1pPr>
               <a:defRPr sz="1100">
                 <a:solidFill>
-                  <a:srgbClr val="727A86"/>
+                  <a:srgbClr val="75817A"/>
                 </a:solidFill>
                 <a:latin typeface="Noto Sans JP Print Black"/>
                 <a:ea typeface="Noto Sans JP Print Black"/>
@@ -12989,7 +12989,7 @@
             <a:lvl1pPr>
               <a:defRPr sz="1100">
                 <a:solidFill>
-                  <a:srgbClr val="727A86"/>
+                  <a:srgbClr val="75817A"/>
                 </a:solidFill>
                 <a:latin typeface="Noto Sans JP Print Black"/>
                 <a:ea typeface="Noto Sans JP Print Black"/>
@@ -13640,7 +13640,7 @@
             <a:lvl1pPr>
               <a:defRPr sz="1100">
                 <a:solidFill>
-                  <a:srgbClr val="727A86"/>
+                  <a:srgbClr val="75817A"/>
                 </a:solidFill>
                 <a:latin typeface="Noto Sans JP Print Black"/>
                 <a:ea typeface="Noto Sans JP Print Black"/>
@@ -14559,7 +14559,7 @@
             <a:lvl1pPr>
               <a:defRPr sz="1100">
                 <a:solidFill>
-                  <a:srgbClr val="727A86"/>
+                  <a:srgbClr val="75817A"/>
                 </a:solidFill>
                 <a:latin typeface="Noto Sans JP Print Black"/>
                 <a:ea typeface="Noto Sans JP Print Black"/>
@@ -15340,7 +15340,7 @@
             <a:lvl1pPr>
               <a:defRPr sz="1100">
                 <a:solidFill>
-                  <a:srgbClr val="727A86"/>
+                  <a:srgbClr val="75817A"/>
                 </a:solidFill>
                 <a:latin typeface="Noto Sans JP Print Black"/>
                 <a:ea typeface="Noto Sans JP Print Black"/>
@@ -16205,7 +16205,7 @@
             <a:lvl1pPr>
               <a:defRPr sz="1100">
                 <a:solidFill>
-                  <a:srgbClr val="727A86"/>
+                  <a:srgbClr val="75817A"/>
                 </a:solidFill>
                 <a:latin typeface="Noto Sans JP Print Black"/>
                 <a:ea typeface="Noto Sans JP Print Black"/>
@@ -16682,7 +16682,7 @@
             <a:lvl1pPr>
               <a:defRPr sz="1100">
                 <a:solidFill>
-                  <a:srgbClr val="727A86"/>
+                  <a:srgbClr val="75817A"/>
                 </a:solidFill>
                 <a:latin typeface="Noto Sans JP Print Black"/>
                 <a:ea typeface="Noto Sans JP Print Black"/>
@@ -17275,7 +17275,7 @@
             <a:lvl1pPr>
               <a:defRPr sz="1100">
                 <a:solidFill>
-                  <a:srgbClr val="727A86"/>
+                  <a:srgbClr val="75817A"/>
                 </a:solidFill>
                 <a:latin typeface="Noto Sans JP Print Black"/>
                 <a:ea typeface="Noto Sans JP Print Black"/>
@@ -17770,7 +17770,7 @@
             <a:lvl1pPr>
               <a:defRPr sz="1100">
                 <a:solidFill>
-                  <a:srgbClr val="727A86"/>
+                  <a:srgbClr val="75817A"/>
                 </a:solidFill>
                 <a:latin typeface="Noto Sans JP Print Black"/>
                 <a:ea typeface="Noto Sans JP Print Black"/>
@@ -18273,7 +18273,7 @@
             <a:lvl1pPr>
               <a:defRPr sz="1100">
                 <a:solidFill>
-                  <a:srgbClr val="727A86"/>
+                  <a:srgbClr val="75817A"/>
                 </a:solidFill>
                 <a:latin typeface="Noto Sans JP Print Black"/>
                 <a:ea typeface="Noto Sans JP Print Black"/>
@@ -18877,7 +18877,7 @@
             <a:lvl1pPr>
               <a:defRPr sz="1100">
                 <a:solidFill>
-                  <a:srgbClr val="727A86"/>
+                  <a:srgbClr val="75817A"/>
                 </a:solidFill>
                 <a:latin typeface="Noto Sans JP Print Black"/>
                 <a:ea typeface="Noto Sans JP Print Black"/>
@@ -19579,7 +19579,7 @@
             <a:lvl1pPr>
               <a:defRPr sz="1100">
                 <a:solidFill>
-                  <a:srgbClr val="727A86"/>
+                  <a:srgbClr val="75817A"/>
                 </a:solidFill>
                 <a:latin typeface="Noto Sans JP Print Black"/>
                 <a:ea typeface="Noto Sans JP Print Black"/>
@@ -20064,7 +20064,7 @@
             <a:lvl1pPr>
               <a:defRPr sz="1100">
                 <a:solidFill>
-                  <a:srgbClr val="727A86"/>
+                  <a:srgbClr val="75817A"/>
                 </a:solidFill>
                 <a:latin typeface="Noto Sans JP Print Black"/>
                 <a:ea typeface="Noto Sans JP Print Black"/>
@@ -20677,7 +20677,7 @@
             <a:lvl1pPr>
               <a:defRPr sz="1100">
                 <a:solidFill>
-                  <a:srgbClr val="727A86"/>
+                  <a:srgbClr val="75817A"/>
                 </a:solidFill>
                 <a:latin typeface="Noto Sans JP Print Black"/>
                 <a:ea typeface="Noto Sans JP Print Black"/>
@@ -21420,7 +21420,7 @@
             <a:lvl1pPr>
               <a:defRPr sz="1100">
                 <a:solidFill>
-                  <a:srgbClr val="727A86"/>
+                  <a:srgbClr val="75817A"/>
                 </a:solidFill>
                 <a:latin typeface="Noto Sans JP Print Black"/>
                 <a:ea typeface="Noto Sans JP Print Black"/>
@@ -22059,7 +22059,7 @@
             <a:lvl1pPr>
               <a:defRPr sz="1100">
                 <a:solidFill>
-                  <a:srgbClr val="727A86"/>
+                  <a:srgbClr val="75817A"/>
                 </a:solidFill>
                 <a:latin typeface="Noto Sans JP Print Black"/>
                 <a:ea typeface="Noto Sans JP Print Black"/>
@@ -23040,7 +23040,7 @@
             <a:lvl1pPr>
               <a:defRPr sz="1100">
                 <a:solidFill>
-                  <a:srgbClr val="727A86"/>
+                  <a:srgbClr val="75817A"/>
                 </a:solidFill>
                 <a:latin typeface="Noto Sans JP Print Black"/>
                 <a:ea typeface="Noto Sans JP Print Black"/>
@@ -23498,7 +23498,7 @@
             <a:lvl1pPr>
               <a:defRPr sz="1100">
                 <a:solidFill>
-                  <a:srgbClr val="727A86"/>
+                  <a:srgbClr val="75817A"/>
                 </a:solidFill>
                 <a:latin typeface="Noto Sans JP Print Black"/>
                 <a:ea typeface="Noto Sans JP Print Black"/>
@@ -24045,7 +24045,7 @@
             <a:lvl1pPr>
               <a:defRPr sz="1100">
                 <a:solidFill>
-                  <a:srgbClr val="727A86"/>
+                  <a:srgbClr val="75817A"/>
                 </a:solidFill>
                 <a:latin typeface="Noto Sans JP Print Black"/>
                 <a:ea typeface="Noto Sans JP Print Black"/>
@@ -24076,40 +24076,40 @@
   <a:themeElements>
     <a:clrScheme name="Marathon Lecture">
       <a:dk1>
-        <a:srgbClr val="1E2533"/>
+        <a:srgbClr val="1F2A25"/>
       </a:dk1>
       <a:lt1>
         <a:srgbClr val="FFFFFF"/>
       </a:lt1>
       <a:dk2>
-        <a:srgbClr val="0B1F3A"/>
+        <a:srgbClr val="17332A"/>
       </a:dk2>
       <a:lt2>
-        <a:srgbClr val="F0F2F5"/>
+        <a:srgbClr val="F0F3F0"/>
       </a:lt2>
       <a:accent1>
-        <a:srgbClr val="B7862B"/>
+        <a:srgbClr val="C9790C"/>
       </a:accent1>
       <a:accent2>
-        <a:srgbClr val="5B7083"/>
+        <a:srgbClr val="3B7A57"/>
       </a:accent2>
       <a:accent3>
         <a:srgbClr val="F2B33D"/>
       </a:accent3>
       <a:accent4>
-        <a:srgbClr val="727A86"/>
+        <a:srgbClr val="75817A"/>
       </a:accent4>
       <a:accent5>
-        <a:srgbClr val="F7EFDF"/>
+        <a:srgbClr val="FBF0DE"/>
       </a:accent5>
       <a:accent6>
-        <a:srgbClr val="E7ECF1"/>
+        <a:srgbClr val="E2EEE6"/>
       </a:accent6>
       <a:hlink>
-        <a:srgbClr val="0B1F3A"/>
+        <a:srgbClr val="17332A"/>
       </a:hlink>
       <a:folHlink>
-        <a:srgbClr val="727A86"/>
+        <a:srgbClr val="75817A"/>
       </a:folHlink>
     </a:clrScheme>
     <a:fontScheme name="Marathon Lecture">
